--- a/Bloc_3_Machine_Learning/North_Face/North_face_presentation.pptx
+++ b/Bloc_3_Machine_Learning/North_Face/North_face_presentation.pptx
@@ -10,6 +10,11 @@
     <p:sldId id="258" r:id="rId9"/>
     <p:sldId id="259" r:id="rId10"/>
     <p:sldId id="260" r:id="rId11"/>
+    <p:sldId id="261" r:id="rId12"/>
+    <p:sldId id="262" r:id="rId13"/>
+    <p:sldId id="263" r:id="rId14"/>
+    <p:sldId id="264" r:id="rId15"/>
+    <p:sldId id="265" r:id="rId16"/>
   </p:sldIdLst>
   <p:sldSz cx="12191695" cy="6858000" type="screen4x3"/>
   <p:notesSz cx="6858000" cy="9144000"/>
@@ -3107,7 +3112,7 @@
             <a:avLst/>
           </a:prstGeom>
           <a:solidFill>
-            <a:srgbClr val="0F172A"/>
+            <a:srgbClr val="0B1120"/>
           </a:solidFill>
           <a:ln>
             <a:noFill/>
@@ -3137,14 +3142,59 @@
       </p:sp>
       <p:sp>
         <p:nvSpPr>
-          <p:cNvPr id="3" name="TextBox 2"/>
+          <p:cNvPr id="3" name="Rounded Rectangle 2"/>
+          <p:cNvSpPr/>
+          <p:nvPr/>
+        </p:nvSpPr>
+        <p:spPr>
+          <a:xfrm>
+            <a:off x="1371600" y="1097280"/>
+            <a:ext cx="9448495" cy="4663440"/>
+          </a:xfrm>
+          <a:prstGeom prst="roundRect">
+            <a:avLst/>
+          </a:prstGeom>
+          <a:solidFill>
+            <a:srgbClr val="1E293B"/>
+          </a:solidFill>
+          <a:ln w="25400">
+            <a:solidFill>
+              <a:srgbClr val="F43F5E"/>
+            </a:solidFill>
+          </a:ln>
+        </p:spPr>
+        <p:style>
+          <a:lnRef idx="1">
+            <a:schemeClr val="accent1"/>
+          </a:lnRef>
+          <a:fillRef idx="3">
+            <a:schemeClr val="accent1"/>
+          </a:fillRef>
+          <a:effectRef idx="2">
+            <a:schemeClr val="accent1"/>
+          </a:effectRef>
+          <a:fontRef idx="minor">
+            <a:schemeClr val="lt1"/>
+          </a:fontRef>
+        </p:style>
+        <p:txBody>
+          <a:bodyPr rtlCol="0" anchor="ctr"/>
+          <a:lstStyle/>
+          <a:p>
+            <a:pPr algn="ctr"/>
+          </a:p>
+        </p:txBody>
+      </p:sp>
+      <p:sp>
+        <p:nvSpPr>
+          <p:cNvPr id="4" name="TextBox 3"/>
           <p:cNvSpPr txBox="1"/>
           <p:nvPr/>
         </p:nvSpPr>
         <p:spPr>
           <a:xfrm>
-            <a:off x="1097280" y="1645920"/>
-            <a:ext cx="10058400" cy="457200"/>
+            <a:off x="1828800" y="1463040"/>
+            <a:ext cx="8534095" cy="365760"/>
           </a:xfrm>
           <a:prstGeom prst="rect">
             <a:avLst/>
@@ -3160,26 +3210,27 @@
             <a:pPr>
               <a:defRPr sz="1300" b="1">
                 <a:solidFill>
-                  <a:srgbClr val="38BDF8"/>
-                </a:solidFill>
-              </a:defRPr>
-            </a:pPr>
-            <a:r>
-              <a:t>BLOC 3 — MACHINE LEARNING &amp; NLP (COMPLÉMENT)</a:t>
-            </a:r>
-          </a:p>
-        </p:txBody>
-      </p:sp>
-      <p:sp>
-        <p:nvSpPr>
-          <p:cNvPr id="4" name="TextBox 3"/>
+                  <a:srgbClr val="F43F5E"/>
+                </a:solidFill>
+                <a:latin typeface="Segoe UI"/>
+              </a:defRPr>
+            </a:pPr>
+            <a:r>
+              <a:t>BLOC 3 — MACHINE LEARNING NON SUPERVISÉ &amp; NLP</a:t>
+            </a:r>
+          </a:p>
+        </p:txBody>
+      </p:sp>
+      <p:sp>
+        <p:nvSpPr>
+          <p:cNvPr id="5" name="TextBox 4"/>
           <p:cNvSpPr txBox="1"/>
           <p:nvPr/>
         </p:nvSpPr>
         <p:spPr>
           <a:xfrm>
-            <a:off x="1097280" y="2194560"/>
-            <a:ext cx="10058400" cy="1463040"/>
+            <a:off x="1828800" y="1920240"/>
+            <a:ext cx="8534095" cy="1097280"/>
           </a:xfrm>
           <a:prstGeom prst="rect">
             <a:avLst/>
@@ -3197,24 +3248,81 @@
                 <a:solidFill>
                   <a:srgbClr val="F8FAFC"/>
                 </a:solidFill>
-              </a:defRPr>
-            </a:pPr>
-            <a:r>
-              <a:t>The North Face Recommender System</a:t>
-            </a:r>
-          </a:p>
-        </p:txBody>
-      </p:sp>
-      <p:sp>
-        <p:nvSpPr>
-          <p:cNvPr id="5" name="TextBox 4"/>
+                <a:latin typeface="Segoe UI"/>
+              </a:defRPr>
+            </a:pPr>
+            <a:r>
+              <a:t>The North Face E-Commerce</a:t>
+            </a:r>
+          </a:p>
+          <a:p>
+            <a:pPr>
+              <a:defRPr sz="1700">
+                <a:solidFill>
+                  <a:srgbClr val="94A3B8"/>
+                </a:solidFill>
+                <a:latin typeface="Segoe UI"/>
+              </a:defRPr>
+            </a:pPr>
+            <a:r>
+              <a:t>Clustering DBSCAN, Système de Recommandation &amp; Modélisation Thématique LSA (TruncatedSVD)</a:t>
+            </a:r>
+          </a:p>
+        </p:txBody>
+      </p:sp>
+      <p:sp>
+        <p:nvSpPr>
+          <p:cNvPr id="6" name="Rectangle 5"/>
+          <p:cNvSpPr/>
+          <p:nvPr/>
+        </p:nvSpPr>
+        <p:spPr>
+          <a:xfrm>
+            <a:off x="1828800" y="3383280"/>
+            <a:ext cx="8534095" cy="27432"/>
+          </a:xfrm>
+          <a:prstGeom prst="rect">
+            <a:avLst/>
+          </a:prstGeom>
+          <a:solidFill>
+            <a:srgbClr val="334155"/>
+          </a:solidFill>
+          <a:ln>
+            <a:noFill/>
+          </a:ln>
+        </p:spPr>
+        <p:style>
+          <a:lnRef idx="1">
+            <a:schemeClr val="accent1"/>
+          </a:lnRef>
+          <a:fillRef idx="3">
+            <a:schemeClr val="accent1"/>
+          </a:fillRef>
+          <a:effectRef idx="2">
+            <a:schemeClr val="accent1"/>
+          </a:effectRef>
+          <a:fontRef idx="minor">
+            <a:schemeClr val="lt1"/>
+          </a:fontRef>
+        </p:style>
+        <p:txBody>
+          <a:bodyPr rtlCol="0" anchor="ctr"/>
+          <a:lstStyle/>
+          <a:p>
+            <a:pPr algn="ctr"/>
+          </a:p>
+        </p:txBody>
+      </p:sp>
+      <p:sp>
+        <p:nvSpPr>
+          <p:cNvPr id="7" name="TextBox 6"/>
           <p:cNvSpPr txBox="1"/>
           <p:nvPr/>
         </p:nvSpPr>
         <p:spPr>
           <a:xfrm>
-            <a:off x="1097280" y="3840480"/>
-            <a:ext cx="10058400" cy="914400"/>
+            <a:off x="1828800" y="3657600"/>
+            <a:ext cx="2743200" cy="1097280"/>
           </a:xfrm>
           <a:prstGeom prst="rect">
             <a:avLst/>
@@ -3228,14 +3336,370 @@
           <a:lstStyle/>
           <a:p>
             <a:pPr>
-              <a:defRPr sz="1800">
+              <a:defRPr sz="2200" b="1">
+                <a:solidFill>
+                  <a:srgbClr val="F43F5E"/>
+                </a:solidFill>
+                <a:latin typeface="Segoe UI"/>
+              </a:defRPr>
+            </a:pPr>
+            <a:r>
+              <a:t>DBSCAN</a:t>
+            </a:r>
+          </a:p>
+          <a:p>
+            <a:pPr>
+              <a:defRPr sz="1100" b="1">
+                <a:solidFill>
+                  <a:srgbClr val="F8FAFC"/>
+                </a:solidFill>
+                <a:latin typeface="Segoe UI"/>
+              </a:defRPr>
+            </a:pPr>
+            <a:r>
+              <a:t>CLUSTERING COSINUS</a:t>
+            </a:r>
+          </a:p>
+          <a:p>
+            <a:pPr>
+              <a:defRPr sz="950">
                 <a:solidFill>
                   <a:srgbClr val="94A3B8"/>
                 </a:solidFill>
-              </a:defRPr>
-            </a:pPr>
-            <a:r>
-              <a:t>Système de Recommandation de Produits Outdoor par Traitement du Langage Naturel (TF-IDF)</a:t>
+                <a:latin typeface="Segoe UI"/>
+              </a:defRPr>
+            </a:pPr>
+            <a:r>
+              <a:t>10 clusters de produits outdoor</a:t>
+            </a:r>
+          </a:p>
+        </p:txBody>
+      </p:sp>
+      <p:sp>
+        <p:nvSpPr>
+          <p:cNvPr id="8" name="TextBox 7"/>
+          <p:cNvSpPr txBox="1"/>
+          <p:nvPr/>
+        </p:nvSpPr>
+        <p:spPr>
+          <a:xfrm>
+            <a:off x="4754880" y="3657600"/>
+            <a:ext cx="2743200" cy="1097280"/>
+          </a:xfrm>
+          <a:prstGeom prst="rect">
+            <a:avLst/>
+          </a:prstGeom>
+          <a:noFill/>
+        </p:spPr>
+        <p:txBody>
+          <a:bodyPr wrap="square">
+            <a:spAutoFit/>
+          </a:bodyPr>
+          <a:lstStyle/>
+          <a:p>
+            <a:pPr>
+              <a:defRPr sz="2200" b="1">
+                <a:solidFill>
+                  <a:srgbClr val="38BDF8"/>
+                </a:solidFill>
+                <a:latin typeface="Segoe UI"/>
+              </a:defRPr>
+            </a:pPr>
+            <a:r>
+              <a:t>TOP-5 RECS</a:t>
+            </a:r>
+          </a:p>
+          <a:p>
+            <a:pPr>
+              <a:defRPr sz="1100" b="1">
+                <a:solidFill>
+                  <a:srgbClr val="F8FAFC"/>
+                </a:solidFill>
+                <a:latin typeface="Segoe UI"/>
+              </a:defRPr>
+            </a:pPr>
+            <a:r>
+              <a:t>MOTEUR DE RECOMMANDATION</a:t>
+            </a:r>
+          </a:p>
+          <a:p>
+            <a:pPr>
+              <a:defRPr sz="950">
+                <a:solidFill>
+                  <a:srgbClr val="94A3B8"/>
+                </a:solidFill>
+                <a:latin typeface="Segoe UI"/>
+              </a:defRPr>
+            </a:pPr>
+            <a:r>
+              <a:t>Affinité textuelle &amp; anti-bruit</a:t>
+            </a:r>
+          </a:p>
+        </p:txBody>
+      </p:sp>
+      <p:sp>
+        <p:nvSpPr>
+          <p:cNvPr id="9" name="TextBox 8"/>
+          <p:cNvSpPr txBox="1"/>
+          <p:nvPr/>
+        </p:nvSpPr>
+        <p:spPr>
+          <a:xfrm>
+            <a:off x="7680960" y="3657600"/>
+            <a:ext cx="2743200" cy="1097280"/>
+          </a:xfrm>
+          <a:prstGeom prst="rect">
+            <a:avLst/>
+          </a:prstGeom>
+          <a:noFill/>
+        </p:spPr>
+        <p:txBody>
+          <a:bodyPr wrap="square">
+            <a:spAutoFit/>
+          </a:bodyPr>
+          <a:lstStyle/>
+          <a:p>
+            <a:pPr>
+              <a:defRPr sz="2200" b="1">
+                <a:solidFill>
+                  <a:srgbClr val="10B981"/>
+                </a:solidFill>
+                <a:latin typeface="Segoe UI"/>
+              </a:defRPr>
+            </a:pPr>
+            <a:r>
+              <a:t>LSA / 15 THÈMES</a:t>
+            </a:r>
+          </a:p>
+          <a:p>
+            <a:pPr>
+              <a:defRPr sz="1100" b="1">
+                <a:solidFill>
+                  <a:srgbClr val="F8FAFC"/>
+                </a:solidFill>
+                <a:latin typeface="Segoe UI"/>
+              </a:defRPr>
+            </a:pPr>
+            <a:r>
+              <a:t>TRUNCATEDSVD TOPICS</a:t>
+            </a:r>
+          </a:p>
+          <a:p>
+            <a:pPr>
+              <a:defRPr sz="950">
+                <a:solidFill>
+                  <a:srgbClr val="94A3B8"/>
+                </a:solidFill>
+                <a:latin typeface="Segoe UI"/>
+              </a:defRPr>
+            </a:pPr>
+            <a:r>
+              <a:t>Décomposition sémantique latente</a:t>
+            </a:r>
+          </a:p>
+        </p:txBody>
+      </p:sp>
+      <p:sp>
+        <p:nvSpPr>
+          <p:cNvPr id="10" name="TextBox 9"/>
+          <p:cNvSpPr txBox="1"/>
+          <p:nvPr/>
+        </p:nvSpPr>
+        <p:spPr>
+          <a:xfrm>
+            <a:off x="1828800" y="4983480"/>
+            <a:ext cx="8534095" cy="457200"/>
+          </a:xfrm>
+          <a:prstGeom prst="rect">
+            <a:avLst/>
+          </a:prstGeom>
+          <a:noFill/>
+        </p:spPr>
+        <p:txBody>
+          <a:bodyPr wrap="square">
+            <a:spAutoFit/>
+          </a:bodyPr>
+          <a:lstStyle/>
+          <a:p>
+            <a:pPr>
+              <a:defRPr sz="1100" b="1">
+                <a:solidFill>
+                  <a:srgbClr val="94A3B8"/>
+                </a:solidFill>
+                <a:latin typeface="Segoe UI"/>
+              </a:defRPr>
+            </a:pPr>
+            <a:r>
+              <a:t>Candidat : Christopher GILLERON   |   Commanditaire : The North Face   |   Certification CDSD (Niveau 7)   |   Jedha Bootcamp</a:t>
+            </a:r>
+          </a:p>
+        </p:txBody>
+      </p:sp>
+    </p:spTree>
+  </p:cSld>
+  <p:clrMapOvr>
+    <a:masterClrMapping/>
+  </p:clrMapOvr>
+</p:sld>
+</file>
+
+<file path=ppt/slides/slide10.xml><?xml version="1.0" encoding="utf-8"?>
+<p:sld xmlns:a="http://schemas.openxmlformats.org/drawingml/2006/main" xmlns:p="http://schemas.openxmlformats.org/presentationml/2006/main" xmlns:r="http://schemas.openxmlformats.org/officeDocument/2006/relationships">
+  <p:cSld>
+    <p:spTree>
+      <p:nvGrpSpPr>
+        <p:cNvPr id="1" name=""/>
+        <p:cNvGrpSpPr/>
+        <p:nvPr/>
+      </p:nvGrpSpPr>
+      <p:grpSpPr/>
+      <p:sp>
+        <p:nvSpPr>
+          <p:cNvPr id="2" name="Rectangle 1"/>
+          <p:cNvSpPr/>
+          <p:nvPr/>
+        </p:nvSpPr>
+        <p:spPr>
+          <a:xfrm>
+            <a:off x="0" y="0"/>
+            <a:ext cx="12191695" cy="6858000"/>
+          </a:xfrm>
+          <a:prstGeom prst="rect">
+            <a:avLst/>
+          </a:prstGeom>
+          <a:solidFill>
+            <a:srgbClr val="0B1120"/>
+          </a:solidFill>
+          <a:ln>
+            <a:noFill/>
+          </a:ln>
+        </p:spPr>
+        <p:style>
+          <a:lnRef idx="1">
+            <a:schemeClr val="accent1"/>
+          </a:lnRef>
+          <a:fillRef idx="3">
+            <a:schemeClr val="accent1"/>
+          </a:fillRef>
+          <a:effectRef idx="2">
+            <a:schemeClr val="accent1"/>
+          </a:effectRef>
+          <a:fontRef idx="minor">
+            <a:schemeClr val="lt1"/>
+          </a:fontRef>
+        </p:style>
+        <p:txBody>
+          <a:bodyPr rtlCol="0" anchor="ctr"/>
+          <a:lstStyle/>
+          <a:p>
+            <a:pPr algn="ctr"/>
+          </a:p>
+        </p:txBody>
+      </p:sp>
+      <p:sp>
+        <p:nvSpPr>
+          <p:cNvPr id="3" name="TextBox 2"/>
+          <p:cNvSpPr txBox="1"/>
+          <p:nvPr/>
+        </p:nvSpPr>
+        <p:spPr>
+          <a:xfrm>
+            <a:off x="731520" y="365760"/>
+            <a:ext cx="7315200" cy="320040"/>
+          </a:xfrm>
+          <a:prstGeom prst="rect">
+            <a:avLst/>
+          </a:prstGeom>
+          <a:noFill/>
+        </p:spPr>
+        <p:txBody>
+          <a:bodyPr wrap="square" lIns="0" tIns="0" rIns="0" bIns="0">
+            <a:spAutoFit/>
+          </a:bodyPr>
+          <a:lstStyle/>
+          <a:p>
+            <a:pPr>
+              <a:defRPr sz="1100" b="1">
+                <a:solidFill>
+                  <a:srgbClr val="F43F5E"/>
+                </a:solidFill>
+                <a:latin typeface="Segoe UI"/>
+              </a:defRPr>
+            </a:pPr>
+            <a:r>
+              <a:t>ÉTAPE 09 | SYNTHÈSE &amp; PLAN D'ACTION</a:t>
+            </a:r>
+          </a:p>
+        </p:txBody>
+      </p:sp>
+      <p:sp>
+        <p:nvSpPr>
+          <p:cNvPr id="4" name="TextBox 3"/>
+          <p:cNvSpPr txBox="1"/>
+          <p:nvPr/>
+        </p:nvSpPr>
+        <p:spPr>
+          <a:xfrm>
+            <a:off x="731520" y="685800"/>
+            <a:ext cx="9601200" cy="502920"/>
+          </a:xfrm>
+          <a:prstGeom prst="rect">
+            <a:avLst/>
+          </a:prstGeom>
+          <a:noFill/>
+        </p:spPr>
+        <p:txBody>
+          <a:bodyPr wrap="square" lIns="0" tIns="0" rIns="0" bIns="0">
+            <a:spAutoFit/>
+          </a:bodyPr>
+          <a:lstStyle/>
+          <a:p>
+            <a:pPr>
+              <a:defRPr sz="2200" b="1">
+                <a:solidFill>
+                  <a:srgbClr val="F8FAFC"/>
+                </a:solidFill>
+                <a:latin typeface="Segoe UI"/>
+              </a:defRPr>
+            </a:pPr>
+            <a:r>
+              <a:t>Bilan Opérationnel &amp; Feuille de Route E-Commerce pour The North Face</a:t>
+            </a:r>
+          </a:p>
+        </p:txBody>
+      </p:sp>
+      <p:sp>
+        <p:nvSpPr>
+          <p:cNvPr id="5" name="TextBox 4"/>
+          <p:cNvSpPr txBox="1"/>
+          <p:nvPr/>
+        </p:nvSpPr>
+        <p:spPr>
+          <a:xfrm>
+            <a:off x="10362895" y="411480"/>
+            <a:ext cx="1097280" cy="365760"/>
+          </a:xfrm>
+          <a:prstGeom prst="rect">
+            <a:avLst/>
+          </a:prstGeom>
+          <a:noFill/>
+        </p:spPr>
+        <p:txBody>
+          <a:bodyPr wrap="square" lIns="0" tIns="0" rIns="0" bIns="0">
+            <a:spAutoFit/>
+          </a:bodyPr>
+          <a:lstStyle/>
+          <a:p>
+            <a:pPr algn="r">
+              <a:defRPr sz="1200" b="1">
+                <a:solidFill>
+                  <a:srgbClr val="94A3B8"/>
+                </a:solidFill>
+                <a:latin typeface="Segoe UI"/>
+              </a:defRPr>
+            </a:pPr>
+            <a:r>
+              <a:t>10 / 10</a:t>
             </a:r>
           </a:p>
         </p:txBody>
@@ -3248,8 +3712,8 @@
         </p:nvSpPr>
         <p:spPr>
           <a:xfrm>
-            <a:off x="1097280" y="5486400"/>
-            <a:ext cx="10058400" cy="548640"/>
+            <a:off x="731520" y="6400800"/>
+            <a:ext cx="10728655" cy="274320"/>
           </a:xfrm>
           <a:prstGeom prst="rect">
             <a:avLst/>
@@ -3257,20 +3721,749 @@
           <a:noFill/>
         </p:spPr>
         <p:txBody>
-          <a:bodyPr wrap="none">
+          <a:bodyPr wrap="square" lIns="0" tIns="0" rIns="0" bIns="0">
             <a:spAutoFit/>
           </a:bodyPr>
           <a:lstStyle/>
           <a:p>
             <a:pPr>
-              <a:defRPr sz="1200">
-                <a:solidFill>
-                  <a:srgbClr val="A855F7"/>
-                </a:solidFill>
-              </a:defRPr>
-            </a:pPr>
-            <a:r>
-              <a:t>Christopher GILLERON  |  Certification CDSD — Jedha Bootcamp  |  Dossier Officiel</a:t>
+              <a:defRPr sz="1000">
+                <a:solidFill>
+                  <a:srgbClr val="64748B"/>
+                </a:solidFill>
+                <a:latin typeface="Segoe UI"/>
+              </a:defRPr>
+            </a:pPr>
+            <a:r>
+              <a:t>Christopher GILLERON  |  The North Face E-Commerce (ML Non Supervisé &amp; NLP)  |  Certification CDSD Bloc 3</a:t>
+            </a:r>
+          </a:p>
+        </p:txBody>
+      </p:sp>
+      <p:sp>
+        <p:nvSpPr>
+          <p:cNvPr id="7" name="Rounded Rectangle 6"/>
+          <p:cNvSpPr/>
+          <p:nvPr/>
+        </p:nvSpPr>
+        <p:spPr>
+          <a:xfrm>
+            <a:off x="731520" y="1371600"/>
+            <a:ext cx="5242255" cy="2377440"/>
+          </a:xfrm>
+          <a:prstGeom prst="roundRect">
+            <a:avLst/>
+          </a:prstGeom>
+          <a:solidFill>
+            <a:srgbClr val="1E293B"/>
+          </a:solidFill>
+          <a:ln w="19050">
+            <a:solidFill>
+              <a:srgbClr val="F43F5E"/>
+            </a:solidFill>
+          </a:ln>
+        </p:spPr>
+        <p:style>
+          <a:lnRef idx="1">
+            <a:schemeClr val="accent1"/>
+          </a:lnRef>
+          <a:fillRef idx="3">
+            <a:schemeClr val="accent1"/>
+          </a:fillRef>
+          <a:effectRef idx="2">
+            <a:schemeClr val="accent1"/>
+          </a:effectRef>
+          <a:fontRef idx="minor">
+            <a:schemeClr val="lt1"/>
+          </a:fontRef>
+        </p:style>
+        <p:txBody>
+          <a:bodyPr rtlCol="0" anchor="ctr"/>
+          <a:lstStyle/>
+          <a:p>
+            <a:pPr algn="ctr"/>
+          </a:p>
+        </p:txBody>
+      </p:sp>
+      <p:sp>
+        <p:nvSpPr>
+          <p:cNvPr id="8" name="TextBox 7"/>
+          <p:cNvSpPr txBox="1"/>
+          <p:nvPr/>
+        </p:nvSpPr>
+        <p:spPr>
+          <a:xfrm>
+            <a:off x="914400" y="1536192"/>
+            <a:ext cx="4876495" cy="365760"/>
+          </a:xfrm>
+          <a:prstGeom prst="rect">
+            <a:avLst/>
+          </a:prstGeom>
+          <a:noFill/>
+        </p:spPr>
+        <p:txBody>
+          <a:bodyPr wrap="square" lIns="0" tIns="0" rIns="0" bIns="0">
+            <a:spAutoFit/>
+          </a:bodyPr>
+          <a:lstStyle/>
+          <a:p>
+            <a:pPr>
+              <a:defRPr sz="1200" b="1">
+                <a:solidFill>
+                  <a:srgbClr val="F43F5E"/>
+                </a:solidFill>
+                <a:latin typeface="Segoe UI"/>
+              </a:defRPr>
+            </a:pPr>
+            <a:r>
+              <a:t>01 | DÉPLOIEMENT CARROUSEL 'PRODUITS SIMILAIRES'</a:t>
+            </a:r>
+          </a:p>
+        </p:txBody>
+      </p:sp>
+      <p:sp>
+        <p:nvSpPr>
+          <p:cNvPr id="9" name="TextBox 8"/>
+          <p:cNvSpPr txBox="1"/>
+          <p:nvPr/>
+        </p:nvSpPr>
+        <p:spPr>
+          <a:xfrm>
+            <a:off x="914400" y="1965960"/>
+            <a:ext cx="4876495" cy="1691640"/>
+          </a:xfrm>
+          <a:prstGeom prst="rect">
+            <a:avLst/>
+          </a:prstGeom>
+          <a:noFill/>
+        </p:spPr>
+        <p:txBody>
+          <a:bodyPr wrap="square">
+            <a:spAutoFit/>
+          </a:bodyPr>
+          <a:lstStyle/>
+          <a:p>
+            <a:pPr>
+              <a:defRPr sz="1050" b="1">
+                <a:solidFill>
+                  <a:srgbClr val="F43F5E"/>
+                </a:solidFill>
+                <a:latin typeface="Segoe UI"/>
+              </a:defRPr>
+            </a:pPr>
+            <a:r>
+              <a:t>Intégration Web :</a:t>
+            </a:r>
+          </a:p>
+          <a:p>
+            <a:pPr>
+              <a:defRPr sz="950">
+                <a:solidFill>
+                  <a:srgbClr val="F8FAFC"/>
+                </a:solidFill>
+                <a:latin typeface="Segoe UI"/>
+              </a:defRPr>
+            </a:pPr>
+            <a:r>
+              <a:t>Intégrer le widget find_similar_items() sous chaque fiche produit du site thenorthface.fr.</a:t>
+            </a:r>
+          </a:p>
+          <a:p>
+            <a:pPr>
+              <a:defRPr sz="1050" b="1">
+                <a:solidFill>
+                  <a:srgbClr val="F43F5E"/>
+                </a:solidFill>
+                <a:latin typeface="Segoe UI"/>
+              </a:defRPr>
+            </a:pPr>
+            <a:r>
+              <a:t>Impact Chiffré :</a:t>
+            </a:r>
+          </a:p>
+          <a:p>
+            <a:pPr>
+              <a:defRPr sz="950">
+                <a:solidFill>
+                  <a:srgbClr val="F8FAFC"/>
+                </a:solidFill>
+                <a:latin typeface="Segoe UI"/>
+              </a:defRPr>
+            </a:pPr>
+            <a:r>
+              <a:t>Hausse estimée de +12% à +18% du taux de clic et réduction du taux de rebond de 20%.</a:t>
+            </a:r>
+          </a:p>
+          <a:p>
+            <a:pPr>
+              <a:defRPr sz="1050" b="1">
+                <a:solidFill>
+                  <a:srgbClr val="F43F5E"/>
+                </a:solidFill>
+                <a:latin typeface="Segoe UI"/>
+              </a:defRPr>
+            </a:pPr>
+            <a:r>
+              <a:t>KPI Cible :</a:t>
+            </a:r>
+          </a:p>
+          <a:p>
+            <a:pPr>
+              <a:defRPr sz="950">
+                <a:solidFill>
+                  <a:srgbClr val="F8FAFC"/>
+                </a:solidFill>
+                <a:latin typeface="Segoe UI"/>
+              </a:defRPr>
+            </a:pPr>
+            <a:r>
+              <a:t>Augmentation du panier moyen via le cross-selling de produits complémentaires.</a:t>
+            </a:r>
+          </a:p>
+        </p:txBody>
+      </p:sp>
+      <p:sp>
+        <p:nvSpPr>
+          <p:cNvPr id="10" name="Rounded Rectangle 9"/>
+          <p:cNvSpPr/>
+          <p:nvPr/>
+        </p:nvSpPr>
+        <p:spPr>
+          <a:xfrm>
+            <a:off x="6217920" y="1371600"/>
+            <a:ext cx="5242255" cy="2377440"/>
+          </a:xfrm>
+          <a:prstGeom prst="roundRect">
+            <a:avLst/>
+          </a:prstGeom>
+          <a:solidFill>
+            <a:srgbClr val="1E293B"/>
+          </a:solidFill>
+          <a:ln w="19050">
+            <a:solidFill>
+              <a:srgbClr val="38BDF8"/>
+            </a:solidFill>
+          </a:ln>
+        </p:spPr>
+        <p:style>
+          <a:lnRef idx="1">
+            <a:schemeClr val="accent1"/>
+          </a:lnRef>
+          <a:fillRef idx="3">
+            <a:schemeClr val="accent1"/>
+          </a:fillRef>
+          <a:effectRef idx="2">
+            <a:schemeClr val="accent1"/>
+          </a:effectRef>
+          <a:fontRef idx="minor">
+            <a:schemeClr val="lt1"/>
+          </a:fontRef>
+        </p:style>
+        <p:txBody>
+          <a:bodyPr rtlCol="0" anchor="ctr"/>
+          <a:lstStyle/>
+          <a:p>
+            <a:pPr algn="ctr"/>
+          </a:p>
+        </p:txBody>
+      </p:sp>
+      <p:sp>
+        <p:nvSpPr>
+          <p:cNvPr id="11" name="TextBox 10"/>
+          <p:cNvSpPr txBox="1"/>
+          <p:nvPr/>
+        </p:nvSpPr>
+        <p:spPr>
+          <a:xfrm>
+            <a:off x="6400800" y="1536192"/>
+            <a:ext cx="4876495" cy="365760"/>
+          </a:xfrm>
+          <a:prstGeom prst="rect">
+            <a:avLst/>
+          </a:prstGeom>
+          <a:noFill/>
+        </p:spPr>
+        <p:txBody>
+          <a:bodyPr wrap="square" lIns="0" tIns="0" rIns="0" bIns="0">
+            <a:spAutoFit/>
+          </a:bodyPr>
+          <a:lstStyle/>
+          <a:p>
+            <a:pPr>
+              <a:defRPr sz="1200" b="1">
+                <a:solidFill>
+                  <a:srgbClr val="F43F5E"/>
+                </a:solidFill>
+                <a:latin typeface="Segoe UI"/>
+              </a:defRPr>
+            </a:pPr>
+            <a:r>
+              <a:t>02 | REFONTE TAXONOMIE &amp; SEO THÉMATIQUE</a:t>
+            </a:r>
+          </a:p>
+        </p:txBody>
+      </p:sp>
+      <p:sp>
+        <p:nvSpPr>
+          <p:cNvPr id="12" name="TextBox 11"/>
+          <p:cNvSpPr txBox="1"/>
+          <p:nvPr/>
+        </p:nvSpPr>
+        <p:spPr>
+          <a:xfrm>
+            <a:off x="6400800" y="1965960"/>
+            <a:ext cx="4876495" cy="1691640"/>
+          </a:xfrm>
+          <a:prstGeom prst="rect">
+            <a:avLst/>
+          </a:prstGeom>
+          <a:noFill/>
+        </p:spPr>
+        <p:txBody>
+          <a:bodyPr wrap="square">
+            <a:spAutoFit/>
+          </a:bodyPr>
+          <a:lstStyle/>
+          <a:p>
+            <a:pPr>
+              <a:defRPr sz="1050" b="1">
+                <a:solidFill>
+                  <a:srgbClr val="38BDF8"/>
+                </a:solidFill>
+                <a:latin typeface="Segoe UI"/>
+              </a:defRPr>
+            </a:pPr>
+            <a:r>
+              <a:t>Landing Pages LSA :</a:t>
+            </a:r>
+          </a:p>
+          <a:p>
+            <a:pPr>
+              <a:defRPr sz="950">
+                <a:solidFill>
+                  <a:srgbClr val="F8FAFC"/>
+                </a:solidFill>
+                <a:latin typeface="Segoe UI"/>
+              </a:defRPr>
+            </a:pPr>
+            <a:r>
+              <a:t>Créer des pages de collection automatisées basées sur les 15 thèmes LSA découverts.</a:t>
+            </a:r>
+          </a:p>
+          <a:p>
+            <a:pPr>
+              <a:defRPr sz="1050" b="1">
+                <a:solidFill>
+                  <a:srgbClr val="38BDF8"/>
+                </a:solidFill>
+                <a:latin typeface="Segoe UI"/>
+              </a:defRPr>
+            </a:pPr>
+            <a:r>
+              <a:t>SEO Organique :</a:t>
+            </a:r>
+          </a:p>
+          <a:p>
+            <a:pPr>
+              <a:defRPr sz="950">
+                <a:solidFill>
+                  <a:srgbClr val="F8FAFC"/>
+                </a:solidFill>
+                <a:latin typeface="Segoe UI"/>
+              </a:defRPr>
+            </a:pPr>
+            <a:r>
+              <a:t>Cibler les requêtes longue traîne 'veste imperméable respirante' plutôt que de simples catégories génériques.</a:t>
+            </a:r>
+          </a:p>
+          <a:p>
+            <a:pPr>
+              <a:defRPr sz="1050" b="1">
+                <a:solidFill>
+                  <a:srgbClr val="38BDF8"/>
+                </a:solidFill>
+                <a:latin typeface="Segoe UI"/>
+              </a:defRPr>
+            </a:pPr>
+            <a:r>
+              <a:t>Expérience UX :</a:t>
+            </a:r>
+          </a:p>
+          <a:p>
+            <a:pPr>
+              <a:defRPr sz="950">
+                <a:solidFill>
+                  <a:srgbClr val="F8FAFC"/>
+                </a:solidFill>
+                <a:latin typeface="Segoe UI"/>
+              </a:defRPr>
+            </a:pPr>
+            <a:r>
+              <a:t>Navigation fluide orientée 'activité et météo' plutôt que 'genre vestimentaire'.</a:t>
+            </a:r>
+          </a:p>
+        </p:txBody>
+      </p:sp>
+      <p:sp>
+        <p:nvSpPr>
+          <p:cNvPr id="13" name="Rounded Rectangle 12"/>
+          <p:cNvSpPr/>
+          <p:nvPr/>
+        </p:nvSpPr>
+        <p:spPr>
+          <a:xfrm>
+            <a:off x="731520" y="3931920"/>
+            <a:ext cx="5242255" cy="2377440"/>
+          </a:xfrm>
+          <a:prstGeom prst="roundRect">
+            <a:avLst/>
+          </a:prstGeom>
+          <a:solidFill>
+            <a:srgbClr val="1E293B"/>
+          </a:solidFill>
+          <a:ln w="19050">
+            <a:solidFill>
+              <a:srgbClr val="F59E0B"/>
+            </a:solidFill>
+          </a:ln>
+        </p:spPr>
+        <p:style>
+          <a:lnRef idx="1">
+            <a:schemeClr val="accent1"/>
+          </a:lnRef>
+          <a:fillRef idx="3">
+            <a:schemeClr val="accent1"/>
+          </a:fillRef>
+          <a:effectRef idx="2">
+            <a:schemeClr val="accent1"/>
+          </a:effectRef>
+          <a:fontRef idx="minor">
+            <a:schemeClr val="lt1"/>
+          </a:fontRef>
+        </p:style>
+        <p:txBody>
+          <a:bodyPr rtlCol="0" anchor="ctr"/>
+          <a:lstStyle/>
+          <a:p>
+            <a:pPr algn="ctr"/>
+          </a:p>
+        </p:txBody>
+      </p:sp>
+      <p:sp>
+        <p:nvSpPr>
+          <p:cNvPr id="14" name="TextBox 13"/>
+          <p:cNvSpPr txBox="1"/>
+          <p:nvPr/>
+        </p:nvSpPr>
+        <p:spPr>
+          <a:xfrm>
+            <a:off x="914400" y="4096512"/>
+            <a:ext cx="4876495" cy="365760"/>
+          </a:xfrm>
+          <a:prstGeom prst="rect">
+            <a:avLst/>
+          </a:prstGeom>
+          <a:noFill/>
+        </p:spPr>
+        <p:txBody>
+          <a:bodyPr wrap="square" lIns="0" tIns="0" rIns="0" bIns="0">
+            <a:spAutoFit/>
+          </a:bodyPr>
+          <a:lstStyle/>
+          <a:p>
+            <a:pPr>
+              <a:defRPr sz="1200" b="1">
+                <a:solidFill>
+                  <a:srgbClr val="F43F5E"/>
+                </a:solidFill>
+                <a:latin typeface="Segoe UI"/>
+              </a:defRPr>
+            </a:pPr>
+            <a:r>
+              <a:t>03 | ARCHITECTURE TECHNIQUE &amp; API TEMPS RÉEL</a:t>
+            </a:r>
+          </a:p>
+        </p:txBody>
+      </p:sp>
+      <p:sp>
+        <p:nvSpPr>
+          <p:cNvPr id="15" name="TextBox 14"/>
+          <p:cNvSpPr txBox="1"/>
+          <p:nvPr/>
+        </p:nvSpPr>
+        <p:spPr>
+          <a:xfrm>
+            <a:off x="914400" y="4526280"/>
+            <a:ext cx="4876495" cy="1691640"/>
+          </a:xfrm>
+          <a:prstGeom prst="rect">
+            <a:avLst/>
+          </a:prstGeom>
+          <a:noFill/>
+        </p:spPr>
+        <p:txBody>
+          <a:bodyPr wrap="square">
+            <a:spAutoFit/>
+          </a:bodyPr>
+          <a:lstStyle/>
+          <a:p>
+            <a:pPr>
+              <a:defRPr sz="1050" b="1">
+                <a:solidFill>
+                  <a:srgbClr val="F59E0B"/>
+                </a:solidFill>
+                <a:latin typeface="Segoe UI"/>
+              </a:defRPr>
+            </a:pPr>
+            <a:r>
+              <a:t>Microservice FastAPI :</a:t>
+            </a:r>
+          </a:p>
+          <a:p>
+            <a:pPr>
+              <a:defRPr sz="950">
+                <a:solidFill>
+                  <a:srgbClr val="F8FAFC"/>
+                </a:solidFill>
+                <a:latin typeface="Segoe UI"/>
+              </a:defRPr>
+            </a:pPr>
+            <a:r>
+              <a:t>Exposer l'algorithme sous forme d'API REST avec mise en cache Redis des matrices de similarité.</a:t>
+            </a:r>
+          </a:p>
+          <a:p>
+            <a:pPr>
+              <a:defRPr sz="1050" b="1">
+                <a:solidFill>
+                  <a:srgbClr val="F59E0B"/>
+                </a:solidFill>
+                <a:latin typeface="Segoe UI"/>
+              </a:defRPr>
+            </a:pPr>
+            <a:r>
+              <a:t>Performance SLA :</a:t>
+            </a:r>
+          </a:p>
+          <a:p>
+            <a:pPr>
+              <a:defRPr sz="950">
+                <a:solidFill>
+                  <a:srgbClr val="F8FAFC"/>
+                </a:solidFill>
+                <a:latin typeface="Segoe UI"/>
+              </a:defRPr>
+            </a:pPr>
+            <a:r>
+              <a:t>Temps de réponse garanti &lt; 15 ms pour préserver la fluidité de navigation sur mobile.</a:t>
+            </a:r>
+          </a:p>
+          <a:p>
+            <a:pPr>
+              <a:defRPr sz="1050" b="1">
+                <a:solidFill>
+                  <a:srgbClr val="F59E0B"/>
+                </a:solidFill>
+                <a:latin typeface="Segoe UI"/>
+              </a:defRPr>
+            </a:pPr>
+            <a:r>
+              <a:t>Scalabilité :</a:t>
+            </a:r>
+          </a:p>
+          <a:p>
+            <a:pPr>
+              <a:defRPr sz="950">
+                <a:solidFill>
+                  <a:srgbClr val="F8FAFC"/>
+                </a:solidFill>
+                <a:latin typeface="Segoe UI"/>
+              </a:defRPr>
+            </a:pPr>
+            <a:r>
+              <a:t>Supporte des millions de requêtes quotidiennes lors des pics de soldes et du Black Friday.</a:t>
+            </a:r>
+          </a:p>
+        </p:txBody>
+      </p:sp>
+      <p:sp>
+        <p:nvSpPr>
+          <p:cNvPr id="16" name="Rounded Rectangle 15"/>
+          <p:cNvSpPr/>
+          <p:nvPr/>
+        </p:nvSpPr>
+        <p:spPr>
+          <a:xfrm>
+            <a:off x="6217920" y="3931920"/>
+            <a:ext cx="5242255" cy="2377440"/>
+          </a:xfrm>
+          <a:prstGeom prst="roundRect">
+            <a:avLst/>
+          </a:prstGeom>
+          <a:solidFill>
+            <a:srgbClr val="1E293B"/>
+          </a:solidFill>
+          <a:ln w="19050">
+            <a:solidFill>
+              <a:srgbClr val="10B981"/>
+            </a:solidFill>
+          </a:ln>
+        </p:spPr>
+        <p:style>
+          <a:lnRef idx="1">
+            <a:schemeClr val="accent1"/>
+          </a:lnRef>
+          <a:fillRef idx="3">
+            <a:schemeClr val="accent1"/>
+          </a:fillRef>
+          <a:effectRef idx="2">
+            <a:schemeClr val="accent1"/>
+          </a:effectRef>
+          <a:fontRef idx="minor">
+            <a:schemeClr val="lt1"/>
+          </a:fontRef>
+        </p:style>
+        <p:txBody>
+          <a:bodyPr rtlCol="0" anchor="ctr"/>
+          <a:lstStyle/>
+          <a:p>
+            <a:pPr algn="ctr"/>
+          </a:p>
+        </p:txBody>
+      </p:sp>
+      <p:sp>
+        <p:nvSpPr>
+          <p:cNvPr id="17" name="TextBox 16"/>
+          <p:cNvSpPr txBox="1"/>
+          <p:nvPr/>
+        </p:nvSpPr>
+        <p:spPr>
+          <a:xfrm>
+            <a:off x="6400800" y="4096512"/>
+            <a:ext cx="4876495" cy="365760"/>
+          </a:xfrm>
+          <a:prstGeom prst="rect">
+            <a:avLst/>
+          </a:prstGeom>
+          <a:noFill/>
+        </p:spPr>
+        <p:txBody>
+          <a:bodyPr wrap="square" lIns="0" tIns="0" rIns="0" bIns="0">
+            <a:spAutoFit/>
+          </a:bodyPr>
+          <a:lstStyle/>
+          <a:p>
+            <a:pPr>
+              <a:defRPr sz="1200" b="1">
+                <a:solidFill>
+                  <a:srgbClr val="F43F5E"/>
+                </a:solidFill>
+                <a:latin typeface="Segoe UI"/>
+              </a:defRPr>
+            </a:pPr>
+            <a:r>
+              <a:t>04 | ÉVOLUTION VERS UN MODÈLE HYBRIDE</a:t>
+            </a:r>
+          </a:p>
+        </p:txBody>
+      </p:sp>
+      <p:sp>
+        <p:nvSpPr>
+          <p:cNvPr id="18" name="TextBox 17"/>
+          <p:cNvSpPr txBox="1"/>
+          <p:nvPr/>
+        </p:nvSpPr>
+        <p:spPr>
+          <a:xfrm>
+            <a:off x="6400800" y="4526280"/>
+            <a:ext cx="4876495" cy="1691640"/>
+          </a:xfrm>
+          <a:prstGeom prst="rect">
+            <a:avLst/>
+          </a:prstGeom>
+          <a:noFill/>
+        </p:spPr>
+        <p:txBody>
+          <a:bodyPr wrap="square">
+            <a:spAutoFit/>
+          </a:bodyPr>
+          <a:lstStyle/>
+          <a:p>
+            <a:pPr>
+              <a:defRPr sz="1050" b="1">
+                <a:solidFill>
+                  <a:srgbClr val="10B981"/>
+                </a:solidFill>
+                <a:latin typeface="Segoe UI"/>
+              </a:defRPr>
+            </a:pPr>
+            <a:r>
+              <a:t>Collaborative Filtering :</a:t>
+            </a:r>
+          </a:p>
+          <a:p>
+            <a:pPr>
+              <a:defRPr sz="950">
+                <a:solidFill>
+                  <a:srgbClr val="F8FAFC"/>
+                </a:solidFill>
+                <a:latin typeface="Segoe UI"/>
+              </a:defRPr>
+            </a:pPr>
+            <a:r>
+              <a:t>Coupler les similitudes textuelles TF-IDF avec les signaux de navigation réels (produits co-achetés).</a:t>
+            </a:r>
+          </a:p>
+          <a:p>
+            <a:pPr>
+              <a:defRPr sz="1050" b="1">
+                <a:solidFill>
+                  <a:srgbClr val="10B981"/>
+                </a:solidFill>
+                <a:latin typeface="Segoe UI"/>
+              </a:defRPr>
+            </a:pPr>
+            <a:r>
+              <a:t>Dense Embeddings :</a:t>
+            </a:r>
+          </a:p>
+          <a:p>
+            <a:pPr>
+              <a:defRPr sz="950">
+                <a:solidFill>
+                  <a:srgbClr val="F8FAFC"/>
+                </a:solidFill>
+                <a:latin typeface="Segoe UI"/>
+              </a:defRPr>
+            </a:pPr>
+            <a:r>
+              <a:t>Tester des modèles d'embeddings Sentence-BERT pour capturer les nuances sémantiques multilingues (FR, EN, DE).</a:t>
+            </a:r>
+          </a:p>
+          <a:p>
+            <a:pPr>
+              <a:defRPr sz="1050" b="1">
+                <a:solidFill>
+                  <a:srgbClr val="10B981"/>
+                </a:solidFill>
+                <a:latin typeface="Segoe UI"/>
+              </a:defRPr>
+            </a:pPr>
+            <a:r>
+              <a:t>A/B Testing :</a:t>
+            </a:r>
+          </a:p>
+          <a:p>
+            <a:pPr>
+              <a:defRPr sz="950">
+                <a:solidFill>
+                  <a:srgbClr val="F8FAFC"/>
+                </a:solidFill>
+                <a:latin typeface="Segoe UI"/>
+              </a:defRPr>
+            </a:pPr>
+            <a:r>
+              <a:t>Mesurer l'incrément de conversion entre le carrousel algorithmique et les recommandations éditoriales manuelles.</a:t>
             </a:r>
           </a:p>
         </p:txBody>
@@ -3308,7 +4501,7 @@
             <a:avLst/>
           </a:prstGeom>
           <a:solidFill>
-            <a:srgbClr val="0F172A"/>
+            <a:srgbClr val="0B1120"/>
           </a:solidFill>
           <a:ln>
             <a:noFill/>
@@ -3344,8 +4537,8 @@
         </p:nvSpPr>
         <p:spPr>
           <a:xfrm>
-            <a:off x="731520" y="457200"/>
-            <a:ext cx="9144000" cy="365760"/>
+            <a:off x="731520" y="365760"/>
+            <a:ext cx="7315200" cy="320040"/>
           </a:xfrm>
           <a:prstGeom prst="rect">
             <a:avLst/>
@@ -3353,7 +4546,7 @@
           <a:noFill/>
         </p:spPr>
         <p:txBody>
-          <a:bodyPr wrap="none">
+          <a:bodyPr wrap="square" lIns="0" tIns="0" rIns="0" bIns="0">
             <a:spAutoFit/>
           </a:bodyPr>
           <a:lstStyle/>
@@ -3361,8 +4554,9 @@
             <a:pPr>
               <a:defRPr sz="1100" b="1">
                 <a:solidFill>
-                  <a:srgbClr val="38BDF8"/>
-                </a:solidFill>
+                  <a:srgbClr val="F43F5E"/>
+                </a:solidFill>
+                <a:latin typeface="Segoe UI"/>
               </a:defRPr>
             </a:pPr>
             <a:r>
@@ -3379,8 +4573,8 @@
         </p:nvSpPr>
         <p:spPr>
           <a:xfrm>
-            <a:off x="731520" y="822960"/>
-            <a:ext cx="9144000" cy="731520"/>
+            <a:off x="731520" y="685800"/>
+            <a:ext cx="9601200" cy="502920"/>
           </a:xfrm>
           <a:prstGeom prst="rect">
             <a:avLst/>
@@ -3388,20 +4582,21 @@
           <a:noFill/>
         </p:spPr>
         <p:txBody>
-          <a:bodyPr wrap="none">
+          <a:bodyPr wrap="square" lIns="0" tIns="0" rIns="0" bIns="0">
             <a:spAutoFit/>
           </a:bodyPr>
           <a:lstStyle/>
           <a:p>
             <a:pPr>
-              <a:defRPr sz="2400" b="1">
+              <a:defRPr sz="2200" b="1">
                 <a:solidFill>
                   <a:srgbClr val="F8FAFC"/>
                 </a:solidFill>
-              </a:defRPr>
-            </a:pPr>
-            <a:r>
-              <a:t>Moteur de Recommandation E-commerce</a:t>
+                <a:latin typeface="Segoe UI"/>
+              </a:defRPr>
+            </a:pPr>
+            <a:r>
+              <a:t>Contexte E-Commerce &amp; Double Objectif Marketing The North Face</a:t>
             </a:r>
           </a:p>
         </p:txBody>
@@ -3414,7 +4609,7 @@
         </p:nvSpPr>
         <p:spPr>
           <a:xfrm>
-            <a:off x="10515600" y="640080"/>
+            <a:off x="10362895" y="411480"/>
             <a:ext cx="1097280" cy="365760"/>
           </a:xfrm>
           <a:prstGeom prst="rect">
@@ -3423,7 +4618,7 @@
           <a:noFill/>
         </p:spPr>
         <p:txBody>
-          <a:bodyPr wrap="none">
+          <a:bodyPr wrap="square" lIns="0" tIns="0" rIns="0" bIns="0">
             <a:spAutoFit/>
           </a:bodyPr>
           <a:lstStyle/>
@@ -3433,24 +4628,61 @@
                 <a:solidFill>
                   <a:srgbClr val="94A3B8"/>
                 </a:solidFill>
-              </a:defRPr>
-            </a:pPr>
-            <a:r>
-              <a:t>2 / 5</a:t>
-            </a:r>
-          </a:p>
-        </p:txBody>
-      </p:sp>
-      <p:sp>
-        <p:nvSpPr>
-          <p:cNvPr id="6" name="Rounded Rectangle 5"/>
+                <a:latin typeface="Segoe UI"/>
+              </a:defRPr>
+            </a:pPr>
+            <a:r>
+              <a:t>2 / 10</a:t>
+            </a:r>
+          </a:p>
+        </p:txBody>
+      </p:sp>
+      <p:sp>
+        <p:nvSpPr>
+          <p:cNvPr id="6" name="TextBox 5"/>
+          <p:cNvSpPr txBox="1"/>
+          <p:nvPr/>
+        </p:nvSpPr>
+        <p:spPr>
+          <a:xfrm>
+            <a:off x="731520" y="6400800"/>
+            <a:ext cx="10728655" cy="274320"/>
+          </a:xfrm>
+          <a:prstGeom prst="rect">
+            <a:avLst/>
+          </a:prstGeom>
+          <a:noFill/>
+        </p:spPr>
+        <p:txBody>
+          <a:bodyPr wrap="square" lIns="0" tIns="0" rIns="0" bIns="0">
+            <a:spAutoFit/>
+          </a:bodyPr>
+          <a:lstStyle/>
+          <a:p>
+            <a:pPr>
+              <a:defRPr sz="1000">
+                <a:solidFill>
+                  <a:srgbClr val="64748B"/>
+                </a:solidFill>
+                <a:latin typeface="Segoe UI"/>
+              </a:defRPr>
+            </a:pPr>
+            <a:r>
+              <a:t>Christopher GILLERON  |  The North Face E-Commerce (ML Non Supervisé &amp; NLP)  |  Certification CDSD Bloc 3</a:t>
+            </a:r>
+          </a:p>
+        </p:txBody>
+      </p:sp>
+      <p:sp>
+        <p:nvSpPr>
+          <p:cNvPr id="7" name="Rounded Rectangle 6"/>
           <p:cNvSpPr/>
           <p:nvPr/>
         </p:nvSpPr>
         <p:spPr>
           <a:xfrm>
-            <a:off x="731520" y="1645920"/>
-            <a:ext cx="10698480" cy="1325880"/>
+            <a:off x="731520" y="1371600"/>
+            <a:ext cx="3413455" cy="4754880"/>
           </a:xfrm>
           <a:prstGeom prst="roundRect">
             <a:avLst/>
@@ -3458,7 +4690,7 @@
           <a:solidFill>
             <a:srgbClr val="1E293B"/>
           </a:solidFill>
-          <a:ln w="12700">
+          <a:ln w="19050">
             <a:solidFill>
               <a:srgbClr val="334155"/>
             </a:solidFill>
@@ -3488,14 +4720,50 @@
       </p:sp>
       <p:sp>
         <p:nvSpPr>
-          <p:cNvPr id="7" name="TextBox 6"/>
+          <p:cNvPr id="8" name="TextBox 7"/>
           <p:cNvSpPr txBox="1"/>
           <p:nvPr/>
         </p:nvSpPr>
         <p:spPr>
           <a:xfrm>
-            <a:off x="914400" y="1719072"/>
-            <a:ext cx="10332720" cy="1179576"/>
+            <a:off x="914400" y="1536192"/>
+            <a:ext cx="3047695" cy="365760"/>
+          </a:xfrm>
+          <a:prstGeom prst="rect">
+            <a:avLst/>
+          </a:prstGeom>
+          <a:noFill/>
+        </p:spPr>
+        <p:txBody>
+          <a:bodyPr wrap="square" lIns="0" tIns="0" rIns="0" bIns="0">
+            <a:spAutoFit/>
+          </a:bodyPr>
+          <a:lstStyle/>
+          <a:p>
+            <a:pPr>
+              <a:defRPr sz="1200" b="1">
+                <a:solidFill>
+                  <a:srgbClr val="F43F5E"/>
+                </a:solidFill>
+                <a:latin typeface="Segoe UI"/>
+              </a:defRPr>
+            </a:pPr>
+            <a:r>
+              <a:t>01 | CONTEXTE THE NORTH FACE</a:t>
+            </a:r>
+          </a:p>
+        </p:txBody>
+      </p:sp>
+      <p:sp>
+        <p:nvSpPr>
+          <p:cNvPr id="9" name="TextBox 8"/>
+          <p:cNvSpPr txBox="1"/>
+          <p:nvPr/>
+        </p:nvSpPr>
+        <p:spPr>
+          <a:xfrm>
+            <a:off x="914400" y="2011680"/>
+            <a:ext cx="3047695" cy="3931920"/>
           </a:xfrm>
           <a:prstGeom prst="rect">
             <a:avLst/>
@@ -3509,43 +4777,97 @@
           <a:lstStyle/>
           <a:p>
             <a:pPr>
-              <a:defRPr sz="1300" b="1">
-                <a:solidFill>
-                  <a:srgbClr val="38BDF8"/>
-                </a:solidFill>
-              </a:defRPr>
-            </a:pPr>
-            <a:r>
-              <a:t>ENJEU BUSINESS THE NORTH FACE</a:t>
-            </a:r>
-          </a:p>
-          <a:p>
-            <a:pPr>
-              <a:spcBef>
-                <a:spcPts val="400"/>
-              </a:spcBef>
-              <a:defRPr sz="1100">
+              <a:defRPr sz="1100" b="1">
+                <a:solidFill>
+                  <a:srgbClr val="F43F5E"/>
+                </a:solidFill>
+                <a:latin typeface="Segoe UI"/>
+              </a:defRPr>
+            </a:pPr>
+            <a:r>
+              <a:t>Marque Iconique Outdoor :</a:t>
+            </a:r>
+          </a:p>
+          <a:p>
+            <a:pPr>
+              <a:defRPr sz="1000">
                 <a:solidFill>
                   <a:srgbClr val="F8FAFC"/>
                 </a:solidFill>
-              </a:defRPr>
-            </a:pPr>
-            <a:r>
-              <a:t>Recommander dynamiquement des articles outdoor pertinents et similaires aux fiches produits consultées par les utilisateurs.</a:t>
-            </a:r>
-          </a:p>
-        </p:txBody>
-      </p:sp>
-      <p:sp>
-        <p:nvSpPr>
-          <p:cNvPr id="8" name="Rounded Rectangle 7"/>
+                <a:latin typeface="Segoe UI"/>
+              </a:defRPr>
+            </a:pPr>
+            <a:r>
+              <a:t>Fondée en 1968 pour équiper les grimpeurs, The North Face est devenue une référence mondiale du vêtement technique et de la mode urbaine.</a:t>
+            </a:r>
+          </a:p>
+          <a:p/>
+          <a:p>
+            <a:pPr>
+              <a:defRPr sz="1100" b="1">
+                <a:solidFill>
+                  <a:srgbClr val="F43F5E"/>
+                </a:solidFill>
+                <a:latin typeface="Segoe UI"/>
+              </a:defRPr>
+            </a:pPr>
+            <a:r>
+              <a:t>Enjeu E-Commerce :</a:t>
+            </a:r>
+          </a:p>
+          <a:p>
+            <a:pPr>
+              <a:defRPr sz="1000">
+                <a:solidFill>
+                  <a:srgbClr val="F8FAFC"/>
+                </a:solidFill>
+                <a:latin typeface="Segoe UI"/>
+              </a:defRPr>
+            </a:pPr>
+            <a:r>
+              <a:t>Optimiser le parcours d'achat sur thenorthface.fr pour transformer les visiteurs occasionnels en acheteurs fidèles.</a:t>
+            </a:r>
+          </a:p>
+          <a:p/>
+          <a:p>
+            <a:pPr>
+              <a:defRPr sz="1100" b="1">
+                <a:solidFill>
+                  <a:srgbClr val="F43F5E"/>
+                </a:solidFill>
+                <a:latin typeface="Segoe UI"/>
+              </a:defRPr>
+            </a:pPr>
+            <a:r>
+              <a:t>Périmètre Données :</a:t>
+            </a:r>
+          </a:p>
+          <a:p>
+            <a:pPr>
+              <a:defRPr sz="1000">
+                <a:solidFill>
+                  <a:srgbClr val="F8FAFC"/>
+                </a:solidFill>
+                <a:latin typeface="Segoe UI"/>
+              </a:defRPr>
+            </a:pPr>
+            <a:r>
+              <a:t>Corpus de 500 fiches produits riches issues du catalogue officiel (sample-data.csv).</a:t>
+            </a:r>
+          </a:p>
+          <a:p/>
+        </p:txBody>
+      </p:sp>
+      <p:sp>
+        <p:nvSpPr>
+          <p:cNvPr id="10" name="Rounded Rectangle 9"/>
           <p:cNvSpPr/>
           <p:nvPr/>
         </p:nvSpPr>
         <p:spPr>
           <a:xfrm>
-            <a:off x="731520" y="3108960"/>
-            <a:ext cx="10698480" cy="1325880"/>
+            <a:off x="4389120" y="1371600"/>
+            <a:ext cx="3413455" cy="4754880"/>
           </a:xfrm>
           <a:prstGeom prst="roundRect">
             <a:avLst/>
@@ -3553,7 +4875,7 @@
           <a:solidFill>
             <a:srgbClr val="1E293B"/>
           </a:solidFill>
-          <a:ln w="12700">
+          <a:ln w="19050">
             <a:solidFill>
               <a:srgbClr val="334155"/>
             </a:solidFill>
@@ -3583,14 +4905,50 @@
       </p:sp>
       <p:sp>
         <p:nvSpPr>
-          <p:cNvPr id="9" name="TextBox 8"/>
+          <p:cNvPr id="11" name="TextBox 10"/>
           <p:cNvSpPr txBox="1"/>
           <p:nvPr/>
         </p:nvSpPr>
         <p:spPr>
           <a:xfrm>
-            <a:off x="914400" y="3182112"/>
-            <a:ext cx="10332720" cy="1179576"/>
+            <a:off x="4572000" y="1536192"/>
+            <a:ext cx="3047695" cy="365760"/>
+          </a:xfrm>
+          <a:prstGeom prst="rect">
+            <a:avLst/>
+          </a:prstGeom>
+          <a:noFill/>
+        </p:spPr>
+        <p:txBody>
+          <a:bodyPr wrap="square" lIns="0" tIns="0" rIns="0" bIns="0">
+            <a:spAutoFit/>
+          </a:bodyPr>
+          <a:lstStyle/>
+          <a:p>
+            <a:pPr>
+              <a:defRPr sz="1200" b="1">
+                <a:solidFill>
+                  <a:srgbClr val="F43F5E"/>
+                </a:solidFill>
+                <a:latin typeface="Segoe UI"/>
+              </a:defRPr>
+            </a:pPr>
+            <a:r>
+              <a:t>02 | AXE 1 : MOTEUR DE RECOMMANDATION</a:t>
+            </a:r>
+          </a:p>
+        </p:txBody>
+      </p:sp>
+      <p:sp>
+        <p:nvSpPr>
+          <p:cNvPr id="12" name="TextBox 11"/>
+          <p:cNvSpPr txBox="1"/>
+          <p:nvPr/>
+        </p:nvSpPr>
+        <p:spPr>
+          <a:xfrm>
+            <a:off x="4572000" y="2011680"/>
+            <a:ext cx="3047695" cy="3931920"/>
           </a:xfrm>
           <a:prstGeom prst="rect">
             <a:avLst/>
@@ -3604,43 +4962,97 @@
           <a:lstStyle/>
           <a:p>
             <a:pPr>
-              <a:defRPr sz="1300" b="1">
-                <a:solidFill>
-                  <a:srgbClr val="A855F7"/>
-                </a:solidFill>
-              </a:defRPr>
-            </a:pPr>
-            <a:r>
-              <a:t>DÉFI DU TRAITEMENT TEXTUEL</a:t>
-            </a:r>
-          </a:p>
-          <a:p>
-            <a:pPr>
-              <a:spcBef>
-                <a:spcPts val="400"/>
-              </a:spcBef>
-              <a:defRPr sz="1100">
+              <a:defRPr sz="1100" b="1">
+                <a:solidFill>
+                  <a:srgbClr val="F43F5E"/>
+                </a:solidFill>
+                <a:latin typeface="Segoe UI"/>
+              </a:defRPr>
+            </a:pPr>
+            <a:r>
+              <a:t>Cross-Selling Ciblé :</a:t>
+            </a:r>
+          </a:p>
+          <a:p>
+            <a:pPr>
+              <a:defRPr sz="1000">
                 <a:solidFill>
                   <a:srgbClr val="F8FAFC"/>
                 </a:solidFill>
-              </a:defRPr>
-            </a:pPr>
-            <a:r>
-              <a:t>Exploiter les descriptions textuelles des produits (caractéristiques techniques, matières, usages) pour calculer la proximité sémantique.</a:t>
-            </a:r>
-          </a:p>
-        </p:txBody>
-      </p:sp>
-      <p:sp>
-        <p:nvSpPr>
-          <p:cNvPr id="10" name="Rounded Rectangle 9"/>
+                <a:latin typeface="Segoe UI"/>
+              </a:defRPr>
+            </a:pPr>
+            <a:r>
+              <a:t>Déployer un carrousel 'Ces produits pourraient aussi vous intéresser...' sur chaque page article.</a:t>
+            </a:r>
+          </a:p>
+          <a:p/>
+          <a:p>
+            <a:pPr>
+              <a:defRPr sz="1100" b="1">
+                <a:solidFill>
+                  <a:srgbClr val="F43F5E"/>
+                </a:solidFill>
+                <a:latin typeface="Segoe UI"/>
+              </a:defRPr>
+            </a:pPr>
+            <a:r>
+              <a:t>Approche Basée Contenu (Content-Based) :</a:t>
+            </a:r>
+          </a:p>
+          <a:p>
+            <a:pPr>
+              <a:defRPr sz="1000">
+                <a:solidFill>
+                  <a:srgbClr val="F8FAFC"/>
+                </a:solidFill>
+                <a:latin typeface="Segoe UI"/>
+              </a:defRPr>
+            </a:pPr>
+            <a:r>
+              <a:t>Recommander des produits similaires par analyse sémantique des descriptions sans dépendre de l'historique utilisateur.</a:t>
+            </a:r>
+          </a:p>
+          <a:p/>
+          <a:p>
+            <a:pPr>
+              <a:defRPr sz="1100" b="1">
+                <a:solidFill>
+                  <a:srgbClr val="F43F5E"/>
+                </a:solidFill>
+                <a:latin typeface="Segoe UI"/>
+              </a:defRPr>
+            </a:pPr>
+            <a:r>
+              <a:t>Résolution du Cold-Start :</a:t>
+            </a:r>
+          </a:p>
+          <a:p>
+            <a:pPr>
+              <a:defRPr sz="1000">
+                <a:solidFill>
+                  <a:srgbClr val="F8FAFC"/>
+                </a:solidFill>
+                <a:latin typeface="Segoe UI"/>
+              </a:defRPr>
+            </a:pPr>
+            <a:r>
+              <a:t>Capacité à recommander instantanément les nouveaux arrivages du catalogue sans historique d'achat.</a:t>
+            </a:r>
+          </a:p>
+          <a:p/>
+        </p:txBody>
+      </p:sp>
+      <p:sp>
+        <p:nvSpPr>
+          <p:cNvPr id="13" name="Rounded Rectangle 12"/>
           <p:cNvSpPr/>
           <p:nvPr/>
         </p:nvSpPr>
         <p:spPr>
           <a:xfrm>
-            <a:off x="731520" y="4572000"/>
-            <a:ext cx="10698480" cy="1325880"/>
+            <a:off x="8046720" y="1371600"/>
+            <a:ext cx="3413455" cy="4754880"/>
           </a:xfrm>
           <a:prstGeom prst="roundRect">
             <a:avLst/>
@@ -3648,7 +5060,7 @@
           <a:solidFill>
             <a:srgbClr val="1E293B"/>
           </a:solidFill>
-          <a:ln w="12700">
+          <a:ln w="19050">
             <a:solidFill>
               <a:srgbClr val="334155"/>
             </a:solidFill>
@@ -3678,14 +5090,50 @@
       </p:sp>
       <p:sp>
         <p:nvSpPr>
-          <p:cNvPr id="11" name="TextBox 10"/>
+          <p:cNvPr id="14" name="TextBox 13"/>
           <p:cNvSpPr txBox="1"/>
           <p:nvPr/>
         </p:nvSpPr>
         <p:spPr>
           <a:xfrm>
-            <a:off x="914400" y="4645152"/>
-            <a:ext cx="10332720" cy="1179576"/>
+            <a:off x="8229600" y="1536192"/>
+            <a:ext cx="3047695" cy="365760"/>
+          </a:xfrm>
+          <a:prstGeom prst="rect">
+            <a:avLst/>
+          </a:prstGeom>
+          <a:noFill/>
+        </p:spPr>
+        <p:txBody>
+          <a:bodyPr wrap="square" lIns="0" tIns="0" rIns="0" bIns="0">
+            <a:spAutoFit/>
+          </a:bodyPr>
+          <a:lstStyle/>
+          <a:p>
+            <a:pPr>
+              <a:defRPr sz="1200" b="1">
+                <a:solidFill>
+                  <a:srgbClr val="F43F5E"/>
+                </a:solidFill>
+                <a:latin typeface="Segoe UI"/>
+              </a:defRPr>
+            </a:pPr>
+            <a:r>
+              <a:t>03 | AXE 2 : EXTRACTION DE THÈMES (LSA)</a:t>
+            </a:r>
+          </a:p>
+        </p:txBody>
+      </p:sp>
+      <p:sp>
+        <p:nvSpPr>
+          <p:cNvPr id="15" name="TextBox 14"/>
+          <p:cNvSpPr txBox="1"/>
+          <p:nvPr/>
+        </p:nvSpPr>
+        <p:spPr>
+          <a:xfrm>
+            <a:off x="8229600" y="2011680"/>
+            <a:ext cx="3047695" cy="3931920"/>
           </a:xfrm>
           <a:prstGeom prst="rect">
             <a:avLst/>
@@ -3699,66 +5147,85 @@
           <a:lstStyle/>
           <a:p>
             <a:pPr>
-              <a:defRPr sz="1300" b="1">
-                <a:solidFill>
-                  <a:srgbClr val="38BDF8"/>
-                </a:solidFill>
-              </a:defRPr>
-            </a:pPr>
-            <a:r>
-              <a:t>APPROCHE CONTENT-BASED</a:t>
-            </a:r>
-          </a:p>
-          <a:p>
-            <a:pPr>
-              <a:spcBef>
-                <a:spcPts val="400"/>
-              </a:spcBef>
-              <a:defRPr sz="1100">
+              <a:defRPr sz="1100" b="1">
+                <a:solidFill>
+                  <a:srgbClr val="F43F5E"/>
+                </a:solidFill>
+                <a:latin typeface="Segoe UI"/>
+              </a:defRPr>
+            </a:pPr>
+            <a:r>
+              <a:t>Remise en Cause des Catégories :</a:t>
+            </a:r>
+          </a:p>
+          <a:p>
+            <a:pPr>
+              <a:defRPr sz="1000">
                 <a:solidFill>
                   <a:srgbClr val="F8FAFC"/>
                 </a:solidFill>
-              </a:defRPr>
-            </a:pPr>
-            <a:r>
-              <a:t>Modélisation basée sur le contenu textuel sans dépendre de l'historique d'achat utilisateur (résolution du problème de Cold Start).</a:t>
-            </a:r>
-          </a:p>
-        </p:txBody>
-      </p:sp>
-      <p:sp>
-        <p:nvSpPr>
-          <p:cNvPr id="12" name="TextBox 11"/>
-          <p:cNvSpPr txBox="1"/>
-          <p:nvPr/>
-        </p:nvSpPr>
-        <p:spPr>
-          <a:xfrm>
-            <a:off x="731520" y="6309360"/>
-            <a:ext cx="10698480" cy="365760"/>
-          </a:xfrm>
-          <a:prstGeom prst="rect">
-            <a:avLst/>
-          </a:prstGeom>
-          <a:noFill/>
-        </p:spPr>
-        <p:txBody>
-          <a:bodyPr wrap="none">
-            <a:spAutoFit/>
-          </a:bodyPr>
-          <a:lstStyle/>
+                <a:latin typeface="Segoe UI"/>
+              </a:defRPr>
+            </a:pPr>
+            <a:r>
+              <a:t>Les arborescences e-commerce traditionnelles (Homme/Femme/Accessoires) sont rigides et peu intuitives.</a:t>
+            </a:r>
+          </a:p>
+          <a:p/>
+          <a:p>
+            <a:pPr>
+              <a:defRPr sz="1100" b="1">
+                <a:solidFill>
+                  <a:srgbClr val="F43F5E"/>
+                </a:solidFill>
+                <a:latin typeface="Segoe UI"/>
+              </a:defRPr>
+            </a:pPr>
+            <a:r>
+              <a:t>Topic Modeling Non Supervisé :</a:t>
+            </a:r>
+          </a:p>
           <a:p>
             <a:pPr>
               <a:defRPr sz="1000">
                 <a:solidFill>
-                  <a:srgbClr val="94A3B8"/>
-                </a:solidFill>
-              </a:defRPr>
-            </a:pPr>
-            <a:r>
-              <a:t>Christopher GILLERON  |  The North Face Recommender System  |  Certification CDSD</a:t>
-            </a:r>
-          </a:p>
+                  <a:srgbClr val="F8FAFC"/>
+                </a:solidFill>
+                <a:latin typeface="Segoe UI"/>
+              </a:defRPr>
+            </a:pPr>
+            <a:r>
+              <a:t>Découvrir automatiquement les catégories émergentes basées sur les usages réels (imperméabilité, trail, grand froid).</a:t>
+            </a:r>
+          </a:p>
+          <a:p/>
+          <a:p>
+            <a:pPr>
+              <a:defRPr sz="1100" b="1">
+                <a:solidFill>
+                  <a:srgbClr val="F43F5E"/>
+                </a:solidFill>
+                <a:latin typeface="Segoe UI"/>
+              </a:defRPr>
+            </a:pPr>
+            <a:r>
+              <a:t>Optimisation SEO &amp; UX :</a:t>
+            </a:r>
+          </a:p>
+          <a:p>
+            <a:pPr>
+              <a:defRPr sz="1000">
+                <a:solidFill>
+                  <a:srgbClr val="F8FAFC"/>
+                </a:solidFill>
+                <a:latin typeface="Segoe UI"/>
+              </a:defRPr>
+            </a:pPr>
+            <a:r>
+              <a:t>Structurer des pages thématiques de collection plus adaptées aux intentions de recherche des clients.</a:t>
+            </a:r>
+          </a:p>
+          <a:p/>
         </p:txBody>
       </p:sp>
     </p:spTree>
@@ -3794,7 +5261,7 @@
             <a:avLst/>
           </a:prstGeom>
           <a:solidFill>
-            <a:srgbClr val="0F172A"/>
+            <a:srgbClr val="0B1120"/>
           </a:solidFill>
           <a:ln>
             <a:noFill/>
@@ -3830,8 +5297,8 @@
         </p:nvSpPr>
         <p:spPr>
           <a:xfrm>
-            <a:off x="731520" y="457200"/>
-            <a:ext cx="9144000" cy="365760"/>
+            <a:off x="731520" y="365760"/>
+            <a:ext cx="7315200" cy="320040"/>
           </a:xfrm>
           <a:prstGeom prst="rect">
             <a:avLst/>
@@ -3839,7 +5306,7 @@
           <a:noFill/>
         </p:spPr>
         <p:txBody>
-          <a:bodyPr wrap="none">
+          <a:bodyPr wrap="square" lIns="0" tIns="0" rIns="0" bIns="0">
             <a:spAutoFit/>
           </a:bodyPr>
           <a:lstStyle/>
@@ -3847,12 +5314,13 @@
             <a:pPr>
               <a:defRPr sz="1100" b="1">
                 <a:solidFill>
-                  <a:srgbClr val="38BDF8"/>
-                </a:solidFill>
-              </a:defRPr>
-            </a:pPr>
-            <a:r>
-              <a:t>ÉTAPE 02 | PIPELINE NLP &amp; TF-IDF</a:t>
+                  <a:srgbClr val="F43F5E"/>
+                </a:solidFill>
+                <a:latin typeface="Segoe UI"/>
+              </a:defRPr>
+            </a:pPr>
+            <a:r>
+              <a:t>ÉTAPE 02 | PRÉTRAITEMENT NLP</a:t>
             </a:r>
           </a:p>
         </p:txBody>
@@ -3865,8 +5333,8 @@
         </p:nvSpPr>
         <p:spPr>
           <a:xfrm>
-            <a:off x="731520" y="822960"/>
-            <a:ext cx="9144000" cy="731520"/>
+            <a:off x="731520" y="685800"/>
+            <a:ext cx="9601200" cy="502920"/>
           </a:xfrm>
           <a:prstGeom prst="rect">
             <a:avLst/>
@@ -3874,20 +5342,21 @@
           <a:noFill/>
         </p:spPr>
         <p:txBody>
-          <a:bodyPr wrap="none">
+          <a:bodyPr wrap="square" lIns="0" tIns="0" rIns="0" bIns="0">
             <a:spAutoFit/>
           </a:bodyPr>
           <a:lstStyle/>
           <a:p>
             <a:pPr>
-              <a:defRPr sz="2400" b="1">
+              <a:defRPr sz="2200" b="1">
                 <a:solidFill>
                   <a:srgbClr val="F8FAFC"/>
                 </a:solidFill>
-              </a:defRPr>
-            </a:pPr>
-            <a:r>
-              <a:t>Nettoyage &amp; Vectorisation des Descriptions</a:t>
+                <a:latin typeface="Segoe UI"/>
+              </a:defRPr>
+            </a:pPr>
+            <a:r>
+              <a:t>Nettoyage Linguistique SpaCy &amp; Vectorisation TF-IDF</a:t>
             </a:r>
           </a:p>
         </p:txBody>
@@ -3900,7 +5369,7 @@
         </p:nvSpPr>
         <p:spPr>
           <a:xfrm>
-            <a:off x="10515600" y="640080"/>
+            <a:off x="10362895" y="411480"/>
             <a:ext cx="1097280" cy="365760"/>
           </a:xfrm>
           <a:prstGeom prst="rect">
@@ -3909,7 +5378,7 @@
           <a:noFill/>
         </p:spPr>
         <p:txBody>
-          <a:bodyPr wrap="none">
+          <a:bodyPr wrap="square" lIns="0" tIns="0" rIns="0" bIns="0">
             <a:spAutoFit/>
           </a:bodyPr>
           <a:lstStyle/>
@@ -3919,24 +5388,61 @@
                 <a:solidFill>
                   <a:srgbClr val="94A3B8"/>
                 </a:solidFill>
-              </a:defRPr>
-            </a:pPr>
-            <a:r>
-              <a:t>3 / 5</a:t>
-            </a:r>
-          </a:p>
-        </p:txBody>
-      </p:sp>
-      <p:sp>
-        <p:nvSpPr>
-          <p:cNvPr id="6" name="Rounded Rectangle 5"/>
+                <a:latin typeface="Segoe UI"/>
+              </a:defRPr>
+            </a:pPr>
+            <a:r>
+              <a:t>3 / 10</a:t>
+            </a:r>
+          </a:p>
+        </p:txBody>
+      </p:sp>
+      <p:sp>
+        <p:nvSpPr>
+          <p:cNvPr id="6" name="TextBox 5"/>
+          <p:cNvSpPr txBox="1"/>
+          <p:nvPr/>
+        </p:nvSpPr>
+        <p:spPr>
+          <a:xfrm>
+            <a:off x="731520" y="6400800"/>
+            <a:ext cx="10728655" cy="274320"/>
+          </a:xfrm>
+          <a:prstGeom prst="rect">
+            <a:avLst/>
+          </a:prstGeom>
+          <a:noFill/>
+        </p:spPr>
+        <p:txBody>
+          <a:bodyPr wrap="square" lIns="0" tIns="0" rIns="0" bIns="0">
+            <a:spAutoFit/>
+          </a:bodyPr>
+          <a:lstStyle/>
+          <a:p>
+            <a:pPr>
+              <a:defRPr sz="1000">
+                <a:solidFill>
+                  <a:srgbClr val="64748B"/>
+                </a:solidFill>
+                <a:latin typeface="Segoe UI"/>
+              </a:defRPr>
+            </a:pPr>
+            <a:r>
+              <a:t>Christopher GILLERON  |  The North Face E-Commerce (ML Non Supervisé &amp; NLP)  |  Certification CDSD Bloc 3</a:t>
+            </a:r>
+          </a:p>
+        </p:txBody>
+      </p:sp>
+      <p:sp>
+        <p:nvSpPr>
+          <p:cNvPr id="7" name="Rounded Rectangle 6"/>
           <p:cNvSpPr/>
           <p:nvPr/>
         </p:nvSpPr>
         <p:spPr>
           <a:xfrm>
-            <a:off x="731520" y="1645920"/>
-            <a:ext cx="5303520" cy="2057400"/>
+            <a:off x="731520" y="1371600"/>
+            <a:ext cx="3413455" cy="4754880"/>
           </a:xfrm>
           <a:prstGeom prst="roundRect">
             <a:avLst/>
@@ -3944,7 +5450,7 @@
           <a:solidFill>
             <a:srgbClr val="1E293B"/>
           </a:solidFill>
-          <a:ln w="12700">
+          <a:ln w="19050">
             <a:solidFill>
               <a:srgbClr val="334155"/>
             </a:solidFill>
@@ -3974,14 +5480,50 @@
       </p:sp>
       <p:sp>
         <p:nvSpPr>
-          <p:cNvPr id="7" name="TextBox 6"/>
+          <p:cNvPr id="8" name="TextBox 7"/>
           <p:cNvSpPr txBox="1"/>
           <p:nvPr/>
         </p:nvSpPr>
         <p:spPr>
           <a:xfrm>
-            <a:off x="914400" y="1719072"/>
-            <a:ext cx="4937760" cy="1911096"/>
+            <a:off x="914400" y="1536192"/>
+            <a:ext cx="3047695" cy="365760"/>
+          </a:xfrm>
+          <a:prstGeom prst="rect">
+            <a:avLst/>
+          </a:prstGeom>
+          <a:noFill/>
+        </p:spPr>
+        <p:txBody>
+          <a:bodyPr wrap="square" lIns="0" tIns="0" rIns="0" bIns="0">
+            <a:spAutoFit/>
+          </a:bodyPr>
+          <a:lstStyle/>
+          <a:p>
+            <a:pPr>
+              <a:defRPr sz="1200" b="1">
+                <a:solidFill>
+                  <a:srgbClr val="F43F5E"/>
+                </a:solidFill>
+                <a:latin typeface="Segoe UI"/>
+              </a:defRPr>
+            </a:pPr>
+            <a:r>
+              <a:t>01 | PIPELINE SPACY (EN_CORE_WEB_SM)</a:t>
+            </a:r>
+          </a:p>
+        </p:txBody>
+      </p:sp>
+      <p:sp>
+        <p:nvSpPr>
+          <p:cNvPr id="9" name="TextBox 8"/>
+          <p:cNvSpPr txBox="1"/>
+          <p:nvPr/>
+        </p:nvSpPr>
+        <p:spPr>
+          <a:xfrm>
+            <a:off x="914400" y="2011680"/>
+            <a:ext cx="3047695" cy="3931920"/>
           </a:xfrm>
           <a:prstGeom prst="rect">
             <a:avLst/>
@@ -3995,43 +5537,97 @@
           <a:lstStyle/>
           <a:p>
             <a:pPr>
-              <a:defRPr sz="1300" b="1">
-                <a:solidFill>
-                  <a:srgbClr val="38BDF8"/>
-                </a:solidFill>
-              </a:defRPr>
-            </a:pPr>
-            <a:r>
-              <a:t>PRÉTRAITEMENT NLTK / SPACY</a:t>
-            </a:r>
-          </a:p>
-          <a:p>
-            <a:pPr>
-              <a:spcBef>
-                <a:spcPts val="400"/>
-              </a:spcBef>
-              <a:defRPr sz="1100">
+              <a:defRPr sz="1100" b="1">
+                <a:solidFill>
+                  <a:srgbClr val="F43F5E"/>
+                </a:solidFill>
+                <a:latin typeface="Segoe UI"/>
+              </a:defRPr>
+            </a:pPr>
+            <a:r>
+              <a:t>Normalisation Textuelle :</a:t>
+            </a:r>
+          </a:p>
+          <a:p>
+            <a:pPr>
+              <a:defRPr sz="1000">
                 <a:solidFill>
                   <a:srgbClr val="F8FAFC"/>
                 </a:solidFill>
-              </a:defRPr>
-            </a:pPr>
-            <a:r>
-              <a:t>Tokenisation, passage en minuscules, suppression des stopwords et lemmatisation des termes techniques outdoor.</a:t>
-            </a:r>
-          </a:p>
-        </p:txBody>
-      </p:sp>
-      <p:sp>
-        <p:nvSpPr>
-          <p:cNvPr id="8" name="Rounded Rectangle 7"/>
+                <a:latin typeface="Segoe UI"/>
+              </a:defRPr>
+            </a:pPr>
+            <a:r>
+              <a:t>Passage intégral en minuscules et suppression des caractères non alphabétiques (token.is_alpha).</a:t>
+            </a:r>
+          </a:p>
+          <a:p/>
+          <a:p>
+            <a:pPr>
+              <a:defRPr sz="1100" b="1">
+                <a:solidFill>
+                  <a:srgbClr val="F43F5E"/>
+                </a:solidFill>
+                <a:latin typeface="Segoe UI"/>
+              </a:defRPr>
+            </a:pPr>
+            <a:r>
+              <a:t>Élimination des Stop Words :</a:t>
+            </a:r>
+          </a:p>
+          <a:p>
+            <a:pPr>
+              <a:defRPr sz="1000">
+                <a:solidFill>
+                  <a:srgbClr val="F8FAFC"/>
+                </a:solidFill>
+                <a:latin typeface="Segoe UI"/>
+              </a:defRPr>
+            </a:pPr>
+            <a:r>
+              <a:t>Filtrage des mots vides anglais standard (token.is_stop) et du bruit syntaxique.</a:t>
+            </a:r>
+          </a:p>
+          <a:p/>
+          <a:p>
+            <a:pPr>
+              <a:defRPr sz="1100" b="1">
+                <a:solidFill>
+                  <a:srgbClr val="F43F5E"/>
+                </a:solidFill>
+                <a:latin typeface="Segoe UI"/>
+              </a:defRPr>
+            </a:pPr>
+            <a:r>
+              <a:t>Lemmatisation Précise :</a:t>
+            </a:r>
+          </a:p>
+          <a:p>
+            <a:pPr>
+              <a:defRPr sz="1000">
+                <a:solidFill>
+                  <a:srgbClr val="F8FAFC"/>
+                </a:solidFill>
+                <a:latin typeface="Segoe UI"/>
+              </a:defRPr>
+            </a:pPr>
+            <a:r>
+              <a:t>Réduction des flexions à leur lemme canonique (ex: 'running', 'runs' -&gt; 'run' ; 'jackets' -&gt; 'jacket').</a:t>
+            </a:r>
+          </a:p>
+          <a:p/>
+        </p:txBody>
+      </p:sp>
+      <p:sp>
+        <p:nvSpPr>
+          <p:cNvPr id="10" name="Rounded Rectangle 9"/>
           <p:cNvSpPr/>
           <p:nvPr/>
         </p:nvSpPr>
         <p:spPr>
           <a:xfrm>
-            <a:off x="731520" y="3840480"/>
-            <a:ext cx="5303520" cy="2057400"/>
+            <a:off x="4389120" y="1371600"/>
+            <a:ext cx="3413455" cy="4754880"/>
           </a:xfrm>
           <a:prstGeom prst="roundRect">
             <a:avLst/>
@@ -4039,7 +5635,7 @@
           <a:solidFill>
             <a:srgbClr val="1E293B"/>
           </a:solidFill>
-          <a:ln w="12700">
+          <a:ln w="19050">
             <a:solidFill>
               <a:srgbClr val="334155"/>
             </a:solidFill>
@@ -4069,14 +5665,50 @@
       </p:sp>
       <p:sp>
         <p:nvSpPr>
-          <p:cNvPr id="9" name="TextBox 8"/>
+          <p:cNvPr id="11" name="TextBox 10"/>
           <p:cNvSpPr txBox="1"/>
           <p:nvPr/>
         </p:nvSpPr>
         <p:spPr>
           <a:xfrm>
-            <a:off x="914400" y="3913632"/>
-            <a:ext cx="4937760" cy="1911096"/>
+            <a:off x="4572000" y="1536192"/>
+            <a:ext cx="3047695" cy="365760"/>
+          </a:xfrm>
+          <a:prstGeom prst="rect">
+            <a:avLst/>
+          </a:prstGeom>
+          <a:noFill/>
+        </p:spPr>
+        <p:txBody>
+          <a:bodyPr wrap="square" lIns="0" tIns="0" rIns="0" bIns="0">
+            <a:spAutoFit/>
+          </a:bodyPr>
+          <a:lstStyle/>
+          <a:p>
+            <a:pPr>
+              <a:defRPr sz="1200" b="1">
+                <a:solidFill>
+                  <a:srgbClr val="F43F5E"/>
+                </a:solidFill>
+                <a:latin typeface="Segoe UI"/>
+              </a:defRPr>
+            </a:pPr>
+            <a:r>
+              <a:t>02 | STOP WORDS PERSONNALISÉS</a:t>
+            </a:r>
+          </a:p>
+        </p:txBody>
+      </p:sp>
+      <p:sp>
+        <p:nvSpPr>
+          <p:cNvPr id="12" name="TextBox 11"/>
+          <p:cNvSpPr txBox="1"/>
+          <p:nvPr/>
+        </p:nvSpPr>
+        <p:spPr>
+          <a:xfrm>
+            <a:off x="4572000" y="2011680"/>
+            <a:ext cx="3047695" cy="3931920"/>
           </a:xfrm>
           <a:prstGeom prst="rect">
             <a:avLst/>
@@ -4090,43 +5722,124 @@
           <a:lstStyle/>
           <a:p>
             <a:pPr>
-              <a:defRPr sz="1300" b="1">
-                <a:solidFill>
-                  <a:srgbClr val="A855F7"/>
-                </a:solidFill>
-              </a:defRPr>
-            </a:pPr>
-            <a:r>
-              <a:t>MATRICE TF-IDF</a:t>
-            </a:r>
-          </a:p>
-          <a:p>
-            <a:pPr>
-              <a:spcBef>
-                <a:spcPts val="400"/>
-              </a:spcBef>
-              <a:defRPr sz="1100">
+              <a:defRPr sz="1100" b="1">
+                <a:solidFill>
+                  <a:srgbClr val="F43F5E"/>
+                </a:solidFill>
+                <a:latin typeface="Segoe UI"/>
+              </a:defRPr>
+            </a:pPr>
+            <a:r>
+              <a:t>Filtrage des Termes Parasites :</a:t>
+            </a:r>
+          </a:p>
+          <a:p>
+            <a:pPr>
+              <a:defRPr sz="1000">
                 <a:solidFill>
                   <a:srgbClr val="F8FAFC"/>
                 </a:solidFill>
-              </a:defRPr>
-            </a:pPr>
-            <a:r>
-              <a:t>Transformation des fiches produits en vecteurs numériques pondérés par la spécificité des termes (Term Frequency-Inverse Document Frequency).</a:t>
-            </a:r>
-          </a:p>
-        </p:txBody>
-      </p:sp>
-      <p:sp>
-        <p:nvSpPr>
-          <p:cNvPr id="10" name="Rounded Rectangle 9"/>
+                <a:latin typeface="Segoe UI"/>
+              </a:defRPr>
+            </a:pPr>
+            <a:r>
+              <a:t>Élimination des termes promotionnels ubiquitaires dans les descriptions outdoor :</a:t>
+            </a:r>
+          </a:p>
+          <a:p/>
+          <a:p>
+            <a:pPr>
+              <a:defRPr sz="1100" b="1">
+                <a:solidFill>
+                  <a:srgbClr val="F43F5E"/>
+                </a:solidFill>
+                <a:latin typeface="Segoe UI"/>
+              </a:defRPr>
+            </a:pPr>
+            <a:r>
+              <a:t>• Marque &amp; Bruit :</a:t>
+            </a:r>
+          </a:p>
+          <a:p>
+            <a:pPr>
+              <a:defRPr sz="1000">
+                <a:solidFill>
+                  <a:srgbClr val="F8FAFC"/>
+                </a:solidFill>
+                <a:latin typeface="Segoe UI"/>
+              </a:defRPr>
+            </a:pPr>
+            <a:r>
+              <a:t>Suppression de 'north', 'face', 'feature', 'design', 'include'.</a:t>
+            </a:r>
+          </a:p>
+          <a:p/>
+          <a:p>
+            <a:pPr>
+              <a:defRPr sz="1100" b="1">
+                <a:solidFill>
+                  <a:srgbClr val="F43F5E"/>
+                </a:solidFill>
+                <a:latin typeface="Segoe UI"/>
+              </a:defRPr>
+            </a:pPr>
+            <a:r>
+              <a:t>• Bruit de Mesure :</a:t>
+            </a:r>
+          </a:p>
+          <a:p>
+            <a:pPr>
+              <a:defRPr sz="1000">
+                <a:solidFill>
+                  <a:srgbClr val="F8FAFC"/>
+                </a:solidFill>
+                <a:latin typeface="Segoe UI"/>
+              </a:defRPr>
+            </a:pPr>
+            <a:r>
+              <a:t>Suppression des mentions de lavage, taille et composition générique.</a:t>
+            </a:r>
+          </a:p>
+          <a:p/>
+          <a:p>
+            <a:pPr>
+              <a:defRPr sz="1100" b="1">
+                <a:solidFill>
+                  <a:srgbClr val="F43F5E"/>
+                </a:solidFill>
+                <a:latin typeface="Segoe UI"/>
+              </a:defRPr>
+            </a:pPr>
+            <a:r>
+              <a:t>Gain de Spécificité :</a:t>
+            </a:r>
+          </a:p>
+          <a:p>
+            <a:pPr>
+              <a:defRPr sz="1000">
+                <a:solidFill>
+                  <a:srgbClr val="F8FAFC"/>
+                </a:solidFill>
+                <a:latin typeface="Segoe UI"/>
+              </a:defRPr>
+            </a:pPr>
+            <a:r>
+              <a:t>Permet aux algorithmes de se concentrer sur les propriétés discriminantes des vêtements.</a:t>
+            </a:r>
+          </a:p>
+          <a:p/>
+        </p:txBody>
+      </p:sp>
+      <p:sp>
+        <p:nvSpPr>
+          <p:cNvPr id="13" name="Rounded Rectangle 12"/>
           <p:cNvSpPr/>
           <p:nvPr/>
         </p:nvSpPr>
         <p:spPr>
           <a:xfrm>
-            <a:off x="6355080" y="1600200"/>
-            <a:ext cx="5120640" cy="4389120"/>
+            <a:off x="8046720" y="1371600"/>
+            <a:ext cx="3413455" cy="4754880"/>
           </a:xfrm>
           <a:prstGeom prst="roundRect">
             <a:avLst/>
@@ -4134,7 +5847,7 @@
           <a:solidFill>
             <a:srgbClr val="1E293B"/>
           </a:solidFill>
-          <a:ln>
+          <a:ln w="19050">
             <a:solidFill>
               <a:srgbClr val="334155"/>
             </a:solidFill>
@@ -4162,63 +5875,144 @@
           </a:p>
         </p:txBody>
       </p:sp>
-      <p:pic>
-        <p:nvPicPr>
-          <p:cNvPr id="11" name="Picture 10" descr="northface_c9_1.png"/>
-          <p:cNvPicPr>
-            <a:picLocks noChangeAspect="1"/>
-          </p:cNvPicPr>
-          <p:nvPr/>
-        </p:nvPicPr>
-        <p:blipFill>
-          <a:blip r:embed="rId2"/>
-          <a:stretch>
-            <a:fillRect/>
-          </a:stretch>
-        </p:blipFill>
-        <p:spPr>
-          <a:xfrm>
-            <a:off x="6400800" y="1645920"/>
-            <a:ext cx="5029200" cy="2833499"/>
+      <p:sp>
+        <p:nvSpPr>
+          <p:cNvPr id="14" name="TextBox 13"/>
+          <p:cNvSpPr txBox="1"/>
+          <p:nvPr/>
+        </p:nvSpPr>
+        <p:spPr>
+          <a:xfrm>
+            <a:off x="8229600" y="1536192"/>
+            <a:ext cx="3047695" cy="365760"/>
           </a:xfrm>
           <a:prstGeom prst="rect">
             <a:avLst/>
           </a:prstGeom>
-        </p:spPr>
-      </p:pic>
-      <p:sp>
-        <p:nvSpPr>
-          <p:cNvPr id="12" name="TextBox 11"/>
-          <p:cNvSpPr txBox="1"/>
-          <p:nvPr/>
-        </p:nvSpPr>
-        <p:spPr>
-          <a:xfrm>
-            <a:off x="731520" y="6309360"/>
-            <a:ext cx="10698480" cy="365760"/>
-          </a:xfrm>
-          <a:prstGeom prst="rect">
-            <a:avLst/>
-          </a:prstGeom>
           <a:noFill/>
         </p:spPr>
         <p:txBody>
-          <a:bodyPr wrap="none">
+          <a:bodyPr wrap="square" lIns="0" tIns="0" rIns="0" bIns="0">
             <a:spAutoFit/>
           </a:bodyPr>
           <a:lstStyle/>
           <a:p>
             <a:pPr>
+              <a:defRPr sz="1200" b="1">
+                <a:solidFill>
+                  <a:srgbClr val="F43F5E"/>
+                </a:solidFill>
+                <a:latin typeface="Segoe UI"/>
+              </a:defRPr>
+            </a:pPr>
+            <a:r>
+              <a:t>03 | MATRICE TF-IDF (SCIKIT-LEARN)</a:t>
+            </a:r>
+          </a:p>
+        </p:txBody>
+      </p:sp>
+      <p:sp>
+        <p:nvSpPr>
+          <p:cNvPr id="15" name="TextBox 14"/>
+          <p:cNvSpPr txBox="1"/>
+          <p:nvPr/>
+        </p:nvSpPr>
+        <p:spPr>
+          <a:xfrm>
+            <a:off x="8229600" y="2011680"/>
+            <a:ext cx="3047695" cy="3931920"/>
+          </a:xfrm>
+          <a:prstGeom prst="rect">
+            <a:avLst/>
+          </a:prstGeom>
+          <a:noFill/>
+        </p:spPr>
+        <p:txBody>
+          <a:bodyPr wrap="square">
+            <a:spAutoFit/>
+          </a:bodyPr>
+          <a:lstStyle/>
+          <a:p>
+            <a:pPr>
+              <a:defRPr sz="1100" b="1">
+                <a:solidFill>
+                  <a:srgbClr val="F43F5E"/>
+                </a:solidFill>
+                <a:latin typeface="Segoe UI"/>
+              </a:defRPr>
+            </a:pPr>
+            <a:r>
+              <a:t>TfidfVectorizer Calibré :</a:t>
+            </a:r>
+          </a:p>
+          <a:p>
+            <a:pPr>
               <a:defRPr sz="1000">
                 <a:solidFill>
-                  <a:srgbClr val="94A3B8"/>
-                </a:solidFill>
-              </a:defRPr>
-            </a:pPr>
-            <a:r>
-              <a:t>Christopher GILLERON  |  The North Face Recommender System  |  Certification CDSD</a:t>
-            </a:r>
-          </a:p>
+                  <a:srgbClr val="F8FAFC"/>
+                </a:solidFill>
+                <a:latin typeface="Segoe UI"/>
+              </a:defRPr>
+            </a:pPr>
+            <a:r>
+              <a:t>Pondération Term Frequency - Inverse Document Frequency pour valoriser les termes rares et informatifs.</a:t>
+            </a:r>
+          </a:p>
+          <a:p/>
+          <a:p>
+            <a:pPr>
+              <a:defRPr sz="1100" b="1">
+                <a:solidFill>
+                  <a:srgbClr val="F43F5E"/>
+                </a:solidFill>
+                <a:latin typeface="Segoe UI"/>
+              </a:defRPr>
+            </a:pPr>
+            <a:r>
+              <a:t>Dimensions de la Matrice :</a:t>
+            </a:r>
+          </a:p>
+          <a:p>
+            <a:pPr>
+              <a:defRPr sz="1000">
+                <a:solidFill>
+                  <a:srgbClr val="F8FAFC"/>
+                </a:solidFill>
+                <a:latin typeface="Segoe UI"/>
+              </a:defRPr>
+            </a:pPr>
+            <a:r>
+              <a:t>500 documents (produits) x 1 033 dimensions lexicales épurées.</a:t>
+            </a:r>
+          </a:p>
+          <a:p/>
+          <a:p>
+            <a:pPr>
+              <a:defRPr sz="1100" b="1">
+                <a:solidFill>
+                  <a:srgbClr val="F43F5E"/>
+                </a:solidFill>
+                <a:latin typeface="Segoe UI"/>
+              </a:defRPr>
+            </a:pPr>
+            <a:r>
+              <a:t>Format Numérique Dense :</a:t>
+            </a:r>
+          </a:p>
+          <a:p>
+            <a:pPr>
+              <a:defRPr sz="1000">
+                <a:solidFill>
+                  <a:srgbClr val="F8FAFC"/>
+                </a:solidFill>
+                <a:latin typeface="Segoe UI"/>
+              </a:defRPr>
+            </a:pPr>
+            <a:r>
+              <a:t>Chaque produit est représenté par un vecteur unitaire normé L2 prêt pour le calcul de similarité cosinus.</a:t>
+            </a:r>
+          </a:p>
+          <a:p/>
         </p:txBody>
       </p:sp>
     </p:spTree>
@@ -4254,7 +6048,7 @@
             <a:avLst/>
           </a:prstGeom>
           <a:solidFill>
-            <a:srgbClr val="0F172A"/>
+            <a:srgbClr val="0B1120"/>
           </a:solidFill>
           <a:ln>
             <a:noFill/>
@@ -4290,8 +6084,8 @@
         </p:nvSpPr>
         <p:spPr>
           <a:xfrm>
-            <a:off x="731520" y="457200"/>
-            <a:ext cx="9144000" cy="365760"/>
+            <a:off x="731520" y="365760"/>
+            <a:ext cx="7315200" cy="320040"/>
           </a:xfrm>
           <a:prstGeom prst="rect">
             <a:avLst/>
@@ -4299,7 +6093,7 @@
           <a:noFill/>
         </p:spPr>
         <p:txBody>
-          <a:bodyPr wrap="none">
+          <a:bodyPr wrap="square" lIns="0" tIns="0" rIns="0" bIns="0">
             <a:spAutoFit/>
           </a:bodyPr>
           <a:lstStyle/>
@@ -4307,12 +6101,13 @@
             <a:pPr>
               <a:defRPr sz="1100" b="1">
                 <a:solidFill>
-                  <a:srgbClr val="38BDF8"/>
-                </a:solidFill>
-              </a:defRPr>
-            </a:pPr>
-            <a:r>
-              <a:t>ÉTAPE 03 | RECHERCHE PAR SIMILARITÉ</a:t>
+                  <a:srgbClr val="F43F5E"/>
+                </a:solidFill>
+                <a:latin typeface="Segoe UI"/>
+              </a:defRPr>
+            </a:pPr>
+            <a:r>
+              <a:t>ÉTAPE 03 | CLUSTERING DBSCAN</a:t>
             </a:r>
           </a:p>
         </p:txBody>
@@ -4325,8 +6120,8 @@
         </p:nvSpPr>
         <p:spPr>
           <a:xfrm>
-            <a:off x="731520" y="822960"/>
-            <a:ext cx="9144000" cy="731520"/>
+            <a:off x="731520" y="685800"/>
+            <a:ext cx="9601200" cy="502920"/>
           </a:xfrm>
           <a:prstGeom prst="rect">
             <a:avLst/>
@@ -4334,20 +6129,21 @@
           <a:noFill/>
         </p:spPr>
         <p:txBody>
-          <a:bodyPr wrap="none">
+          <a:bodyPr wrap="square" lIns="0" tIns="0" rIns="0" bIns="0">
             <a:spAutoFit/>
           </a:bodyPr>
           <a:lstStyle/>
           <a:p>
             <a:pPr>
-              <a:defRPr sz="2400" b="1">
+              <a:defRPr sz="2200" b="1">
                 <a:solidFill>
                   <a:srgbClr val="F8FAFC"/>
                 </a:solidFill>
-              </a:defRPr>
-            </a:pPr>
-            <a:r>
-              <a:t>Calcul de la Proximité Cosinus (Cosine Similarity)</a:t>
+                <a:latin typeface="Segoe UI"/>
+              </a:defRPr>
+            </a:pPr>
+            <a:r>
+              <a:t>Partie 1 : Groupement Non Supervisé sur Matrice TF-IDF</a:t>
             </a:r>
           </a:p>
         </p:txBody>
@@ -4360,7 +6156,7 @@
         </p:nvSpPr>
         <p:spPr>
           <a:xfrm>
-            <a:off x="10515600" y="640080"/>
+            <a:off x="10362895" y="411480"/>
             <a:ext cx="1097280" cy="365760"/>
           </a:xfrm>
           <a:prstGeom prst="rect">
@@ -4369,7 +6165,7 @@
           <a:noFill/>
         </p:spPr>
         <p:txBody>
-          <a:bodyPr wrap="none">
+          <a:bodyPr wrap="square" lIns="0" tIns="0" rIns="0" bIns="0">
             <a:spAutoFit/>
           </a:bodyPr>
           <a:lstStyle/>
@@ -4379,24 +6175,61 @@
                 <a:solidFill>
                   <a:srgbClr val="94A3B8"/>
                 </a:solidFill>
-              </a:defRPr>
-            </a:pPr>
-            <a:r>
-              <a:t>4 / 5</a:t>
-            </a:r>
-          </a:p>
-        </p:txBody>
-      </p:sp>
-      <p:sp>
-        <p:nvSpPr>
-          <p:cNvPr id="6" name="Rounded Rectangle 5"/>
+                <a:latin typeface="Segoe UI"/>
+              </a:defRPr>
+            </a:pPr>
+            <a:r>
+              <a:t>4 / 10</a:t>
+            </a:r>
+          </a:p>
+        </p:txBody>
+      </p:sp>
+      <p:sp>
+        <p:nvSpPr>
+          <p:cNvPr id="6" name="TextBox 5"/>
+          <p:cNvSpPr txBox="1"/>
+          <p:nvPr/>
+        </p:nvSpPr>
+        <p:spPr>
+          <a:xfrm>
+            <a:off x="731520" y="6400800"/>
+            <a:ext cx="10728655" cy="274320"/>
+          </a:xfrm>
+          <a:prstGeom prst="rect">
+            <a:avLst/>
+          </a:prstGeom>
+          <a:noFill/>
+        </p:spPr>
+        <p:txBody>
+          <a:bodyPr wrap="square" lIns="0" tIns="0" rIns="0" bIns="0">
+            <a:spAutoFit/>
+          </a:bodyPr>
+          <a:lstStyle/>
+          <a:p>
+            <a:pPr>
+              <a:defRPr sz="1000">
+                <a:solidFill>
+                  <a:srgbClr val="64748B"/>
+                </a:solidFill>
+                <a:latin typeface="Segoe UI"/>
+              </a:defRPr>
+            </a:pPr>
+            <a:r>
+              <a:t>Christopher GILLERON  |  The North Face E-Commerce (ML Non Supervisé &amp; NLP)  |  Certification CDSD Bloc 3</a:t>
+            </a:r>
+          </a:p>
+        </p:txBody>
+      </p:sp>
+      <p:sp>
+        <p:nvSpPr>
+          <p:cNvPr id="7" name="Rounded Rectangle 6"/>
           <p:cNvSpPr/>
           <p:nvPr/>
         </p:nvSpPr>
         <p:spPr>
           <a:xfrm>
-            <a:off x="731520" y="1645920"/>
-            <a:ext cx="5303520" cy="2057400"/>
+            <a:off x="731520" y="1371600"/>
+            <a:ext cx="5212080" cy="4754880"/>
           </a:xfrm>
           <a:prstGeom prst="roundRect">
             <a:avLst/>
@@ -4404,7 +6237,7 @@
           <a:solidFill>
             <a:srgbClr val="1E293B"/>
           </a:solidFill>
-          <a:ln w="12700">
+          <a:ln w="19050">
             <a:solidFill>
               <a:srgbClr val="334155"/>
             </a:solidFill>
@@ -4434,14 +6267,50 @@
       </p:sp>
       <p:sp>
         <p:nvSpPr>
-          <p:cNvPr id="7" name="TextBox 6"/>
+          <p:cNvPr id="8" name="TextBox 7"/>
           <p:cNvSpPr txBox="1"/>
           <p:nvPr/>
         </p:nvSpPr>
         <p:spPr>
           <a:xfrm>
-            <a:off x="914400" y="1719072"/>
-            <a:ext cx="4937760" cy="1911096"/>
+            <a:off x="914400" y="1536192"/>
+            <a:ext cx="4846320" cy="365760"/>
+          </a:xfrm>
+          <a:prstGeom prst="rect">
+            <a:avLst/>
+          </a:prstGeom>
+          <a:noFill/>
+        </p:spPr>
+        <p:txBody>
+          <a:bodyPr wrap="square" lIns="0" tIns="0" rIns="0" bIns="0">
+            <a:spAutoFit/>
+          </a:bodyPr>
+          <a:lstStyle/>
+          <a:p>
+            <a:pPr>
+              <a:defRPr sz="1200" b="1">
+                <a:solidFill>
+                  <a:srgbClr val="F43F5E"/>
+                </a:solidFill>
+                <a:latin typeface="Segoe UI"/>
+              </a:defRPr>
+            </a:pPr>
+            <a:r>
+              <a:t>PARAMÉTRAGE &amp; RÉSULTATS DBSCAN (SCIKIT-LEARN)</a:t>
+            </a:r>
+          </a:p>
+        </p:txBody>
+      </p:sp>
+      <p:sp>
+        <p:nvSpPr>
+          <p:cNvPr id="9" name="TextBox 8"/>
+          <p:cNvSpPr txBox="1"/>
+          <p:nvPr/>
+        </p:nvSpPr>
+        <p:spPr>
+          <a:xfrm>
+            <a:off x="914400" y="1920240"/>
+            <a:ext cx="4846320" cy="3931920"/>
           </a:xfrm>
           <a:prstGeom prst="rect">
             <a:avLst/>
@@ -4455,43 +6324,124 @@
           <a:lstStyle/>
           <a:p>
             <a:pPr>
-              <a:defRPr sz="1300" b="1">
-                <a:solidFill>
-                  <a:srgbClr val="38BDF8"/>
-                </a:solidFill>
-              </a:defRPr>
-            </a:pPr>
-            <a:r>
-              <a:t>MÉTRIQUE COSINUS</a:t>
-            </a:r>
-          </a:p>
-          <a:p>
-            <a:pPr>
-              <a:spcBef>
-                <a:spcPts val="400"/>
-              </a:spcBef>
-              <a:defRPr sz="1100">
+              <a:defRPr sz="1100" b="1">
+                <a:solidFill>
+                  <a:srgbClr val="F43F5E"/>
+                </a:solidFill>
+                <a:latin typeface="Segoe UI"/>
+              </a:defRPr>
+            </a:pPr>
+            <a:r>
+              <a:t>Choix de la Métrique Cosinus :</a:t>
+            </a:r>
+          </a:p>
+          <a:p>
+            <a:pPr>
+              <a:defRPr sz="1000">
                 <a:solidFill>
                   <a:srgbClr val="F8FAFC"/>
                 </a:solidFill>
-              </a:defRPr>
-            </a:pPr>
-            <a:r>
-              <a:t>Calcul de l'angle cosinus entre le vecteur du produit actif et l'ensemble du catalogue pour évaluer l'affinité sémantique.</a:t>
-            </a:r>
-          </a:p>
-        </p:txBody>
-      </p:sp>
-      <p:sp>
-        <p:nvSpPr>
-          <p:cNvPr id="8" name="Rounded Rectangle 7"/>
+                <a:latin typeface="Segoe UI"/>
+              </a:defRPr>
+            </a:pPr>
+            <a:r>
+              <a:t>En haute dimension textuelle (1 033 mots), la distance euclidienne souffre du fléau de la dimension. La distance cosinus mesure l'orientation sémantique indépendamment de la longueur du texte.</a:t>
+            </a:r>
+          </a:p>
+          <a:p>
+            <a:pPr>
+              <a:defRPr sz="1100" b="1">
+                <a:solidFill>
+                  <a:srgbClr val="F43F5E"/>
+                </a:solidFill>
+                <a:latin typeface="Segoe UI"/>
+              </a:defRPr>
+            </a:pPr>
+            <a:r>
+              <a:t>Calibration des Hyperparamètres :</a:t>
+            </a:r>
+          </a:p>
+          <a:p>
+            <a:pPr>
+              <a:defRPr sz="1000">
+                <a:solidFill>
+                  <a:srgbClr val="F8FAFC"/>
+                </a:solidFill>
+                <a:latin typeface="Segoe UI"/>
+              </a:defRPr>
+            </a:pPr>
+            <a:r>
+              <a:t>• eps = 0.35 (rayon maximal d'affinité sémantique).</a:t>
+            </a:r>
+            <a:br/>
+            <a:r>
+              <a:t>• min_samples = 5 (seuil de densité minimale pour former un groupe).</a:t>
+            </a:r>
+          </a:p>
+          <a:p>
+            <a:pPr>
+              <a:defRPr sz="1100" b="1">
+                <a:solidFill>
+                  <a:srgbClr val="F43F5E"/>
+                </a:solidFill>
+                <a:latin typeface="Segoe UI"/>
+              </a:defRPr>
+            </a:pPr>
+            <a:r>
+              <a:t>Clusters Découverts :</a:t>
+            </a:r>
+          </a:p>
+          <a:p>
+            <a:pPr>
+              <a:defRPr sz="1000">
+                <a:solidFill>
+                  <a:srgbClr val="F8FAFC"/>
+                </a:solidFill>
+                <a:latin typeface="Segoe UI"/>
+              </a:defRPr>
+            </a:pPr>
+            <a:r>
+              <a:t>10 clusters thématiques cohérents identifiés (conforme à l'attente 10 à 20 clusters du cahier des charges).</a:t>
+            </a:r>
+          </a:p>
+          <a:p>
+            <a:pPr>
+              <a:defRPr sz="1100" b="1">
+                <a:solidFill>
+                  <a:srgbClr val="F43F5E"/>
+                </a:solidFill>
+                <a:latin typeface="Segoe UI"/>
+              </a:defRPr>
+            </a:pPr>
+            <a:r>
+              <a:t>Gestion des Outliers (Bruit) :</a:t>
+            </a:r>
+          </a:p>
+          <a:p>
+            <a:pPr>
+              <a:defRPr sz="1000">
+                <a:solidFill>
+                  <a:srgbClr val="F8FAFC"/>
+                </a:solidFill>
+                <a:latin typeface="Segoe UI"/>
+              </a:defRPr>
+            </a:pPr>
+            <a:r>
+              <a:t>Les articles trop spécifiques ou hybrides sont classés en bruit (cluster -1) sans corrompre la pureté des clusters denses.</a:t>
+            </a:r>
+          </a:p>
+        </p:txBody>
+      </p:sp>
+      <p:sp>
+        <p:nvSpPr>
+          <p:cNvPr id="10" name="Rounded Rectangle 9"/>
           <p:cNvSpPr/>
           <p:nvPr/>
         </p:nvSpPr>
         <p:spPr>
           <a:xfrm>
-            <a:off x="731520" y="3840480"/>
-            <a:ext cx="5303520" cy="2057400"/>
+            <a:off x="6217920" y="1371600"/>
+            <a:ext cx="5242255" cy="4754880"/>
           </a:xfrm>
           <a:prstGeom prst="roundRect">
             <a:avLst/>
@@ -4499,7 +6449,7 @@
           <a:solidFill>
             <a:srgbClr val="1E293B"/>
           </a:solidFill>
-          <a:ln w="12700">
+          <a:ln w="19050">
             <a:solidFill>
               <a:srgbClr val="334155"/>
             </a:solidFill>
@@ -4529,14 +6479,14 @@
       </p:sp>
       <p:sp>
         <p:nvSpPr>
-          <p:cNvPr id="9" name="TextBox 8"/>
+          <p:cNvPr id="11" name="TextBox 10"/>
           <p:cNvSpPr txBox="1"/>
           <p:nvPr/>
         </p:nvSpPr>
         <p:spPr>
           <a:xfrm>
-            <a:off x="914400" y="3913632"/>
-            <a:ext cx="4937760" cy="1911096"/>
+            <a:off x="6400800" y="1536192"/>
+            <a:ext cx="4876495" cy="365760"/>
           </a:xfrm>
           <a:prstGeom prst="rect">
             <a:avLst/>
@@ -4544,143 +6494,644 @@
           <a:noFill/>
         </p:spPr>
         <p:txBody>
-          <a:bodyPr wrap="square">
+          <a:bodyPr wrap="square" lIns="0" tIns="0" rIns="0" bIns="0">
             <a:spAutoFit/>
           </a:bodyPr>
           <a:lstStyle/>
           <a:p>
             <a:pPr>
-              <a:defRPr sz="1300" b="1">
-                <a:solidFill>
-                  <a:srgbClr val="A855F7"/>
-                </a:solidFill>
-              </a:defRPr>
-            </a:pPr>
-            <a:r>
-              <a:t>TOP-N RECOMMANDATIONS</a:t>
-            </a:r>
-          </a:p>
-          <a:p>
-            <a:pPr>
-              <a:spcBef>
-                <a:spcPts val="400"/>
-              </a:spcBef>
-              <a:defRPr sz="1100">
-                <a:solidFill>
-                  <a:srgbClr val="F8FAFC"/>
-                </a:solidFill>
-              </a:defRPr>
-            </a:pPr>
-            <a:r>
-              <a:t>Extraction instantanée des 5 produits les plus proches avec filtrage par catégorie (vestes imperméables, sacs techniques, polaires).</a:t>
-            </a:r>
-          </a:p>
-        </p:txBody>
-      </p:sp>
-      <p:sp>
-        <p:nvSpPr>
-          <p:cNvPr id="10" name="Rounded Rectangle 9"/>
-          <p:cNvSpPr/>
-          <p:nvPr/>
-        </p:nvSpPr>
-        <p:spPr>
-          <a:xfrm>
-            <a:off x="6355080" y="1600200"/>
-            <a:ext cx="5120640" cy="4389120"/>
-          </a:xfrm>
-          <a:prstGeom prst="roundRect">
-            <a:avLst/>
-          </a:prstGeom>
-          <a:solidFill>
-            <a:srgbClr val="1E293B"/>
-          </a:solidFill>
-          <a:ln>
-            <a:solidFill>
-              <a:srgbClr val="334155"/>
-            </a:solidFill>
-          </a:ln>
-        </p:spPr>
-        <p:style>
-          <a:lnRef idx="1">
-            <a:schemeClr val="accent1"/>
-          </a:lnRef>
-          <a:fillRef idx="3">
-            <a:schemeClr val="accent1"/>
-          </a:fillRef>
-          <a:effectRef idx="2">
-            <a:schemeClr val="accent1"/>
-          </a:effectRef>
-          <a:fontRef idx="minor">
-            <a:schemeClr val="lt1"/>
-          </a:fontRef>
-        </p:style>
-        <p:txBody>
-          <a:bodyPr rtlCol="0" anchor="ctr"/>
-          <a:lstStyle/>
-          <a:p>
-            <a:pPr algn="ctr"/>
-          </a:p>
-        </p:txBody>
-      </p:sp>
-      <p:pic>
-        <p:nvPicPr>
-          <p:cNvPr id="11" name="Picture 10" descr="northface_c11_6.png"/>
-          <p:cNvPicPr>
-            <a:picLocks noChangeAspect="1"/>
-          </p:cNvPicPr>
-          <p:nvPr/>
-        </p:nvPicPr>
-        <p:blipFill>
-          <a:blip r:embed="rId2"/>
-          <a:stretch>
-            <a:fillRect/>
-          </a:stretch>
-        </p:blipFill>
-        <p:spPr>
-          <a:xfrm>
-            <a:off x="6400800" y="1645920"/>
-            <a:ext cx="5029200" cy="2833499"/>
-          </a:xfrm>
-          <a:prstGeom prst="rect">
-            <a:avLst/>
-          </a:prstGeom>
-        </p:spPr>
-      </p:pic>
-      <p:sp>
-        <p:nvSpPr>
-          <p:cNvPr id="12" name="TextBox 11"/>
-          <p:cNvSpPr txBox="1"/>
-          <p:nvPr/>
-        </p:nvSpPr>
-        <p:spPr>
-          <a:xfrm>
-            <a:off x="731520" y="6309360"/>
-            <a:ext cx="10698480" cy="365760"/>
-          </a:xfrm>
-          <a:prstGeom prst="rect">
-            <a:avLst/>
-          </a:prstGeom>
-          <a:noFill/>
-        </p:spPr>
-        <p:txBody>
-          <a:bodyPr wrap="none">
-            <a:spAutoFit/>
-          </a:bodyPr>
-          <a:lstStyle/>
-          <a:p>
-            <a:pPr>
-              <a:defRPr sz="1000">
-                <a:solidFill>
-                  <a:srgbClr val="94A3B8"/>
-                </a:solidFill>
-              </a:defRPr>
-            </a:pPr>
-            <a:r>
-              <a:t>Christopher GILLERON  |  The North Face Recommender System  |  Certification CDSD</a:t>
-            </a:r>
-          </a:p>
-        </p:txBody>
-      </p:sp>
+              <a:defRPr sz="1200" b="1">
+                <a:solidFill>
+                  <a:srgbClr val="F43F5E"/>
+                </a:solidFill>
+                <a:latin typeface="Segoe UI"/>
+              </a:defRPr>
+            </a:pPr>
+            <a:r>
+              <a:t>DISTRIBUTION DES PRINCIPAUX CLUSTERS DENSE</a:t>
+            </a:r>
+          </a:p>
+        </p:txBody>
+      </p:sp>
+      <p:graphicFrame>
+        <p:nvGraphicFramePr>
+          <p:cNvPr id="12" name="Table 11"/>
+          <p:cNvGraphicFramePr>
+            <a:graphicFrameLocks noGrp="1"/>
+          </p:cNvGraphicFramePr>
+          <p:nvPr/>
+        </p:nvGraphicFramePr>
+        <p:xfrm>
+          <a:off x="6400800" y="1920240"/>
+          <a:ext cx="4846320" cy="3931920"/>
+        </p:xfrm>
+        <a:graphic>
+          <a:graphicData uri="http://schemas.openxmlformats.org/drawingml/2006/table">
+            <a:tbl>
+              <a:tblPr firstRow="1" bandRow="1">
+                <a:tableStyleId>{5C22544A-7EE6-4342-B048-85BDC9FD1C3A}</a:tableStyleId>
+              </a:tblPr>
+              <a:tblGrid>
+                <a:gridCol w="1615440"/>
+                <a:gridCol w="1615440"/>
+                <a:gridCol w="1615440"/>
+              </a:tblGrid>
+              <a:tr h="491490">
+                <a:tc>
+                  <a:txBody>
+                    <a:bodyPr/>
+                    <a:lstStyle/>
+                    <a:p>
+                      <a:pPr>
+                        <a:defRPr sz="1050" b="1">
+                          <a:solidFill>
+                            <a:srgbClr val="F43F5E"/>
+                          </a:solidFill>
+                          <a:latin typeface="Segoe UI"/>
+                        </a:defRPr>
+                      </a:pPr>
+                      <a:r>
+                        <a:t>Cluster ID</a:t>
+                      </a:r>
+                    </a:p>
+                  </a:txBody>
+                  <a:tcPr>
+                    <a:solidFill>
+                      <a:srgbClr val="0F172A"/>
+                    </a:solidFill>
+                  </a:tcPr>
+                </a:tc>
+                <a:tc>
+                  <a:txBody>
+                    <a:bodyPr/>
+                    <a:lstStyle/>
+                    <a:p>
+                      <a:pPr>
+                        <a:defRPr sz="1050" b="1">
+                          <a:solidFill>
+                            <a:srgbClr val="F43F5E"/>
+                          </a:solidFill>
+                          <a:latin typeface="Segoe UI"/>
+                        </a:defRPr>
+                      </a:pPr>
+                      <a:r>
+                        <a:t>Volume Produits</a:t>
+                      </a:r>
+                    </a:p>
+                  </a:txBody>
+                  <a:tcPr>
+                    <a:solidFill>
+                      <a:srgbClr val="0F172A"/>
+                    </a:solidFill>
+                  </a:tcPr>
+                </a:tc>
+                <a:tc>
+                  <a:txBody>
+                    <a:bodyPr/>
+                    <a:lstStyle/>
+                    <a:p>
+                      <a:pPr>
+                        <a:defRPr sz="1050" b="1">
+                          <a:solidFill>
+                            <a:srgbClr val="F43F5E"/>
+                          </a:solidFill>
+                          <a:latin typeface="Segoe UI"/>
+                        </a:defRPr>
+                      </a:pPr>
+                      <a:r>
+                        <a:t>Thématique Déduite</a:t>
+                      </a:r>
+                    </a:p>
+                  </a:txBody>
+                  <a:tcPr>
+                    <a:solidFill>
+                      <a:srgbClr val="0F172A"/>
+                    </a:solidFill>
+                  </a:tcPr>
+                </a:tc>
+              </a:tr>
+              <a:tr h="491490">
+                <a:tc>
+                  <a:txBody>
+                    <a:bodyPr/>
+                    <a:lstStyle/>
+                    <a:p>
+                      <a:pPr>
+                        <a:defRPr sz="950" b="1">
+                          <a:solidFill>
+                            <a:srgbClr val="F8FAFC"/>
+                          </a:solidFill>
+                          <a:latin typeface="Segoe UI"/>
+                        </a:defRPr>
+                      </a:pPr>
+                      <a:r>
+                        <a:t>Cluster 2</a:t>
+                      </a:r>
+                    </a:p>
+                  </a:txBody>
+                  <a:tcPr>
+                    <a:solidFill>
+                      <a:srgbClr val="18202F"/>
+                    </a:solidFill>
+                  </a:tcPr>
+                </a:tc>
+                <a:tc>
+                  <a:txBody>
+                    <a:bodyPr/>
+                    <a:lstStyle/>
+                    <a:p>
+                      <a:pPr>
+                        <a:defRPr sz="950" b="0">
+                          <a:solidFill>
+                            <a:srgbClr val="F8FAFC"/>
+                          </a:solidFill>
+                          <a:latin typeface="Segoe UI"/>
+                        </a:defRPr>
+                      </a:pPr>
+                      <a:r>
+                        <a:t>53 produits</a:t>
+                      </a:r>
+                    </a:p>
+                  </a:txBody>
+                  <a:tcPr>
+                    <a:solidFill>
+                      <a:srgbClr val="18202F"/>
+                    </a:solidFill>
+                  </a:tcPr>
+                </a:tc>
+                <a:tc>
+                  <a:txBody>
+                    <a:bodyPr/>
+                    <a:lstStyle/>
+                    <a:p>
+                      <a:pPr>
+                        <a:defRPr sz="950" b="0">
+                          <a:solidFill>
+                            <a:srgbClr val="F8FAFC"/>
+                          </a:solidFill>
+                          <a:latin typeface="Segoe UI"/>
+                        </a:defRPr>
+                      </a:pPr>
+                      <a:r>
+                        <a:t>Sous-vêtements &amp; Boxers techniques</a:t>
+                      </a:r>
+                    </a:p>
+                  </a:txBody>
+                  <a:tcPr>
+                    <a:solidFill>
+                      <a:srgbClr val="18202F"/>
+                    </a:solidFill>
+                  </a:tcPr>
+                </a:tc>
+              </a:tr>
+              <a:tr h="491490">
+                <a:tc>
+                  <a:txBody>
+                    <a:bodyPr/>
+                    <a:lstStyle/>
+                    <a:p>
+                      <a:pPr>
+                        <a:defRPr sz="950" b="1">
+                          <a:solidFill>
+                            <a:srgbClr val="F8FAFC"/>
+                          </a:solidFill>
+                          <a:latin typeface="Segoe UI"/>
+                        </a:defRPr>
+                      </a:pPr>
+                      <a:r>
+                        <a:t>Cluster 5</a:t>
+                      </a:r>
+                    </a:p>
+                  </a:txBody>
+                  <a:tcPr>
+                    <a:solidFill>
+                      <a:srgbClr val="1E293B"/>
+                    </a:solidFill>
+                  </a:tcPr>
+                </a:tc>
+                <a:tc>
+                  <a:txBody>
+                    <a:bodyPr/>
+                    <a:lstStyle/>
+                    <a:p>
+                      <a:pPr>
+                        <a:defRPr sz="950" b="0">
+                          <a:solidFill>
+                            <a:srgbClr val="F8FAFC"/>
+                          </a:solidFill>
+                          <a:latin typeface="Segoe UI"/>
+                        </a:defRPr>
+                      </a:pPr>
+                      <a:r>
+                        <a:t>13 produits</a:t>
+                      </a:r>
+                    </a:p>
+                  </a:txBody>
+                  <a:tcPr>
+                    <a:solidFill>
+                      <a:srgbClr val="1E293B"/>
+                    </a:solidFill>
+                  </a:tcPr>
+                </a:tc>
+                <a:tc>
+                  <a:txBody>
+                    <a:bodyPr/>
+                    <a:lstStyle/>
+                    <a:p>
+                      <a:pPr>
+                        <a:defRPr sz="950" b="0">
+                          <a:solidFill>
+                            <a:srgbClr val="F8FAFC"/>
+                          </a:solidFill>
+                          <a:latin typeface="Segoe UI"/>
+                        </a:defRPr>
+                      </a:pPr>
+                      <a:r>
+                        <a:t>Sacs à dos &amp; Équipement trekking</a:t>
+                      </a:r>
+                    </a:p>
+                  </a:txBody>
+                  <a:tcPr>
+                    <a:solidFill>
+                      <a:srgbClr val="1E293B"/>
+                    </a:solidFill>
+                  </a:tcPr>
+                </a:tc>
+              </a:tr>
+              <a:tr h="491490">
+                <a:tc>
+                  <a:txBody>
+                    <a:bodyPr/>
+                    <a:lstStyle/>
+                    <a:p>
+                      <a:pPr>
+                        <a:defRPr sz="950" b="1">
+                          <a:solidFill>
+                            <a:srgbClr val="F8FAFC"/>
+                          </a:solidFill>
+                          <a:latin typeface="Segoe UI"/>
+                        </a:defRPr>
+                      </a:pPr>
+                      <a:r>
+                        <a:t>Cluster 3</a:t>
+                      </a:r>
+                    </a:p>
+                  </a:txBody>
+                  <a:tcPr>
+                    <a:solidFill>
+                      <a:srgbClr val="18202F"/>
+                    </a:solidFill>
+                  </a:tcPr>
+                </a:tc>
+                <a:tc>
+                  <a:txBody>
+                    <a:bodyPr/>
+                    <a:lstStyle/>
+                    <a:p>
+                      <a:pPr>
+                        <a:defRPr sz="950" b="0">
+                          <a:solidFill>
+                            <a:srgbClr val="F8FAFC"/>
+                          </a:solidFill>
+                          <a:latin typeface="Segoe UI"/>
+                        </a:defRPr>
+                      </a:pPr>
+                      <a:r>
+                        <a:t>8 produits</a:t>
+                      </a:r>
+                    </a:p>
+                  </a:txBody>
+                  <a:tcPr>
+                    <a:solidFill>
+                      <a:srgbClr val="18202F"/>
+                    </a:solidFill>
+                  </a:tcPr>
+                </a:tc>
+                <a:tc>
+                  <a:txBody>
+                    <a:bodyPr/>
+                    <a:lstStyle/>
+                    <a:p>
+                      <a:pPr>
+                        <a:defRPr sz="950" b="0">
+                          <a:solidFill>
+                            <a:srgbClr val="F8FAFC"/>
+                          </a:solidFill>
+                          <a:latin typeface="Segoe UI"/>
+                        </a:defRPr>
+                      </a:pPr>
+                      <a:r>
+                        <a:t>T-shirts &amp; Polos respirants</a:t>
+                      </a:r>
+                    </a:p>
+                  </a:txBody>
+                  <a:tcPr>
+                    <a:solidFill>
+                      <a:srgbClr val="18202F"/>
+                    </a:solidFill>
+                  </a:tcPr>
+                </a:tc>
+              </a:tr>
+              <a:tr h="491490">
+                <a:tc>
+                  <a:txBody>
+                    <a:bodyPr/>
+                    <a:lstStyle/>
+                    <a:p>
+                      <a:pPr>
+                        <a:defRPr sz="950" b="1">
+                          <a:solidFill>
+                            <a:srgbClr val="F8FAFC"/>
+                          </a:solidFill>
+                          <a:latin typeface="Segoe UI"/>
+                        </a:defRPr>
+                      </a:pPr>
+                      <a:r>
+                        <a:t>Cluster 0</a:t>
+                      </a:r>
+                    </a:p>
+                  </a:txBody>
+                  <a:tcPr>
+                    <a:solidFill>
+                      <a:srgbClr val="1E293B"/>
+                    </a:solidFill>
+                  </a:tcPr>
+                </a:tc>
+                <a:tc>
+                  <a:txBody>
+                    <a:bodyPr/>
+                    <a:lstStyle/>
+                    <a:p>
+                      <a:pPr>
+                        <a:defRPr sz="950" b="0">
+                          <a:solidFill>
+                            <a:srgbClr val="F8FAFC"/>
+                          </a:solidFill>
+                          <a:latin typeface="Segoe UI"/>
+                        </a:defRPr>
+                      </a:pPr>
+                      <a:r>
+                        <a:t>7 produits</a:t>
+                      </a:r>
+                    </a:p>
+                  </a:txBody>
+                  <a:tcPr>
+                    <a:solidFill>
+                      <a:srgbClr val="1E293B"/>
+                    </a:solidFill>
+                  </a:tcPr>
+                </a:tc>
+                <a:tc>
+                  <a:txBody>
+                    <a:bodyPr/>
+                    <a:lstStyle/>
+                    <a:p>
+                      <a:pPr>
+                        <a:defRPr sz="950" b="0">
+                          <a:solidFill>
+                            <a:srgbClr val="F8FAFC"/>
+                          </a:solidFill>
+                          <a:latin typeface="Segoe UI"/>
+                        </a:defRPr>
+                      </a:pPr>
+                      <a:r>
+                        <a:t>Vestes coupe-vent imperméables</a:t>
+                      </a:r>
+                    </a:p>
+                  </a:txBody>
+                  <a:tcPr>
+                    <a:solidFill>
+                      <a:srgbClr val="1E293B"/>
+                    </a:solidFill>
+                  </a:tcPr>
+                </a:tc>
+              </a:tr>
+              <a:tr h="491490">
+                <a:tc>
+                  <a:txBody>
+                    <a:bodyPr/>
+                    <a:lstStyle/>
+                    <a:p>
+                      <a:pPr>
+                        <a:defRPr sz="950" b="1">
+                          <a:solidFill>
+                            <a:srgbClr val="F8FAFC"/>
+                          </a:solidFill>
+                          <a:latin typeface="Segoe UI"/>
+                        </a:defRPr>
+                      </a:pPr>
+                      <a:r>
+                        <a:t>Cluster 1</a:t>
+                      </a:r>
+                    </a:p>
+                  </a:txBody>
+                  <a:tcPr>
+                    <a:solidFill>
+                      <a:srgbClr val="18202F"/>
+                    </a:solidFill>
+                  </a:tcPr>
+                </a:tc>
+                <a:tc>
+                  <a:txBody>
+                    <a:bodyPr/>
+                    <a:lstStyle/>
+                    <a:p>
+                      <a:pPr>
+                        <a:defRPr sz="950" b="0">
+                          <a:solidFill>
+                            <a:srgbClr val="F8FAFC"/>
+                          </a:solidFill>
+                          <a:latin typeface="Segoe UI"/>
+                        </a:defRPr>
+                      </a:pPr>
+                      <a:r>
+                        <a:t>7 produits</a:t>
+                      </a:r>
+                    </a:p>
+                  </a:txBody>
+                  <a:tcPr>
+                    <a:solidFill>
+                      <a:srgbClr val="18202F"/>
+                    </a:solidFill>
+                  </a:tcPr>
+                </a:tc>
+                <a:tc>
+                  <a:txBody>
+                    <a:bodyPr/>
+                    <a:lstStyle/>
+                    <a:p>
+                      <a:pPr>
+                        <a:defRPr sz="950" b="0">
+                          <a:solidFill>
+                            <a:srgbClr val="F8FAFC"/>
+                          </a:solidFill>
+                          <a:latin typeface="Segoe UI"/>
+                        </a:defRPr>
+                      </a:pPr>
+                      <a:r>
+                        <a:t>Pantalons de randonnée stretch</a:t>
+                      </a:r>
+                    </a:p>
+                  </a:txBody>
+                  <a:tcPr>
+                    <a:solidFill>
+                      <a:srgbClr val="18202F"/>
+                    </a:solidFill>
+                  </a:tcPr>
+                </a:tc>
+              </a:tr>
+              <a:tr h="491490">
+                <a:tc>
+                  <a:txBody>
+                    <a:bodyPr/>
+                    <a:lstStyle/>
+                    <a:p>
+                      <a:pPr>
+                        <a:defRPr sz="950" b="1">
+                          <a:solidFill>
+                            <a:srgbClr val="F8FAFC"/>
+                          </a:solidFill>
+                          <a:latin typeface="Segoe UI"/>
+                        </a:defRPr>
+                      </a:pPr>
+                      <a:r>
+                        <a:t>Cluster 8</a:t>
+                      </a:r>
+                    </a:p>
+                  </a:txBody>
+                  <a:tcPr>
+                    <a:solidFill>
+                      <a:srgbClr val="1E293B"/>
+                    </a:solidFill>
+                  </a:tcPr>
+                </a:tc>
+                <a:tc>
+                  <a:txBody>
+                    <a:bodyPr/>
+                    <a:lstStyle/>
+                    <a:p>
+                      <a:pPr>
+                        <a:defRPr sz="950" b="0">
+                          <a:solidFill>
+                            <a:srgbClr val="F8FAFC"/>
+                          </a:solidFill>
+                          <a:latin typeface="Segoe UI"/>
+                        </a:defRPr>
+                      </a:pPr>
+                      <a:r>
+                        <a:t>7 produits</a:t>
+                      </a:r>
+                    </a:p>
+                  </a:txBody>
+                  <a:tcPr>
+                    <a:solidFill>
+                      <a:srgbClr val="1E293B"/>
+                    </a:solidFill>
+                  </a:tcPr>
+                </a:tc>
+                <a:tc>
+                  <a:txBody>
+                    <a:bodyPr/>
+                    <a:lstStyle/>
+                    <a:p>
+                      <a:pPr>
+                        <a:defRPr sz="950" b="0">
+                          <a:solidFill>
+                            <a:srgbClr val="F8FAFC"/>
+                          </a:solidFill>
+                          <a:latin typeface="Segoe UI"/>
+                        </a:defRPr>
+                      </a:pPr>
+                      <a:r>
+                        <a:t>Polaires &amp; Vestes isolantes</a:t>
+                      </a:r>
+                    </a:p>
+                  </a:txBody>
+                  <a:tcPr>
+                    <a:solidFill>
+                      <a:srgbClr val="1E293B"/>
+                    </a:solidFill>
+                  </a:tcPr>
+                </a:tc>
+              </a:tr>
+              <a:tr h="491490">
+                <a:tc>
+                  <a:txBody>
+                    <a:bodyPr/>
+                    <a:lstStyle/>
+                    <a:p>
+                      <a:pPr>
+                        <a:defRPr sz="950" b="1">
+                          <a:solidFill>
+                            <a:srgbClr val="F8FAFC"/>
+                          </a:solidFill>
+                          <a:latin typeface="Segoe UI"/>
+                        </a:defRPr>
+                      </a:pPr>
+                      <a:r>
+                        <a:t>Cluster 6</a:t>
+                      </a:r>
+                    </a:p>
+                  </a:txBody>
+                  <a:tcPr>
+                    <a:solidFill>
+                      <a:srgbClr val="18202F"/>
+                    </a:solidFill>
+                  </a:tcPr>
+                </a:tc>
+                <a:tc>
+                  <a:txBody>
+                    <a:bodyPr/>
+                    <a:lstStyle/>
+                    <a:p>
+                      <a:pPr>
+                        <a:defRPr sz="950" b="0">
+                          <a:solidFill>
+                            <a:srgbClr val="F8FAFC"/>
+                          </a:solidFill>
+                          <a:latin typeface="Segoe UI"/>
+                        </a:defRPr>
+                      </a:pPr>
+                      <a:r>
+                        <a:t>6 produits</a:t>
+                      </a:r>
+                    </a:p>
+                  </a:txBody>
+                  <a:tcPr>
+                    <a:solidFill>
+                      <a:srgbClr val="18202F"/>
+                    </a:solidFill>
+                  </a:tcPr>
+                </a:tc>
+                <a:tc>
+                  <a:txBody>
+                    <a:bodyPr/>
+                    <a:lstStyle/>
+                    <a:p>
+                      <a:pPr>
+                        <a:defRPr sz="950" b="0">
+                          <a:solidFill>
+                            <a:srgbClr val="F8FAFC"/>
+                          </a:solidFill>
+                          <a:latin typeface="Segoe UI"/>
+                        </a:defRPr>
+                      </a:pPr>
+                      <a:r>
+                        <a:t>Bonnets, gants &amp; accessoires</a:t>
+                      </a:r>
+                    </a:p>
+                  </a:txBody>
+                  <a:tcPr>
+                    <a:solidFill>
+                      <a:srgbClr val="18202F"/>
+                    </a:solidFill>
+                  </a:tcPr>
+                </a:tc>
+              </a:tr>
+            </a:tbl>
+          </a:graphicData>
+        </a:graphic>
+      </p:graphicFrame>
     </p:spTree>
   </p:cSld>
   <p:clrMapOvr>
@@ -4714,7 +7165,7 @@
             <a:avLst/>
           </a:prstGeom>
           <a:solidFill>
-            <a:srgbClr val="0F172A"/>
+            <a:srgbClr val="0B1120"/>
           </a:solidFill>
           <a:ln>
             <a:noFill/>
@@ -4750,8 +7201,8 @@
         </p:nvSpPr>
         <p:spPr>
           <a:xfrm>
-            <a:off x="731520" y="457200"/>
-            <a:ext cx="9144000" cy="365760"/>
+            <a:off x="731520" y="365760"/>
+            <a:ext cx="7315200" cy="320040"/>
           </a:xfrm>
           <a:prstGeom prst="rect">
             <a:avLst/>
@@ -4759,7 +7210,7 @@
           <a:noFill/>
         </p:spPr>
         <p:txBody>
-          <a:bodyPr wrap="none">
+          <a:bodyPr wrap="square" lIns="0" tIns="0" rIns="0" bIns="0">
             <a:spAutoFit/>
           </a:bodyPr>
           <a:lstStyle/>
@@ -4767,12 +7218,13 @@
             <a:pPr>
               <a:defRPr sz="1100" b="1">
                 <a:solidFill>
-                  <a:srgbClr val="38BDF8"/>
-                </a:solidFill>
-              </a:defRPr>
-            </a:pPr>
-            <a:r>
-              <a:t>ÉTAPE 04 | RECOMMANDATIONS &amp; PERSPECTIVES</a:t>
+                  <a:srgbClr val="F43F5E"/>
+                </a:solidFill>
+                <a:latin typeface="Segoe UI"/>
+              </a:defRPr>
+            </a:pPr>
+            <a:r>
+              <a:t>ÉTAPE 04 | VALIDATION DES CLUSTERS</a:t>
             </a:r>
           </a:p>
         </p:txBody>
@@ -4785,8 +7237,8 @@
         </p:nvSpPr>
         <p:spPr>
           <a:xfrm>
-            <a:off x="731520" y="822960"/>
-            <a:ext cx="9144000" cy="731520"/>
+            <a:off x="731520" y="685800"/>
+            <a:ext cx="9601200" cy="502920"/>
           </a:xfrm>
           <a:prstGeom prst="rect">
             <a:avLst/>
@@ -4794,20 +7246,21 @@
           <a:noFill/>
         </p:spPr>
         <p:txBody>
-          <a:bodyPr wrap="none">
+          <a:bodyPr wrap="square" lIns="0" tIns="0" rIns="0" bIns="0">
             <a:spAutoFit/>
           </a:bodyPr>
           <a:lstStyle/>
           <a:p>
             <a:pPr>
-              <a:defRPr sz="2400" b="1">
+              <a:defRPr sz="2200" b="1">
                 <a:solidFill>
                   <a:srgbClr val="F8FAFC"/>
                 </a:solidFill>
-              </a:defRPr>
-            </a:pPr>
-            <a:r>
-              <a:t>Intégration Web &amp; Optimisation du Panier</a:t>
+                <a:latin typeface="Segoe UI"/>
+              </a:defRPr>
+            </a:pPr>
+            <a:r>
+              <a:t>Analyse Lexicale &amp; Nuages de Mots (WordClouds) des Clusters</a:t>
             </a:r>
           </a:p>
         </p:txBody>
@@ -4820,7 +7273,7 @@
         </p:nvSpPr>
         <p:spPr>
           <a:xfrm>
-            <a:off x="10515600" y="640080"/>
+            <a:off x="10362895" y="411480"/>
             <a:ext cx="1097280" cy="365760"/>
           </a:xfrm>
           <a:prstGeom prst="rect">
@@ -4829,7 +7282,7 @@
           <a:noFill/>
         </p:spPr>
         <p:txBody>
-          <a:bodyPr wrap="none">
+          <a:bodyPr wrap="square" lIns="0" tIns="0" rIns="0" bIns="0">
             <a:spAutoFit/>
           </a:bodyPr>
           <a:lstStyle/>
@@ -4839,24 +7292,61 @@
                 <a:solidFill>
                   <a:srgbClr val="94A3B8"/>
                 </a:solidFill>
-              </a:defRPr>
-            </a:pPr>
-            <a:r>
-              <a:t>5 / 5</a:t>
-            </a:r>
-          </a:p>
-        </p:txBody>
-      </p:sp>
-      <p:sp>
-        <p:nvSpPr>
-          <p:cNvPr id="6" name="Rounded Rectangle 5"/>
+                <a:latin typeface="Segoe UI"/>
+              </a:defRPr>
+            </a:pPr>
+            <a:r>
+              <a:t>5 / 10</a:t>
+            </a:r>
+          </a:p>
+        </p:txBody>
+      </p:sp>
+      <p:sp>
+        <p:nvSpPr>
+          <p:cNvPr id="6" name="TextBox 5"/>
+          <p:cNvSpPr txBox="1"/>
+          <p:nvPr/>
+        </p:nvSpPr>
+        <p:spPr>
+          <a:xfrm>
+            <a:off x="731520" y="6400800"/>
+            <a:ext cx="10728655" cy="274320"/>
+          </a:xfrm>
+          <a:prstGeom prst="rect">
+            <a:avLst/>
+          </a:prstGeom>
+          <a:noFill/>
+        </p:spPr>
+        <p:txBody>
+          <a:bodyPr wrap="square" lIns="0" tIns="0" rIns="0" bIns="0">
+            <a:spAutoFit/>
+          </a:bodyPr>
+          <a:lstStyle/>
+          <a:p>
+            <a:pPr>
+              <a:defRPr sz="1000">
+                <a:solidFill>
+                  <a:srgbClr val="64748B"/>
+                </a:solidFill>
+                <a:latin typeface="Segoe UI"/>
+              </a:defRPr>
+            </a:pPr>
+            <a:r>
+              <a:t>Christopher GILLERON  |  The North Face E-Commerce (ML Non Supervisé &amp; NLP)  |  Certification CDSD Bloc 3</a:t>
+            </a:r>
+          </a:p>
+        </p:txBody>
+      </p:sp>
+      <p:sp>
+        <p:nvSpPr>
+          <p:cNvPr id="7" name="Rounded Rectangle 6"/>
           <p:cNvSpPr/>
           <p:nvPr/>
         </p:nvSpPr>
         <p:spPr>
           <a:xfrm>
-            <a:off x="731520" y="1645920"/>
-            <a:ext cx="10698480" cy="1325880"/>
+            <a:off x="731520" y="1371600"/>
+            <a:ext cx="5212080" cy="4754880"/>
           </a:xfrm>
           <a:prstGeom prst="roundRect">
             <a:avLst/>
@@ -4864,7 +7354,7 @@
           <a:solidFill>
             <a:srgbClr val="1E293B"/>
           </a:solidFill>
-          <a:ln w="12700">
+          <a:ln w="19050">
             <a:solidFill>
               <a:srgbClr val="334155"/>
             </a:solidFill>
@@ -4894,14 +7384,50 @@
       </p:sp>
       <p:sp>
         <p:nvSpPr>
-          <p:cNvPr id="7" name="TextBox 6"/>
+          <p:cNvPr id="8" name="TextBox 7"/>
           <p:cNvSpPr txBox="1"/>
           <p:nvPr/>
         </p:nvSpPr>
         <p:spPr>
           <a:xfrm>
-            <a:off x="914400" y="1719072"/>
-            <a:ext cx="10332720" cy="1179576"/>
+            <a:off x="914400" y="1536192"/>
+            <a:ext cx="4846320" cy="365760"/>
+          </a:xfrm>
+          <a:prstGeom prst="rect">
+            <a:avLst/>
+          </a:prstGeom>
+          <a:noFill/>
+        </p:spPr>
+        <p:txBody>
+          <a:bodyPr wrap="square" lIns="0" tIns="0" rIns="0" bIns="0">
+            <a:spAutoFit/>
+          </a:bodyPr>
+          <a:lstStyle/>
+          <a:p>
+            <a:pPr>
+              <a:defRPr sz="1200" b="1">
+                <a:solidFill>
+                  <a:srgbClr val="F43F5E"/>
+                </a:solidFill>
+                <a:latin typeface="Segoe UI"/>
+              </a:defRPr>
+            </a:pPr>
+            <a:r>
+              <a:t>VOCABULAIRE CLÉ PAR GROUPE DE PRODUITS</a:t>
+            </a:r>
+          </a:p>
+        </p:txBody>
+      </p:sp>
+      <p:sp>
+        <p:nvSpPr>
+          <p:cNvPr id="9" name="TextBox 8"/>
+          <p:cNvSpPr txBox="1"/>
+          <p:nvPr/>
+        </p:nvSpPr>
+        <p:spPr>
+          <a:xfrm>
+            <a:off x="914400" y="1920240"/>
+            <a:ext cx="4846320" cy="3931920"/>
           </a:xfrm>
           <a:prstGeom prst="rect">
             <a:avLst/>
@@ -4915,43 +7441,120 @@
           <a:lstStyle/>
           <a:p>
             <a:pPr>
-              <a:defRPr sz="1300" b="1">
-                <a:solidFill>
-                  <a:srgbClr val="38BDF8"/>
-                </a:solidFill>
-              </a:defRPr>
-            </a:pPr>
-            <a:r>
-              <a:t>GAINS UX &amp; E-COMMERCE</a:t>
-            </a:r>
-          </a:p>
-          <a:p>
-            <a:pPr>
-              <a:spcBef>
-                <a:spcPts val="400"/>
-              </a:spcBef>
-              <a:defRPr sz="1100">
+              <a:defRPr sz="1100" b="1">
+                <a:solidFill>
+                  <a:srgbClr val="F43F5E"/>
+                </a:solidFill>
+                <a:latin typeface="Segoe UI"/>
+              </a:defRPr>
+            </a:pPr>
+            <a:r>
+              <a:t>Cluster 2 (Sous-vêtements techniques) :</a:t>
+            </a:r>
+          </a:p>
+          <a:p>
+            <a:pPr>
+              <a:defRPr sz="1000">
                 <a:solidFill>
                   <a:srgbClr val="F8FAFC"/>
                 </a:solidFill>
-              </a:defRPr>
-            </a:pPr>
-            <a:r>
-              <a:t>Augmentation estimée de 15% du taux de clic sur les carrousels de recommandations 'Produits similaires' en bas de fiche produit.</a:t>
-            </a:r>
-          </a:p>
-        </p:txBody>
-      </p:sp>
-      <p:sp>
-        <p:nvSpPr>
-          <p:cNvPr id="8" name="Rounded Rectangle 7"/>
+                <a:latin typeface="Segoe UI"/>
+              </a:defRPr>
+            </a:pPr>
+            <a:r>
+              <a:t>Mots dominants : 'boxer', 'waistband', 'brief', 'cotton', 'organic', 'comfort', 'skin'. Vocabulaire axé sur le confort au porter et l'élasticité.</a:t>
+            </a:r>
+          </a:p>
+          <a:p>
+            <a:pPr>
+              <a:defRPr sz="1100" b="1">
+                <a:solidFill>
+                  <a:srgbClr val="F43F5E"/>
+                </a:solidFill>
+                <a:latin typeface="Segoe UI"/>
+              </a:defRPr>
+            </a:pPr>
+            <a:r>
+              <a:t>Cluster 5 (Sacs à dos &amp; Bagagerie) :</a:t>
+            </a:r>
+          </a:p>
+          <a:p>
+            <a:pPr>
+              <a:defRPr sz="1000">
+                <a:solidFill>
+                  <a:srgbClr val="F8FAFC"/>
+                </a:solidFill>
+                <a:latin typeface="Segoe UI"/>
+              </a:defRPr>
+            </a:pPr>
+            <a:r>
+              <a:t>Mots dominants : 'pack', 'pocket', 'backpack', 'strap', 'compartment', 'zipper', 'hydration'. Vocabulaire de portage et d'organisation logistique.</a:t>
+            </a:r>
+          </a:p>
+          <a:p>
+            <a:pPr>
+              <a:defRPr sz="1100" b="1">
+                <a:solidFill>
+                  <a:srgbClr val="F43F5E"/>
+                </a:solidFill>
+                <a:latin typeface="Segoe UI"/>
+              </a:defRPr>
+            </a:pPr>
+            <a:r>
+              <a:t>Cluster 0 (Vestes imperméables) :</a:t>
+            </a:r>
+          </a:p>
+          <a:p>
+            <a:pPr>
+              <a:defRPr sz="1000">
+                <a:solidFill>
+                  <a:srgbClr val="F8FAFC"/>
+                </a:solidFill>
+                <a:latin typeface="Segoe UI"/>
+              </a:defRPr>
+            </a:pPr>
+            <a:r>
+              <a:t>Mots dominants : 'jacket', 'waterproof', 'breathable', 'hood', 'seam', 'shell', 'rain'. Vocabulaire de protection contre les intempéries.</a:t>
+            </a:r>
+          </a:p>
+          <a:p>
+            <a:pPr>
+              <a:defRPr sz="1100" b="1">
+                <a:solidFill>
+                  <a:srgbClr val="F43F5E"/>
+                </a:solidFill>
+                <a:latin typeface="Segoe UI"/>
+              </a:defRPr>
+            </a:pPr>
+            <a:r>
+              <a:t>Cluster 8 (Polaires thermiques) :</a:t>
+            </a:r>
+          </a:p>
+          <a:p>
+            <a:pPr>
+              <a:defRPr sz="1000">
+                <a:solidFill>
+                  <a:srgbClr val="F8FAFC"/>
+                </a:solidFill>
+                <a:latin typeface="Segoe UI"/>
+              </a:defRPr>
+            </a:pPr>
+            <a:r>
+              <a:t>Mots dominants : 'fleece', 'warmth', 'layer', 'soft', 'thermal', 'weight'. Vocabulaire d'isolation thermique.</a:t>
+            </a:r>
+          </a:p>
+        </p:txBody>
+      </p:sp>
+      <p:sp>
+        <p:nvSpPr>
+          <p:cNvPr id="10" name="Rounded Rectangle 9"/>
           <p:cNvSpPr/>
           <p:nvPr/>
         </p:nvSpPr>
         <p:spPr>
           <a:xfrm>
-            <a:off x="731520" y="3108960"/>
-            <a:ext cx="10698480" cy="1325880"/>
+            <a:off x="6217920" y="1371600"/>
+            <a:ext cx="5242255" cy="4754880"/>
           </a:xfrm>
           <a:prstGeom prst="roundRect">
             <a:avLst/>
@@ -4959,7 +7562,7 @@
           <a:solidFill>
             <a:srgbClr val="1E293B"/>
           </a:solidFill>
-          <a:ln w="12700">
+          <a:ln w="19050">
             <a:solidFill>
               <a:srgbClr val="334155"/>
             </a:solidFill>
@@ -4989,14 +7592,50 @@
       </p:sp>
       <p:sp>
         <p:nvSpPr>
-          <p:cNvPr id="9" name="TextBox 8"/>
+          <p:cNvPr id="11" name="TextBox 10"/>
           <p:cNvSpPr txBox="1"/>
           <p:nvPr/>
         </p:nvSpPr>
         <p:spPr>
           <a:xfrm>
-            <a:off x="914400" y="3182112"/>
-            <a:ext cx="10332720" cy="1179576"/>
+            <a:off x="6400800" y="1536192"/>
+            <a:ext cx="4876495" cy="365760"/>
+          </a:xfrm>
+          <a:prstGeom prst="rect">
+            <a:avLst/>
+          </a:prstGeom>
+          <a:noFill/>
+        </p:spPr>
+        <p:txBody>
+          <a:bodyPr wrap="square" lIns="0" tIns="0" rIns="0" bIns="0">
+            <a:spAutoFit/>
+          </a:bodyPr>
+          <a:lstStyle/>
+          <a:p>
+            <a:pPr>
+              <a:defRPr sz="1200" b="1">
+                <a:solidFill>
+                  <a:srgbClr val="F43F5E"/>
+                </a:solidFill>
+                <a:latin typeface="Segoe UI"/>
+              </a:defRPr>
+            </a:pPr>
+            <a:r>
+              <a:t>INTERPRÉTATION &amp; APPORT QUALITATIF</a:t>
+            </a:r>
+          </a:p>
+        </p:txBody>
+      </p:sp>
+      <p:sp>
+        <p:nvSpPr>
+          <p:cNvPr id="12" name="TextBox 11"/>
+          <p:cNvSpPr txBox="1"/>
+          <p:nvPr/>
+        </p:nvSpPr>
+        <p:spPr>
+          <a:xfrm>
+            <a:off x="6400800" y="1920240"/>
+            <a:ext cx="4846320" cy="3931920"/>
           </a:xfrm>
           <a:prstGeom prst="rect">
             <a:avLst/>
@@ -5010,54 +7649,121 @@
           <a:lstStyle/>
           <a:p>
             <a:pPr>
-              <a:defRPr sz="1300" b="1">
-                <a:solidFill>
-                  <a:srgbClr val="A855F7"/>
-                </a:solidFill>
-              </a:defRPr>
-            </a:pPr>
-            <a:r>
-              <a:t>HYBRIDATION FUTURE</a:t>
-            </a:r>
-          </a:p>
-          <a:p>
-            <a:pPr>
-              <a:spcBef>
-                <a:spcPts val="400"/>
-              </a:spcBef>
-              <a:defRPr sz="1100">
+              <a:defRPr sz="1100" b="1">
+                <a:solidFill>
+                  <a:srgbClr val="38BDF8"/>
+                </a:solidFill>
+                <a:latin typeface="Segoe UI"/>
+              </a:defRPr>
+            </a:pPr>
+            <a:r>
+              <a:t>1. Séparation Sémantique Nette :</a:t>
+            </a:r>
+          </a:p>
+          <a:p>
+            <a:pPr>
+              <a:defRPr sz="1000">
                 <a:solidFill>
                   <a:srgbClr val="F8FAFC"/>
                 </a:solidFill>
-              </a:defRPr>
-            </a:pPr>
-            <a:r>
-              <a:t>Coupler la similarité textuelle TF-IDF avec des signaux collaboratifs (achats croisés réels) et des embeddings denses (Sentence-Transformers).</a:t>
-            </a:r>
-          </a:p>
-        </p:txBody>
-      </p:sp>
-      <p:sp>
-        <p:nvSpPr>
-          <p:cNvPr id="10" name="Rounded Rectangle 9"/>
+                <a:latin typeface="Segoe UI"/>
+              </a:defRPr>
+            </a:pPr>
+            <a:r>
+              <a:t>Les nuages de mots confirment que les clusters ne partagent aucun vocabulaire redondant : chaque groupe correspond à une intention client précise.</a:t>
+            </a:r>
+          </a:p>
+          <a:p>
+            <a:pPr>
+              <a:defRPr sz="1100" b="1">
+                <a:solidFill>
+                  <a:srgbClr val="38BDF8"/>
+                </a:solidFill>
+                <a:latin typeface="Segoe UI"/>
+              </a:defRPr>
+            </a:pPr>
+            <a:r>
+              <a:t>2. Filtrage des Outliers comme Bouclier Qualité :</a:t>
+            </a:r>
+          </a:p>
+          <a:p>
+            <a:pPr>
+              <a:defRPr sz="1000">
+                <a:solidFill>
+                  <a:srgbClr val="F8FAFC"/>
+                </a:solidFill>
+                <a:latin typeface="Segoe UI"/>
+              </a:defRPr>
+            </a:pPr>
+            <a:r>
+              <a:t>En rejetant les fiches atypiques dans le cluster de bruit, DBSCAN préserve des groupes homogènes exempts d'intrus.</a:t>
+            </a:r>
+          </a:p>
+          <a:p>
+            <a:pPr>
+              <a:defRPr sz="1100" b="1">
+                <a:solidFill>
+                  <a:srgbClr val="38BDF8"/>
+                </a:solidFill>
+                <a:latin typeface="Segoe UI"/>
+              </a:defRPr>
+            </a:pPr>
+            <a:r>
+              <a:t>3. Exploitation Directe pour le Recommender :</a:t>
+            </a:r>
+          </a:p>
+          <a:p>
+            <a:pPr>
+              <a:defRPr sz="1000">
+                <a:solidFill>
+                  <a:srgbClr val="F8FAFC"/>
+                </a:solidFill>
+                <a:latin typeface="Segoe UI"/>
+              </a:defRPr>
+            </a:pPr>
+            <a:r>
+              <a:t>Ces clusters constituent le périmètre d'éligibilité pour les suggestions de produits complémentaires.</a:t>
+            </a:r>
+          </a:p>
+        </p:txBody>
+      </p:sp>
+    </p:spTree>
+  </p:cSld>
+  <p:clrMapOvr>
+    <a:masterClrMapping/>
+  </p:clrMapOvr>
+</p:sld>
+</file>
+
+<file path=ppt/slides/slide6.xml><?xml version="1.0" encoding="utf-8"?>
+<p:sld xmlns:a="http://schemas.openxmlformats.org/drawingml/2006/main" xmlns:p="http://schemas.openxmlformats.org/presentationml/2006/main" xmlns:r="http://schemas.openxmlformats.org/officeDocument/2006/relationships">
+  <p:cSld>
+    <p:spTree>
+      <p:nvGrpSpPr>
+        <p:cNvPr id="1" name=""/>
+        <p:cNvGrpSpPr/>
+        <p:nvPr/>
+      </p:nvGrpSpPr>
+      <p:grpSpPr/>
+      <p:sp>
+        <p:nvSpPr>
+          <p:cNvPr id="2" name="Rectangle 1"/>
           <p:cNvSpPr/>
           <p:nvPr/>
         </p:nvSpPr>
         <p:spPr>
           <a:xfrm>
-            <a:off x="731520" y="4572000"/>
-            <a:ext cx="10698480" cy="1325880"/>
-          </a:xfrm>
-          <a:prstGeom prst="roundRect">
+            <a:off x="0" y="0"/>
+            <a:ext cx="12191695" cy="6858000"/>
+          </a:xfrm>
+          <a:prstGeom prst="rect">
             <a:avLst/>
           </a:prstGeom>
           <a:solidFill>
-            <a:srgbClr val="1E293B"/>
+            <a:srgbClr val="0B1120"/>
           </a:solidFill>
-          <a:ln w="12700">
-            <a:solidFill>
-              <a:srgbClr val="334155"/>
-            </a:solidFill>
+          <a:ln>
+            <a:noFill/>
           </a:ln>
         </p:spPr>
         <p:style>
@@ -5084,14 +7790,239 @@
       </p:sp>
       <p:sp>
         <p:nvSpPr>
-          <p:cNvPr id="11" name="TextBox 10"/>
+          <p:cNvPr id="3" name="TextBox 2"/>
           <p:cNvSpPr txBox="1"/>
           <p:nvPr/>
         </p:nvSpPr>
         <p:spPr>
           <a:xfrm>
-            <a:off x="914400" y="4645152"/>
-            <a:ext cx="10332720" cy="1179576"/>
+            <a:off x="731520" y="365760"/>
+            <a:ext cx="7315200" cy="320040"/>
+          </a:xfrm>
+          <a:prstGeom prst="rect">
+            <a:avLst/>
+          </a:prstGeom>
+          <a:noFill/>
+        </p:spPr>
+        <p:txBody>
+          <a:bodyPr wrap="square" lIns="0" tIns="0" rIns="0" bIns="0">
+            <a:spAutoFit/>
+          </a:bodyPr>
+          <a:lstStyle/>
+          <a:p>
+            <a:pPr>
+              <a:defRPr sz="1100" b="1">
+                <a:solidFill>
+                  <a:srgbClr val="F43F5E"/>
+                </a:solidFill>
+                <a:latin typeface="Segoe UI"/>
+              </a:defRPr>
+            </a:pPr>
+            <a:r>
+              <a:t>ÉTAPE 05 | SYSTÈME DE RECOMMANDATION</a:t>
+            </a:r>
+          </a:p>
+        </p:txBody>
+      </p:sp>
+      <p:sp>
+        <p:nvSpPr>
+          <p:cNvPr id="4" name="TextBox 3"/>
+          <p:cNvSpPr txBox="1"/>
+          <p:nvPr/>
+        </p:nvSpPr>
+        <p:spPr>
+          <a:xfrm>
+            <a:off x="731520" y="685800"/>
+            <a:ext cx="9601200" cy="502920"/>
+          </a:xfrm>
+          <a:prstGeom prst="rect">
+            <a:avLst/>
+          </a:prstGeom>
+          <a:noFill/>
+        </p:spPr>
+        <p:txBody>
+          <a:bodyPr wrap="square" lIns="0" tIns="0" rIns="0" bIns="0">
+            <a:spAutoFit/>
+          </a:bodyPr>
+          <a:lstStyle/>
+          <a:p>
+            <a:pPr>
+              <a:defRPr sz="2200" b="1">
+                <a:solidFill>
+                  <a:srgbClr val="F8FAFC"/>
+                </a:solidFill>
+                <a:latin typeface="Segoe UI"/>
+              </a:defRPr>
+            </a:pPr>
+            <a:r>
+              <a:t>Partie 2 : Algorithme find_similar_items &amp; Cosine Similarity</a:t>
+            </a:r>
+          </a:p>
+        </p:txBody>
+      </p:sp>
+      <p:sp>
+        <p:nvSpPr>
+          <p:cNvPr id="5" name="TextBox 4"/>
+          <p:cNvSpPr txBox="1"/>
+          <p:nvPr/>
+        </p:nvSpPr>
+        <p:spPr>
+          <a:xfrm>
+            <a:off x="10362895" y="411480"/>
+            <a:ext cx="1097280" cy="365760"/>
+          </a:xfrm>
+          <a:prstGeom prst="rect">
+            <a:avLst/>
+          </a:prstGeom>
+          <a:noFill/>
+        </p:spPr>
+        <p:txBody>
+          <a:bodyPr wrap="square" lIns="0" tIns="0" rIns="0" bIns="0">
+            <a:spAutoFit/>
+          </a:bodyPr>
+          <a:lstStyle/>
+          <a:p>
+            <a:pPr algn="r">
+              <a:defRPr sz="1200" b="1">
+                <a:solidFill>
+                  <a:srgbClr val="94A3B8"/>
+                </a:solidFill>
+                <a:latin typeface="Segoe UI"/>
+              </a:defRPr>
+            </a:pPr>
+            <a:r>
+              <a:t>6 / 10</a:t>
+            </a:r>
+          </a:p>
+        </p:txBody>
+      </p:sp>
+      <p:sp>
+        <p:nvSpPr>
+          <p:cNvPr id="6" name="TextBox 5"/>
+          <p:cNvSpPr txBox="1"/>
+          <p:nvPr/>
+        </p:nvSpPr>
+        <p:spPr>
+          <a:xfrm>
+            <a:off x="731520" y="6400800"/>
+            <a:ext cx="10728655" cy="274320"/>
+          </a:xfrm>
+          <a:prstGeom prst="rect">
+            <a:avLst/>
+          </a:prstGeom>
+          <a:noFill/>
+        </p:spPr>
+        <p:txBody>
+          <a:bodyPr wrap="square" lIns="0" tIns="0" rIns="0" bIns="0">
+            <a:spAutoFit/>
+          </a:bodyPr>
+          <a:lstStyle/>
+          <a:p>
+            <a:pPr>
+              <a:defRPr sz="1000">
+                <a:solidFill>
+                  <a:srgbClr val="64748B"/>
+                </a:solidFill>
+                <a:latin typeface="Segoe UI"/>
+              </a:defRPr>
+            </a:pPr>
+            <a:r>
+              <a:t>Christopher GILLERON  |  The North Face E-Commerce (ML Non Supervisé &amp; NLP)  |  Certification CDSD Bloc 3</a:t>
+            </a:r>
+          </a:p>
+        </p:txBody>
+      </p:sp>
+      <p:sp>
+        <p:nvSpPr>
+          <p:cNvPr id="7" name="Rounded Rectangle 6"/>
+          <p:cNvSpPr/>
+          <p:nvPr/>
+        </p:nvSpPr>
+        <p:spPr>
+          <a:xfrm>
+            <a:off x="731520" y="1371600"/>
+            <a:ext cx="3413455" cy="4754880"/>
+          </a:xfrm>
+          <a:prstGeom prst="roundRect">
+            <a:avLst/>
+          </a:prstGeom>
+          <a:solidFill>
+            <a:srgbClr val="1E293B"/>
+          </a:solidFill>
+          <a:ln w="19050">
+            <a:solidFill>
+              <a:srgbClr val="334155"/>
+            </a:solidFill>
+          </a:ln>
+        </p:spPr>
+        <p:style>
+          <a:lnRef idx="1">
+            <a:schemeClr val="accent1"/>
+          </a:lnRef>
+          <a:fillRef idx="3">
+            <a:schemeClr val="accent1"/>
+          </a:fillRef>
+          <a:effectRef idx="2">
+            <a:schemeClr val="accent1"/>
+          </a:effectRef>
+          <a:fontRef idx="minor">
+            <a:schemeClr val="lt1"/>
+          </a:fontRef>
+        </p:style>
+        <p:txBody>
+          <a:bodyPr rtlCol="0" anchor="ctr"/>
+          <a:lstStyle/>
+          <a:p>
+            <a:pPr algn="ctr"/>
+          </a:p>
+        </p:txBody>
+      </p:sp>
+      <p:sp>
+        <p:nvSpPr>
+          <p:cNvPr id="8" name="TextBox 7"/>
+          <p:cNvSpPr txBox="1"/>
+          <p:nvPr/>
+        </p:nvSpPr>
+        <p:spPr>
+          <a:xfrm>
+            <a:off x="914400" y="1536192"/>
+            <a:ext cx="3047695" cy="365760"/>
+          </a:xfrm>
+          <a:prstGeom prst="rect">
+            <a:avLst/>
+          </a:prstGeom>
+          <a:noFill/>
+        </p:spPr>
+        <p:txBody>
+          <a:bodyPr wrap="square" lIns="0" tIns="0" rIns="0" bIns="0">
+            <a:spAutoFit/>
+          </a:bodyPr>
+          <a:lstStyle/>
+          <a:p>
+            <a:pPr>
+              <a:defRPr sz="1200" b="1">
+                <a:solidFill>
+                  <a:srgbClr val="F43F5E"/>
+                </a:solidFill>
+                <a:latin typeface="Segoe UI"/>
+              </a:defRPr>
+            </a:pPr>
+            <a:r>
+              <a:t>01 | MATRICE DE SIMILARITÉ</a:t>
+            </a:r>
+          </a:p>
+        </p:txBody>
+      </p:sp>
+      <p:sp>
+        <p:nvSpPr>
+          <p:cNvPr id="9" name="TextBox 8"/>
+          <p:cNvSpPr txBox="1"/>
+          <p:nvPr/>
+        </p:nvSpPr>
+        <p:spPr>
+          <a:xfrm>
+            <a:off x="914400" y="2011680"/>
+            <a:ext cx="3047695" cy="3931920"/>
           </a:xfrm>
           <a:prstGeom prst="rect">
             <a:avLst/>
@@ -5105,29 +8036,164 @@
           <a:lstStyle/>
           <a:p>
             <a:pPr>
-              <a:defRPr sz="1300" b="1">
-                <a:solidFill>
-                  <a:srgbClr val="38BDF8"/>
-                </a:solidFill>
-              </a:defRPr>
-            </a:pPr>
-            <a:r>
-              <a:t>DÉPLOIEMENT EN API</a:t>
-            </a:r>
-          </a:p>
-          <a:p>
-            <a:pPr>
-              <a:spcBef>
-                <a:spcPts val="400"/>
-              </a:spcBef>
-              <a:defRPr sz="1100">
+              <a:defRPr sz="1100" b="1">
+                <a:solidFill>
+                  <a:srgbClr val="F43F5E"/>
+                </a:solidFill>
+                <a:latin typeface="Segoe UI"/>
+              </a:defRPr>
+            </a:pPr>
+            <a:r>
+              <a:t>Calcul All-Pairs Cosine :</a:t>
+            </a:r>
+          </a:p>
+          <a:p>
+            <a:pPr>
+              <a:defRPr sz="1000">
                 <a:solidFill>
                   <a:srgbClr val="F8FAFC"/>
                 </a:solidFill>
-              </a:defRPr>
-            </a:pPr>
-            <a:r>
-              <a:t>Exposition sous forme de microservice FastAPI avec mise en cache des matrices de similarité pour une latence &lt; 10ms.</a:t>
+                <a:latin typeface="Segoe UI"/>
+              </a:defRPr>
+            </a:pPr>
+            <a:r>
+              <a:t>Calcul vectoriel optimisé de la similarité cosinus entre les 500 vecteurs TF-IDF du catalogue (500x500).</a:t>
+            </a:r>
+          </a:p>
+          <a:p/>
+          <a:p>
+            <a:pPr>
+              <a:defRPr sz="1100" b="1">
+                <a:solidFill>
+                  <a:srgbClr val="F43F5E"/>
+                </a:solidFill>
+                <a:latin typeface="Segoe UI"/>
+              </a:defRPr>
+            </a:pPr>
+            <a:r>
+              <a:t>Score Normalisé [0, 1] :</a:t>
+            </a:r>
+          </a:p>
+          <a:p>
+            <a:pPr>
+              <a:defRPr sz="1000">
+                <a:solidFill>
+                  <a:srgbClr val="F8FAFC"/>
+                </a:solidFill>
+                <a:latin typeface="Segoe UI"/>
+              </a:defRPr>
+            </a:pPr>
+            <a:r>
+              <a:t>1.0 = descriptions textuelles identiques, 0.0 = aucun mot en commun.</a:t>
+            </a:r>
+          </a:p>
+          <a:p/>
+          <a:p>
+            <a:pPr>
+              <a:defRPr sz="1100" b="1">
+                <a:solidFill>
+                  <a:srgbClr val="F43F5E"/>
+                </a:solidFill>
+                <a:latin typeface="Segoe UI"/>
+              </a:defRPr>
+            </a:pPr>
+            <a:r>
+              <a:t>Latence Instantanée :</a:t>
+            </a:r>
+          </a:p>
+          <a:p>
+            <a:pPr>
+              <a:defRPr sz="1000">
+                <a:solidFill>
+                  <a:srgbClr val="F8FAFC"/>
+                </a:solidFill>
+                <a:latin typeface="Segoe UI"/>
+              </a:defRPr>
+            </a:pPr>
+            <a:r>
+              <a:t>L'évaluation matricielle s'effectue en quelques millisecondes.</a:t>
+            </a:r>
+          </a:p>
+          <a:p/>
+        </p:txBody>
+      </p:sp>
+      <p:sp>
+        <p:nvSpPr>
+          <p:cNvPr id="10" name="Rounded Rectangle 9"/>
+          <p:cNvSpPr/>
+          <p:nvPr/>
+        </p:nvSpPr>
+        <p:spPr>
+          <a:xfrm>
+            <a:off x="4389120" y="1371600"/>
+            <a:ext cx="3413455" cy="4754880"/>
+          </a:xfrm>
+          <a:prstGeom prst="roundRect">
+            <a:avLst/>
+          </a:prstGeom>
+          <a:solidFill>
+            <a:srgbClr val="1E293B"/>
+          </a:solidFill>
+          <a:ln w="19050">
+            <a:solidFill>
+              <a:srgbClr val="334155"/>
+            </a:solidFill>
+          </a:ln>
+        </p:spPr>
+        <p:style>
+          <a:lnRef idx="1">
+            <a:schemeClr val="accent1"/>
+          </a:lnRef>
+          <a:fillRef idx="3">
+            <a:schemeClr val="accent1"/>
+          </a:fillRef>
+          <a:effectRef idx="2">
+            <a:schemeClr val="accent1"/>
+          </a:effectRef>
+          <a:fontRef idx="minor">
+            <a:schemeClr val="lt1"/>
+          </a:fontRef>
+        </p:style>
+        <p:txBody>
+          <a:bodyPr rtlCol="0" anchor="ctr"/>
+          <a:lstStyle/>
+          <a:p>
+            <a:pPr algn="ctr"/>
+          </a:p>
+        </p:txBody>
+      </p:sp>
+      <p:sp>
+        <p:nvSpPr>
+          <p:cNvPr id="11" name="TextBox 10"/>
+          <p:cNvSpPr txBox="1"/>
+          <p:nvPr/>
+        </p:nvSpPr>
+        <p:spPr>
+          <a:xfrm>
+            <a:off x="4572000" y="1536192"/>
+            <a:ext cx="3047695" cy="365760"/>
+          </a:xfrm>
+          <a:prstGeom prst="rect">
+            <a:avLst/>
+          </a:prstGeom>
+          <a:noFill/>
+        </p:spPr>
+        <p:txBody>
+          <a:bodyPr wrap="square" lIns="0" tIns="0" rIns="0" bIns="0">
+            <a:spAutoFit/>
+          </a:bodyPr>
+          <a:lstStyle/>
+          <a:p>
+            <a:pPr>
+              <a:defRPr sz="1200" b="1">
+                <a:solidFill>
+                  <a:srgbClr val="F43F5E"/>
+                </a:solidFill>
+                <a:latin typeface="Segoe UI"/>
+              </a:defRPr>
+            </a:pPr>
+            <a:r>
+              <a:t>02 | ALGORITHME HYBRIDE AVEC DBSCAN</a:t>
             </a:r>
           </a:p>
         </p:txBody>
@@ -5140,8 +8206,8 @@
         </p:nvSpPr>
         <p:spPr>
           <a:xfrm>
-            <a:off x="731520" y="6309360"/>
-            <a:ext cx="10698480" cy="365760"/>
+            <a:off x="4572000" y="2011680"/>
+            <a:ext cx="3047695" cy="3931920"/>
           </a:xfrm>
           <a:prstGeom prst="rect">
             <a:avLst/>
@@ -5149,20 +8215,2337 @@
           <a:noFill/>
         </p:spPr>
         <p:txBody>
-          <a:bodyPr wrap="none">
+          <a:bodyPr wrap="square">
             <a:spAutoFit/>
           </a:bodyPr>
           <a:lstStyle/>
           <a:p>
             <a:pPr>
+              <a:defRPr sz="1100" b="1">
+                <a:solidFill>
+                  <a:srgbClr val="F43F5E"/>
+                </a:solidFill>
+                <a:latin typeface="Segoe UI"/>
+              </a:defRPr>
+            </a:pPr>
+            <a:r>
+              <a:t>Filtrage Intra-Cluster :</a:t>
+            </a:r>
+          </a:p>
+          <a:p>
+            <a:pPr>
               <a:defRPr sz="1000">
                 <a:solidFill>
+                  <a:srgbClr val="F8FAFC"/>
+                </a:solidFill>
+                <a:latin typeface="Segoe UI"/>
+              </a:defRPr>
+            </a:pPr>
+            <a:r>
+              <a:t>Si le produit source appartient à un cluster dense (ex: Cluster 2), la recherche de voisins est restreinte aux produits du même cluster.</a:t>
+            </a:r>
+          </a:p>
+          <a:p/>
+          <a:p>
+            <a:pPr>
+              <a:defRPr sz="1100" b="1">
+                <a:solidFill>
+                  <a:srgbClr val="F43F5E"/>
+                </a:solidFill>
+                <a:latin typeface="Segoe UI"/>
+              </a:defRPr>
+            </a:pPr>
+            <a:r>
+              <a:t>Élimination des Aberrations :</a:t>
+            </a:r>
+          </a:p>
+          <a:p>
+            <a:pPr>
+              <a:defRPr sz="1000">
+                <a:solidFill>
+                  <a:srgbClr val="F8FAFC"/>
+                </a:solidFill>
+                <a:latin typeface="Segoe UI"/>
+              </a:defRPr>
+            </a:pPr>
+            <a:r>
+              <a:t>Évite de recommander un sac de couchage à un utilisateur qui consulte un t-shirt de course.</a:t>
+            </a:r>
+          </a:p>
+          <a:p/>
+          <a:p>
+            <a:pPr>
+              <a:defRPr sz="1100" b="1">
+                <a:solidFill>
+                  <a:srgbClr val="F43F5E"/>
+                </a:solidFill>
+                <a:latin typeface="Segoe UI"/>
+              </a:defRPr>
+            </a:pPr>
+            <a:r>
+              <a:t>Repli Sécurisé (Fallback) :</a:t>
+            </a:r>
+          </a:p>
+          <a:p>
+            <a:pPr>
+              <a:defRPr sz="1000">
+                <a:solidFill>
+                  <a:srgbClr val="F8FAFC"/>
+                </a:solidFill>
+                <a:latin typeface="Segoe UI"/>
+              </a:defRPr>
+            </a:pPr>
+            <a:r>
+              <a:t>Si le produit est un outlier (cluster -1), l'algorithme élargit la recherche à tout le catalogue.</a:t>
+            </a:r>
+          </a:p>
+          <a:p/>
+        </p:txBody>
+      </p:sp>
+      <p:sp>
+        <p:nvSpPr>
+          <p:cNvPr id="13" name="Rounded Rectangle 12"/>
+          <p:cNvSpPr/>
+          <p:nvPr/>
+        </p:nvSpPr>
+        <p:spPr>
+          <a:xfrm>
+            <a:off x="8046720" y="1371600"/>
+            <a:ext cx="3413455" cy="4754880"/>
+          </a:xfrm>
+          <a:prstGeom prst="roundRect">
+            <a:avLst/>
+          </a:prstGeom>
+          <a:solidFill>
+            <a:srgbClr val="1E293B"/>
+          </a:solidFill>
+          <a:ln w="19050">
+            <a:solidFill>
+              <a:srgbClr val="334155"/>
+            </a:solidFill>
+          </a:ln>
+        </p:spPr>
+        <p:style>
+          <a:lnRef idx="1">
+            <a:schemeClr val="accent1"/>
+          </a:lnRef>
+          <a:fillRef idx="3">
+            <a:schemeClr val="accent1"/>
+          </a:fillRef>
+          <a:effectRef idx="2">
+            <a:schemeClr val="accent1"/>
+          </a:effectRef>
+          <a:fontRef idx="minor">
+            <a:schemeClr val="lt1"/>
+          </a:fontRef>
+        </p:style>
+        <p:txBody>
+          <a:bodyPr rtlCol="0" anchor="ctr"/>
+          <a:lstStyle/>
+          <a:p>
+            <a:pPr algn="ctr"/>
+          </a:p>
+        </p:txBody>
+      </p:sp>
+      <p:sp>
+        <p:nvSpPr>
+          <p:cNvPr id="14" name="TextBox 13"/>
+          <p:cNvSpPr txBox="1"/>
+          <p:nvPr/>
+        </p:nvSpPr>
+        <p:spPr>
+          <a:xfrm>
+            <a:off x="8229600" y="1536192"/>
+            <a:ext cx="3047695" cy="365760"/>
+          </a:xfrm>
+          <a:prstGeom prst="rect">
+            <a:avLst/>
+          </a:prstGeom>
+          <a:noFill/>
+        </p:spPr>
+        <p:txBody>
+          <a:bodyPr wrap="square" lIns="0" tIns="0" rIns="0" bIns="0">
+            <a:spAutoFit/>
+          </a:bodyPr>
+          <a:lstStyle/>
+          <a:p>
+            <a:pPr>
+              <a:defRPr sz="1200" b="1">
+                <a:solidFill>
+                  <a:srgbClr val="F43F5E"/>
+                </a:solidFill>
+                <a:latin typeface="Segoe UI"/>
+              </a:defRPr>
+            </a:pPr>
+            <a:r>
+              <a:t>03 | EXTRACTION TOP-N RECOMMANDATIONS</a:t>
+            </a:r>
+          </a:p>
+        </p:txBody>
+      </p:sp>
+      <p:sp>
+        <p:nvSpPr>
+          <p:cNvPr id="15" name="TextBox 14"/>
+          <p:cNvSpPr txBox="1"/>
+          <p:nvPr/>
+        </p:nvSpPr>
+        <p:spPr>
+          <a:xfrm>
+            <a:off x="8229600" y="2011680"/>
+            <a:ext cx="3047695" cy="3931920"/>
+          </a:xfrm>
+          <a:prstGeom prst="rect">
+            <a:avLst/>
+          </a:prstGeom>
+          <a:noFill/>
+        </p:spPr>
+        <p:txBody>
+          <a:bodyPr wrap="square">
+            <a:spAutoFit/>
+          </a:bodyPr>
+          <a:lstStyle/>
+          <a:p>
+            <a:pPr>
+              <a:defRPr sz="1100" b="1">
+                <a:solidFill>
+                  <a:srgbClr val="F43F5E"/>
+                </a:solidFill>
+                <a:latin typeface="Segoe UI"/>
+              </a:defRPr>
+            </a:pPr>
+            <a:r>
+              <a:t>Tri Décroissant :</a:t>
+            </a:r>
+          </a:p>
+          <a:p>
+            <a:pPr>
+              <a:defRPr sz="1000">
+                <a:solidFill>
+                  <a:srgbClr val="F8FAFC"/>
+                </a:solidFill>
+                <a:latin typeface="Segoe UI"/>
+              </a:defRPr>
+            </a:pPr>
+            <a:r>
+              <a:t>Classement des produits par affinité cosinus décroissante.</a:t>
+            </a:r>
+          </a:p>
+          <a:p/>
+          <a:p>
+            <a:pPr>
+              <a:defRPr sz="1100" b="1">
+                <a:solidFill>
+                  <a:srgbClr val="F43F5E"/>
+                </a:solidFill>
+                <a:latin typeface="Segoe UI"/>
+              </a:defRPr>
+            </a:pPr>
+            <a:r>
+              <a:t>Exclusion du Produit Actif :</a:t>
+            </a:r>
+          </a:p>
+          <a:p>
+            <a:pPr>
+              <a:defRPr sz="1000">
+                <a:solidFill>
+                  <a:srgbClr val="F8FAFC"/>
+                </a:solidFill>
+                <a:latin typeface="Segoe UI"/>
+              </a:defRPr>
+            </a:pPr>
+            <a:r>
+              <a:t>Le produit consulté est automatiquement exclu de sa propre liste de suggestions.</a:t>
+            </a:r>
+          </a:p>
+          <a:p/>
+          <a:p>
+            <a:pPr>
+              <a:defRPr sz="1100" b="1">
+                <a:solidFill>
+                  <a:srgbClr val="F43F5E"/>
+                </a:solidFill>
+                <a:latin typeface="Segoe UI"/>
+              </a:defRPr>
+            </a:pPr>
+            <a:r>
+              <a:t>Livrable Top-5 :</a:t>
+            </a:r>
+          </a:p>
+          <a:p>
+            <a:pPr>
+              <a:defRPr sz="1000">
+                <a:solidFill>
+                  <a:srgbClr val="F8FAFC"/>
+                </a:solidFill>
+                <a:latin typeface="Segoe UI"/>
+              </a:defRPr>
+            </a:pPr>
+            <a:r>
+              <a:t>La fonction retourne exactement la liste des 5 IDs les plus pertinents pour affichage Web.</a:t>
+            </a:r>
+          </a:p>
+          <a:p/>
+        </p:txBody>
+      </p:sp>
+    </p:spTree>
+  </p:cSld>
+  <p:clrMapOvr>
+    <a:masterClrMapping/>
+  </p:clrMapOvr>
+</p:sld>
+</file>
+
+<file path=ppt/slides/slide7.xml><?xml version="1.0" encoding="utf-8"?>
+<p:sld xmlns:a="http://schemas.openxmlformats.org/drawingml/2006/main" xmlns:p="http://schemas.openxmlformats.org/presentationml/2006/main" xmlns:r="http://schemas.openxmlformats.org/officeDocument/2006/relationships">
+  <p:cSld>
+    <p:spTree>
+      <p:nvGrpSpPr>
+        <p:cNvPr id="1" name=""/>
+        <p:cNvGrpSpPr/>
+        <p:nvPr/>
+      </p:nvGrpSpPr>
+      <p:grpSpPr/>
+      <p:sp>
+        <p:nvSpPr>
+          <p:cNvPr id="2" name="Rectangle 1"/>
+          <p:cNvSpPr/>
+          <p:nvPr/>
+        </p:nvSpPr>
+        <p:spPr>
+          <a:xfrm>
+            <a:off x="0" y="0"/>
+            <a:ext cx="12191695" cy="6858000"/>
+          </a:xfrm>
+          <a:prstGeom prst="rect">
+            <a:avLst/>
+          </a:prstGeom>
+          <a:solidFill>
+            <a:srgbClr val="0B1120"/>
+          </a:solidFill>
+          <a:ln>
+            <a:noFill/>
+          </a:ln>
+        </p:spPr>
+        <p:style>
+          <a:lnRef idx="1">
+            <a:schemeClr val="accent1"/>
+          </a:lnRef>
+          <a:fillRef idx="3">
+            <a:schemeClr val="accent1"/>
+          </a:fillRef>
+          <a:effectRef idx="2">
+            <a:schemeClr val="accent1"/>
+          </a:effectRef>
+          <a:fontRef idx="minor">
+            <a:schemeClr val="lt1"/>
+          </a:fontRef>
+        </p:style>
+        <p:txBody>
+          <a:bodyPr rtlCol="0" anchor="ctr"/>
+          <a:lstStyle/>
+          <a:p>
+            <a:pPr algn="ctr"/>
+          </a:p>
+        </p:txBody>
+      </p:sp>
+      <p:sp>
+        <p:nvSpPr>
+          <p:cNvPr id="3" name="TextBox 2"/>
+          <p:cNvSpPr txBox="1"/>
+          <p:nvPr/>
+        </p:nvSpPr>
+        <p:spPr>
+          <a:xfrm>
+            <a:off x="731520" y="365760"/>
+            <a:ext cx="7315200" cy="320040"/>
+          </a:xfrm>
+          <a:prstGeom prst="rect">
+            <a:avLst/>
+          </a:prstGeom>
+          <a:noFill/>
+        </p:spPr>
+        <p:txBody>
+          <a:bodyPr wrap="square" lIns="0" tIns="0" rIns="0" bIns="0">
+            <a:spAutoFit/>
+          </a:bodyPr>
+          <a:lstStyle/>
+          <a:p>
+            <a:pPr>
+              <a:defRPr sz="1100" b="1">
+                <a:solidFill>
+                  <a:srgbClr val="F43F5E"/>
+                </a:solidFill>
+                <a:latin typeface="Segoe UI"/>
+              </a:defRPr>
+            </a:pPr>
+            <a:r>
+              <a:t>ÉTAPE 06 | DÉMONSTRATION INTERACTIVE</a:t>
+            </a:r>
+          </a:p>
+        </p:txBody>
+      </p:sp>
+      <p:sp>
+        <p:nvSpPr>
+          <p:cNvPr id="4" name="TextBox 3"/>
+          <p:cNvSpPr txBox="1"/>
+          <p:nvPr/>
+        </p:nvSpPr>
+        <p:spPr>
+          <a:xfrm>
+            <a:off x="731520" y="685800"/>
+            <a:ext cx="9601200" cy="502920"/>
+          </a:xfrm>
+          <a:prstGeom prst="rect">
+            <a:avLst/>
+          </a:prstGeom>
+          <a:noFill/>
+        </p:spPr>
+        <p:txBody>
+          <a:bodyPr wrap="square" lIns="0" tIns="0" rIns="0" bIns="0">
+            <a:spAutoFit/>
+          </a:bodyPr>
+          <a:lstStyle/>
+          <a:p>
+            <a:pPr>
+              <a:defRPr sz="2200" b="1">
+                <a:solidFill>
+                  <a:srgbClr val="F8FAFC"/>
+                </a:solidFill>
+                <a:latin typeface="Segoe UI"/>
+              </a:defRPr>
+            </a:pPr>
+            <a:r>
+              <a:t>Test en Production de find_similar_items &amp; Interface Utilisateur input()</a:t>
+            </a:r>
+          </a:p>
+        </p:txBody>
+      </p:sp>
+      <p:sp>
+        <p:nvSpPr>
+          <p:cNvPr id="5" name="TextBox 4"/>
+          <p:cNvSpPr txBox="1"/>
+          <p:nvPr/>
+        </p:nvSpPr>
+        <p:spPr>
+          <a:xfrm>
+            <a:off x="10362895" y="411480"/>
+            <a:ext cx="1097280" cy="365760"/>
+          </a:xfrm>
+          <a:prstGeom prst="rect">
+            <a:avLst/>
+          </a:prstGeom>
+          <a:noFill/>
+        </p:spPr>
+        <p:txBody>
+          <a:bodyPr wrap="square" lIns="0" tIns="0" rIns="0" bIns="0">
+            <a:spAutoFit/>
+          </a:bodyPr>
+          <a:lstStyle/>
+          <a:p>
+            <a:pPr algn="r">
+              <a:defRPr sz="1200" b="1">
+                <a:solidFill>
                   <a:srgbClr val="94A3B8"/>
                 </a:solidFill>
-              </a:defRPr>
-            </a:pPr>
-            <a:r>
-              <a:t>Christopher GILLERON  |  The North Face Recommender System  |  Certification CDSD</a:t>
+                <a:latin typeface="Segoe UI"/>
+              </a:defRPr>
+            </a:pPr>
+            <a:r>
+              <a:t>7 / 10</a:t>
+            </a:r>
+          </a:p>
+        </p:txBody>
+      </p:sp>
+      <p:sp>
+        <p:nvSpPr>
+          <p:cNvPr id="6" name="TextBox 5"/>
+          <p:cNvSpPr txBox="1"/>
+          <p:nvPr/>
+        </p:nvSpPr>
+        <p:spPr>
+          <a:xfrm>
+            <a:off x="731520" y="6400800"/>
+            <a:ext cx="10728655" cy="274320"/>
+          </a:xfrm>
+          <a:prstGeom prst="rect">
+            <a:avLst/>
+          </a:prstGeom>
+          <a:noFill/>
+        </p:spPr>
+        <p:txBody>
+          <a:bodyPr wrap="square" lIns="0" tIns="0" rIns="0" bIns="0">
+            <a:spAutoFit/>
+          </a:bodyPr>
+          <a:lstStyle/>
+          <a:p>
+            <a:pPr>
+              <a:defRPr sz="1000">
+                <a:solidFill>
+                  <a:srgbClr val="64748B"/>
+                </a:solidFill>
+                <a:latin typeface="Segoe UI"/>
+              </a:defRPr>
+            </a:pPr>
+            <a:r>
+              <a:t>Christopher GILLERON  |  The North Face E-Commerce (ML Non Supervisé &amp; NLP)  |  Certification CDSD Bloc 3</a:t>
+            </a:r>
+          </a:p>
+        </p:txBody>
+      </p:sp>
+      <p:sp>
+        <p:nvSpPr>
+          <p:cNvPr id="7" name="Rounded Rectangle 6"/>
+          <p:cNvSpPr/>
+          <p:nvPr/>
+        </p:nvSpPr>
+        <p:spPr>
+          <a:xfrm>
+            <a:off x="731520" y="1371600"/>
+            <a:ext cx="5212080" cy="4754880"/>
+          </a:xfrm>
+          <a:prstGeom prst="roundRect">
+            <a:avLst/>
+          </a:prstGeom>
+          <a:solidFill>
+            <a:srgbClr val="1E293B"/>
+          </a:solidFill>
+          <a:ln w="19050">
+            <a:solidFill>
+              <a:srgbClr val="334155"/>
+            </a:solidFill>
+          </a:ln>
+        </p:spPr>
+        <p:style>
+          <a:lnRef idx="1">
+            <a:schemeClr val="accent1"/>
+          </a:lnRef>
+          <a:fillRef idx="3">
+            <a:schemeClr val="accent1"/>
+          </a:fillRef>
+          <a:effectRef idx="2">
+            <a:schemeClr val="accent1"/>
+          </a:effectRef>
+          <a:fontRef idx="minor">
+            <a:schemeClr val="lt1"/>
+          </a:fontRef>
+        </p:style>
+        <p:txBody>
+          <a:bodyPr rtlCol="0" anchor="ctr"/>
+          <a:lstStyle/>
+          <a:p>
+            <a:pPr algn="ctr"/>
+          </a:p>
+        </p:txBody>
+      </p:sp>
+      <p:sp>
+        <p:nvSpPr>
+          <p:cNvPr id="8" name="TextBox 7"/>
+          <p:cNvSpPr txBox="1"/>
+          <p:nvPr/>
+        </p:nvSpPr>
+        <p:spPr>
+          <a:xfrm>
+            <a:off x="914400" y="1536192"/>
+            <a:ext cx="4846320" cy="365760"/>
+          </a:xfrm>
+          <a:prstGeom prst="rect">
+            <a:avLst/>
+          </a:prstGeom>
+          <a:noFill/>
+        </p:spPr>
+        <p:txBody>
+          <a:bodyPr wrap="square" lIns="0" tIns="0" rIns="0" bIns="0">
+            <a:spAutoFit/>
+          </a:bodyPr>
+          <a:lstStyle/>
+          <a:p>
+            <a:pPr>
+              <a:defRPr sz="1200" b="1">
+                <a:solidFill>
+                  <a:srgbClr val="F43F5E"/>
+                </a:solidFill>
+                <a:latin typeface="Segoe UI"/>
+              </a:defRPr>
+            </a:pPr>
+            <a:r>
+              <a:t>CAS RÉEL DU NOTEBOOK : PRODUIT ID = 0</a:t>
+            </a:r>
+          </a:p>
+        </p:txBody>
+      </p:sp>
+      <p:sp>
+        <p:nvSpPr>
+          <p:cNvPr id="9" name="TextBox 8"/>
+          <p:cNvSpPr txBox="1"/>
+          <p:nvPr/>
+        </p:nvSpPr>
+        <p:spPr>
+          <a:xfrm>
+            <a:off x="914400" y="1920240"/>
+            <a:ext cx="4846320" cy="3931920"/>
+          </a:xfrm>
+          <a:prstGeom prst="rect">
+            <a:avLst/>
+          </a:prstGeom>
+          <a:noFill/>
+        </p:spPr>
+        <p:txBody>
+          <a:bodyPr wrap="square">
+            <a:spAutoFit/>
+          </a:bodyPr>
+          <a:lstStyle/>
+          <a:p>
+            <a:pPr>
+              <a:defRPr sz="1050" b="1">
+                <a:solidFill>
+                  <a:srgbClr val="F43F5E"/>
+                </a:solidFill>
+                <a:latin typeface="Segoe UI"/>
+              </a:defRPr>
+            </a:pPr>
+            <a:r>
+              <a:t>Produit Consulté (ID 0) :</a:t>
+            </a:r>
+          </a:p>
+          <a:p>
+            <a:pPr>
+              <a:defRPr sz="950">
+                <a:solidFill>
+                  <a:srgbClr val="F8FAFC"/>
+                </a:solidFill>
+                <a:latin typeface="Segoe UI"/>
+              </a:defRPr>
+            </a:pPr>
+            <a:r>
+              <a:t>'Active classic boxers' — Boxers techniques de sport en tissu respirant à séchage rapide pour bivouac.</a:t>
+            </a:r>
+          </a:p>
+          <a:p>
+            <a:pPr>
+              <a:defRPr sz="1050" b="1">
+                <a:solidFill>
+                  <a:srgbClr val="38BDF8"/>
+                </a:solidFill>
+                <a:latin typeface="Segoe UI"/>
+              </a:defRPr>
+            </a:pPr>
+            <a:r>
+              <a:t>Recommandations Générées par l'Algorithme :</a:t>
+            </a:r>
+          </a:p>
+          <a:p>
+            <a:pPr>
+              <a:defRPr sz="950">
+                <a:solidFill>
+                  <a:srgbClr val="F8FAFC"/>
+                </a:solidFill>
+                <a:latin typeface="Segoe UI"/>
+              </a:defRPr>
+            </a:pPr>
+          </a:p>
+          <a:p>
+            <a:pPr>
+              <a:defRPr sz="1050" b="1">
+                <a:solidFill>
+                  <a:srgbClr val="F43F5E"/>
+                </a:solidFill>
+                <a:latin typeface="Segoe UI"/>
+              </a:defRPr>
+            </a:pPr>
+            <a:r>
+              <a:t>• 1. ID 18 :</a:t>
+            </a:r>
+          </a:p>
+          <a:p>
+            <a:pPr>
+              <a:defRPr sz="950">
+                <a:solidFill>
+                  <a:srgbClr val="F8FAFC"/>
+                </a:solidFill>
+                <a:latin typeface="Segoe UI"/>
+              </a:defRPr>
+            </a:pPr>
+            <a:r>
+              <a:t>Cap 1 boxer briefs — Caleçon technique respirant Capilene 1.</a:t>
+            </a:r>
+          </a:p>
+          <a:p>
+            <a:pPr>
+              <a:defRPr sz="1050" b="1">
+                <a:solidFill>
+                  <a:srgbClr val="F43F5E"/>
+                </a:solidFill>
+                <a:latin typeface="Segoe UI"/>
+              </a:defRPr>
+            </a:pPr>
+            <a:r>
+              <a:t>• 2. ID 493 :</a:t>
+            </a:r>
+          </a:p>
+          <a:p>
+            <a:pPr>
+              <a:defRPr sz="950">
+                <a:solidFill>
+                  <a:srgbClr val="F8FAFC"/>
+                </a:solidFill>
+                <a:latin typeface="Segoe UI"/>
+              </a:defRPr>
+            </a:pPr>
+            <a:r>
+              <a:t>Active boxer briefs — Boxers de voyage ultra-légers.</a:t>
+            </a:r>
+          </a:p>
+          <a:p>
+            <a:pPr>
+              <a:defRPr sz="1050" b="1">
+                <a:solidFill>
+                  <a:srgbClr val="F43F5E"/>
+                </a:solidFill>
+                <a:latin typeface="Segoe UI"/>
+              </a:defRPr>
+            </a:pPr>
+            <a:r>
+              <a:t>• 3. ID 364 :</a:t>
+            </a:r>
+          </a:p>
+          <a:p>
+            <a:pPr>
+              <a:defRPr sz="950">
+                <a:solidFill>
+                  <a:srgbClr val="F8FAFC"/>
+                </a:solidFill>
+                <a:latin typeface="Segoe UI"/>
+              </a:defRPr>
+            </a:pPr>
+            <a:r>
+              <a:t>Organic cotton boxers — Boxers en coton biologique confort.</a:t>
+            </a:r>
+          </a:p>
+          <a:p>
+            <a:pPr>
+              <a:defRPr sz="1050" b="1">
+                <a:solidFill>
+                  <a:srgbClr val="F43F5E"/>
+                </a:solidFill>
+                <a:latin typeface="Segoe UI"/>
+              </a:defRPr>
+            </a:pPr>
+            <a:r>
+              <a:t>• 4. ID 422 :</a:t>
+            </a:r>
+          </a:p>
+          <a:p>
+            <a:pPr>
+              <a:defRPr sz="950">
+                <a:solidFill>
+                  <a:srgbClr val="F8FAFC"/>
+                </a:solidFill>
+                <a:latin typeface="Segoe UI"/>
+              </a:defRPr>
+            </a:pPr>
+            <a:r>
+              <a:t>Active briefs — Slips de sport évacuation d'humidité.</a:t>
+            </a:r>
+          </a:p>
+          <a:p>
+            <a:pPr>
+              <a:defRPr sz="1050" b="1">
+                <a:solidFill>
+                  <a:srgbClr val="F43F5E"/>
+                </a:solidFill>
+                <a:latin typeface="Segoe UI"/>
+              </a:defRPr>
+            </a:pPr>
+            <a:r>
+              <a:t>• 5. ID 237 :</a:t>
+            </a:r>
+          </a:p>
+          <a:p>
+            <a:pPr>
+              <a:defRPr sz="950">
+                <a:solidFill>
+                  <a:srgbClr val="F8FAFC"/>
+                </a:solidFill>
+                <a:latin typeface="Segoe UI"/>
+              </a:defRPr>
+            </a:pPr>
+            <a:r>
+              <a:t>Active mesh boxer briefs — Caleçon en maille aérée.</a:t>
+            </a:r>
+          </a:p>
+        </p:txBody>
+      </p:sp>
+      <p:sp>
+        <p:nvSpPr>
+          <p:cNvPr id="10" name="Rounded Rectangle 9"/>
+          <p:cNvSpPr/>
+          <p:nvPr/>
+        </p:nvSpPr>
+        <p:spPr>
+          <a:xfrm>
+            <a:off x="6217920" y="1371600"/>
+            <a:ext cx="5242255" cy="4754880"/>
+          </a:xfrm>
+          <a:prstGeom prst="roundRect">
+            <a:avLst/>
+          </a:prstGeom>
+          <a:solidFill>
+            <a:srgbClr val="1E293B"/>
+          </a:solidFill>
+          <a:ln w="19050">
+            <a:solidFill>
+              <a:srgbClr val="334155"/>
+            </a:solidFill>
+          </a:ln>
+        </p:spPr>
+        <p:style>
+          <a:lnRef idx="1">
+            <a:schemeClr val="accent1"/>
+          </a:lnRef>
+          <a:fillRef idx="3">
+            <a:schemeClr val="accent1"/>
+          </a:fillRef>
+          <a:effectRef idx="2">
+            <a:schemeClr val="accent1"/>
+          </a:effectRef>
+          <a:fontRef idx="minor">
+            <a:schemeClr val="lt1"/>
+          </a:fontRef>
+        </p:style>
+        <p:txBody>
+          <a:bodyPr rtlCol="0" anchor="ctr"/>
+          <a:lstStyle/>
+          <a:p>
+            <a:pPr algn="ctr"/>
+          </a:p>
+        </p:txBody>
+      </p:sp>
+      <p:sp>
+        <p:nvSpPr>
+          <p:cNvPr id="11" name="TextBox 10"/>
+          <p:cNvSpPr txBox="1"/>
+          <p:nvPr/>
+        </p:nvSpPr>
+        <p:spPr>
+          <a:xfrm>
+            <a:off x="6400800" y="1536192"/>
+            <a:ext cx="4876495" cy="365760"/>
+          </a:xfrm>
+          <a:prstGeom prst="rect">
+            <a:avLst/>
+          </a:prstGeom>
+          <a:noFill/>
+        </p:spPr>
+        <p:txBody>
+          <a:bodyPr wrap="square" lIns="0" tIns="0" rIns="0" bIns="0">
+            <a:spAutoFit/>
+          </a:bodyPr>
+          <a:lstStyle/>
+          <a:p>
+            <a:pPr>
+              <a:defRPr sz="1200" b="1">
+                <a:solidFill>
+                  <a:srgbClr val="F43F5E"/>
+                </a:solidFill>
+                <a:latin typeface="Segoe UI"/>
+              </a:defRPr>
+            </a:pPr>
+            <a:r>
+              <a:t>INTERFACE UTILISATEUR &amp; CONTRÔLE INTERACTIF INPUT()</a:t>
+            </a:r>
+          </a:p>
+        </p:txBody>
+      </p:sp>
+      <p:sp>
+        <p:nvSpPr>
+          <p:cNvPr id="12" name="TextBox 11"/>
+          <p:cNvSpPr txBox="1"/>
+          <p:nvPr/>
+        </p:nvSpPr>
+        <p:spPr>
+          <a:xfrm>
+            <a:off x="6400800" y="1920240"/>
+            <a:ext cx="4846320" cy="3931920"/>
+          </a:xfrm>
+          <a:prstGeom prst="rect">
+            <a:avLst/>
+          </a:prstGeom>
+          <a:noFill/>
+        </p:spPr>
+        <p:txBody>
+          <a:bodyPr wrap="square">
+            <a:spAutoFit/>
+          </a:bodyPr>
+          <a:lstStyle/>
+          <a:p>
+            <a:pPr>
+              <a:defRPr sz="1100" b="1">
+                <a:solidFill>
+                  <a:srgbClr val="10B981"/>
+                </a:solidFill>
+                <a:latin typeface="Segoe UI"/>
+              </a:defRPr>
+            </a:pPr>
+            <a:r>
+              <a:t>Fonction Interactive input() :</a:t>
+            </a:r>
+          </a:p>
+          <a:p>
+            <a:pPr>
+              <a:defRPr sz="1000">
+                <a:solidFill>
+                  <a:srgbClr val="F8FAFC"/>
+                </a:solidFill>
+                <a:latin typeface="Segoe UI"/>
+              </a:defRPr>
+            </a:pPr>
+            <a:r>
+              <a:t>Un programme console permet à l'utilisateur de saisir n'importe quel identifiant produit (0 à 499) pour visualiser instantanément les 5 articles recommandés.</a:t>
+            </a:r>
+          </a:p>
+          <a:p>
+            <a:pPr>
+              <a:defRPr sz="1100" b="1">
+                <a:solidFill>
+                  <a:srgbClr val="10B981"/>
+                </a:solidFill>
+                <a:latin typeface="Segoe UI"/>
+              </a:defRPr>
+            </a:pPr>
+            <a:r>
+              <a:t>Gestion des Exceptions :</a:t>
+            </a:r>
+          </a:p>
+          <a:p>
+            <a:pPr>
+              <a:defRPr sz="1000">
+                <a:solidFill>
+                  <a:srgbClr val="F8FAFC"/>
+                </a:solidFill>
+                <a:latin typeface="Segoe UI"/>
+              </a:defRPr>
+            </a:pPr>
+            <a:r>
+              <a:t>Vérification des bornes de l'index et message d'erreur explicite en cas de saisie invalide.</a:t>
+            </a:r>
+          </a:p>
+          <a:p>
+            <a:pPr>
+              <a:defRPr sz="1100" b="1">
+                <a:solidFill>
+                  <a:srgbClr val="10B981"/>
+                </a:solidFill>
+                <a:latin typeface="Segoe UI"/>
+              </a:defRPr>
+            </a:pPr>
+            <a:r>
+              <a:t>Pertinence Métier :</a:t>
+            </a:r>
+          </a:p>
+          <a:p>
+            <a:pPr>
+              <a:defRPr sz="1000">
+                <a:solidFill>
+                  <a:srgbClr val="F8FAFC"/>
+                </a:solidFill>
+                <a:latin typeface="Segoe UI"/>
+              </a:defRPr>
+            </a:pPr>
+            <a:r>
+              <a:t>100% des produits suggérés appartiennent au même usage (boxers techniques) : zéro hallucination sémantique.</a:t>
+            </a:r>
+          </a:p>
+          <a:p>
+            <a:pPr>
+              <a:defRPr sz="1100" b="1">
+                <a:solidFill>
+                  <a:srgbClr val="10B981"/>
+                </a:solidFill>
+                <a:latin typeface="Segoe UI"/>
+              </a:defRPr>
+            </a:pPr>
+            <a:r>
+              <a:t>Expérience Client :</a:t>
+            </a:r>
+          </a:p>
+          <a:p>
+            <a:pPr>
+              <a:defRPr sz="1000">
+                <a:solidFill>
+                  <a:srgbClr val="F8FAFC"/>
+                </a:solidFill>
+                <a:latin typeface="Segoe UI"/>
+              </a:defRPr>
+            </a:pPr>
+            <a:r>
+              <a:t>L'utilisateur trouve immédiatement des alternatives de coupe et de matière adaptées à son besoin.</a:t>
+            </a:r>
+          </a:p>
+        </p:txBody>
+      </p:sp>
+    </p:spTree>
+  </p:cSld>
+  <p:clrMapOvr>
+    <a:masterClrMapping/>
+  </p:clrMapOvr>
+</p:sld>
+</file>
+
+<file path=ppt/slides/slide8.xml><?xml version="1.0" encoding="utf-8"?>
+<p:sld xmlns:a="http://schemas.openxmlformats.org/drawingml/2006/main" xmlns:p="http://schemas.openxmlformats.org/presentationml/2006/main" xmlns:r="http://schemas.openxmlformats.org/officeDocument/2006/relationships">
+  <p:cSld>
+    <p:spTree>
+      <p:nvGrpSpPr>
+        <p:cNvPr id="1" name=""/>
+        <p:cNvGrpSpPr/>
+        <p:nvPr/>
+      </p:nvGrpSpPr>
+      <p:grpSpPr/>
+      <p:sp>
+        <p:nvSpPr>
+          <p:cNvPr id="2" name="Rectangle 1"/>
+          <p:cNvSpPr/>
+          <p:nvPr/>
+        </p:nvSpPr>
+        <p:spPr>
+          <a:xfrm>
+            <a:off x="0" y="0"/>
+            <a:ext cx="12191695" cy="6858000"/>
+          </a:xfrm>
+          <a:prstGeom prst="rect">
+            <a:avLst/>
+          </a:prstGeom>
+          <a:solidFill>
+            <a:srgbClr val="0B1120"/>
+          </a:solidFill>
+          <a:ln>
+            <a:noFill/>
+          </a:ln>
+        </p:spPr>
+        <p:style>
+          <a:lnRef idx="1">
+            <a:schemeClr val="accent1"/>
+          </a:lnRef>
+          <a:fillRef idx="3">
+            <a:schemeClr val="accent1"/>
+          </a:fillRef>
+          <a:effectRef idx="2">
+            <a:schemeClr val="accent1"/>
+          </a:effectRef>
+          <a:fontRef idx="minor">
+            <a:schemeClr val="lt1"/>
+          </a:fontRef>
+        </p:style>
+        <p:txBody>
+          <a:bodyPr rtlCol="0" anchor="ctr"/>
+          <a:lstStyle/>
+          <a:p>
+            <a:pPr algn="ctr"/>
+          </a:p>
+        </p:txBody>
+      </p:sp>
+      <p:sp>
+        <p:nvSpPr>
+          <p:cNvPr id="3" name="TextBox 2"/>
+          <p:cNvSpPr txBox="1"/>
+          <p:nvPr/>
+        </p:nvSpPr>
+        <p:spPr>
+          <a:xfrm>
+            <a:off x="731520" y="365760"/>
+            <a:ext cx="7315200" cy="320040"/>
+          </a:xfrm>
+          <a:prstGeom prst="rect">
+            <a:avLst/>
+          </a:prstGeom>
+          <a:noFill/>
+        </p:spPr>
+        <p:txBody>
+          <a:bodyPr wrap="square" lIns="0" tIns="0" rIns="0" bIns="0">
+            <a:spAutoFit/>
+          </a:bodyPr>
+          <a:lstStyle/>
+          <a:p>
+            <a:pPr>
+              <a:defRPr sz="1100" b="1">
+                <a:solidFill>
+                  <a:srgbClr val="F43F5E"/>
+                </a:solidFill>
+                <a:latin typeface="Segoe UI"/>
+              </a:defRPr>
+            </a:pPr>
+            <a:r>
+              <a:t>ÉTAPE 07 | MODÉLISATION THÉMATIQUE</a:t>
+            </a:r>
+          </a:p>
+        </p:txBody>
+      </p:sp>
+      <p:sp>
+        <p:nvSpPr>
+          <p:cNvPr id="4" name="TextBox 3"/>
+          <p:cNvSpPr txBox="1"/>
+          <p:nvPr/>
+        </p:nvSpPr>
+        <p:spPr>
+          <a:xfrm>
+            <a:off x="731520" y="685800"/>
+            <a:ext cx="9601200" cy="502920"/>
+          </a:xfrm>
+          <a:prstGeom prst="rect">
+            <a:avLst/>
+          </a:prstGeom>
+          <a:noFill/>
+        </p:spPr>
+        <p:txBody>
+          <a:bodyPr wrap="square" lIns="0" tIns="0" rIns="0" bIns="0">
+            <a:spAutoFit/>
+          </a:bodyPr>
+          <a:lstStyle/>
+          <a:p>
+            <a:pPr>
+              <a:defRPr sz="2200" b="1">
+                <a:solidFill>
+                  <a:srgbClr val="F8FAFC"/>
+                </a:solidFill>
+                <a:latin typeface="Segoe UI"/>
+              </a:defRPr>
+            </a:pPr>
+            <a:r>
+              <a:t>Partie 3 : Décomposition Sémantique LSA via TruncatedSVD</a:t>
+            </a:r>
+          </a:p>
+        </p:txBody>
+      </p:sp>
+      <p:sp>
+        <p:nvSpPr>
+          <p:cNvPr id="5" name="TextBox 4"/>
+          <p:cNvSpPr txBox="1"/>
+          <p:nvPr/>
+        </p:nvSpPr>
+        <p:spPr>
+          <a:xfrm>
+            <a:off x="10362895" y="411480"/>
+            <a:ext cx="1097280" cy="365760"/>
+          </a:xfrm>
+          <a:prstGeom prst="rect">
+            <a:avLst/>
+          </a:prstGeom>
+          <a:noFill/>
+        </p:spPr>
+        <p:txBody>
+          <a:bodyPr wrap="square" lIns="0" tIns="0" rIns="0" bIns="0">
+            <a:spAutoFit/>
+          </a:bodyPr>
+          <a:lstStyle/>
+          <a:p>
+            <a:pPr algn="r">
+              <a:defRPr sz="1200" b="1">
+                <a:solidFill>
+                  <a:srgbClr val="94A3B8"/>
+                </a:solidFill>
+                <a:latin typeface="Segoe UI"/>
+              </a:defRPr>
+            </a:pPr>
+            <a:r>
+              <a:t>8 / 10</a:t>
+            </a:r>
+          </a:p>
+        </p:txBody>
+      </p:sp>
+      <p:sp>
+        <p:nvSpPr>
+          <p:cNvPr id="6" name="TextBox 5"/>
+          <p:cNvSpPr txBox="1"/>
+          <p:nvPr/>
+        </p:nvSpPr>
+        <p:spPr>
+          <a:xfrm>
+            <a:off x="731520" y="6400800"/>
+            <a:ext cx="10728655" cy="274320"/>
+          </a:xfrm>
+          <a:prstGeom prst="rect">
+            <a:avLst/>
+          </a:prstGeom>
+          <a:noFill/>
+        </p:spPr>
+        <p:txBody>
+          <a:bodyPr wrap="square" lIns="0" tIns="0" rIns="0" bIns="0">
+            <a:spAutoFit/>
+          </a:bodyPr>
+          <a:lstStyle/>
+          <a:p>
+            <a:pPr>
+              <a:defRPr sz="1000">
+                <a:solidFill>
+                  <a:srgbClr val="64748B"/>
+                </a:solidFill>
+                <a:latin typeface="Segoe UI"/>
+              </a:defRPr>
+            </a:pPr>
+            <a:r>
+              <a:t>Christopher GILLERON  |  The North Face E-Commerce (ML Non Supervisé &amp; NLP)  |  Certification CDSD Bloc 3</a:t>
+            </a:r>
+          </a:p>
+        </p:txBody>
+      </p:sp>
+      <p:sp>
+        <p:nvSpPr>
+          <p:cNvPr id="7" name="Rounded Rectangle 6"/>
+          <p:cNvSpPr/>
+          <p:nvPr/>
+        </p:nvSpPr>
+        <p:spPr>
+          <a:xfrm>
+            <a:off x="731520" y="1371600"/>
+            <a:ext cx="3413455" cy="4754880"/>
+          </a:xfrm>
+          <a:prstGeom prst="roundRect">
+            <a:avLst/>
+          </a:prstGeom>
+          <a:solidFill>
+            <a:srgbClr val="1E293B"/>
+          </a:solidFill>
+          <a:ln w="19050">
+            <a:solidFill>
+              <a:srgbClr val="334155"/>
+            </a:solidFill>
+          </a:ln>
+        </p:spPr>
+        <p:style>
+          <a:lnRef idx="1">
+            <a:schemeClr val="accent1"/>
+          </a:lnRef>
+          <a:fillRef idx="3">
+            <a:schemeClr val="accent1"/>
+          </a:fillRef>
+          <a:effectRef idx="2">
+            <a:schemeClr val="accent1"/>
+          </a:effectRef>
+          <a:fontRef idx="minor">
+            <a:schemeClr val="lt1"/>
+          </a:fontRef>
+        </p:style>
+        <p:txBody>
+          <a:bodyPr rtlCol="0" anchor="ctr"/>
+          <a:lstStyle/>
+          <a:p>
+            <a:pPr algn="ctr"/>
+          </a:p>
+        </p:txBody>
+      </p:sp>
+      <p:sp>
+        <p:nvSpPr>
+          <p:cNvPr id="8" name="TextBox 7"/>
+          <p:cNvSpPr txBox="1"/>
+          <p:nvPr/>
+        </p:nvSpPr>
+        <p:spPr>
+          <a:xfrm>
+            <a:off x="914400" y="1536192"/>
+            <a:ext cx="3047695" cy="365760"/>
+          </a:xfrm>
+          <a:prstGeom prst="rect">
+            <a:avLst/>
+          </a:prstGeom>
+          <a:noFill/>
+        </p:spPr>
+        <p:txBody>
+          <a:bodyPr wrap="square" lIns="0" tIns="0" rIns="0" bIns="0">
+            <a:spAutoFit/>
+          </a:bodyPr>
+          <a:lstStyle/>
+          <a:p>
+            <a:pPr>
+              <a:defRPr sz="1200" b="1">
+                <a:solidFill>
+                  <a:srgbClr val="F43F5E"/>
+                </a:solidFill>
+                <a:latin typeface="Segoe UI"/>
+              </a:defRPr>
+            </a:pPr>
+            <a:r>
+              <a:t>01 | ANALYSE SÉMANTIQUE LATENTE (LSA)</a:t>
+            </a:r>
+          </a:p>
+        </p:txBody>
+      </p:sp>
+      <p:sp>
+        <p:nvSpPr>
+          <p:cNvPr id="9" name="TextBox 8"/>
+          <p:cNvSpPr txBox="1"/>
+          <p:nvPr/>
+        </p:nvSpPr>
+        <p:spPr>
+          <a:xfrm>
+            <a:off x="914400" y="2011680"/>
+            <a:ext cx="3047695" cy="3931920"/>
+          </a:xfrm>
+          <a:prstGeom prst="rect">
+            <a:avLst/>
+          </a:prstGeom>
+          <a:noFill/>
+        </p:spPr>
+        <p:txBody>
+          <a:bodyPr wrap="square">
+            <a:spAutoFit/>
+          </a:bodyPr>
+          <a:lstStyle/>
+          <a:p>
+            <a:pPr>
+              <a:defRPr sz="1100" b="1">
+                <a:solidFill>
+                  <a:srgbClr val="F43F5E"/>
+                </a:solidFill>
+                <a:latin typeface="Segoe UI"/>
+              </a:defRPr>
+            </a:pPr>
+            <a:r>
+              <a:t>Au-delà du Clustering Strict :</a:t>
+            </a:r>
+          </a:p>
+          <a:p>
+            <a:pPr>
+              <a:defRPr sz="1000">
+                <a:solidFill>
+                  <a:srgbClr val="F8FAFC"/>
+                </a:solidFill>
+                <a:latin typeface="Segoe UI"/>
+              </a:defRPr>
+            </a:pPr>
+            <a:r>
+              <a:t>Le clustering assigne un produit à une seule boîte. En réalité, un vêtement est multi-thématique (imperméable ET respirant ET urbain).</a:t>
+            </a:r>
+          </a:p>
+          <a:p/>
+          <a:p>
+            <a:pPr>
+              <a:defRPr sz="1100" b="1">
+                <a:solidFill>
+                  <a:srgbClr val="F43F5E"/>
+                </a:solidFill>
+                <a:latin typeface="Segoe UI"/>
+              </a:defRPr>
+            </a:pPr>
+            <a:r>
+              <a:t>Réduction TruncatedSVD :</a:t>
+            </a:r>
+          </a:p>
+          <a:p>
+            <a:pPr>
+              <a:defRPr sz="1000">
+                <a:solidFill>
+                  <a:srgbClr val="F8FAFC"/>
+                </a:solidFill>
+                <a:latin typeface="Segoe UI"/>
+              </a:defRPr>
+            </a:pPr>
+            <a:r>
+              <a:t>Factorisation de la matrice TF-IDF en 15 composantes singulières latentes (n_components=15).</a:t>
+            </a:r>
+          </a:p>
+          <a:p/>
+          <a:p>
+            <a:pPr>
+              <a:defRPr sz="1100" b="1">
+                <a:solidFill>
+                  <a:srgbClr val="F43F5E"/>
+                </a:solidFill>
+                <a:latin typeface="Segoe UI"/>
+              </a:defRPr>
+            </a:pPr>
+            <a:r>
+              <a:t>Sauvegarde topic_encoded_df :</a:t>
+            </a:r>
+          </a:p>
+          <a:p>
+            <a:pPr>
+              <a:defRPr sz="1000">
+                <a:solidFill>
+                  <a:srgbClr val="F8FAFC"/>
+                </a:solidFill>
+                <a:latin typeface="Segoe UI"/>
+              </a:defRPr>
+            </a:pPr>
+            <a:r>
+              <a:t>Stockage officiel de la matrice encodée dans la variable requise par le livrable.</a:t>
+            </a:r>
+          </a:p>
+          <a:p/>
+        </p:txBody>
+      </p:sp>
+      <p:sp>
+        <p:nvSpPr>
+          <p:cNvPr id="10" name="Rounded Rectangle 9"/>
+          <p:cNvSpPr/>
+          <p:nvPr/>
+        </p:nvSpPr>
+        <p:spPr>
+          <a:xfrm>
+            <a:off x="4389120" y="1371600"/>
+            <a:ext cx="3413455" cy="4754880"/>
+          </a:xfrm>
+          <a:prstGeom prst="roundRect">
+            <a:avLst/>
+          </a:prstGeom>
+          <a:solidFill>
+            <a:srgbClr val="1E293B"/>
+          </a:solidFill>
+          <a:ln w="19050">
+            <a:solidFill>
+              <a:srgbClr val="334155"/>
+            </a:solidFill>
+          </a:ln>
+        </p:spPr>
+        <p:style>
+          <a:lnRef idx="1">
+            <a:schemeClr val="accent1"/>
+          </a:lnRef>
+          <a:fillRef idx="3">
+            <a:schemeClr val="accent1"/>
+          </a:fillRef>
+          <a:effectRef idx="2">
+            <a:schemeClr val="accent1"/>
+          </a:effectRef>
+          <a:fontRef idx="minor">
+            <a:schemeClr val="lt1"/>
+          </a:fontRef>
+        </p:style>
+        <p:txBody>
+          <a:bodyPr rtlCol="0" anchor="ctr"/>
+          <a:lstStyle/>
+          <a:p>
+            <a:pPr algn="ctr"/>
+          </a:p>
+        </p:txBody>
+      </p:sp>
+      <p:sp>
+        <p:nvSpPr>
+          <p:cNvPr id="11" name="TextBox 10"/>
+          <p:cNvSpPr txBox="1"/>
+          <p:nvPr/>
+        </p:nvSpPr>
+        <p:spPr>
+          <a:xfrm>
+            <a:off x="4572000" y="1536192"/>
+            <a:ext cx="3047695" cy="365760"/>
+          </a:xfrm>
+          <a:prstGeom prst="rect">
+            <a:avLst/>
+          </a:prstGeom>
+          <a:noFill/>
+        </p:spPr>
+        <p:txBody>
+          <a:bodyPr wrap="square" lIns="0" tIns="0" rIns="0" bIns="0">
+            <a:spAutoFit/>
+          </a:bodyPr>
+          <a:lstStyle/>
+          <a:p>
+            <a:pPr>
+              <a:defRPr sz="1200" b="1">
+                <a:solidFill>
+                  <a:srgbClr val="F43F5E"/>
+                </a:solidFill>
+                <a:latin typeface="Segoe UI"/>
+              </a:defRPr>
+            </a:pPr>
+            <a:r>
+              <a:t>02 | EXTRACTION DU MAIN_TOPIC</a:t>
+            </a:r>
+          </a:p>
+        </p:txBody>
+      </p:sp>
+      <p:sp>
+        <p:nvSpPr>
+          <p:cNvPr id="12" name="TextBox 11"/>
+          <p:cNvSpPr txBox="1"/>
+          <p:nvPr/>
+        </p:nvSpPr>
+        <p:spPr>
+          <a:xfrm>
+            <a:off x="4572000" y="2011680"/>
+            <a:ext cx="3047695" cy="3931920"/>
+          </a:xfrm>
+          <a:prstGeom prst="rect">
+            <a:avLst/>
+          </a:prstGeom>
+          <a:noFill/>
+        </p:spPr>
+        <p:txBody>
+          <a:bodyPr wrap="square">
+            <a:spAutoFit/>
+          </a:bodyPr>
+          <a:lstStyle/>
+          <a:p>
+            <a:pPr>
+              <a:defRPr sz="1100" b="1">
+                <a:solidFill>
+                  <a:srgbClr val="F43F5E"/>
+                </a:solidFill>
+                <a:latin typeface="Segoe UI"/>
+              </a:defRPr>
+            </a:pPr>
+            <a:r>
+              <a:t>Thème Dominant par Produit :</a:t>
+            </a:r>
+          </a:p>
+          <a:p>
+            <a:pPr>
+              <a:defRPr sz="1000">
+                <a:solidFill>
+                  <a:srgbClr val="F8FAFC"/>
+                </a:solidFill>
+                <a:latin typeface="Segoe UI"/>
+              </a:defRPr>
+            </a:pPr>
+            <a:r>
+              <a:t>Application de idxmax() sur les 15 dimensions latentes pour assigner à chaque produit sa thématique principale.</a:t>
+            </a:r>
+          </a:p>
+          <a:p/>
+          <a:p>
+            <a:pPr>
+              <a:defRPr sz="1100" b="1">
+                <a:solidFill>
+                  <a:srgbClr val="F43F5E"/>
+                </a:solidFill>
+                <a:latin typeface="Segoe UI"/>
+              </a:defRPr>
+            </a:pPr>
+            <a:r>
+              <a:t>Restructuration du Catalogue :</a:t>
+            </a:r>
+          </a:p>
+          <a:p>
+            <a:pPr>
+              <a:defRPr sz="1000">
+                <a:solidFill>
+                  <a:srgbClr val="F8FAFC"/>
+                </a:solidFill>
+                <a:latin typeface="Segoe UI"/>
+              </a:defRPr>
+            </a:pPr>
+            <a:r>
+              <a:t>Permet de redéfinir automatiquement l'arborescence des catégories du site web sans intervention humaine manuelle.</a:t>
+            </a:r>
+          </a:p>
+          <a:p/>
+          <a:p>
+            <a:pPr>
+              <a:defRPr sz="1100" b="1">
+                <a:solidFill>
+                  <a:srgbClr val="F43F5E"/>
+                </a:solidFill>
+                <a:latin typeface="Segoe UI"/>
+              </a:defRPr>
+            </a:pPr>
+            <a:r>
+              <a:t>Poids Sémantique :</a:t>
+            </a:r>
+          </a:p>
+          <a:p>
+            <a:pPr>
+              <a:defRPr sz="1000">
+                <a:solidFill>
+                  <a:srgbClr val="F8FAFC"/>
+                </a:solidFill>
+                <a:latin typeface="Segoe UI"/>
+              </a:defRPr>
+            </a:pPr>
+            <a:r>
+              <a:t>Chaque composante LSA capture des cooccurrences profondes de mots-clés.</a:t>
+            </a:r>
+          </a:p>
+          <a:p/>
+        </p:txBody>
+      </p:sp>
+      <p:sp>
+        <p:nvSpPr>
+          <p:cNvPr id="13" name="Rounded Rectangle 12"/>
+          <p:cNvSpPr/>
+          <p:nvPr/>
+        </p:nvSpPr>
+        <p:spPr>
+          <a:xfrm>
+            <a:off x="8046720" y="1371600"/>
+            <a:ext cx="3413455" cy="4754880"/>
+          </a:xfrm>
+          <a:prstGeom prst="roundRect">
+            <a:avLst/>
+          </a:prstGeom>
+          <a:solidFill>
+            <a:srgbClr val="1E293B"/>
+          </a:solidFill>
+          <a:ln w="19050">
+            <a:solidFill>
+              <a:srgbClr val="334155"/>
+            </a:solidFill>
+          </a:ln>
+        </p:spPr>
+        <p:style>
+          <a:lnRef idx="1">
+            <a:schemeClr val="accent1"/>
+          </a:lnRef>
+          <a:fillRef idx="3">
+            <a:schemeClr val="accent1"/>
+          </a:fillRef>
+          <a:effectRef idx="2">
+            <a:schemeClr val="accent1"/>
+          </a:effectRef>
+          <a:fontRef idx="minor">
+            <a:schemeClr val="lt1"/>
+          </a:fontRef>
+        </p:style>
+        <p:txBody>
+          <a:bodyPr rtlCol="0" anchor="ctr"/>
+          <a:lstStyle/>
+          <a:p>
+            <a:pPr algn="ctr"/>
+          </a:p>
+        </p:txBody>
+      </p:sp>
+      <p:sp>
+        <p:nvSpPr>
+          <p:cNvPr id="14" name="TextBox 13"/>
+          <p:cNvSpPr txBox="1"/>
+          <p:nvPr/>
+        </p:nvSpPr>
+        <p:spPr>
+          <a:xfrm>
+            <a:off x="8229600" y="1536192"/>
+            <a:ext cx="3047695" cy="365760"/>
+          </a:xfrm>
+          <a:prstGeom prst="rect">
+            <a:avLst/>
+          </a:prstGeom>
+          <a:noFill/>
+        </p:spPr>
+        <p:txBody>
+          <a:bodyPr wrap="square" lIns="0" tIns="0" rIns="0" bIns="0">
+            <a:spAutoFit/>
+          </a:bodyPr>
+          <a:lstStyle/>
+          <a:p>
+            <a:pPr>
+              <a:defRPr sz="1200" b="1">
+                <a:solidFill>
+                  <a:srgbClr val="F43F5E"/>
+                </a:solidFill>
+                <a:latin typeface="Segoe UI"/>
+              </a:defRPr>
+            </a:pPr>
+            <a:r>
+              <a:t>03 | PERFORMANCE &amp; ROBUSTESSE</a:t>
+            </a:r>
+          </a:p>
+        </p:txBody>
+      </p:sp>
+      <p:sp>
+        <p:nvSpPr>
+          <p:cNvPr id="15" name="TextBox 14"/>
+          <p:cNvSpPr txBox="1"/>
+          <p:nvPr/>
+        </p:nvSpPr>
+        <p:spPr>
+          <a:xfrm>
+            <a:off x="8229600" y="2011680"/>
+            <a:ext cx="3047695" cy="3931920"/>
+          </a:xfrm>
+          <a:prstGeom prst="rect">
+            <a:avLst/>
+          </a:prstGeom>
+          <a:noFill/>
+        </p:spPr>
+        <p:txBody>
+          <a:bodyPr wrap="square">
+            <a:spAutoFit/>
+          </a:bodyPr>
+          <a:lstStyle/>
+          <a:p>
+            <a:pPr>
+              <a:defRPr sz="1100" b="1">
+                <a:solidFill>
+                  <a:srgbClr val="F43F5E"/>
+                </a:solidFill>
+                <a:latin typeface="Segoe UI"/>
+              </a:defRPr>
+            </a:pPr>
+            <a:r>
+              <a:t>Débruitage Automatique :</a:t>
+            </a:r>
+          </a:p>
+          <a:p>
+            <a:pPr>
+              <a:defRPr sz="1000">
+                <a:solidFill>
+                  <a:srgbClr val="F8FAFC"/>
+                </a:solidFill>
+                <a:latin typeface="Segoe UI"/>
+              </a:defRPr>
+            </a:pPr>
+            <a:r>
+              <a:t>LSA filtre le bruit statistique en ne conservant que les 15 axes principaux de variation sémantique.</a:t>
+            </a:r>
+          </a:p>
+          <a:p/>
+          <a:p>
+            <a:pPr>
+              <a:defRPr sz="1100" b="1">
+                <a:solidFill>
+                  <a:srgbClr val="F43F5E"/>
+                </a:solidFill>
+                <a:latin typeface="Segoe UI"/>
+              </a:defRPr>
+            </a:pPr>
+            <a:r>
+              <a:t>Généralisation E-Commerce :</a:t>
+            </a:r>
+          </a:p>
+          <a:p>
+            <a:pPr>
+              <a:defRPr sz="1000">
+                <a:solidFill>
+                  <a:srgbClr val="F8FAFC"/>
+                </a:solidFill>
+                <a:latin typeface="Segoe UI"/>
+              </a:defRPr>
+            </a:pPr>
+            <a:r>
+              <a:t>Capable de catégoriser instantanément de nouvelles descriptions produits par simple projection matricielle.</a:t>
+            </a:r>
+          </a:p>
+          <a:p/>
+          <a:p>
+            <a:pPr>
+              <a:defRPr sz="1100" b="1">
+                <a:solidFill>
+                  <a:srgbClr val="F43F5E"/>
+                </a:solidFill>
+                <a:latin typeface="Segoe UI"/>
+              </a:defRPr>
+            </a:pPr>
+            <a:r>
+              <a:t>Compatibilité SEO :</a:t>
+            </a:r>
+          </a:p>
+          <a:p>
+            <a:pPr>
+              <a:defRPr sz="1000">
+                <a:solidFill>
+                  <a:srgbClr val="F8FAFC"/>
+                </a:solidFill>
+                <a:latin typeface="Segoe UI"/>
+              </a:defRPr>
+            </a:pPr>
+            <a:r>
+              <a:t>Aligne la taxonomie du site avec le vocabulaire réellement tapé par les internautes sur Google.</a:t>
+            </a:r>
+          </a:p>
+          <a:p/>
+        </p:txBody>
+      </p:sp>
+    </p:spTree>
+  </p:cSld>
+  <p:clrMapOvr>
+    <a:masterClrMapping/>
+  </p:clrMapOvr>
+</p:sld>
+</file>
+
+<file path=ppt/slides/slide9.xml><?xml version="1.0" encoding="utf-8"?>
+<p:sld xmlns:a="http://schemas.openxmlformats.org/drawingml/2006/main" xmlns:p="http://schemas.openxmlformats.org/presentationml/2006/main" xmlns:r="http://schemas.openxmlformats.org/officeDocument/2006/relationships">
+  <p:cSld>
+    <p:spTree>
+      <p:nvGrpSpPr>
+        <p:cNvPr id="1" name=""/>
+        <p:cNvGrpSpPr/>
+        <p:nvPr/>
+      </p:nvGrpSpPr>
+      <p:grpSpPr/>
+      <p:sp>
+        <p:nvSpPr>
+          <p:cNvPr id="2" name="Rectangle 1"/>
+          <p:cNvSpPr/>
+          <p:nvPr/>
+        </p:nvSpPr>
+        <p:spPr>
+          <a:xfrm>
+            <a:off x="0" y="0"/>
+            <a:ext cx="12191695" cy="6858000"/>
+          </a:xfrm>
+          <a:prstGeom prst="rect">
+            <a:avLst/>
+          </a:prstGeom>
+          <a:solidFill>
+            <a:srgbClr val="0B1120"/>
+          </a:solidFill>
+          <a:ln>
+            <a:noFill/>
+          </a:ln>
+        </p:spPr>
+        <p:style>
+          <a:lnRef idx="1">
+            <a:schemeClr val="accent1"/>
+          </a:lnRef>
+          <a:fillRef idx="3">
+            <a:schemeClr val="accent1"/>
+          </a:fillRef>
+          <a:effectRef idx="2">
+            <a:schemeClr val="accent1"/>
+          </a:effectRef>
+          <a:fontRef idx="minor">
+            <a:schemeClr val="lt1"/>
+          </a:fontRef>
+        </p:style>
+        <p:txBody>
+          <a:bodyPr rtlCol="0" anchor="ctr"/>
+          <a:lstStyle/>
+          <a:p>
+            <a:pPr algn="ctr"/>
+          </a:p>
+        </p:txBody>
+      </p:sp>
+      <p:sp>
+        <p:nvSpPr>
+          <p:cNvPr id="3" name="TextBox 2"/>
+          <p:cNvSpPr txBox="1"/>
+          <p:nvPr/>
+        </p:nvSpPr>
+        <p:spPr>
+          <a:xfrm>
+            <a:off x="731520" y="365760"/>
+            <a:ext cx="7315200" cy="320040"/>
+          </a:xfrm>
+          <a:prstGeom prst="rect">
+            <a:avLst/>
+          </a:prstGeom>
+          <a:noFill/>
+        </p:spPr>
+        <p:txBody>
+          <a:bodyPr wrap="square" lIns="0" tIns="0" rIns="0" bIns="0">
+            <a:spAutoFit/>
+          </a:bodyPr>
+          <a:lstStyle/>
+          <a:p>
+            <a:pPr>
+              <a:defRPr sz="1100" b="1">
+                <a:solidFill>
+                  <a:srgbClr val="F43F5E"/>
+                </a:solidFill>
+                <a:latin typeface="Segoe UI"/>
+              </a:defRPr>
+            </a:pPr>
+            <a:r>
+              <a:t>ÉTAPE 08 | TAXONOMIE DES THÈMES</a:t>
+            </a:r>
+          </a:p>
+        </p:txBody>
+      </p:sp>
+      <p:sp>
+        <p:nvSpPr>
+          <p:cNvPr id="4" name="TextBox 3"/>
+          <p:cNvSpPr txBox="1"/>
+          <p:nvPr/>
+        </p:nvSpPr>
+        <p:spPr>
+          <a:xfrm>
+            <a:off x="731520" y="685800"/>
+            <a:ext cx="9601200" cy="502920"/>
+          </a:xfrm>
+          <a:prstGeom prst="rect">
+            <a:avLst/>
+          </a:prstGeom>
+          <a:noFill/>
+        </p:spPr>
+        <p:txBody>
+          <a:bodyPr wrap="square" lIns="0" tIns="0" rIns="0" bIns="0">
+            <a:spAutoFit/>
+          </a:bodyPr>
+          <a:lstStyle/>
+          <a:p>
+            <a:pPr>
+              <a:defRPr sz="2200" b="1">
+                <a:solidFill>
+                  <a:srgbClr val="F8FAFC"/>
+                </a:solidFill>
+                <a:latin typeface="Segoe UI"/>
+              </a:defRPr>
+            </a:pPr>
+            <a:r>
+              <a:t>Nuages de Mots des Thèmes Latents &amp; Nouvelles Catégories Découvertes</a:t>
+            </a:r>
+          </a:p>
+        </p:txBody>
+      </p:sp>
+      <p:sp>
+        <p:nvSpPr>
+          <p:cNvPr id="5" name="TextBox 4"/>
+          <p:cNvSpPr txBox="1"/>
+          <p:nvPr/>
+        </p:nvSpPr>
+        <p:spPr>
+          <a:xfrm>
+            <a:off x="10362895" y="411480"/>
+            <a:ext cx="1097280" cy="365760"/>
+          </a:xfrm>
+          <a:prstGeom prst="rect">
+            <a:avLst/>
+          </a:prstGeom>
+          <a:noFill/>
+        </p:spPr>
+        <p:txBody>
+          <a:bodyPr wrap="square" lIns="0" tIns="0" rIns="0" bIns="0">
+            <a:spAutoFit/>
+          </a:bodyPr>
+          <a:lstStyle/>
+          <a:p>
+            <a:pPr algn="r">
+              <a:defRPr sz="1200" b="1">
+                <a:solidFill>
+                  <a:srgbClr val="94A3B8"/>
+                </a:solidFill>
+                <a:latin typeface="Segoe UI"/>
+              </a:defRPr>
+            </a:pPr>
+            <a:r>
+              <a:t>9 / 10</a:t>
+            </a:r>
+          </a:p>
+        </p:txBody>
+      </p:sp>
+      <p:sp>
+        <p:nvSpPr>
+          <p:cNvPr id="6" name="TextBox 5"/>
+          <p:cNvSpPr txBox="1"/>
+          <p:nvPr/>
+        </p:nvSpPr>
+        <p:spPr>
+          <a:xfrm>
+            <a:off x="731520" y="6400800"/>
+            <a:ext cx="10728655" cy="274320"/>
+          </a:xfrm>
+          <a:prstGeom prst="rect">
+            <a:avLst/>
+          </a:prstGeom>
+          <a:noFill/>
+        </p:spPr>
+        <p:txBody>
+          <a:bodyPr wrap="square" lIns="0" tIns="0" rIns="0" bIns="0">
+            <a:spAutoFit/>
+          </a:bodyPr>
+          <a:lstStyle/>
+          <a:p>
+            <a:pPr>
+              <a:defRPr sz="1000">
+                <a:solidFill>
+                  <a:srgbClr val="64748B"/>
+                </a:solidFill>
+                <a:latin typeface="Segoe UI"/>
+              </a:defRPr>
+            </a:pPr>
+            <a:r>
+              <a:t>Christopher GILLERON  |  The North Face E-Commerce (ML Non Supervisé &amp; NLP)  |  Certification CDSD Bloc 3</a:t>
+            </a:r>
+          </a:p>
+        </p:txBody>
+      </p:sp>
+      <p:sp>
+        <p:nvSpPr>
+          <p:cNvPr id="7" name="Rounded Rectangle 6"/>
+          <p:cNvSpPr/>
+          <p:nvPr/>
+        </p:nvSpPr>
+        <p:spPr>
+          <a:xfrm>
+            <a:off x="731520" y="1371600"/>
+            <a:ext cx="5212080" cy="4754880"/>
+          </a:xfrm>
+          <a:prstGeom prst="roundRect">
+            <a:avLst/>
+          </a:prstGeom>
+          <a:solidFill>
+            <a:srgbClr val="1E293B"/>
+          </a:solidFill>
+          <a:ln w="19050">
+            <a:solidFill>
+              <a:srgbClr val="334155"/>
+            </a:solidFill>
+          </a:ln>
+        </p:spPr>
+        <p:style>
+          <a:lnRef idx="1">
+            <a:schemeClr val="accent1"/>
+          </a:lnRef>
+          <a:fillRef idx="3">
+            <a:schemeClr val="accent1"/>
+          </a:fillRef>
+          <a:effectRef idx="2">
+            <a:schemeClr val="accent1"/>
+          </a:effectRef>
+          <a:fontRef idx="minor">
+            <a:schemeClr val="lt1"/>
+          </a:fontRef>
+        </p:style>
+        <p:txBody>
+          <a:bodyPr rtlCol="0" anchor="ctr"/>
+          <a:lstStyle/>
+          <a:p>
+            <a:pPr algn="ctr"/>
+          </a:p>
+        </p:txBody>
+      </p:sp>
+      <p:sp>
+        <p:nvSpPr>
+          <p:cNvPr id="8" name="TextBox 7"/>
+          <p:cNvSpPr txBox="1"/>
+          <p:nvPr/>
+        </p:nvSpPr>
+        <p:spPr>
+          <a:xfrm>
+            <a:off x="914400" y="1536192"/>
+            <a:ext cx="4846320" cy="365760"/>
+          </a:xfrm>
+          <a:prstGeom prst="rect">
+            <a:avLst/>
+          </a:prstGeom>
+          <a:noFill/>
+        </p:spPr>
+        <p:txBody>
+          <a:bodyPr wrap="square" lIns="0" tIns="0" rIns="0" bIns="0">
+            <a:spAutoFit/>
+          </a:bodyPr>
+          <a:lstStyle/>
+          <a:p>
+            <a:pPr>
+              <a:defRPr sz="1200" b="1">
+                <a:solidFill>
+                  <a:srgbClr val="F43F5E"/>
+                </a:solidFill>
+                <a:latin typeface="Segoe UI"/>
+              </a:defRPr>
+            </a:pPr>
+            <a:r>
+              <a:t>LES 4 MACRO-THÈMES LATENTS MAJEURS (WORDCLOUDS LSA)</a:t>
+            </a:r>
+          </a:p>
+        </p:txBody>
+      </p:sp>
+      <p:sp>
+        <p:nvSpPr>
+          <p:cNvPr id="9" name="TextBox 8"/>
+          <p:cNvSpPr txBox="1"/>
+          <p:nvPr/>
+        </p:nvSpPr>
+        <p:spPr>
+          <a:xfrm>
+            <a:off x="914400" y="1920240"/>
+            <a:ext cx="4846320" cy="3931920"/>
+          </a:xfrm>
+          <a:prstGeom prst="rect">
+            <a:avLst/>
+          </a:prstGeom>
+          <a:noFill/>
+        </p:spPr>
+        <p:txBody>
+          <a:bodyPr wrap="square">
+            <a:spAutoFit/>
+          </a:bodyPr>
+          <a:lstStyle/>
+          <a:p>
+            <a:pPr>
+              <a:defRPr sz="1100" b="1">
+                <a:solidFill>
+                  <a:srgbClr val="F43F5E"/>
+                </a:solidFill>
+                <a:latin typeface="Segoe UI"/>
+              </a:defRPr>
+            </a:pPr>
+            <a:r>
+              <a:t>Thème 1 : Vêtements Imperméables &amp; Coques (Shells) :</a:t>
+            </a:r>
+          </a:p>
+          <a:p>
+            <a:pPr>
+              <a:defRPr sz="1000">
+                <a:solidFill>
+                  <a:srgbClr val="F8FAFC"/>
+                </a:solidFill>
+                <a:latin typeface="Segoe UI"/>
+              </a:defRPr>
+            </a:pPr>
+            <a:r>
+              <a:t>Termes LSA : 'waterproof', 'jacket', 'breathable', 'membrane', 'hood', 'storm'. Réunit les technologies Gore-Tex et DryVent.</a:t>
+            </a:r>
+          </a:p>
+          <a:p>
+            <a:pPr>
+              <a:defRPr sz="1100" b="1">
+                <a:solidFill>
+                  <a:srgbClr val="F43F5E"/>
+                </a:solidFill>
+                <a:latin typeface="Segoe UI"/>
+              </a:defRPr>
+            </a:pPr>
+            <a:r>
+              <a:t>Thème 2 : Isolation Thermique &amp; Couches Chaudes :</a:t>
+            </a:r>
+          </a:p>
+          <a:p>
+            <a:pPr>
+              <a:defRPr sz="1000">
+                <a:solidFill>
+                  <a:srgbClr val="F8FAFC"/>
+                </a:solidFill>
+                <a:latin typeface="Segoe UI"/>
+              </a:defRPr>
+            </a:pPr>
+            <a:r>
+              <a:t>Termes LSA : 'fleece', 'down', 'insulation', 'warmth', 'winter', 'thermal'. Produits en duvet d'oie et fibres polaires.</a:t>
+            </a:r>
+          </a:p>
+          <a:p>
+            <a:pPr>
+              <a:defRPr sz="1100" b="1">
+                <a:solidFill>
+                  <a:srgbClr val="F43F5E"/>
+                </a:solidFill>
+                <a:latin typeface="Segoe UI"/>
+              </a:defRPr>
+            </a:pPr>
+            <a:r>
+              <a:t>Thème 3 : Portage &amp; Équipement d'Expédition :</a:t>
+            </a:r>
+          </a:p>
+          <a:p>
+            <a:pPr>
+              <a:defRPr sz="1000">
+                <a:solidFill>
+                  <a:srgbClr val="F8FAFC"/>
+                </a:solidFill>
+                <a:latin typeface="Segoe UI"/>
+              </a:defRPr>
+            </a:pPr>
+            <a:r>
+              <a:t>Termes LSA : 'pack', 'backpack', 'volume', 'pocket', 'harness', 'load', 'durable'. Sacs techniques pour trekking.</a:t>
+            </a:r>
+          </a:p>
+          <a:p>
+            <a:pPr>
+              <a:defRPr sz="1100" b="1">
+                <a:solidFill>
+                  <a:srgbClr val="F43F5E"/>
+                </a:solidFill>
+                <a:latin typeface="Segoe UI"/>
+              </a:defRPr>
+            </a:pPr>
+            <a:r>
+              <a:t>Thème 4 : Vêtements Respirants Trail &amp; Running :</a:t>
+            </a:r>
+          </a:p>
+          <a:p>
+            <a:pPr>
+              <a:defRPr sz="1000">
+                <a:solidFill>
+                  <a:srgbClr val="F8FAFC"/>
+                </a:solidFill>
+                <a:latin typeface="Segoe UI"/>
+              </a:defRPr>
+            </a:pPr>
+            <a:r>
+              <a:t>Termes LSA : 'short', 'shirt', 'mesh', 'lightweight', 'sweat', 'quick-dry', 'stretch'. Tenues de course et sous-vêtements actifs.</a:t>
+            </a:r>
+          </a:p>
+        </p:txBody>
+      </p:sp>
+      <p:sp>
+        <p:nvSpPr>
+          <p:cNvPr id="10" name="Rounded Rectangle 9"/>
+          <p:cNvSpPr/>
+          <p:nvPr/>
+        </p:nvSpPr>
+        <p:spPr>
+          <a:xfrm>
+            <a:off x="6217920" y="1371600"/>
+            <a:ext cx="5242255" cy="4754880"/>
+          </a:xfrm>
+          <a:prstGeom prst="roundRect">
+            <a:avLst/>
+          </a:prstGeom>
+          <a:solidFill>
+            <a:srgbClr val="1E293B"/>
+          </a:solidFill>
+          <a:ln w="19050">
+            <a:solidFill>
+              <a:srgbClr val="334155"/>
+            </a:solidFill>
+          </a:ln>
+        </p:spPr>
+        <p:style>
+          <a:lnRef idx="1">
+            <a:schemeClr val="accent1"/>
+          </a:lnRef>
+          <a:fillRef idx="3">
+            <a:schemeClr val="accent1"/>
+          </a:fillRef>
+          <a:effectRef idx="2">
+            <a:schemeClr val="accent1"/>
+          </a:effectRef>
+          <a:fontRef idx="minor">
+            <a:schemeClr val="lt1"/>
+          </a:fontRef>
+        </p:style>
+        <p:txBody>
+          <a:bodyPr rtlCol="0" anchor="ctr"/>
+          <a:lstStyle/>
+          <a:p>
+            <a:pPr algn="ctr"/>
+          </a:p>
+        </p:txBody>
+      </p:sp>
+      <p:sp>
+        <p:nvSpPr>
+          <p:cNvPr id="11" name="TextBox 10"/>
+          <p:cNvSpPr txBox="1"/>
+          <p:nvPr/>
+        </p:nvSpPr>
+        <p:spPr>
+          <a:xfrm>
+            <a:off x="6400800" y="1536192"/>
+            <a:ext cx="4876495" cy="365760"/>
+          </a:xfrm>
+          <a:prstGeom prst="rect">
+            <a:avLst/>
+          </a:prstGeom>
+          <a:noFill/>
+        </p:spPr>
+        <p:txBody>
+          <a:bodyPr wrap="square" lIns="0" tIns="0" rIns="0" bIns="0">
+            <a:spAutoFit/>
+          </a:bodyPr>
+          <a:lstStyle/>
+          <a:p>
+            <a:pPr>
+              <a:defRPr sz="1200" b="1">
+                <a:solidFill>
+                  <a:srgbClr val="F43F5E"/>
+                </a:solidFill>
+                <a:latin typeface="Segoe UI"/>
+              </a:defRPr>
+            </a:pPr>
+            <a:r>
+              <a:t>REPENSER L'ARBORESCENCE DU SITE WEB THE NORTH FACE</a:t>
+            </a:r>
+          </a:p>
+        </p:txBody>
+      </p:sp>
+      <p:sp>
+        <p:nvSpPr>
+          <p:cNvPr id="12" name="TextBox 11"/>
+          <p:cNvSpPr txBox="1"/>
+          <p:nvPr/>
+        </p:nvSpPr>
+        <p:spPr>
+          <a:xfrm>
+            <a:off x="6400800" y="1920240"/>
+            <a:ext cx="4846320" cy="3931920"/>
+          </a:xfrm>
+          <a:prstGeom prst="rect">
+            <a:avLst/>
+          </a:prstGeom>
+          <a:noFill/>
+        </p:spPr>
+        <p:txBody>
+          <a:bodyPr wrap="square">
+            <a:spAutoFit/>
+          </a:bodyPr>
+          <a:lstStyle/>
+          <a:p>
+            <a:pPr>
+              <a:defRPr sz="1100" b="1">
+                <a:solidFill>
+                  <a:srgbClr val="38BDF8"/>
+                </a:solidFill>
+                <a:latin typeface="Segoe UI"/>
+              </a:defRPr>
+            </a:pPr>
+            <a:r>
+              <a:t>Navigation Traditionnelle (Dépassée) :</a:t>
+            </a:r>
+          </a:p>
+          <a:p>
+            <a:pPr>
+              <a:defRPr sz="1000">
+                <a:solidFill>
+                  <a:srgbClr val="F8FAFC"/>
+                </a:solidFill>
+                <a:latin typeface="Segoe UI"/>
+              </a:defRPr>
+            </a:pPr>
+            <a:r>
+              <a:t>L'arborescence 'Homme / Femme / Accessoires' force l'utilisateur à naviguer en silo, sans lien avec l'activité pratiquée.</a:t>
+            </a:r>
+          </a:p>
+          <a:p>
+            <a:pPr>
+              <a:defRPr sz="1100" b="1">
+                <a:solidFill>
+                  <a:srgbClr val="38BDF8"/>
+                </a:solidFill>
+                <a:latin typeface="Segoe UI"/>
+              </a:defRPr>
+            </a:pPr>
+            <a:r>
+              <a:t>Nouvelle Navigation Thématique Déduite par LSA :</a:t>
+            </a:r>
+          </a:p>
+          <a:p>
+            <a:pPr>
+              <a:defRPr sz="1000">
+                <a:solidFill>
+                  <a:srgbClr val="F8FAFC"/>
+                </a:solidFill>
+                <a:latin typeface="Segoe UI"/>
+              </a:defRPr>
+            </a:pPr>
+            <a:r>
+              <a:t>• 'Expédition Alpinisme &amp; Grand Froid' (Thème Duvet/Gore-Tex)</a:t>
+            </a:r>
+            <a:br/>
+            <a:r>
+              <a:t>• 'Randonnée &amp; Bivouac Léger' (Thème Portage &amp; Stretch)</a:t>
+            </a:r>
+            <a:br/>
+            <a:r>
+              <a:t>• 'Trail Running &amp; Performance Active' (Thème Respirabilité)</a:t>
+            </a:r>
+            <a:br/>
+            <a:r>
+              <a:t>• 'Lifestyle Éco-responsable' (Thème Coton Bio &amp; Vêtements Quotidiens).</a:t>
+            </a:r>
+          </a:p>
+          <a:p>
+            <a:pPr>
+              <a:defRPr sz="1100" b="1">
+                <a:solidFill>
+                  <a:srgbClr val="38BDF8"/>
+                </a:solidFill>
+                <a:latin typeface="Segoe UI"/>
+              </a:defRPr>
+            </a:pPr>
+            <a:r>
+              <a:t>Impact sur l'Expérience Client :</a:t>
+            </a:r>
+          </a:p>
+          <a:p>
+            <a:pPr>
+              <a:defRPr sz="1000">
+                <a:solidFill>
+                  <a:srgbClr val="F8FAFC"/>
+                </a:solidFill>
+                <a:latin typeface="Segoe UI"/>
+              </a:defRPr>
+            </a:pPr>
+            <a:r>
+              <a:t>Réduction du nombre de clics pour trouver le produit idéal et augmentation mécanique du panier moyen.</a:t>
             </a:r>
           </a:p>
         </p:txBody>

--- a/Bloc_3_Machine_Learning/North_Face/North_face_presentation.pptx
+++ b/Bloc_3_Machine_Learning/North_Face/North_face_presentation.pptx
@@ -13,8 +13,6 @@
     <p:sldId id="261" r:id="rId12"/>
     <p:sldId id="262" r:id="rId13"/>
     <p:sldId id="263" r:id="rId14"/>
-    <p:sldId id="264" r:id="rId15"/>
-    <p:sldId id="265" r:id="rId16"/>
   </p:sldIdLst>
   <p:sldSz cx="12191695" cy="6858000" type="screen4x3"/>
   <p:notesSz cx="6858000" cy="9144000"/>
@@ -3202,7 +3200,7 @@
           <a:noFill/>
         </p:spPr>
         <p:txBody>
-          <a:bodyPr wrap="square">
+          <a:bodyPr wrap="none">
             <a:spAutoFit/>
           </a:bodyPr>
           <a:lstStyle/>
@@ -3238,7 +3236,7 @@
           <a:noFill/>
         </p:spPr>
         <p:txBody>
-          <a:bodyPr wrap="square">
+          <a:bodyPr wrap="none">
             <a:spAutoFit/>
           </a:bodyPr>
           <a:lstStyle/>
@@ -3330,7 +3328,7 @@
           <a:noFill/>
         </p:spPr>
         <p:txBody>
-          <a:bodyPr wrap="square">
+          <a:bodyPr wrap="none">
             <a:spAutoFit/>
           </a:bodyPr>
           <a:lstStyle/>
@@ -3392,7 +3390,7 @@
           <a:noFill/>
         </p:spPr>
         <p:txBody>
-          <a:bodyPr wrap="square">
+          <a:bodyPr wrap="none">
             <a:spAutoFit/>
           </a:bodyPr>
           <a:lstStyle/>
@@ -3454,7 +3452,7 @@
           <a:noFill/>
         </p:spPr>
         <p:txBody>
-          <a:bodyPr wrap="square">
+          <a:bodyPr wrap="none">
             <a:spAutoFit/>
           </a:bodyPr>
           <a:lstStyle/>
@@ -3516,7 +3514,7 @@
           <a:noFill/>
         </p:spPr>
         <p:txBody>
-          <a:bodyPr wrap="square">
+          <a:bodyPr wrap="none">
             <a:spAutoFit/>
           </a:bodyPr>
           <a:lstStyle/>
@@ -3530,940 +3528,7 @@
               </a:defRPr>
             </a:pPr>
             <a:r>
-              <a:t>Candidat : Christopher GILLERON   |   Commanditaire : The North Face   |   Certification CDSD (Niveau 7)   |   Jedha Bootcamp</a:t>
-            </a:r>
-          </a:p>
-        </p:txBody>
-      </p:sp>
-    </p:spTree>
-  </p:cSld>
-  <p:clrMapOvr>
-    <a:masterClrMapping/>
-  </p:clrMapOvr>
-</p:sld>
-</file>
-
-<file path=ppt/slides/slide10.xml><?xml version="1.0" encoding="utf-8"?>
-<p:sld xmlns:a="http://schemas.openxmlformats.org/drawingml/2006/main" xmlns:p="http://schemas.openxmlformats.org/presentationml/2006/main" xmlns:r="http://schemas.openxmlformats.org/officeDocument/2006/relationships">
-  <p:cSld>
-    <p:spTree>
-      <p:nvGrpSpPr>
-        <p:cNvPr id="1" name=""/>
-        <p:cNvGrpSpPr/>
-        <p:nvPr/>
-      </p:nvGrpSpPr>
-      <p:grpSpPr/>
-      <p:sp>
-        <p:nvSpPr>
-          <p:cNvPr id="2" name="Rectangle 1"/>
-          <p:cNvSpPr/>
-          <p:nvPr/>
-        </p:nvSpPr>
-        <p:spPr>
-          <a:xfrm>
-            <a:off x="0" y="0"/>
-            <a:ext cx="12191695" cy="6858000"/>
-          </a:xfrm>
-          <a:prstGeom prst="rect">
-            <a:avLst/>
-          </a:prstGeom>
-          <a:solidFill>
-            <a:srgbClr val="0B1120"/>
-          </a:solidFill>
-          <a:ln>
-            <a:noFill/>
-          </a:ln>
-        </p:spPr>
-        <p:style>
-          <a:lnRef idx="1">
-            <a:schemeClr val="accent1"/>
-          </a:lnRef>
-          <a:fillRef idx="3">
-            <a:schemeClr val="accent1"/>
-          </a:fillRef>
-          <a:effectRef idx="2">
-            <a:schemeClr val="accent1"/>
-          </a:effectRef>
-          <a:fontRef idx="minor">
-            <a:schemeClr val="lt1"/>
-          </a:fontRef>
-        </p:style>
-        <p:txBody>
-          <a:bodyPr rtlCol="0" anchor="ctr"/>
-          <a:lstStyle/>
-          <a:p>
-            <a:pPr algn="ctr"/>
-          </a:p>
-        </p:txBody>
-      </p:sp>
-      <p:sp>
-        <p:nvSpPr>
-          <p:cNvPr id="3" name="TextBox 2"/>
-          <p:cNvSpPr txBox="1"/>
-          <p:nvPr/>
-        </p:nvSpPr>
-        <p:spPr>
-          <a:xfrm>
-            <a:off x="731520" y="365760"/>
-            <a:ext cx="7315200" cy="320040"/>
-          </a:xfrm>
-          <a:prstGeom prst="rect">
-            <a:avLst/>
-          </a:prstGeom>
-          <a:noFill/>
-        </p:spPr>
-        <p:txBody>
-          <a:bodyPr wrap="square" lIns="0" tIns="0" rIns="0" bIns="0">
-            <a:spAutoFit/>
-          </a:bodyPr>
-          <a:lstStyle/>
-          <a:p>
-            <a:pPr>
-              <a:defRPr sz="1100" b="1">
-                <a:solidFill>
-                  <a:srgbClr val="F43F5E"/>
-                </a:solidFill>
-                <a:latin typeface="Segoe UI"/>
-              </a:defRPr>
-            </a:pPr>
-            <a:r>
-              <a:t>ÉTAPE 09 | SYNTHÈSE &amp; PLAN D'ACTION</a:t>
-            </a:r>
-          </a:p>
-        </p:txBody>
-      </p:sp>
-      <p:sp>
-        <p:nvSpPr>
-          <p:cNvPr id="4" name="TextBox 3"/>
-          <p:cNvSpPr txBox="1"/>
-          <p:nvPr/>
-        </p:nvSpPr>
-        <p:spPr>
-          <a:xfrm>
-            <a:off x="731520" y="685800"/>
-            <a:ext cx="9601200" cy="502920"/>
-          </a:xfrm>
-          <a:prstGeom prst="rect">
-            <a:avLst/>
-          </a:prstGeom>
-          <a:noFill/>
-        </p:spPr>
-        <p:txBody>
-          <a:bodyPr wrap="square" lIns="0" tIns="0" rIns="0" bIns="0">
-            <a:spAutoFit/>
-          </a:bodyPr>
-          <a:lstStyle/>
-          <a:p>
-            <a:pPr>
-              <a:defRPr sz="2200" b="1">
-                <a:solidFill>
-                  <a:srgbClr val="F8FAFC"/>
-                </a:solidFill>
-                <a:latin typeface="Segoe UI"/>
-              </a:defRPr>
-            </a:pPr>
-            <a:r>
-              <a:t>Bilan Opérationnel &amp; Feuille de Route E-Commerce pour The North Face</a:t>
-            </a:r>
-          </a:p>
-        </p:txBody>
-      </p:sp>
-      <p:sp>
-        <p:nvSpPr>
-          <p:cNvPr id="5" name="TextBox 4"/>
-          <p:cNvSpPr txBox="1"/>
-          <p:nvPr/>
-        </p:nvSpPr>
-        <p:spPr>
-          <a:xfrm>
-            <a:off x="10362895" y="411480"/>
-            <a:ext cx="1097280" cy="365760"/>
-          </a:xfrm>
-          <a:prstGeom prst="rect">
-            <a:avLst/>
-          </a:prstGeom>
-          <a:noFill/>
-        </p:spPr>
-        <p:txBody>
-          <a:bodyPr wrap="square" lIns="0" tIns="0" rIns="0" bIns="0">
-            <a:spAutoFit/>
-          </a:bodyPr>
-          <a:lstStyle/>
-          <a:p>
-            <a:pPr algn="r">
-              <a:defRPr sz="1200" b="1">
-                <a:solidFill>
-                  <a:srgbClr val="94A3B8"/>
-                </a:solidFill>
-                <a:latin typeface="Segoe UI"/>
-              </a:defRPr>
-            </a:pPr>
-            <a:r>
-              <a:t>10 / 10</a:t>
-            </a:r>
-          </a:p>
-        </p:txBody>
-      </p:sp>
-      <p:sp>
-        <p:nvSpPr>
-          <p:cNvPr id="6" name="TextBox 5"/>
-          <p:cNvSpPr txBox="1"/>
-          <p:nvPr/>
-        </p:nvSpPr>
-        <p:spPr>
-          <a:xfrm>
-            <a:off x="731520" y="6400800"/>
-            <a:ext cx="10728655" cy="274320"/>
-          </a:xfrm>
-          <a:prstGeom prst="rect">
-            <a:avLst/>
-          </a:prstGeom>
-          <a:noFill/>
-        </p:spPr>
-        <p:txBody>
-          <a:bodyPr wrap="square" lIns="0" tIns="0" rIns="0" bIns="0">
-            <a:spAutoFit/>
-          </a:bodyPr>
-          <a:lstStyle/>
-          <a:p>
-            <a:pPr>
-              <a:defRPr sz="1000">
-                <a:solidFill>
-                  <a:srgbClr val="64748B"/>
-                </a:solidFill>
-                <a:latin typeface="Segoe UI"/>
-              </a:defRPr>
-            </a:pPr>
-            <a:r>
-              <a:t>Christopher GILLERON  |  The North Face E-Commerce (ML Non Supervisé &amp; NLP)  |  Certification CDSD Bloc 3</a:t>
-            </a:r>
-          </a:p>
-        </p:txBody>
-      </p:sp>
-      <p:sp>
-        <p:nvSpPr>
-          <p:cNvPr id="7" name="Rounded Rectangle 6"/>
-          <p:cNvSpPr/>
-          <p:nvPr/>
-        </p:nvSpPr>
-        <p:spPr>
-          <a:xfrm>
-            <a:off x="731520" y="1371600"/>
-            <a:ext cx="5242255" cy="2377440"/>
-          </a:xfrm>
-          <a:prstGeom prst="roundRect">
-            <a:avLst/>
-          </a:prstGeom>
-          <a:solidFill>
-            <a:srgbClr val="1E293B"/>
-          </a:solidFill>
-          <a:ln w="19050">
-            <a:solidFill>
-              <a:srgbClr val="F43F5E"/>
-            </a:solidFill>
-          </a:ln>
-        </p:spPr>
-        <p:style>
-          <a:lnRef idx="1">
-            <a:schemeClr val="accent1"/>
-          </a:lnRef>
-          <a:fillRef idx="3">
-            <a:schemeClr val="accent1"/>
-          </a:fillRef>
-          <a:effectRef idx="2">
-            <a:schemeClr val="accent1"/>
-          </a:effectRef>
-          <a:fontRef idx="minor">
-            <a:schemeClr val="lt1"/>
-          </a:fontRef>
-        </p:style>
-        <p:txBody>
-          <a:bodyPr rtlCol="0" anchor="ctr"/>
-          <a:lstStyle/>
-          <a:p>
-            <a:pPr algn="ctr"/>
-          </a:p>
-        </p:txBody>
-      </p:sp>
-      <p:sp>
-        <p:nvSpPr>
-          <p:cNvPr id="8" name="TextBox 7"/>
-          <p:cNvSpPr txBox="1"/>
-          <p:nvPr/>
-        </p:nvSpPr>
-        <p:spPr>
-          <a:xfrm>
-            <a:off x="914400" y="1536192"/>
-            <a:ext cx="4876495" cy="365760"/>
-          </a:xfrm>
-          <a:prstGeom prst="rect">
-            <a:avLst/>
-          </a:prstGeom>
-          <a:noFill/>
-        </p:spPr>
-        <p:txBody>
-          <a:bodyPr wrap="square" lIns="0" tIns="0" rIns="0" bIns="0">
-            <a:spAutoFit/>
-          </a:bodyPr>
-          <a:lstStyle/>
-          <a:p>
-            <a:pPr>
-              <a:defRPr sz="1200" b="1">
-                <a:solidFill>
-                  <a:srgbClr val="F43F5E"/>
-                </a:solidFill>
-                <a:latin typeface="Segoe UI"/>
-              </a:defRPr>
-            </a:pPr>
-            <a:r>
-              <a:t>01 | DÉPLOIEMENT CARROUSEL 'PRODUITS SIMILAIRES'</a:t>
-            </a:r>
-          </a:p>
-        </p:txBody>
-      </p:sp>
-      <p:sp>
-        <p:nvSpPr>
-          <p:cNvPr id="9" name="TextBox 8"/>
-          <p:cNvSpPr txBox="1"/>
-          <p:nvPr/>
-        </p:nvSpPr>
-        <p:spPr>
-          <a:xfrm>
-            <a:off x="914400" y="1965960"/>
-            <a:ext cx="4876495" cy="1691640"/>
-          </a:xfrm>
-          <a:prstGeom prst="rect">
-            <a:avLst/>
-          </a:prstGeom>
-          <a:noFill/>
-        </p:spPr>
-        <p:txBody>
-          <a:bodyPr wrap="square">
-            <a:spAutoFit/>
-          </a:bodyPr>
-          <a:lstStyle/>
-          <a:p>
-            <a:pPr>
-              <a:defRPr sz="1050" b="1">
-                <a:solidFill>
-                  <a:srgbClr val="F43F5E"/>
-                </a:solidFill>
-                <a:latin typeface="Segoe UI"/>
-              </a:defRPr>
-            </a:pPr>
-            <a:r>
-              <a:t>Intégration Web :</a:t>
-            </a:r>
-          </a:p>
-          <a:p>
-            <a:pPr>
-              <a:defRPr sz="950">
-                <a:solidFill>
-                  <a:srgbClr val="F8FAFC"/>
-                </a:solidFill>
-                <a:latin typeface="Segoe UI"/>
-              </a:defRPr>
-            </a:pPr>
-            <a:r>
-              <a:t>Intégrer le widget find_similar_items() sous chaque fiche produit du site thenorthface.fr.</a:t>
-            </a:r>
-          </a:p>
-          <a:p>
-            <a:pPr>
-              <a:defRPr sz="1050" b="1">
-                <a:solidFill>
-                  <a:srgbClr val="F43F5E"/>
-                </a:solidFill>
-                <a:latin typeface="Segoe UI"/>
-              </a:defRPr>
-            </a:pPr>
-            <a:r>
-              <a:t>Impact Chiffré :</a:t>
-            </a:r>
-          </a:p>
-          <a:p>
-            <a:pPr>
-              <a:defRPr sz="950">
-                <a:solidFill>
-                  <a:srgbClr val="F8FAFC"/>
-                </a:solidFill>
-                <a:latin typeface="Segoe UI"/>
-              </a:defRPr>
-            </a:pPr>
-            <a:r>
-              <a:t>Hausse estimée de +12% à +18% du taux de clic et réduction du taux de rebond de 20%.</a:t>
-            </a:r>
-          </a:p>
-          <a:p>
-            <a:pPr>
-              <a:defRPr sz="1050" b="1">
-                <a:solidFill>
-                  <a:srgbClr val="F43F5E"/>
-                </a:solidFill>
-                <a:latin typeface="Segoe UI"/>
-              </a:defRPr>
-            </a:pPr>
-            <a:r>
-              <a:t>KPI Cible :</a:t>
-            </a:r>
-          </a:p>
-          <a:p>
-            <a:pPr>
-              <a:defRPr sz="950">
-                <a:solidFill>
-                  <a:srgbClr val="F8FAFC"/>
-                </a:solidFill>
-                <a:latin typeface="Segoe UI"/>
-              </a:defRPr>
-            </a:pPr>
-            <a:r>
-              <a:t>Augmentation du panier moyen via le cross-selling de produits complémentaires.</a:t>
-            </a:r>
-          </a:p>
-        </p:txBody>
-      </p:sp>
-      <p:sp>
-        <p:nvSpPr>
-          <p:cNvPr id="10" name="Rounded Rectangle 9"/>
-          <p:cNvSpPr/>
-          <p:nvPr/>
-        </p:nvSpPr>
-        <p:spPr>
-          <a:xfrm>
-            <a:off x="6217920" y="1371600"/>
-            <a:ext cx="5242255" cy="2377440"/>
-          </a:xfrm>
-          <a:prstGeom prst="roundRect">
-            <a:avLst/>
-          </a:prstGeom>
-          <a:solidFill>
-            <a:srgbClr val="1E293B"/>
-          </a:solidFill>
-          <a:ln w="19050">
-            <a:solidFill>
-              <a:srgbClr val="38BDF8"/>
-            </a:solidFill>
-          </a:ln>
-        </p:spPr>
-        <p:style>
-          <a:lnRef idx="1">
-            <a:schemeClr val="accent1"/>
-          </a:lnRef>
-          <a:fillRef idx="3">
-            <a:schemeClr val="accent1"/>
-          </a:fillRef>
-          <a:effectRef idx="2">
-            <a:schemeClr val="accent1"/>
-          </a:effectRef>
-          <a:fontRef idx="minor">
-            <a:schemeClr val="lt1"/>
-          </a:fontRef>
-        </p:style>
-        <p:txBody>
-          <a:bodyPr rtlCol="0" anchor="ctr"/>
-          <a:lstStyle/>
-          <a:p>
-            <a:pPr algn="ctr"/>
-          </a:p>
-        </p:txBody>
-      </p:sp>
-      <p:sp>
-        <p:nvSpPr>
-          <p:cNvPr id="11" name="TextBox 10"/>
-          <p:cNvSpPr txBox="1"/>
-          <p:nvPr/>
-        </p:nvSpPr>
-        <p:spPr>
-          <a:xfrm>
-            <a:off x="6400800" y="1536192"/>
-            <a:ext cx="4876495" cy="365760"/>
-          </a:xfrm>
-          <a:prstGeom prst="rect">
-            <a:avLst/>
-          </a:prstGeom>
-          <a:noFill/>
-        </p:spPr>
-        <p:txBody>
-          <a:bodyPr wrap="square" lIns="0" tIns="0" rIns="0" bIns="0">
-            <a:spAutoFit/>
-          </a:bodyPr>
-          <a:lstStyle/>
-          <a:p>
-            <a:pPr>
-              <a:defRPr sz="1200" b="1">
-                <a:solidFill>
-                  <a:srgbClr val="F43F5E"/>
-                </a:solidFill>
-                <a:latin typeface="Segoe UI"/>
-              </a:defRPr>
-            </a:pPr>
-            <a:r>
-              <a:t>02 | REFONTE TAXONOMIE &amp; SEO THÉMATIQUE</a:t>
-            </a:r>
-          </a:p>
-        </p:txBody>
-      </p:sp>
-      <p:sp>
-        <p:nvSpPr>
-          <p:cNvPr id="12" name="TextBox 11"/>
-          <p:cNvSpPr txBox="1"/>
-          <p:nvPr/>
-        </p:nvSpPr>
-        <p:spPr>
-          <a:xfrm>
-            <a:off x="6400800" y="1965960"/>
-            <a:ext cx="4876495" cy="1691640"/>
-          </a:xfrm>
-          <a:prstGeom prst="rect">
-            <a:avLst/>
-          </a:prstGeom>
-          <a:noFill/>
-        </p:spPr>
-        <p:txBody>
-          <a:bodyPr wrap="square">
-            <a:spAutoFit/>
-          </a:bodyPr>
-          <a:lstStyle/>
-          <a:p>
-            <a:pPr>
-              <a:defRPr sz="1050" b="1">
-                <a:solidFill>
-                  <a:srgbClr val="38BDF8"/>
-                </a:solidFill>
-                <a:latin typeface="Segoe UI"/>
-              </a:defRPr>
-            </a:pPr>
-            <a:r>
-              <a:t>Landing Pages LSA :</a:t>
-            </a:r>
-          </a:p>
-          <a:p>
-            <a:pPr>
-              <a:defRPr sz="950">
-                <a:solidFill>
-                  <a:srgbClr val="F8FAFC"/>
-                </a:solidFill>
-                <a:latin typeface="Segoe UI"/>
-              </a:defRPr>
-            </a:pPr>
-            <a:r>
-              <a:t>Créer des pages de collection automatisées basées sur les 15 thèmes LSA découverts.</a:t>
-            </a:r>
-          </a:p>
-          <a:p>
-            <a:pPr>
-              <a:defRPr sz="1050" b="1">
-                <a:solidFill>
-                  <a:srgbClr val="38BDF8"/>
-                </a:solidFill>
-                <a:latin typeface="Segoe UI"/>
-              </a:defRPr>
-            </a:pPr>
-            <a:r>
-              <a:t>SEO Organique :</a:t>
-            </a:r>
-          </a:p>
-          <a:p>
-            <a:pPr>
-              <a:defRPr sz="950">
-                <a:solidFill>
-                  <a:srgbClr val="F8FAFC"/>
-                </a:solidFill>
-                <a:latin typeface="Segoe UI"/>
-              </a:defRPr>
-            </a:pPr>
-            <a:r>
-              <a:t>Cibler les requêtes longue traîne 'veste imperméable respirante' plutôt que de simples catégories génériques.</a:t>
-            </a:r>
-          </a:p>
-          <a:p>
-            <a:pPr>
-              <a:defRPr sz="1050" b="1">
-                <a:solidFill>
-                  <a:srgbClr val="38BDF8"/>
-                </a:solidFill>
-                <a:latin typeface="Segoe UI"/>
-              </a:defRPr>
-            </a:pPr>
-            <a:r>
-              <a:t>Expérience UX :</a:t>
-            </a:r>
-          </a:p>
-          <a:p>
-            <a:pPr>
-              <a:defRPr sz="950">
-                <a:solidFill>
-                  <a:srgbClr val="F8FAFC"/>
-                </a:solidFill>
-                <a:latin typeface="Segoe UI"/>
-              </a:defRPr>
-            </a:pPr>
-            <a:r>
-              <a:t>Navigation fluide orientée 'activité et météo' plutôt que 'genre vestimentaire'.</a:t>
-            </a:r>
-          </a:p>
-        </p:txBody>
-      </p:sp>
-      <p:sp>
-        <p:nvSpPr>
-          <p:cNvPr id="13" name="Rounded Rectangle 12"/>
-          <p:cNvSpPr/>
-          <p:nvPr/>
-        </p:nvSpPr>
-        <p:spPr>
-          <a:xfrm>
-            <a:off x="731520" y="3931920"/>
-            <a:ext cx="5242255" cy="2377440"/>
-          </a:xfrm>
-          <a:prstGeom prst="roundRect">
-            <a:avLst/>
-          </a:prstGeom>
-          <a:solidFill>
-            <a:srgbClr val="1E293B"/>
-          </a:solidFill>
-          <a:ln w="19050">
-            <a:solidFill>
-              <a:srgbClr val="F59E0B"/>
-            </a:solidFill>
-          </a:ln>
-        </p:spPr>
-        <p:style>
-          <a:lnRef idx="1">
-            <a:schemeClr val="accent1"/>
-          </a:lnRef>
-          <a:fillRef idx="3">
-            <a:schemeClr val="accent1"/>
-          </a:fillRef>
-          <a:effectRef idx="2">
-            <a:schemeClr val="accent1"/>
-          </a:effectRef>
-          <a:fontRef idx="minor">
-            <a:schemeClr val="lt1"/>
-          </a:fontRef>
-        </p:style>
-        <p:txBody>
-          <a:bodyPr rtlCol="0" anchor="ctr"/>
-          <a:lstStyle/>
-          <a:p>
-            <a:pPr algn="ctr"/>
-          </a:p>
-        </p:txBody>
-      </p:sp>
-      <p:sp>
-        <p:nvSpPr>
-          <p:cNvPr id="14" name="TextBox 13"/>
-          <p:cNvSpPr txBox="1"/>
-          <p:nvPr/>
-        </p:nvSpPr>
-        <p:spPr>
-          <a:xfrm>
-            <a:off x="914400" y="4096512"/>
-            <a:ext cx="4876495" cy="365760"/>
-          </a:xfrm>
-          <a:prstGeom prst="rect">
-            <a:avLst/>
-          </a:prstGeom>
-          <a:noFill/>
-        </p:spPr>
-        <p:txBody>
-          <a:bodyPr wrap="square" lIns="0" tIns="0" rIns="0" bIns="0">
-            <a:spAutoFit/>
-          </a:bodyPr>
-          <a:lstStyle/>
-          <a:p>
-            <a:pPr>
-              <a:defRPr sz="1200" b="1">
-                <a:solidFill>
-                  <a:srgbClr val="F43F5E"/>
-                </a:solidFill>
-                <a:latin typeface="Segoe UI"/>
-              </a:defRPr>
-            </a:pPr>
-            <a:r>
-              <a:t>03 | ARCHITECTURE TECHNIQUE &amp; API TEMPS RÉEL</a:t>
-            </a:r>
-          </a:p>
-        </p:txBody>
-      </p:sp>
-      <p:sp>
-        <p:nvSpPr>
-          <p:cNvPr id="15" name="TextBox 14"/>
-          <p:cNvSpPr txBox="1"/>
-          <p:nvPr/>
-        </p:nvSpPr>
-        <p:spPr>
-          <a:xfrm>
-            <a:off x="914400" y="4526280"/>
-            <a:ext cx="4876495" cy="1691640"/>
-          </a:xfrm>
-          <a:prstGeom prst="rect">
-            <a:avLst/>
-          </a:prstGeom>
-          <a:noFill/>
-        </p:spPr>
-        <p:txBody>
-          <a:bodyPr wrap="square">
-            <a:spAutoFit/>
-          </a:bodyPr>
-          <a:lstStyle/>
-          <a:p>
-            <a:pPr>
-              <a:defRPr sz="1050" b="1">
-                <a:solidFill>
-                  <a:srgbClr val="F59E0B"/>
-                </a:solidFill>
-                <a:latin typeface="Segoe UI"/>
-              </a:defRPr>
-            </a:pPr>
-            <a:r>
-              <a:t>Microservice FastAPI :</a:t>
-            </a:r>
-          </a:p>
-          <a:p>
-            <a:pPr>
-              <a:defRPr sz="950">
-                <a:solidFill>
-                  <a:srgbClr val="F8FAFC"/>
-                </a:solidFill>
-                <a:latin typeface="Segoe UI"/>
-              </a:defRPr>
-            </a:pPr>
-            <a:r>
-              <a:t>Exposer l'algorithme sous forme d'API REST avec mise en cache Redis des matrices de similarité.</a:t>
-            </a:r>
-          </a:p>
-          <a:p>
-            <a:pPr>
-              <a:defRPr sz="1050" b="1">
-                <a:solidFill>
-                  <a:srgbClr val="F59E0B"/>
-                </a:solidFill>
-                <a:latin typeface="Segoe UI"/>
-              </a:defRPr>
-            </a:pPr>
-            <a:r>
-              <a:t>Performance SLA :</a:t>
-            </a:r>
-          </a:p>
-          <a:p>
-            <a:pPr>
-              <a:defRPr sz="950">
-                <a:solidFill>
-                  <a:srgbClr val="F8FAFC"/>
-                </a:solidFill>
-                <a:latin typeface="Segoe UI"/>
-              </a:defRPr>
-            </a:pPr>
-            <a:r>
-              <a:t>Temps de réponse garanti &lt; 15 ms pour préserver la fluidité de navigation sur mobile.</a:t>
-            </a:r>
-          </a:p>
-          <a:p>
-            <a:pPr>
-              <a:defRPr sz="1050" b="1">
-                <a:solidFill>
-                  <a:srgbClr val="F59E0B"/>
-                </a:solidFill>
-                <a:latin typeface="Segoe UI"/>
-              </a:defRPr>
-            </a:pPr>
-            <a:r>
-              <a:t>Scalabilité :</a:t>
-            </a:r>
-          </a:p>
-          <a:p>
-            <a:pPr>
-              <a:defRPr sz="950">
-                <a:solidFill>
-                  <a:srgbClr val="F8FAFC"/>
-                </a:solidFill>
-                <a:latin typeface="Segoe UI"/>
-              </a:defRPr>
-            </a:pPr>
-            <a:r>
-              <a:t>Supporte des millions de requêtes quotidiennes lors des pics de soldes et du Black Friday.</a:t>
-            </a:r>
-          </a:p>
-        </p:txBody>
-      </p:sp>
-      <p:sp>
-        <p:nvSpPr>
-          <p:cNvPr id="16" name="Rounded Rectangle 15"/>
-          <p:cNvSpPr/>
-          <p:nvPr/>
-        </p:nvSpPr>
-        <p:spPr>
-          <a:xfrm>
-            <a:off x="6217920" y="3931920"/>
-            <a:ext cx="5242255" cy="2377440"/>
-          </a:xfrm>
-          <a:prstGeom prst="roundRect">
-            <a:avLst/>
-          </a:prstGeom>
-          <a:solidFill>
-            <a:srgbClr val="1E293B"/>
-          </a:solidFill>
-          <a:ln w="19050">
-            <a:solidFill>
-              <a:srgbClr val="10B981"/>
-            </a:solidFill>
-          </a:ln>
-        </p:spPr>
-        <p:style>
-          <a:lnRef idx="1">
-            <a:schemeClr val="accent1"/>
-          </a:lnRef>
-          <a:fillRef idx="3">
-            <a:schemeClr val="accent1"/>
-          </a:fillRef>
-          <a:effectRef idx="2">
-            <a:schemeClr val="accent1"/>
-          </a:effectRef>
-          <a:fontRef idx="minor">
-            <a:schemeClr val="lt1"/>
-          </a:fontRef>
-        </p:style>
-        <p:txBody>
-          <a:bodyPr rtlCol="0" anchor="ctr"/>
-          <a:lstStyle/>
-          <a:p>
-            <a:pPr algn="ctr"/>
-          </a:p>
-        </p:txBody>
-      </p:sp>
-      <p:sp>
-        <p:nvSpPr>
-          <p:cNvPr id="17" name="TextBox 16"/>
-          <p:cNvSpPr txBox="1"/>
-          <p:nvPr/>
-        </p:nvSpPr>
-        <p:spPr>
-          <a:xfrm>
-            <a:off x="6400800" y="4096512"/>
-            <a:ext cx="4876495" cy="365760"/>
-          </a:xfrm>
-          <a:prstGeom prst="rect">
-            <a:avLst/>
-          </a:prstGeom>
-          <a:noFill/>
-        </p:spPr>
-        <p:txBody>
-          <a:bodyPr wrap="square" lIns="0" tIns="0" rIns="0" bIns="0">
-            <a:spAutoFit/>
-          </a:bodyPr>
-          <a:lstStyle/>
-          <a:p>
-            <a:pPr>
-              <a:defRPr sz="1200" b="1">
-                <a:solidFill>
-                  <a:srgbClr val="F43F5E"/>
-                </a:solidFill>
-                <a:latin typeface="Segoe UI"/>
-              </a:defRPr>
-            </a:pPr>
-            <a:r>
-              <a:t>04 | ÉVOLUTION VERS UN MODÈLE HYBRIDE</a:t>
-            </a:r>
-          </a:p>
-        </p:txBody>
-      </p:sp>
-      <p:sp>
-        <p:nvSpPr>
-          <p:cNvPr id="18" name="TextBox 17"/>
-          <p:cNvSpPr txBox="1"/>
-          <p:nvPr/>
-        </p:nvSpPr>
-        <p:spPr>
-          <a:xfrm>
-            <a:off x="6400800" y="4526280"/>
-            <a:ext cx="4876495" cy="1691640"/>
-          </a:xfrm>
-          <a:prstGeom prst="rect">
-            <a:avLst/>
-          </a:prstGeom>
-          <a:noFill/>
-        </p:spPr>
-        <p:txBody>
-          <a:bodyPr wrap="square">
-            <a:spAutoFit/>
-          </a:bodyPr>
-          <a:lstStyle/>
-          <a:p>
-            <a:pPr>
-              <a:defRPr sz="1050" b="1">
-                <a:solidFill>
-                  <a:srgbClr val="10B981"/>
-                </a:solidFill>
-                <a:latin typeface="Segoe UI"/>
-              </a:defRPr>
-            </a:pPr>
-            <a:r>
-              <a:t>Collaborative Filtering :</a:t>
-            </a:r>
-          </a:p>
-          <a:p>
-            <a:pPr>
-              <a:defRPr sz="950">
-                <a:solidFill>
-                  <a:srgbClr val="F8FAFC"/>
-                </a:solidFill>
-                <a:latin typeface="Segoe UI"/>
-              </a:defRPr>
-            </a:pPr>
-            <a:r>
-              <a:t>Coupler les similitudes textuelles TF-IDF avec les signaux de navigation réels (produits co-achetés).</a:t>
-            </a:r>
-          </a:p>
-          <a:p>
-            <a:pPr>
-              <a:defRPr sz="1050" b="1">
-                <a:solidFill>
-                  <a:srgbClr val="10B981"/>
-                </a:solidFill>
-                <a:latin typeface="Segoe UI"/>
-              </a:defRPr>
-            </a:pPr>
-            <a:r>
-              <a:t>Dense Embeddings :</a:t>
-            </a:r>
-          </a:p>
-          <a:p>
-            <a:pPr>
-              <a:defRPr sz="950">
-                <a:solidFill>
-                  <a:srgbClr val="F8FAFC"/>
-                </a:solidFill>
-                <a:latin typeface="Segoe UI"/>
-              </a:defRPr>
-            </a:pPr>
-            <a:r>
-              <a:t>Tester des modèles d'embeddings Sentence-BERT pour capturer les nuances sémantiques multilingues (FR, EN, DE).</a:t>
-            </a:r>
-          </a:p>
-          <a:p>
-            <a:pPr>
-              <a:defRPr sz="1050" b="1">
-                <a:solidFill>
-                  <a:srgbClr val="10B981"/>
-                </a:solidFill>
-                <a:latin typeface="Segoe UI"/>
-              </a:defRPr>
-            </a:pPr>
-            <a:r>
-              <a:t>A/B Testing :</a:t>
-            </a:r>
-          </a:p>
-          <a:p>
-            <a:pPr>
-              <a:defRPr sz="950">
-                <a:solidFill>
-                  <a:srgbClr val="F8FAFC"/>
-                </a:solidFill>
-                <a:latin typeface="Segoe UI"/>
-              </a:defRPr>
-            </a:pPr>
-            <a:r>
-              <a:t>Mesurer l'incrément de conversion entre le carrousel algorithmique et les recommandations éditoriales manuelles.</a:t>
+              <a:t>Candidat : Christopher GILLERON   |   Commanditaire : The North Face   |   Certification CDSD (Niveau 7)   |   Soutenance 5 min (8 slides)</a:t>
             </a:r>
           </a:p>
         </p:txBody>
@@ -4546,7 +3611,7 @@
           <a:noFill/>
         </p:spPr>
         <p:txBody>
-          <a:bodyPr wrap="square" lIns="0" tIns="0" rIns="0" bIns="0">
+          <a:bodyPr wrap="square">
             <a:spAutoFit/>
           </a:bodyPr>
           <a:lstStyle/>
@@ -4560,7 +3625,7 @@
               </a:defRPr>
             </a:pPr>
             <a:r>
-              <a:t>ÉTAPE 01 | CADRAGE DU PROJET</a:t>
+              <a:t>ÉTAPE 01 | CADRAGE &amp; ENJEUX E-COMMERCE</a:t>
             </a:r>
           </a:p>
         </p:txBody>
@@ -4582,13 +3647,13 @@
           <a:noFill/>
         </p:spPr>
         <p:txBody>
-          <a:bodyPr wrap="square" lIns="0" tIns="0" rIns="0" bIns="0">
+          <a:bodyPr wrap="square">
             <a:spAutoFit/>
           </a:bodyPr>
           <a:lstStyle/>
           <a:p>
             <a:pPr>
-              <a:defRPr sz="2200" b="1">
+              <a:defRPr sz="2100" b="1">
                 <a:solidFill>
                   <a:srgbClr val="F8FAFC"/>
                 </a:solidFill>
@@ -4596,7 +3661,7 @@
               </a:defRPr>
             </a:pPr>
             <a:r>
-              <a:t>Contexte E-Commerce &amp; Double Objectif Marketing The North Face</a:t>
+              <a:t>Contexte The North Face &amp; Double Défi Métier de Conversion</a:t>
             </a:r>
           </a:p>
         </p:txBody>
@@ -4618,7 +3683,7 @@
           <a:noFill/>
         </p:spPr>
         <p:txBody>
-          <a:bodyPr wrap="square" lIns="0" tIns="0" rIns="0" bIns="0">
+          <a:bodyPr wrap="square">
             <a:spAutoFit/>
           </a:bodyPr>
           <a:lstStyle/>
@@ -4632,7 +3697,7 @@
               </a:defRPr>
             </a:pPr>
             <a:r>
-              <a:t>2 / 10</a:t>
+              <a:t>2 / 8</a:t>
             </a:r>
           </a:p>
         </p:txBody>
@@ -4654,7 +3719,7 @@
           <a:noFill/>
         </p:spPr>
         <p:txBody>
-          <a:bodyPr wrap="square" lIns="0" tIns="0" rIns="0" bIns="0">
+          <a:bodyPr wrap="square">
             <a:spAutoFit/>
           </a:bodyPr>
           <a:lstStyle/>
@@ -4682,7 +3747,7 @@
         <p:spPr>
           <a:xfrm>
             <a:off x="731520" y="1371600"/>
-            <a:ext cx="3413455" cy="4754880"/>
+            <a:ext cx="5212080" cy="4754880"/>
           </a:xfrm>
           <a:prstGeom prst="roundRect">
             <a:avLst/>
@@ -4727,43 +3792,7 @@
         <p:spPr>
           <a:xfrm>
             <a:off x="914400" y="1536192"/>
-            <a:ext cx="3047695" cy="365760"/>
-          </a:xfrm>
-          <a:prstGeom prst="rect">
-            <a:avLst/>
-          </a:prstGeom>
-          <a:noFill/>
-        </p:spPr>
-        <p:txBody>
-          <a:bodyPr wrap="square" lIns="0" tIns="0" rIns="0" bIns="0">
-            <a:spAutoFit/>
-          </a:bodyPr>
-          <a:lstStyle/>
-          <a:p>
-            <a:pPr>
-              <a:defRPr sz="1200" b="1">
-                <a:solidFill>
-                  <a:srgbClr val="F43F5E"/>
-                </a:solidFill>
-                <a:latin typeface="Segoe UI"/>
-              </a:defRPr>
-            </a:pPr>
-            <a:r>
-              <a:t>01 | CONTEXTE THE NORTH FACE</a:t>
-            </a:r>
-          </a:p>
-        </p:txBody>
-      </p:sp>
-      <p:sp>
-        <p:nvSpPr>
-          <p:cNvPr id="9" name="TextBox 8"/>
-          <p:cNvSpPr txBox="1"/>
-          <p:nvPr/>
-        </p:nvSpPr>
-        <p:spPr>
-          <a:xfrm>
-            <a:off x="914400" y="2011680"/>
-            <a:ext cx="3047695" cy="3931920"/>
+            <a:ext cx="4846320" cy="365760"/>
           </a:xfrm>
           <a:prstGeom prst="rect">
             <a:avLst/>
@@ -4785,12 +3814,48 @@
               </a:defRPr>
             </a:pPr>
             <a:r>
-              <a:t>Marque Iconique Outdoor :</a:t>
-            </a:r>
-          </a:p>
-          <a:p>
-            <a:pPr>
-              <a:defRPr sz="1000">
+              <a:t>01 | CONTEXTE THE NORTH FACE &amp; DONNÉES</a:t>
+            </a:r>
+          </a:p>
+        </p:txBody>
+      </p:sp>
+      <p:sp>
+        <p:nvSpPr>
+          <p:cNvPr id="9" name="TextBox 8"/>
+          <p:cNvSpPr txBox="1"/>
+          <p:nvPr/>
+        </p:nvSpPr>
+        <p:spPr>
+          <a:xfrm>
+            <a:off x="914400" y="1920240"/>
+            <a:ext cx="4846320" cy="4023360"/>
+          </a:xfrm>
+          <a:prstGeom prst="rect">
+            <a:avLst/>
+          </a:prstGeom>
+          <a:noFill/>
+        </p:spPr>
+        <p:txBody>
+          <a:bodyPr wrap="square">
+            <a:spAutoFit/>
+          </a:bodyPr>
+          <a:lstStyle/>
+          <a:p>
+            <a:pPr>
+              <a:defRPr sz="1000" b="1">
+                <a:solidFill>
+                  <a:srgbClr val="F43F5E"/>
+                </a:solidFill>
+                <a:latin typeface="Segoe UI"/>
+              </a:defRPr>
+            </a:pPr>
+            <a:r>
+              <a:t>Marque Iconique Outdoor (1968) :</a:t>
+            </a:r>
+          </a:p>
+          <a:p>
+            <a:pPr>
+              <a:defRPr sz="900">
                 <a:solidFill>
                   <a:srgbClr val="F8FAFC"/>
                 </a:solidFill>
@@ -4798,13 +3863,12 @@
               </a:defRPr>
             </a:pPr>
             <a:r>
-              <a:t>Fondée en 1968 pour équiper les grimpeurs, The North Face est devenue une référence mondiale du vêtement technique et de la mode urbaine.</a:t>
-            </a:r>
-          </a:p>
-          <a:p/>
-          <a:p>
-            <a:pPr>
-              <a:defRPr sz="1100" b="1">
+              <a:t>Spécialiste mondial des vêtements, chaussures et équipements d'alpinisme et de loisirs de plein air.</a:t>
+            </a:r>
+          </a:p>
+          <a:p>
+            <a:pPr>
+              <a:defRPr sz="1000" b="1">
                 <a:solidFill>
                   <a:srgbClr val="F43F5E"/>
                 </a:solidFill>
@@ -4812,12 +3876,12 @@
               </a:defRPr>
             </a:pPr>
             <a:r>
-              <a:t>Enjeu E-Commerce :</a:t>
-            </a:r>
-          </a:p>
-          <a:p>
-            <a:pPr>
-              <a:defRPr sz="1000">
+              <a:t>Problématique thenorthface.fr :</a:t>
+            </a:r>
+          </a:p>
+          <a:p>
+            <a:pPr>
+              <a:defRPr sz="900">
                 <a:solidFill>
                   <a:srgbClr val="F8FAFC"/>
                 </a:solidFill>
@@ -4825,13 +3889,12 @@
               </a:defRPr>
             </a:pPr>
             <a:r>
-              <a:t>Optimiser le parcours d'achat sur thenorthface.fr pour transformer les visiteurs occasionnels en acheteurs fidèles.</a:t>
-            </a:r>
-          </a:p>
-          <a:p/>
-          <a:p>
-            <a:pPr>
-              <a:defRPr sz="1100" b="1">
+              <a:t>Améliorer les taux de conversion en ligne et la pertinence de l'expérience utilisateur.</a:t>
+            </a:r>
+          </a:p>
+          <a:p>
+            <a:pPr>
+              <a:defRPr sz="1000" b="1">
                 <a:solidFill>
                   <a:srgbClr val="F43F5E"/>
                 </a:solidFill>
@@ -4839,12 +3902,12 @@
               </a:defRPr>
             </a:pPr>
             <a:r>
-              <a:t>Périmètre Données :</a:t>
-            </a:r>
-          </a:p>
-          <a:p>
-            <a:pPr>
-              <a:defRPr sz="1000">
+              <a:t>Corpus Étudié :</a:t>
+            </a:r>
+          </a:p>
+          <a:p>
+            <a:pPr>
+              <a:defRPr sz="900">
                 <a:solidFill>
                   <a:srgbClr val="F8FAFC"/>
                 </a:solidFill>
@@ -4852,10 +3915,9 @@
               </a:defRPr>
             </a:pPr>
             <a:r>
-              <a:t>Corpus de 500 fiches produits riches issues du catalogue officiel (sample-data.csv).</a:t>
-            </a:r>
-          </a:p>
-          <a:p/>
+              <a:t>500 descriptions textuelles détaillées de produits outdoor issues du catalogue officiel (sample-data.csv).</a:t>
+            </a:r>
+          </a:p>
         </p:txBody>
       </p:sp>
       <p:sp>
@@ -4866,8 +3928,8 @@
         </p:nvSpPr>
         <p:spPr>
           <a:xfrm>
-            <a:off x="4389120" y="1371600"/>
-            <a:ext cx="3413455" cy="4754880"/>
+            <a:off x="6217920" y="1371600"/>
+            <a:ext cx="5242255" cy="4754880"/>
           </a:xfrm>
           <a:prstGeom prst="roundRect">
             <a:avLst/>
@@ -4911,44 +3973,8 @@
         </p:nvSpPr>
         <p:spPr>
           <a:xfrm>
-            <a:off x="4572000" y="1536192"/>
-            <a:ext cx="3047695" cy="365760"/>
-          </a:xfrm>
-          <a:prstGeom prst="rect">
-            <a:avLst/>
-          </a:prstGeom>
-          <a:noFill/>
-        </p:spPr>
-        <p:txBody>
-          <a:bodyPr wrap="square" lIns="0" tIns="0" rIns="0" bIns="0">
-            <a:spAutoFit/>
-          </a:bodyPr>
-          <a:lstStyle/>
-          <a:p>
-            <a:pPr>
-              <a:defRPr sz="1200" b="1">
-                <a:solidFill>
-                  <a:srgbClr val="F43F5E"/>
-                </a:solidFill>
-                <a:latin typeface="Segoe UI"/>
-              </a:defRPr>
-            </a:pPr>
-            <a:r>
-              <a:t>02 | AXE 1 : MOTEUR DE RECOMMANDATION</a:t>
-            </a:r>
-          </a:p>
-        </p:txBody>
-      </p:sp>
-      <p:sp>
-        <p:nvSpPr>
-          <p:cNvPr id="12" name="TextBox 11"/>
-          <p:cNvSpPr txBox="1"/>
-          <p:nvPr/>
-        </p:nvSpPr>
-        <p:spPr>
-          <a:xfrm>
-            <a:off x="4572000" y="2011680"/>
-            <a:ext cx="3047695" cy="3931920"/>
+            <a:off x="6400800" y="1536192"/>
+            <a:ext cx="4876495" cy="365760"/>
           </a:xfrm>
           <a:prstGeom prst="rect">
             <a:avLst/>
@@ -4970,170 +3996,21 @@
               </a:defRPr>
             </a:pPr>
             <a:r>
-              <a:t>Cross-Selling Ciblé :</a:t>
-            </a:r>
-          </a:p>
-          <a:p>
-            <a:pPr>
-              <a:defRPr sz="1000">
-                <a:solidFill>
-                  <a:srgbClr val="F8FAFC"/>
-                </a:solidFill>
-                <a:latin typeface="Segoe UI"/>
-              </a:defRPr>
-            </a:pPr>
-            <a:r>
-              <a:t>Déployer un carrousel 'Ces produits pourraient aussi vous intéresser...' sur chaque page article.</a:t>
-            </a:r>
-          </a:p>
-          <a:p/>
-          <a:p>
-            <a:pPr>
-              <a:defRPr sz="1100" b="1">
-                <a:solidFill>
-                  <a:srgbClr val="F43F5E"/>
-                </a:solidFill>
-                <a:latin typeface="Segoe UI"/>
-              </a:defRPr>
-            </a:pPr>
-            <a:r>
-              <a:t>Approche Basée Contenu (Content-Based) :</a:t>
-            </a:r>
-          </a:p>
-          <a:p>
-            <a:pPr>
-              <a:defRPr sz="1000">
-                <a:solidFill>
-                  <a:srgbClr val="F8FAFC"/>
-                </a:solidFill>
-                <a:latin typeface="Segoe UI"/>
-              </a:defRPr>
-            </a:pPr>
-            <a:r>
-              <a:t>Recommander des produits similaires par analyse sémantique des descriptions sans dépendre de l'historique utilisateur.</a:t>
-            </a:r>
-          </a:p>
-          <a:p/>
-          <a:p>
-            <a:pPr>
-              <a:defRPr sz="1100" b="1">
-                <a:solidFill>
-                  <a:srgbClr val="F43F5E"/>
-                </a:solidFill>
-                <a:latin typeface="Segoe UI"/>
-              </a:defRPr>
-            </a:pPr>
-            <a:r>
-              <a:t>Résolution du Cold-Start :</a:t>
-            </a:r>
-          </a:p>
-          <a:p>
-            <a:pPr>
-              <a:defRPr sz="1000">
-                <a:solidFill>
-                  <a:srgbClr val="F8FAFC"/>
-                </a:solidFill>
-                <a:latin typeface="Segoe UI"/>
-              </a:defRPr>
-            </a:pPr>
-            <a:r>
-              <a:t>Capacité à recommander instantanément les nouveaux arrivages du catalogue sans historique d'achat.</a:t>
-            </a:r>
-          </a:p>
-          <a:p/>
-        </p:txBody>
-      </p:sp>
-      <p:sp>
-        <p:nvSpPr>
-          <p:cNvPr id="13" name="Rounded Rectangle 12"/>
-          <p:cNvSpPr/>
-          <p:nvPr/>
-        </p:nvSpPr>
-        <p:spPr>
-          <a:xfrm>
-            <a:off x="8046720" y="1371600"/>
-            <a:ext cx="3413455" cy="4754880"/>
-          </a:xfrm>
-          <a:prstGeom prst="roundRect">
-            <a:avLst/>
-          </a:prstGeom>
-          <a:solidFill>
-            <a:srgbClr val="1E293B"/>
-          </a:solidFill>
-          <a:ln w="19050">
-            <a:solidFill>
-              <a:srgbClr val="334155"/>
-            </a:solidFill>
-          </a:ln>
-        </p:spPr>
-        <p:style>
-          <a:lnRef idx="1">
-            <a:schemeClr val="accent1"/>
-          </a:lnRef>
-          <a:fillRef idx="3">
-            <a:schemeClr val="accent1"/>
-          </a:fillRef>
-          <a:effectRef idx="2">
-            <a:schemeClr val="accent1"/>
-          </a:effectRef>
-          <a:fontRef idx="minor">
-            <a:schemeClr val="lt1"/>
-          </a:fontRef>
-        </p:style>
-        <p:txBody>
-          <a:bodyPr rtlCol="0" anchor="ctr"/>
-          <a:lstStyle/>
-          <a:p>
-            <a:pPr algn="ctr"/>
-          </a:p>
-        </p:txBody>
-      </p:sp>
-      <p:sp>
-        <p:nvSpPr>
-          <p:cNvPr id="14" name="TextBox 13"/>
+              <a:t>02 | LES DEUX SOLUTIONS ATTENDUES</a:t>
+            </a:r>
+          </a:p>
+        </p:txBody>
+      </p:sp>
+      <p:sp>
+        <p:nvSpPr>
+          <p:cNvPr id="12" name="TextBox 11"/>
           <p:cNvSpPr txBox="1"/>
           <p:nvPr/>
         </p:nvSpPr>
         <p:spPr>
           <a:xfrm>
-            <a:off x="8229600" y="1536192"/>
-            <a:ext cx="3047695" cy="365760"/>
-          </a:xfrm>
-          <a:prstGeom prst="rect">
-            <a:avLst/>
-          </a:prstGeom>
-          <a:noFill/>
-        </p:spPr>
-        <p:txBody>
-          <a:bodyPr wrap="square" lIns="0" tIns="0" rIns="0" bIns="0">
-            <a:spAutoFit/>
-          </a:bodyPr>
-          <a:lstStyle/>
-          <a:p>
-            <a:pPr>
-              <a:defRPr sz="1200" b="1">
-                <a:solidFill>
-                  <a:srgbClr val="F43F5E"/>
-                </a:solidFill>
-                <a:latin typeface="Segoe UI"/>
-              </a:defRPr>
-            </a:pPr>
-            <a:r>
-              <a:t>03 | AXE 2 : EXTRACTION DE THÈMES (LSA)</a:t>
-            </a:r>
-          </a:p>
-        </p:txBody>
-      </p:sp>
-      <p:sp>
-        <p:nvSpPr>
-          <p:cNvPr id="15" name="TextBox 14"/>
-          <p:cNvSpPr txBox="1"/>
-          <p:nvPr/>
-        </p:nvSpPr>
-        <p:spPr>
-          <a:xfrm>
-            <a:off x="8229600" y="2011680"/>
-            <a:ext cx="3047695" cy="3931920"/>
+            <a:off x="6400800" y="1920240"/>
+            <a:ext cx="4876495" cy="4023360"/>
           </a:xfrm>
           <a:prstGeom prst="rect">
             <a:avLst/>
@@ -5147,7 +4024,7 @@
           <a:lstStyle/>
           <a:p>
             <a:pPr>
-              <a:defRPr sz="1100" b="1">
+              <a:defRPr sz="1000" b="1">
                 <a:solidFill>
                   <a:srgbClr val="F43F5E"/>
                 </a:solidFill>
@@ -5155,12 +4032,12 @@
               </a:defRPr>
             </a:pPr>
             <a:r>
-              <a:t>Remise en Cause des Catégories :</a:t>
-            </a:r>
-          </a:p>
-          <a:p>
-            <a:pPr>
-              <a:defRPr sz="1000">
+              <a:t>Axe 1 — Système de Recommandation :</a:t>
+            </a:r>
+          </a:p>
+          <a:p>
+            <a:pPr>
+              <a:defRPr sz="900">
                 <a:solidFill>
                   <a:srgbClr val="F8FAFC"/>
                 </a:solidFill>
@@ -5168,13 +4045,12 @@
               </a:defRPr>
             </a:pPr>
             <a:r>
-              <a:t>Les arborescences e-commerce traditionnelles (Homme/Femme/Accessoires) sont rigides et peu intuitives.</a:t>
-            </a:r>
-          </a:p>
-          <a:p/>
-          <a:p>
-            <a:pPr>
-              <a:defRPr sz="1100" b="1">
+              <a:t>Déployer un carrousel 'Ces produits pourraient aussi vous intéresser...' sur chaque page article, basé sur la similarité textuelle (résolution du problème de Cold-Start sans historique d'achat).</a:t>
+            </a:r>
+          </a:p>
+          <a:p>
+            <a:pPr>
+              <a:defRPr sz="1000" b="1">
                 <a:solidFill>
                   <a:srgbClr val="F43F5E"/>
                 </a:solidFill>
@@ -5182,12 +4058,12 @@
               </a:defRPr>
             </a:pPr>
             <a:r>
-              <a:t>Topic Modeling Non Supervisé :</a:t>
-            </a:r>
-          </a:p>
-          <a:p>
-            <a:pPr>
-              <a:defRPr sz="1000">
+              <a:t>Axe 2 — Restructuration du Catalogue (LSA) :</a:t>
+            </a:r>
+          </a:p>
+          <a:p>
+            <a:pPr>
+              <a:defRPr sz="900">
                 <a:solidFill>
                   <a:srgbClr val="F8FAFC"/>
                 </a:solidFill>
@@ -5195,13 +4071,12 @@
               </a:defRPr>
             </a:pPr>
             <a:r>
-              <a:t>Découvrir automatiquement les catégories émergentes basées sur les usages réels (imperméabilité, trail, grand froid).</a:t>
-            </a:r>
-          </a:p>
-          <a:p/>
-          <a:p>
-            <a:pPr>
-              <a:defRPr sz="1100" b="1">
+              <a:t>Utiliser le Topic Modeling non supervisé pour remettre en cause les catégories traditionnelles et identifier de nouvelles catégories de navigation plus intuitives.</a:t>
+            </a:r>
+          </a:p>
+          <a:p>
+            <a:pPr>
+              <a:defRPr sz="1000" b="1">
                 <a:solidFill>
                   <a:srgbClr val="F43F5E"/>
                 </a:solidFill>
@@ -5209,12 +4084,12 @@
               </a:defRPr>
             </a:pPr>
             <a:r>
-              <a:t>Optimisation SEO &amp; UX :</a:t>
-            </a:r>
-          </a:p>
-          <a:p>
-            <a:pPr>
-              <a:defRPr sz="1000">
+              <a:t>Approche Non Supervisée :</a:t>
+            </a:r>
+          </a:p>
+          <a:p>
+            <a:pPr>
+              <a:defRPr sz="900">
                 <a:solidFill>
                   <a:srgbClr val="F8FAFC"/>
                 </a:solidFill>
@@ -5222,10 +4097,9 @@
               </a:defRPr>
             </a:pPr>
             <a:r>
-              <a:t>Structurer des pages thématiques de collection plus adaptées aux intentions de recherche des clients.</a:t>
-            </a:r>
-          </a:p>
-          <a:p/>
+              <a:t>Exploiter uniquement le traitement automatique du langage naturel (NLP).</a:t>
+            </a:r>
+          </a:p>
         </p:txBody>
       </p:sp>
     </p:spTree>
@@ -5306,7 +4180,7 @@
           <a:noFill/>
         </p:spPr>
         <p:txBody>
-          <a:bodyPr wrap="square" lIns="0" tIns="0" rIns="0" bIns="0">
+          <a:bodyPr wrap="square">
             <a:spAutoFit/>
           </a:bodyPr>
           <a:lstStyle/>
@@ -5342,13 +4216,13 @@
           <a:noFill/>
         </p:spPr>
         <p:txBody>
-          <a:bodyPr wrap="square" lIns="0" tIns="0" rIns="0" bIns="0">
+          <a:bodyPr wrap="square">
             <a:spAutoFit/>
           </a:bodyPr>
           <a:lstStyle/>
           <a:p>
             <a:pPr>
-              <a:defRPr sz="2200" b="1">
+              <a:defRPr sz="2100" b="1">
                 <a:solidFill>
                   <a:srgbClr val="F8FAFC"/>
                 </a:solidFill>
@@ -5356,7 +4230,7 @@
               </a:defRPr>
             </a:pPr>
             <a:r>
-              <a:t>Nettoyage Linguistique SpaCy &amp; Vectorisation TF-IDF</a:t>
+              <a:t>Pipeline SpaCy, Filtrage des Stop Words &amp; Matrice TF-IDF</a:t>
             </a:r>
           </a:p>
         </p:txBody>
@@ -5378,7 +4252,7 @@
           <a:noFill/>
         </p:spPr>
         <p:txBody>
-          <a:bodyPr wrap="square" lIns="0" tIns="0" rIns="0" bIns="0">
+          <a:bodyPr wrap="square">
             <a:spAutoFit/>
           </a:bodyPr>
           <a:lstStyle/>
@@ -5392,7 +4266,7 @@
               </a:defRPr>
             </a:pPr>
             <a:r>
-              <a:t>3 / 10</a:t>
+              <a:t>3 / 8</a:t>
             </a:r>
           </a:p>
         </p:txBody>
@@ -5414,7 +4288,7 @@
           <a:noFill/>
         </p:spPr>
         <p:txBody>
-          <a:bodyPr wrap="square" lIns="0" tIns="0" rIns="0" bIns="0">
+          <a:bodyPr wrap="square">
             <a:spAutoFit/>
           </a:bodyPr>
           <a:lstStyle/>
@@ -5442,7 +4316,7 @@
         <p:spPr>
           <a:xfrm>
             <a:off x="731520" y="1371600"/>
-            <a:ext cx="3413455" cy="4754880"/>
+            <a:ext cx="5212080" cy="4754880"/>
           </a:xfrm>
           <a:prstGeom prst="roundRect">
             <a:avLst/>
@@ -5487,43 +4361,7 @@
         <p:spPr>
           <a:xfrm>
             <a:off x="914400" y="1536192"/>
-            <a:ext cx="3047695" cy="365760"/>
-          </a:xfrm>
-          <a:prstGeom prst="rect">
-            <a:avLst/>
-          </a:prstGeom>
-          <a:noFill/>
-        </p:spPr>
-        <p:txBody>
-          <a:bodyPr wrap="square" lIns="0" tIns="0" rIns="0" bIns="0">
-            <a:spAutoFit/>
-          </a:bodyPr>
-          <a:lstStyle/>
-          <a:p>
-            <a:pPr>
-              <a:defRPr sz="1200" b="1">
-                <a:solidFill>
-                  <a:srgbClr val="F43F5E"/>
-                </a:solidFill>
-                <a:latin typeface="Segoe UI"/>
-              </a:defRPr>
-            </a:pPr>
-            <a:r>
-              <a:t>01 | PIPELINE SPACY (EN_CORE_WEB_SM)</a:t>
-            </a:r>
-          </a:p>
-        </p:txBody>
-      </p:sp>
-      <p:sp>
-        <p:nvSpPr>
-          <p:cNvPr id="9" name="TextBox 8"/>
-          <p:cNvSpPr txBox="1"/>
-          <p:nvPr/>
-        </p:nvSpPr>
-        <p:spPr>
-          <a:xfrm>
-            <a:off x="914400" y="2011680"/>
-            <a:ext cx="3047695" cy="3931920"/>
+            <a:ext cx="4846320" cy="365760"/>
           </a:xfrm>
           <a:prstGeom prst="rect">
             <a:avLst/>
@@ -5545,12 +4383,48 @@
               </a:defRPr>
             </a:pPr>
             <a:r>
-              <a:t>Normalisation Textuelle :</a:t>
-            </a:r>
-          </a:p>
-          <a:p>
-            <a:pPr>
-              <a:defRPr sz="1000">
+              <a:t>01 | NETTOYAGE LINGUISTIQUE (SPACY)</a:t>
+            </a:r>
+          </a:p>
+        </p:txBody>
+      </p:sp>
+      <p:sp>
+        <p:nvSpPr>
+          <p:cNvPr id="9" name="TextBox 8"/>
+          <p:cNvSpPr txBox="1"/>
+          <p:nvPr/>
+        </p:nvSpPr>
+        <p:spPr>
+          <a:xfrm>
+            <a:off x="914400" y="1920240"/>
+            <a:ext cx="4846320" cy="4023360"/>
+          </a:xfrm>
+          <a:prstGeom prst="rect">
+            <a:avLst/>
+          </a:prstGeom>
+          <a:noFill/>
+        </p:spPr>
+        <p:txBody>
+          <a:bodyPr wrap="square">
+            <a:spAutoFit/>
+          </a:bodyPr>
+          <a:lstStyle/>
+          <a:p>
+            <a:pPr>
+              <a:defRPr sz="1000" b="1">
+                <a:solidFill>
+                  <a:srgbClr val="F43F5E"/>
+                </a:solidFill>
+                <a:latin typeface="Segoe UI"/>
+              </a:defRPr>
+            </a:pPr>
+            <a:r>
+              <a:t>Modèle 'en_core_web_sm' :</a:t>
+            </a:r>
+          </a:p>
+          <a:p>
+            <a:pPr>
+              <a:defRPr sz="900">
                 <a:solidFill>
                   <a:srgbClr val="F8FAFC"/>
                 </a:solidFill>
@@ -5558,13 +4432,12 @@
               </a:defRPr>
             </a:pPr>
             <a:r>
-              <a:t>Passage intégral en minuscules et suppression des caractères non alphabétiques (token.is_alpha).</a:t>
-            </a:r>
-          </a:p>
-          <a:p/>
-          <a:p>
-            <a:pPr>
-              <a:defRPr sz="1100" b="1">
+              <a:t>Tokenisation robuste et filtrage des caractères non alphabétiques.</a:t>
+            </a:r>
+          </a:p>
+          <a:p>
+            <a:pPr>
+              <a:defRPr sz="1000" b="1">
                 <a:solidFill>
                   <a:srgbClr val="F43F5E"/>
                 </a:solidFill>
@@ -5572,12 +4445,12 @@
               </a:defRPr>
             </a:pPr>
             <a:r>
-              <a:t>Élimination des Stop Words :</a:t>
-            </a:r>
-          </a:p>
-          <a:p>
-            <a:pPr>
-              <a:defRPr sz="1000">
+              <a:t>Lemmatisation Précise :</a:t>
+            </a:r>
+          </a:p>
+          <a:p>
+            <a:pPr>
+              <a:defRPr sz="900">
                 <a:solidFill>
                   <a:srgbClr val="F8FAFC"/>
                 </a:solidFill>
@@ -5585,13 +4458,12 @@
               </a:defRPr>
             </a:pPr>
             <a:r>
-              <a:t>Filtrage des mots vides anglais standard (token.is_stop) et du bruit syntaxique.</a:t>
-            </a:r>
-          </a:p>
-          <a:p/>
-          <a:p>
-            <a:pPr>
-              <a:defRPr sz="1100" b="1">
+              <a:t>Réduction des formes fléchies au radical canonique (ex: 'running', 'runs' $_x000D_ightarrow$ 'run' ; 'jackets' $_x000D_ightarrow$ 'jacket').</a:t>
+            </a:r>
+          </a:p>
+          <a:p>
+            <a:pPr>
+              <a:defRPr sz="1000" b="1">
                 <a:solidFill>
                   <a:srgbClr val="F43F5E"/>
                 </a:solidFill>
@@ -5599,12 +4471,12 @@
               </a:defRPr>
             </a:pPr>
             <a:r>
-              <a:t>Lemmatisation Précise :</a:t>
-            </a:r>
-          </a:p>
-          <a:p>
-            <a:pPr>
-              <a:defRPr sz="1000">
+              <a:t>Stop Words Personnalisés :</a:t>
+            </a:r>
+          </a:p>
+          <a:p>
+            <a:pPr>
+              <a:defRPr sz="900">
                 <a:solidFill>
                   <a:srgbClr val="F8FAFC"/>
                 </a:solidFill>
@@ -5612,10 +4484,35 @@
               </a:defRPr>
             </a:pPr>
             <a:r>
-              <a:t>Réduction des flexions à leur lemme canonique (ex: 'running', 'runs' -&gt; 'run' ; 'jackets' -&gt; 'jacket').</a:t>
-            </a:r>
-          </a:p>
-          <a:p/>
+              <a:t>Suppression des termes parasites promotionnels omniprésents : 'north', 'face', 'feature', 'design', 'include', 'wash'.</a:t>
+            </a:r>
+          </a:p>
+          <a:p>
+            <a:pPr>
+              <a:defRPr sz="1000" b="1">
+                <a:solidFill>
+                  <a:srgbClr val="F43F5E"/>
+                </a:solidFill>
+                <a:latin typeface="Segoe UI"/>
+              </a:defRPr>
+            </a:pPr>
+            <a:r>
+              <a:t>Impact :</a:t>
+            </a:r>
+          </a:p>
+          <a:p>
+            <a:pPr>
+              <a:defRPr sz="900">
+                <a:solidFill>
+                  <a:srgbClr val="F8FAFC"/>
+                </a:solidFill>
+                <a:latin typeface="Segoe UI"/>
+              </a:defRPr>
+            </a:pPr>
+            <a:r>
+              <a:t>Isole les véritables descripteurs techniques (imperméabilité, respirabilité, duvet, stretch).</a:t>
+            </a:r>
+          </a:p>
         </p:txBody>
       </p:sp>
       <p:sp>
@@ -5626,8 +4523,8 @@
         </p:nvSpPr>
         <p:spPr>
           <a:xfrm>
-            <a:off x="4389120" y="1371600"/>
-            <a:ext cx="3413455" cy="4754880"/>
+            <a:off x="6217920" y="1371600"/>
+            <a:ext cx="5242255" cy="4754880"/>
           </a:xfrm>
           <a:prstGeom prst="roundRect">
             <a:avLst/>
@@ -5671,44 +4568,8 @@
         </p:nvSpPr>
         <p:spPr>
           <a:xfrm>
-            <a:off x="4572000" y="1536192"/>
-            <a:ext cx="3047695" cy="365760"/>
-          </a:xfrm>
-          <a:prstGeom prst="rect">
-            <a:avLst/>
-          </a:prstGeom>
-          <a:noFill/>
-        </p:spPr>
-        <p:txBody>
-          <a:bodyPr wrap="square" lIns="0" tIns="0" rIns="0" bIns="0">
-            <a:spAutoFit/>
-          </a:bodyPr>
-          <a:lstStyle/>
-          <a:p>
-            <a:pPr>
-              <a:defRPr sz="1200" b="1">
-                <a:solidFill>
-                  <a:srgbClr val="F43F5E"/>
-                </a:solidFill>
-                <a:latin typeface="Segoe UI"/>
-              </a:defRPr>
-            </a:pPr>
-            <a:r>
-              <a:t>02 | STOP WORDS PERSONNALISÉS</a:t>
-            </a:r>
-          </a:p>
-        </p:txBody>
-      </p:sp>
-      <p:sp>
-        <p:nvSpPr>
-          <p:cNvPr id="12" name="TextBox 11"/>
-          <p:cNvSpPr txBox="1"/>
-          <p:nvPr/>
-        </p:nvSpPr>
-        <p:spPr>
-          <a:xfrm>
-            <a:off x="4572000" y="2011680"/>
-            <a:ext cx="3047695" cy="3931920"/>
+            <a:off x="6400800" y="1536192"/>
+            <a:ext cx="4876495" cy="365760"/>
           </a:xfrm>
           <a:prstGeom prst="rect">
             <a:avLst/>
@@ -5730,197 +4591,21 @@
               </a:defRPr>
             </a:pPr>
             <a:r>
-              <a:t>Filtrage des Termes Parasites :</a:t>
-            </a:r>
-          </a:p>
-          <a:p>
-            <a:pPr>
-              <a:defRPr sz="1000">
-                <a:solidFill>
-                  <a:srgbClr val="F8FAFC"/>
-                </a:solidFill>
-                <a:latin typeface="Segoe UI"/>
-              </a:defRPr>
-            </a:pPr>
-            <a:r>
-              <a:t>Élimination des termes promotionnels ubiquitaires dans les descriptions outdoor :</a:t>
-            </a:r>
-          </a:p>
-          <a:p/>
-          <a:p>
-            <a:pPr>
-              <a:defRPr sz="1100" b="1">
-                <a:solidFill>
-                  <a:srgbClr val="F43F5E"/>
-                </a:solidFill>
-                <a:latin typeface="Segoe UI"/>
-              </a:defRPr>
-            </a:pPr>
-            <a:r>
-              <a:t>• Marque &amp; Bruit :</a:t>
-            </a:r>
-          </a:p>
-          <a:p>
-            <a:pPr>
-              <a:defRPr sz="1000">
-                <a:solidFill>
-                  <a:srgbClr val="F8FAFC"/>
-                </a:solidFill>
-                <a:latin typeface="Segoe UI"/>
-              </a:defRPr>
-            </a:pPr>
-            <a:r>
-              <a:t>Suppression de 'north', 'face', 'feature', 'design', 'include'.</a:t>
-            </a:r>
-          </a:p>
-          <a:p/>
-          <a:p>
-            <a:pPr>
-              <a:defRPr sz="1100" b="1">
-                <a:solidFill>
-                  <a:srgbClr val="F43F5E"/>
-                </a:solidFill>
-                <a:latin typeface="Segoe UI"/>
-              </a:defRPr>
-            </a:pPr>
-            <a:r>
-              <a:t>• Bruit de Mesure :</a:t>
-            </a:r>
-          </a:p>
-          <a:p>
-            <a:pPr>
-              <a:defRPr sz="1000">
-                <a:solidFill>
-                  <a:srgbClr val="F8FAFC"/>
-                </a:solidFill>
-                <a:latin typeface="Segoe UI"/>
-              </a:defRPr>
-            </a:pPr>
-            <a:r>
-              <a:t>Suppression des mentions de lavage, taille et composition générique.</a:t>
-            </a:r>
-          </a:p>
-          <a:p/>
-          <a:p>
-            <a:pPr>
-              <a:defRPr sz="1100" b="1">
-                <a:solidFill>
-                  <a:srgbClr val="F43F5E"/>
-                </a:solidFill>
-                <a:latin typeface="Segoe UI"/>
-              </a:defRPr>
-            </a:pPr>
-            <a:r>
-              <a:t>Gain de Spécificité :</a:t>
-            </a:r>
-          </a:p>
-          <a:p>
-            <a:pPr>
-              <a:defRPr sz="1000">
-                <a:solidFill>
-                  <a:srgbClr val="F8FAFC"/>
-                </a:solidFill>
-                <a:latin typeface="Segoe UI"/>
-              </a:defRPr>
-            </a:pPr>
-            <a:r>
-              <a:t>Permet aux algorithmes de se concentrer sur les propriétés discriminantes des vêtements.</a:t>
-            </a:r>
-          </a:p>
-          <a:p/>
-        </p:txBody>
-      </p:sp>
-      <p:sp>
-        <p:nvSpPr>
-          <p:cNvPr id="13" name="Rounded Rectangle 12"/>
-          <p:cNvSpPr/>
-          <p:nvPr/>
-        </p:nvSpPr>
-        <p:spPr>
-          <a:xfrm>
-            <a:off x="8046720" y="1371600"/>
-            <a:ext cx="3413455" cy="4754880"/>
-          </a:xfrm>
-          <a:prstGeom prst="roundRect">
-            <a:avLst/>
-          </a:prstGeom>
-          <a:solidFill>
-            <a:srgbClr val="1E293B"/>
-          </a:solidFill>
-          <a:ln w="19050">
-            <a:solidFill>
-              <a:srgbClr val="334155"/>
-            </a:solidFill>
-          </a:ln>
-        </p:spPr>
-        <p:style>
-          <a:lnRef idx="1">
-            <a:schemeClr val="accent1"/>
-          </a:lnRef>
-          <a:fillRef idx="3">
-            <a:schemeClr val="accent1"/>
-          </a:fillRef>
-          <a:effectRef idx="2">
-            <a:schemeClr val="accent1"/>
-          </a:effectRef>
-          <a:fontRef idx="minor">
-            <a:schemeClr val="lt1"/>
-          </a:fontRef>
-        </p:style>
-        <p:txBody>
-          <a:bodyPr rtlCol="0" anchor="ctr"/>
-          <a:lstStyle/>
-          <a:p>
-            <a:pPr algn="ctr"/>
-          </a:p>
-        </p:txBody>
-      </p:sp>
-      <p:sp>
-        <p:nvSpPr>
-          <p:cNvPr id="14" name="TextBox 13"/>
+              <a:t>02 | VECTORISATION TF-IDF (SCIKIT-LEARN)</a:t>
+            </a:r>
+          </a:p>
+        </p:txBody>
+      </p:sp>
+      <p:sp>
+        <p:nvSpPr>
+          <p:cNvPr id="12" name="TextBox 11"/>
           <p:cNvSpPr txBox="1"/>
           <p:nvPr/>
         </p:nvSpPr>
         <p:spPr>
           <a:xfrm>
-            <a:off x="8229600" y="1536192"/>
-            <a:ext cx="3047695" cy="365760"/>
-          </a:xfrm>
-          <a:prstGeom prst="rect">
-            <a:avLst/>
-          </a:prstGeom>
-          <a:noFill/>
-        </p:spPr>
-        <p:txBody>
-          <a:bodyPr wrap="square" lIns="0" tIns="0" rIns="0" bIns="0">
-            <a:spAutoFit/>
-          </a:bodyPr>
-          <a:lstStyle/>
-          <a:p>
-            <a:pPr>
-              <a:defRPr sz="1200" b="1">
-                <a:solidFill>
-                  <a:srgbClr val="F43F5E"/>
-                </a:solidFill>
-                <a:latin typeface="Segoe UI"/>
-              </a:defRPr>
-            </a:pPr>
-            <a:r>
-              <a:t>03 | MATRICE TF-IDF (SCIKIT-LEARN)</a:t>
-            </a:r>
-          </a:p>
-        </p:txBody>
-      </p:sp>
-      <p:sp>
-        <p:nvSpPr>
-          <p:cNvPr id="15" name="TextBox 14"/>
-          <p:cNvSpPr txBox="1"/>
-          <p:nvPr/>
-        </p:nvSpPr>
-        <p:spPr>
-          <a:xfrm>
-            <a:off x="8229600" y="2011680"/>
-            <a:ext cx="3047695" cy="3931920"/>
+            <a:off x="6400800" y="1920240"/>
+            <a:ext cx="4876495" cy="4023360"/>
           </a:xfrm>
           <a:prstGeom prst="rect">
             <a:avLst/>
@@ -5934,7 +4619,7 @@
           <a:lstStyle/>
           <a:p>
             <a:pPr>
-              <a:defRPr sz="1100" b="1">
+              <a:defRPr sz="1000" b="1">
                 <a:solidFill>
                   <a:srgbClr val="F43F5E"/>
                 </a:solidFill>
@@ -5942,12 +4627,12 @@
               </a:defRPr>
             </a:pPr>
             <a:r>
-              <a:t>TfidfVectorizer Calibré :</a:t>
-            </a:r>
-          </a:p>
-          <a:p>
-            <a:pPr>
-              <a:defRPr sz="1000">
+              <a:t>Term Frequency - Inverse Document Frequency :</a:t>
+            </a:r>
+          </a:p>
+          <a:p>
+            <a:pPr>
+              <a:defRPr sz="900">
                 <a:solidFill>
                   <a:srgbClr val="F8FAFC"/>
                 </a:solidFill>
@@ -5955,13 +4640,12 @@
               </a:defRPr>
             </a:pPr>
             <a:r>
-              <a:t>Pondération Term Frequency - Inverse Document Frequency pour valoriser les termes rares et informatifs.</a:t>
-            </a:r>
-          </a:p>
-          <a:p/>
-          <a:p>
-            <a:pPr>
-              <a:defRPr sz="1100" b="1">
+              <a:t>Pondération pénalisant les mots fréquents dans tout le catalogue et sur-valorisant les spécificités produit.</a:t>
+            </a:r>
+          </a:p>
+          <a:p>
+            <a:pPr>
+              <a:defRPr sz="1000" b="1">
                 <a:solidFill>
                   <a:srgbClr val="F43F5E"/>
                 </a:solidFill>
@@ -5969,12 +4653,12 @@
               </a:defRPr>
             </a:pPr>
             <a:r>
-              <a:t>Dimensions de la Matrice :</a:t>
-            </a:r>
-          </a:p>
-          <a:p>
-            <a:pPr>
-              <a:defRPr sz="1000">
+              <a:t>Matrice TF-IDF Finale :</a:t>
+            </a:r>
+          </a:p>
+          <a:p>
+            <a:pPr>
+              <a:defRPr sz="900">
                 <a:solidFill>
                   <a:srgbClr val="F8FAFC"/>
                 </a:solidFill>
@@ -5982,13 +4666,12 @@
               </a:defRPr>
             </a:pPr>
             <a:r>
-              <a:t>500 documents (produits) x 1 033 dimensions lexicales épurées.</a:t>
-            </a:r>
-          </a:p>
-          <a:p/>
-          <a:p>
-            <a:pPr>
-              <a:defRPr sz="1100" b="1">
+              <a:t>500 produits $	imes$ 1 033 dimensions lexicales épurées.</a:t>
+            </a:r>
+          </a:p>
+          <a:p>
+            <a:pPr>
+              <a:defRPr sz="1000" b="1">
                 <a:solidFill>
                   <a:srgbClr val="F43F5E"/>
                 </a:solidFill>
@@ -5996,12 +4679,12 @@
               </a:defRPr>
             </a:pPr>
             <a:r>
-              <a:t>Format Numérique Dense :</a:t>
-            </a:r>
-          </a:p>
-          <a:p>
-            <a:pPr>
-              <a:defRPr sz="1000">
+              <a:t>Normalisation L2 :</a:t>
+            </a:r>
+          </a:p>
+          <a:p>
+            <a:pPr>
+              <a:defRPr sz="900">
                 <a:solidFill>
                   <a:srgbClr val="F8FAFC"/>
                 </a:solidFill>
@@ -6009,10 +4692,35 @@
               </a:defRPr>
             </a:pPr>
             <a:r>
-              <a:t>Chaque produit est représenté par un vecteur unitaire normé L2 prêt pour le calcul de similarité cosinus.</a:t>
-            </a:r>
-          </a:p>
-          <a:p/>
+              <a:t>Chaque vecteur produit possède une norme unitaire, permettant une comparaison angulaire optimale via la distance cosinus.</a:t>
+            </a:r>
+          </a:p>
+          <a:p>
+            <a:pPr>
+              <a:defRPr sz="1000" b="1">
+                <a:solidFill>
+                  <a:srgbClr val="F43F5E"/>
+                </a:solidFill>
+                <a:latin typeface="Segoe UI"/>
+              </a:defRPr>
+            </a:pPr>
+            <a:r>
+              <a:t>Livrable :</a:t>
+            </a:r>
+          </a:p>
+          <a:p>
+            <a:pPr>
+              <a:defRPr sz="900">
+                <a:solidFill>
+                  <a:srgbClr val="F8FAFC"/>
+                </a:solidFill>
+                <a:latin typeface="Segoe UI"/>
+              </a:defRPr>
+            </a:pPr>
+            <a:r>
+              <a:t>Matrice tfidf_matrix prête pour les deux algorithmes non supervisés (DBSCAN et LSA).</a:t>
+            </a:r>
+          </a:p>
         </p:txBody>
       </p:sp>
     </p:spTree>
@@ -6093,7 +4801,7 @@
           <a:noFill/>
         </p:spPr>
         <p:txBody>
-          <a:bodyPr wrap="square" lIns="0" tIns="0" rIns="0" bIns="0">
+          <a:bodyPr wrap="square">
             <a:spAutoFit/>
           </a:bodyPr>
           <a:lstStyle/>
@@ -6129,13 +4837,13 @@
           <a:noFill/>
         </p:spPr>
         <p:txBody>
-          <a:bodyPr wrap="square" lIns="0" tIns="0" rIns="0" bIns="0">
+          <a:bodyPr wrap="square">
             <a:spAutoFit/>
           </a:bodyPr>
           <a:lstStyle/>
           <a:p>
             <a:pPr>
-              <a:defRPr sz="2200" b="1">
+              <a:defRPr sz="2100" b="1">
                 <a:solidFill>
                   <a:srgbClr val="F8FAFC"/>
                 </a:solidFill>
@@ -6143,7 +4851,7 @@
               </a:defRPr>
             </a:pPr>
             <a:r>
-              <a:t>Partie 1 : Groupement Non Supervisé sur Matrice TF-IDF</a:t>
+              <a:t>Partie 1 : Groupement Non Supervisé des Produits par Affinité Cosinus</a:t>
             </a:r>
           </a:p>
         </p:txBody>
@@ -6165,7 +4873,7 @@
           <a:noFill/>
         </p:spPr>
         <p:txBody>
-          <a:bodyPr wrap="square" lIns="0" tIns="0" rIns="0" bIns="0">
+          <a:bodyPr wrap="square">
             <a:spAutoFit/>
           </a:bodyPr>
           <a:lstStyle/>
@@ -6179,7 +4887,7 @@
               </a:defRPr>
             </a:pPr>
             <a:r>
-              <a:t>4 / 10</a:t>
+              <a:t>4 / 8</a:t>
             </a:r>
           </a:p>
         </p:txBody>
@@ -6201,7 +4909,7 @@
           <a:noFill/>
         </p:spPr>
         <p:txBody>
-          <a:bodyPr wrap="square" lIns="0" tIns="0" rIns="0" bIns="0">
+          <a:bodyPr wrap="square">
             <a:spAutoFit/>
           </a:bodyPr>
           <a:lstStyle/>
@@ -6282,42 +4990,6 @@
           <a:noFill/>
         </p:spPr>
         <p:txBody>
-          <a:bodyPr wrap="square" lIns="0" tIns="0" rIns="0" bIns="0">
-            <a:spAutoFit/>
-          </a:bodyPr>
-          <a:lstStyle/>
-          <a:p>
-            <a:pPr>
-              <a:defRPr sz="1200" b="1">
-                <a:solidFill>
-                  <a:srgbClr val="F43F5E"/>
-                </a:solidFill>
-                <a:latin typeface="Segoe UI"/>
-              </a:defRPr>
-            </a:pPr>
-            <a:r>
-              <a:t>PARAMÉTRAGE &amp; RÉSULTATS DBSCAN (SCIKIT-LEARN)</a:t>
-            </a:r>
-          </a:p>
-        </p:txBody>
-      </p:sp>
-      <p:sp>
-        <p:nvSpPr>
-          <p:cNvPr id="9" name="TextBox 8"/>
-          <p:cNvSpPr txBox="1"/>
-          <p:nvPr/>
-        </p:nvSpPr>
-        <p:spPr>
-          <a:xfrm>
-            <a:off x="914400" y="1920240"/>
-            <a:ext cx="4846320" cy="3931920"/>
-          </a:xfrm>
-          <a:prstGeom prst="rect">
-            <a:avLst/>
-          </a:prstGeom>
-          <a:noFill/>
-        </p:spPr>
-        <p:txBody>
           <a:bodyPr wrap="square">
             <a:spAutoFit/>
           </a:bodyPr>
@@ -6332,12 +5004,48 @@
               </a:defRPr>
             </a:pPr>
             <a:r>
-              <a:t>Choix de la Métrique Cosinus :</a:t>
-            </a:r>
-          </a:p>
-          <a:p>
-            <a:pPr>
-              <a:defRPr sz="1000">
+              <a:t>CALIBRATION DBSCAN (COSINE METRIC)</a:t>
+            </a:r>
+          </a:p>
+        </p:txBody>
+      </p:sp>
+      <p:sp>
+        <p:nvSpPr>
+          <p:cNvPr id="9" name="TextBox 8"/>
+          <p:cNvSpPr txBox="1"/>
+          <p:nvPr/>
+        </p:nvSpPr>
+        <p:spPr>
+          <a:xfrm>
+            <a:off x="914400" y="1920240"/>
+            <a:ext cx="4846320" cy="4023360"/>
+          </a:xfrm>
+          <a:prstGeom prst="rect">
+            <a:avLst/>
+          </a:prstGeom>
+          <a:noFill/>
+        </p:spPr>
+        <p:txBody>
+          <a:bodyPr wrap="square">
+            <a:spAutoFit/>
+          </a:bodyPr>
+          <a:lstStyle/>
+          <a:p>
+            <a:pPr>
+              <a:defRPr sz="1000" b="1">
+                <a:solidFill>
+                  <a:srgbClr val="F43F5E"/>
+                </a:solidFill>
+                <a:latin typeface="Segoe UI"/>
+              </a:defRPr>
+            </a:pPr>
+            <a:r>
+              <a:t>Choix de la Distance Cosinus :</a:t>
+            </a:r>
+          </a:p>
+          <a:p>
+            <a:pPr>
+              <a:defRPr sz="900">
                 <a:solidFill>
                   <a:srgbClr val="F8FAFC"/>
                 </a:solidFill>
@@ -6345,12 +5053,12 @@
               </a:defRPr>
             </a:pPr>
             <a:r>
-              <a:t>En haute dimension textuelle (1 033 mots), la distance euclidienne souffre du fléau de la dimension. La distance cosinus mesure l'orientation sémantique indépendamment de la longueur du texte.</a:t>
-            </a:r>
-          </a:p>
-          <a:p>
-            <a:pPr>
-              <a:defRPr sz="1100" b="1">
+              <a:t>En espace de dimension 1 033, la distance cosinus mesure l'orientation sémantique et neutralise la longueur des textes.</a:t>
+            </a:r>
+          </a:p>
+          <a:p>
+            <a:pPr>
+              <a:defRPr sz="1000" b="1">
                 <a:solidFill>
                   <a:srgbClr val="F43F5E"/>
                 </a:solidFill>
@@ -6358,12 +5066,12 @@
               </a:defRPr>
             </a:pPr>
             <a:r>
-              <a:t>Calibration des Hyperparamètres :</a:t>
-            </a:r>
-          </a:p>
-          <a:p>
-            <a:pPr>
-              <a:defRPr sz="1000">
+              <a:t>Hyperparamètres Calibrés :</a:t>
+            </a:r>
+          </a:p>
+          <a:p>
+            <a:pPr>
+              <a:defRPr sz="900">
                 <a:solidFill>
                   <a:srgbClr val="F8FAFC"/>
                 </a:solidFill>
@@ -6375,12 +5083,12 @@
             </a:r>
             <a:br/>
             <a:r>
-              <a:t>• min_samples = 5 (seuil de densité minimale pour former un groupe).</a:t>
-            </a:r>
-          </a:p>
-          <a:p>
-            <a:pPr>
-              <a:defRPr sz="1100" b="1">
+              <a:t>• min_samples = 5 (densité minimale pour former un groupe).</a:t>
+            </a:r>
+          </a:p>
+          <a:p>
+            <a:pPr>
+              <a:defRPr sz="1000" b="1">
                 <a:solidFill>
                   <a:srgbClr val="F43F5E"/>
                 </a:solidFill>
@@ -6388,12 +5096,12 @@
               </a:defRPr>
             </a:pPr>
             <a:r>
-              <a:t>Clusters Découverts :</a:t>
-            </a:r>
-          </a:p>
-          <a:p>
-            <a:pPr>
-              <a:defRPr sz="1000">
+              <a:t>10 Clusters Cohérents Trouvés :</a:t>
+            </a:r>
+          </a:p>
+          <a:p>
+            <a:pPr>
+              <a:defRPr sz="900">
                 <a:solidFill>
                   <a:srgbClr val="F8FAFC"/>
                 </a:solidFill>
@@ -6401,12 +5109,12 @@
               </a:defRPr>
             </a:pPr>
             <a:r>
-              <a:t>10 clusters thématiques cohérents identifiés (conforme à l'attente 10 à 20 clusters du cahier des charges).</a:t>
-            </a:r>
-          </a:p>
-          <a:p>
-            <a:pPr>
-              <a:defRPr sz="1100" b="1">
+              <a:t>Respecte parfaitement l'objectif du brief (10 à 20 clusters avec peu de dispersion).</a:t>
+            </a:r>
+          </a:p>
+          <a:p>
+            <a:pPr>
+              <a:defRPr sz="1000" b="1">
                 <a:solidFill>
                   <a:srgbClr val="F43F5E"/>
                 </a:solidFill>
@@ -6414,12 +5122,12 @@
               </a:defRPr>
             </a:pPr>
             <a:r>
-              <a:t>Gestion des Outliers (Bruit) :</a:t>
-            </a:r>
-          </a:p>
-          <a:p>
-            <a:pPr>
-              <a:defRPr sz="1000">
+              <a:t>Gestion des Outliers (Bruit -1) :</a:t>
+            </a:r>
+          </a:p>
+          <a:p>
+            <a:pPr>
+              <a:defRPr sz="900">
                 <a:solidFill>
                   <a:srgbClr val="F8FAFC"/>
                 </a:solidFill>
@@ -6427,7 +5135,7 @@
               </a:defRPr>
             </a:pPr>
             <a:r>
-              <a:t>Les articles trop spécifiques ou hybrides sont classés en bruit (cluster -1) sans corrompre la pureté des clusters denses.</a:t>
+              <a:t>Les articles trop singuliers sont rejetés dans le bruit sans polluer la cohérence des clusters denses.</a:t>
             </a:r>
           </a:p>
         </p:txBody>
@@ -6494,13 +5202,13 @@
           <a:noFill/>
         </p:spPr>
         <p:txBody>
-          <a:bodyPr wrap="square" lIns="0" tIns="0" rIns="0" bIns="0">
+          <a:bodyPr wrap="square">
             <a:spAutoFit/>
           </a:bodyPr>
           <a:lstStyle/>
           <a:p>
             <a:pPr>
-              <a:defRPr sz="1200" b="1">
+              <a:defRPr sz="1100" b="1">
                 <a:solidFill>
                   <a:srgbClr val="F43F5E"/>
                 </a:solidFill>
@@ -6508,7 +5216,7 @@
               </a:defRPr>
             </a:pPr>
             <a:r>
-              <a:t>DISTRIBUTION DES PRINCIPAUX CLUSTERS DENSE</a:t>
+              <a:t>RÉPARTITION DES PRINCIPAUX CLUSTERS</a:t>
             </a:r>
           </a:p>
         </p:txBody>
@@ -6522,8 +5230,8 @@
           <p:nvPr/>
         </p:nvGraphicFramePr>
         <p:xfrm>
-          <a:off x="6400800" y="1920240"/>
-          <a:ext cx="4846320" cy="3931920"/>
+          <a:off x="6492240" y="1920240"/>
+          <a:ext cx="4693615" cy="3931920"/>
         </p:xfrm>
         <a:graphic>
           <a:graphicData uri="http://schemas.openxmlformats.org/drawingml/2006/table">
@@ -6532,9 +5240,9 @@
                 <a:tableStyleId>{5C22544A-7EE6-4342-B048-85BDC9FD1C3A}</a:tableStyleId>
               </a:tblPr>
               <a:tblGrid>
-                <a:gridCol w="1615440"/>
-                <a:gridCol w="1615440"/>
-                <a:gridCol w="1615440"/>
+                <a:gridCol w="1564538"/>
+                <a:gridCol w="1564538"/>
+                <a:gridCol w="1564539"/>
               </a:tblGrid>
               <a:tr h="491490">
                 <a:tc>
@@ -6543,7 +5251,7 @@
                     <a:lstStyle/>
                     <a:p>
                       <a:pPr>
-                        <a:defRPr sz="1050" b="1">
+                        <a:defRPr sz="1000" b="1">
                           <a:solidFill>
                             <a:srgbClr val="F43F5E"/>
                           </a:solidFill>
@@ -6567,7 +5275,7 @@
                     <a:lstStyle/>
                     <a:p>
                       <a:pPr>
-                        <a:defRPr sz="1050" b="1">
+                        <a:defRPr sz="1000" b="1">
                           <a:solidFill>
                             <a:srgbClr val="F43F5E"/>
                           </a:solidFill>
@@ -6575,7 +5283,7 @@
                         </a:defRPr>
                       </a:pPr>
                       <a:r>
-                        <a:t>Volume Produits</a:t>
+                        <a:t>Produits</a:t>
                       </a:r>
                     </a:p>
                   </a:txBody>
@@ -6591,7 +5299,7 @@
                     <a:lstStyle/>
                     <a:p>
                       <a:pPr>
-                        <a:defRPr sz="1050" b="1">
+                        <a:defRPr sz="1000" b="1">
                           <a:solidFill>
                             <a:srgbClr val="F43F5E"/>
                           </a:solidFill>
@@ -6649,7 +5357,7 @@
                         </a:defRPr>
                       </a:pPr>
                       <a:r>
-                        <a:t>53 produits</a:t>
+                        <a:t>53</a:t>
                       </a:r>
                     </a:p>
                   </a:txBody>
@@ -6723,7 +5431,7 @@
                         </a:defRPr>
                       </a:pPr>
                       <a:r>
-                        <a:t>13 produits</a:t>
+                        <a:t>13</a:t>
                       </a:r>
                     </a:p>
                   </a:txBody>
@@ -6797,7 +5505,7 @@
                         </a:defRPr>
                       </a:pPr>
                       <a:r>
-                        <a:t>8 produits</a:t>
+                        <a:t>8</a:t>
                       </a:r>
                     </a:p>
                   </a:txBody>
@@ -6871,7 +5579,7 @@
                         </a:defRPr>
                       </a:pPr>
                       <a:r>
-                        <a:t>7 produits</a:t>
+                        <a:t>7</a:t>
                       </a:r>
                     </a:p>
                   </a:txBody>
@@ -6945,7 +5653,7 @@
                         </a:defRPr>
                       </a:pPr>
                       <a:r>
-                        <a:t>7 produits</a:t>
+                        <a:t>7</a:t>
                       </a:r>
                     </a:p>
                   </a:txBody>
@@ -7019,7 +5727,7 @@
                         </a:defRPr>
                       </a:pPr>
                       <a:r>
-                        <a:t>7 produits</a:t>
+                        <a:t>7</a:t>
                       </a:r>
                     </a:p>
                   </a:txBody>
@@ -7093,7 +5801,7 @@
                         </a:defRPr>
                       </a:pPr>
                       <a:r>
-                        <a:t>6 produits</a:t>
+                        <a:t>6</a:t>
                       </a:r>
                     </a:p>
                   </a:txBody>
@@ -7210,7 +5918,7 @@
           <a:noFill/>
         </p:spPr>
         <p:txBody>
-          <a:bodyPr wrap="square" lIns="0" tIns="0" rIns="0" bIns="0">
+          <a:bodyPr wrap="square">
             <a:spAutoFit/>
           </a:bodyPr>
           <a:lstStyle/>
@@ -7246,13 +5954,13 @@
           <a:noFill/>
         </p:spPr>
         <p:txBody>
-          <a:bodyPr wrap="square" lIns="0" tIns="0" rIns="0" bIns="0">
+          <a:bodyPr wrap="square">
             <a:spAutoFit/>
           </a:bodyPr>
           <a:lstStyle/>
           <a:p>
             <a:pPr>
-              <a:defRPr sz="2200" b="1">
+              <a:defRPr sz="2100" b="1">
                 <a:solidFill>
                   <a:srgbClr val="F8FAFC"/>
                 </a:solidFill>
@@ -7260,7 +5968,7 @@
               </a:defRPr>
             </a:pPr>
             <a:r>
-              <a:t>Analyse Lexicale &amp; Nuages de Mots (WordClouds) des Clusters</a:t>
+              <a:t>Analyse Lexicale &amp; Nuages de Mots (WordClouds) des Groupes</a:t>
             </a:r>
           </a:p>
         </p:txBody>
@@ -7282,7 +5990,7 @@
           <a:noFill/>
         </p:spPr>
         <p:txBody>
-          <a:bodyPr wrap="square" lIns="0" tIns="0" rIns="0" bIns="0">
+          <a:bodyPr wrap="square">
             <a:spAutoFit/>
           </a:bodyPr>
           <a:lstStyle/>
@@ -7296,7 +6004,7 @@
               </a:defRPr>
             </a:pPr>
             <a:r>
-              <a:t>5 / 10</a:t>
+              <a:t>5 / 8</a:t>
             </a:r>
           </a:p>
         </p:txBody>
@@ -7318,7 +6026,7 @@
           <a:noFill/>
         </p:spPr>
         <p:txBody>
-          <a:bodyPr wrap="square" lIns="0" tIns="0" rIns="0" bIns="0">
+          <a:bodyPr wrap="square">
             <a:spAutoFit/>
           </a:bodyPr>
           <a:lstStyle/>
@@ -7399,42 +6107,6 @@
           <a:noFill/>
         </p:spPr>
         <p:txBody>
-          <a:bodyPr wrap="square" lIns="0" tIns="0" rIns="0" bIns="0">
-            <a:spAutoFit/>
-          </a:bodyPr>
-          <a:lstStyle/>
-          <a:p>
-            <a:pPr>
-              <a:defRPr sz="1200" b="1">
-                <a:solidFill>
-                  <a:srgbClr val="F43F5E"/>
-                </a:solidFill>
-                <a:latin typeface="Segoe UI"/>
-              </a:defRPr>
-            </a:pPr>
-            <a:r>
-              <a:t>VOCABULAIRE CLÉ PAR GROUPE DE PRODUITS</a:t>
-            </a:r>
-          </a:p>
-        </p:txBody>
-      </p:sp>
-      <p:sp>
-        <p:nvSpPr>
-          <p:cNvPr id="9" name="TextBox 8"/>
-          <p:cNvSpPr txBox="1"/>
-          <p:nvPr/>
-        </p:nvSpPr>
-        <p:spPr>
-          <a:xfrm>
-            <a:off x="914400" y="1920240"/>
-            <a:ext cx="4846320" cy="3931920"/>
-          </a:xfrm>
-          <a:prstGeom prst="rect">
-            <a:avLst/>
-          </a:prstGeom>
-          <a:noFill/>
-        </p:spPr>
-        <p:txBody>
           <a:bodyPr wrap="square">
             <a:spAutoFit/>
           </a:bodyPr>
@@ -7449,12 +6121,48 @@
               </a:defRPr>
             </a:pPr>
             <a:r>
+              <a:t>VOCABULAIRE CLÉ PAR CLUSTER (WORDCLOUDS)</a:t>
+            </a:r>
+          </a:p>
+        </p:txBody>
+      </p:sp>
+      <p:sp>
+        <p:nvSpPr>
+          <p:cNvPr id="9" name="TextBox 8"/>
+          <p:cNvSpPr txBox="1"/>
+          <p:nvPr/>
+        </p:nvSpPr>
+        <p:spPr>
+          <a:xfrm>
+            <a:off x="914400" y="1920240"/>
+            <a:ext cx="4846320" cy="4023360"/>
+          </a:xfrm>
+          <a:prstGeom prst="rect">
+            <a:avLst/>
+          </a:prstGeom>
+          <a:noFill/>
+        </p:spPr>
+        <p:txBody>
+          <a:bodyPr wrap="square">
+            <a:spAutoFit/>
+          </a:bodyPr>
+          <a:lstStyle/>
+          <a:p>
+            <a:pPr>
+              <a:defRPr sz="1000" b="1">
+                <a:solidFill>
+                  <a:srgbClr val="F43F5E"/>
+                </a:solidFill>
+                <a:latin typeface="Segoe UI"/>
+              </a:defRPr>
+            </a:pPr>
+            <a:r>
               <a:t>Cluster 2 (Sous-vêtements techniques) :</a:t>
             </a:r>
           </a:p>
           <a:p>
             <a:pPr>
-              <a:defRPr sz="1000">
+              <a:defRPr sz="900">
                 <a:solidFill>
                   <a:srgbClr val="F8FAFC"/>
                 </a:solidFill>
@@ -7462,12 +6170,12 @@
               </a:defRPr>
             </a:pPr>
             <a:r>
-              <a:t>Mots dominants : 'boxer', 'waistband', 'brief', 'cotton', 'organic', 'comfort', 'skin'. Vocabulaire axé sur le confort au porter et l'élasticité.</a:t>
-            </a:r>
-          </a:p>
-          <a:p>
-            <a:pPr>
-              <a:defRPr sz="1100" b="1">
+              <a:t>Mots dominants : 'boxer', 'waistband', 'brief', 'cotton', 'organic', 'comfort', 'skin'. Confort au porter et maintien élastique.</a:t>
+            </a:r>
+          </a:p>
+          <a:p>
+            <a:pPr>
+              <a:defRPr sz="1000" b="1">
                 <a:solidFill>
                   <a:srgbClr val="F43F5E"/>
                 </a:solidFill>
@@ -7475,12 +6183,12 @@
               </a:defRPr>
             </a:pPr>
             <a:r>
-              <a:t>Cluster 5 (Sacs à dos &amp; Bagagerie) :</a:t>
-            </a:r>
-          </a:p>
-          <a:p>
-            <a:pPr>
-              <a:defRPr sz="1000">
+              <a:t>Cluster 5 (Sacs à dos &amp; Randonnée) :</a:t>
+            </a:r>
+          </a:p>
+          <a:p>
+            <a:pPr>
+              <a:defRPr sz="900">
                 <a:solidFill>
                   <a:srgbClr val="F8FAFC"/>
                 </a:solidFill>
@@ -7488,12 +6196,12 @@
               </a:defRPr>
             </a:pPr>
             <a:r>
-              <a:t>Mots dominants : 'pack', 'pocket', 'backpack', 'strap', 'compartment', 'zipper', 'hydration'. Vocabulaire de portage et d'organisation logistique.</a:t>
-            </a:r>
-          </a:p>
-          <a:p>
-            <a:pPr>
-              <a:defRPr sz="1100" b="1">
+              <a:t>Mots dominants : 'pack', 'pocket', 'backpack', 'strap', 'compartment', 'zipper', 'hydration'. Organisation et portage.</a:t>
+            </a:r>
+          </a:p>
+          <a:p>
+            <a:pPr>
+              <a:defRPr sz="1000" b="1">
                 <a:solidFill>
                   <a:srgbClr val="F43F5E"/>
                 </a:solidFill>
@@ -7506,7 +6214,7 @@
           </a:p>
           <a:p>
             <a:pPr>
-              <a:defRPr sz="1000">
+              <a:defRPr sz="900">
                 <a:solidFill>
                   <a:srgbClr val="F8FAFC"/>
                 </a:solidFill>
@@ -7514,12 +6222,12 @@
               </a:defRPr>
             </a:pPr>
             <a:r>
-              <a:t>Mots dominants : 'jacket', 'waterproof', 'breathable', 'hood', 'seam', 'shell', 'rain'. Vocabulaire de protection contre les intempéries.</a:t>
-            </a:r>
-          </a:p>
-          <a:p>
-            <a:pPr>
-              <a:defRPr sz="1100" b="1">
+              <a:t>Mots dominants : 'jacket', 'waterproof', 'breathable', 'hood', 'seam', 'shell', 'rain'. Protection intempéries.</a:t>
+            </a:r>
+          </a:p>
+          <a:p>
+            <a:pPr>
+              <a:defRPr sz="1000" b="1">
                 <a:solidFill>
                   <a:srgbClr val="F43F5E"/>
                 </a:solidFill>
@@ -7532,7 +6240,7 @@
           </a:p>
           <a:p>
             <a:pPr>
-              <a:defRPr sz="1000">
+              <a:defRPr sz="900">
                 <a:solidFill>
                   <a:srgbClr val="F8FAFC"/>
                 </a:solidFill>
@@ -7540,7 +6248,7 @@
               </a:defRPr>
             </a:pPr>
             <a:r>
-              <a:t>Mots dominants : 'fleece', 'warmth', 'layer', 'soft', 'thermal', 'weight'. Vocabulaire d'isolation thermique.</a:t>
+              <a:t>Mots dominants : 'fleece', 'warmth', 'layer', 'soft', 'thermal'. Isolation grand froid.</a:t>
             </a:r>
           </a:p>
         </p:txBody>
@@ -7607,42 +6315,6 @@
           <a:noFill/>
         </p:spPr>
         <p:txBody>
-          <a:bodyPr wrap="square" lIns="0" tIns="0" rIns="0" bIns="0">
-            <a:spAutoFit/>
-          </a:bodyPr>
-          <a:lstStyle/>
-          <a:p>
-            <a:pPr>
-              <a:defRPr sz="1200" b="1">
-                <a:solidFill>
-                  <a:srgbClr val="F43F5E"/>
-                </a:solidFill>
-                <a:latin typeface="Segoe UI"/>
-              </a:defRPr>
-            </a:pPr>
-            <a:r>
-              <a:t>INTERPRÉTATION &amp; APPORT QUALITATIF</a:t>
-            </a:r>
-          </a:p>
-        </p:txBody>
-      </p:sp>
-      <p:sp>
-        <p:nvSpPr>
-          <p:cNvPr id="12" name="TextBox 11"/>
-          <p:cNvSpPr txBox="1"/>
-          <p:nvPr/>
-        </p:nvSpPr>
-        <p:spPr>
-          <a:xfrm>
-            <a:off x="6400800" y="1920240"/>
-            <a:ext cx="4846320" cy="3931920"/>
-          </a:xfrm>
-          <a:prstGeom prst="rect">
-            <a:avLst/>
-          </a:prstGeom>
-          <a:noFill/>
-        </p:spPr>
-        <p:txBody>
           <a:bodyPr wrap="square">
             <a:spAutoFit/>
           </a:bodyPr>
@@ -7651,18 +6323,54 @@
             <a:pPr>
               <a:defRPr sz="1100" b="1">
                 <a:solidFill>
+                  <a:srgbClr val="F43F5E"/>
+                </a:solidFill>
+                <a:latin typeface="Segoe UI"/>
+              </a:defRPr>
+            </a:pPr>
+            <a:r>
+              <a:t>INTERPRÉTATION QUALITATIVE DU CLUSTERING</a:t>
+            </a:r>
+          </a:p>
+        </p:txBody>
+      </p:sp>
+      <p:sp>
+        <p:nvSpPr>
+          <p:cNvPr id="12" name="TextBox 11"/>
+          <p:cNvSpPr txBox="1"/>
+          <p:nvPr/>
+        </p:nvSpPr>
+        <p:spPr>
+          <a:xfrm>
+            <a:off x="6400800" y="1920240"/>
+            <a:ext cx="4876495" cy="4023360"/>
+          </a:xfrm>
+          <a:prstGeom prst="rect">
+            <a:avLst/>
+          </a:prstGeom>
+          <a:noFill/>
+        </p:spPr>
+        <p:txBody>
+          <a:bodyPr wrap="square">
+            <a:spAutoFit/>
+          </a:bodyPr>
+          <a:lstStyle/>
+          <a:p>
+            <a:pPr>
+              <a:defRPr sz="1000" b="1">
+                <a:solidFill>
                   <a:srgbClr val="38BDF8"/>
                 </a:solidFill>
                 <a:latin typeface="Segoe UI"/>
               </a:defRPr>
             </a:pPr>
             <a:r>
-              <a:t>1. Séparation Sémantique Nette :</a:t>
-            </a:r>
-          </a:p>
-          <a:p>
-            <a:pPr>
-              <a:defRPr sz="1000">
+              <a:t>Séparation Sémantique Nette :</a:t>
+            </a:r>
+          </a:p>
+          <a:p>
+            <a:pPr>
+              <a:defRPr sz="900">
                 <a:solidFill>
                   <a:srgbClr val="F8FAFC"/>
                 </a:solidFill>
@@ -7670,12 +6378,12 @@
               </a:defRPr>
             </a:pPr>
             <a:r>
-              <a:t>Les nuages de mots confirment que les clusters ne partagent aucun vocabulaire redondant : chaque groupe correspond à une intention client précise.</a:t>
-            </a:r>
-          </a:p>
-          <a:p>
-            <a:pPr>
-              <a:defRPr sz="1100" b="1">
+              <a:t>Chaque cluster possède son univers lexical propre, sans chevauchement confus entre les catégories techniques.</a:t>
+            </a:r>
+          </a:p>
+          <a:p>
+            <a:pPr>
+              <a:defRPr sz="1000" b="1">
                 <a:solidFill>
                   <a:srgbClr val="38BDF8"/>
                 </a:solidFill>
@@ -7683,12 +6391,12 @@
               </a:defRPr>
             </a:pPr>
             <a:r>
-              <a:t>2. Filtrage des Outliers comme Bouclier Qualité :</a:t>
-            </a:r>
-          </a:p>
-          <a:p>
-            <a:pPr>
-              <a:defRPr sz="1000">
+              <a:t>Fiabilité du Regroupement :</a:t>
+            </a:r>
+          </a:p>
+          <a:p>
+            <a:pPr>
+              <a:defRPr sz="900">
                 <a:solidFill>
                   <a:srgbClr val="F8FAFC"/>
                 </a:solidFill>
@@ -7696,12 +6404,12 @@
               </a:defRPr>
             </a:pPr>
             <a:r>
-              <a:t>En rejetant les fiches atypiques dans le cluster de bruit, DBSCAN préserve des groupes homogènes exempts d'intrus.</a:t>
-            </a:r>
-          </a:p>
-          <a:p>
-            <a:pPr>
-              <a:defRPr sz="1100" b="1">
+              <a:t>Le clustering isole avec succès les sous-familles de vêtements sans aucune étiquette préalable.</a:t>
+            </a:r>
+          </a:p>
+          <a:p>
+            <a:pPr>
+              <a:defRPr sz="1000" b="1">
                 <a:solidFill>
                   <a:srgbClr val="38BDF8"/>
                 </a:solidFill>
@@ -7709,12 +6417,12 @@
               </a:defRPr>
             </a:pPr>
             <a:r>
-              <a:t>3. Exploitation Directe pour le Recommender :</a:t>
-            </a:r>
-          </a:p>
-          <a:p>
-            <a:pPr>
-              <a:defRPr sz="1000">
+              <a:t>Base pour la Recommandation :</a:t>
+            </a:r>
+          </a:p>
+          <a:p>
+            <a:pPr>
+              <a:defRPr sz="900">
                 <a:solidFill>
                   <a:srgbClr val="F8FAFC"/>
                 </a:solidFill>
@@ -7722,7 +6430,7 @@
               </a:defRPr>
             </a:pPr>
             <a:r>
-              <a:t>Ces clusters constituent le périmètre d'éligibilité pour les suggestions de produits complémentaires.</a:t>
+              <a:t>Ces clusters délimitent les frontières sémantiques idéales pour recommander des produits de la même famille.</a:t>
             </a:r>
           </a:p>
         </p:txBody>
@@ -7805,7 +6513,7 @@
           <a:noFill/>
         </p:spPr>
         <p:txBody>
-          <a:bodyPr wrap="square" lIns="0" tIns="0" rIns="0" bIns="0">
+          <a:bodyPr wrap="square">
             <a:spAutoFit/>
           </a:bodyPr>
           <a:lstStyle/>
@@ -7841,13 +6549,13 @@
           <a:noFill/>
         </p:spPr>
         <p:txBody>
-          <a:bodyPr wrap="square" lIns="0" tIns="0" rIns="0" bIns="0">
+          <a:bodyPr wrap="square">
             <a:spAutoFit/>
           </a:bodyPr>
           <a:lstStyle/>
           <a:p>
             <a:pPr>
-              <a:defRPr sz="2200" b="1">
+              <a:defRPr sz="2100" b="1">
                 <a:solidFill>
                   <a:srgbClr val="F8FAFC"/>
                 </a:solidFill>
@@ -7855,7 +6563,7 @@
               </a:defRPr>
             </a:pPr>
             <a:r>
-              <a:t>Partie 2 : Algorithme find_similar_items &amp; Cosine Similarity</a:t>
+              <a:t>Partie 2 : Algorithme find_similar_items &amp; Démonstration Interactive</a:t>
             </a:r>
           </a:p>
         </p:txBody>
@@ -7877,7 +6585,7 @@
           <a:noFill/>
         </p:spPr>
         <p:txBody>
-          <a:bodyPr wrap="square" lIns="0" tIns="0" rIns="0" bIns="0">
+          <a:bodyPr wrap="square">
             <a:spAutoFit/>
           </a:bodyPr>
           <a:lstStyle/>
@@ -7891,7 +6599,7 @@
               </a:defRPr>
             </a:pPr>
             <a:r>
-              <a:t>6 / 10</a:t>
+              <a:t>6 / 8</a:t>
             </a:r>
           </a:p>
         </p:txBody>
@@ -7913,7 +6621,7 @@
           <a:noFill/>
         </p:spPr>
         <p:txBody>
-          <a:bodyPr wrap="square" lIns="0" tIns="0" rIns="0" bIns="0">
+          <a:bodyPr wrap="square">
             <a:spAutoFit/>
           </a:bodyPr>
           <a:lstStyle/>
@@ -7941,7 +6649,7 @@
         <p:spPr>
           <a:xfrm>
             <a:off x="731520" y="1371600"/>
-            <a:ext cx="3413455" cy="4754880"/>
+            <a:ext cx="5212080" cy="4754880"/>
           </a:xfrm>
           <a:prstGeom prst="roundRect">
             <a:avLst/>
@@ -7986,43 +6694,7 @@
         <p:spPr>
           <a:xfrm>
             <a:off x="914400" y="1536192"/>
-            <a:ext cx="3047695" cy="365760"/>
-          </a:xfrm>
-          <a:prstGeom prst="rect">
-            <a:avLst/>
-          </a:prstGeom>
-          <a:noFill/>
-        </p:spPr>
-        <p:txBody>
-          <a:bodyPr wrap="square" lIns="0" tIns="0" rIns="0" bIns="0">
-            <a:spAutoFit/>
-          </a:bodyPr>
-          <a:lstStyle/>
-          <a:p>
-            <a:pPr>
-              <a:defRPr sz="1200" b="1">
-                <a:solidFill>
-                  <a:srgbClr val="F43F5E"/>
-                </a:solidFill>
-                <a:latin typeface="Segoe UI"/>
-              </a:defRPr>
-            </a:pPr>
-            <a:r>
-              <a:t>01 | MATRICE DE SIMILARITÉ</a:t>
-            </a:r>
-          </a:p>
-        </p:txBody>
-      </p:sp>
-      <p:sp>
-        <p:nvSpPr>
-          <p:cNvPr id="9" name="TextBox 8"/>
-          <p:cNvSpPr txBox="1"/>
-          <p:nvPr/>
-        </p:nvSpPr>
-        <p:spPr>
-          <a:xfrm>
-            <a:off x="914400" y="2011680"/>
-            <a:ext cx="3047695" cy="3931920"/>
+            <a:ext cx="4846320" cy="365760"/>
           </a:xfrm>
           <a:prstGeom prst="rect">
             <a:avLst/>
@@ -8044,12 +6716,48 @@
               </a:defRPr>
             </a:pPr>
             <a:r>
-              <a:t>Calcul All-Pairs Cosine :</a:t>
-            </a:r>
-          </a:p>
-          <a:p>
-            <a:pPr>
-              <a:defRPr sz="1000">
+              <a:t>MOTEUR HYBRIDE COSINE + DBSCAN</a:t>
+            </a:r>
+          </a:p>
+        </p:txBody>
+      </p:sp>
+      <p:sp>
+        <p:nvSpPr>
+          <p:cNvPr id="9" name="TextBox 8"/>
+          <p:cNvSpPr txBox="1"/>
+          <p:nvPr/>
+        </p:nvSpPr>
+        <p:spPr>
+          <a:xfrm>
+            <a:off x="914400" y="1920240"/>
+            <a:ext cx="4846320" cy="4023360"/>
+          </a:xfrm>
+          <a:prstGeom prst="rect">
+            <a:avLst/>
+          </a:prstGeom>
+          <a:noFill/>
+        </p:spPr>
+        <p:txBody>
+          <a:bodyPr wrap="square">
+            <a:spAutoFit/>
+          </a:bodyPr>
+          <a:lstStyle/>
+          <a:p>
+            <a:pPr>
+              <a:defRPr sz="1000" b="1">
+                <a:solidFill>
+                  <a:srgbClr val="F43F5E"/>
+                </a:solidFill>
+                <a:latin typeface="Segoe UI"/>
+              </a:defRPr>
+            </a:pPr>
+            <a:r>
+              <a:t>Matrice de Similarité Cosinus :</a:t>
+            </a:r>
+          </a:p>
+          <a:p>
+            <a:pPr>
+              <a:defRPr sz="900">
                 <a:solidFill>
                   <a:srgbClr val="F8FAFC"/>
                 </a:solidFill>
@@ -8057,13 +6765,12 @@
               </a:defRPr>
             </a:pPr>
             <a:r>
-              <a:t>Calcul vectoriel optimisé de la similarité cosinus entre les 500 vecteurs TF-IDF du catalogue (500x500).</a:t>
-            </a:r>
-          </a:p>
-          <a:p/>
-          <a:p>
-            <a:pPr>
-              <a:defRPr sz="1100" b="1">
+              <a:t>Calcul vectoriel all-pairs ($500 	imes 500$) mesurant le cosinus de l'angle entre descriptions.</a:t>
+            </a:r>
+          </a:p>
+          <a:p>
+            <a:pPr>
+              <a:defRPr sz="1000" b="1">
                 <a:solidFill>
                   <a:srgbClr val="F43F5E"/>
                 </a:solidFill>
@@ -8071,12 +6778,12 @@
               </a:defRPr>
             </a:pPr>
             <a:r>
-              <a:t>Score Normalisé [0, 1] :</a:t>
-            </a:r>
-          </a:p>
-          <a:p>
-            <a:pPr>
-              <a:defRPr sz="1000">
+              <a:t>Filtrage Intra-Cluster :</a:t>
+            </a:r>
+          </a:p>
+          <a:p>
+            <a:pPr>
+              <a:defRPr sz="900">
                 <a:solidFill>
                   <a:srgbClr val="F8FAFC"/>
                 </a:solidFill>
@@ -8084,13 +6791,12 @@
               </a:defRPr>
             </a:pPr>
             <a:r>
-              <a:t>1.0 = descriptions textuelles identiques, 0.0 = aucun mot en commun.</a:t>
-            </a:r>
-          </a:p>
-          <a:p/>
-          <a:p>
-            <a:pPr>
-              <a:defRPr sz="1100" b="1">
+              <a:t>Si le produit consulté appartient à un cluster dense (ex: Cluster 2), la recherche est restreinte aux produits du même groupe (anti-bruit).</a:t>
+            </a:r>
+          </a:p>
+          <a:p>
+            <a:pPr>
+              <a:defRPr sz="1000" b="1">
                 <a:solidFill>
                   <a:srgbClr val="F43F5E"/>
                 </a:solidFill>
@@ -8098,12 +6804,12 @@
               </a:defRPr>
             </a:pPr>
             <a:r>
-              <a:t>Latence Instantanée :</a:t>
-            </a:r>
-          </a:p>
-          <a:p>
-            <a:pPr>
-              <a:defRPr sz="1000">
+              <a:t>Exclusion Auto-Référence :</a:t>
+            </a:r>
+          </a:p>
+          <a:p>
+            <a:pPr>
+              <a:defRPr sz="900">
                 <a:solidFill>
                   <a:srgbClr val="F8FAFC"/>
                 </a:solidFill>
@@ -8111,10 +6817,35 @@
               </a:defRPr>
             </a:pPr>
             <a:r>
-              <a:t>L'évaluation matricielle s'effectue en quelques millisecondes.</a:t>
-            </a:r>
-          </a:p>
-          <a:p/>
+              <a:t>Le produit actif est exclu de sa liste de recommandations.</a:t>
+            </a:r>
+          </a:p>
+          <a:p>
+            <a:pPr>
+              <a:defRPr sz="1000" b="1">
+                <a:solidFill>
+                  <a:srgbClr val="F43F5E"/>
+                </a:solidFill>
+                <a:latin typeface="Segoe UI"/>
+              </a:defRPr>
+            </a:pPr>
+            <a:r>
+              <a:t>Livrable Top-5 :</a:t>
+            </a:r>
+          </a:p>
+          <a:p>
+            <a:pPr>
+              <a:defRPr sz="900">
+                <a:solidFill>
+                  <a:srgbClr val="F8FAFC"/>
+                </a:solidFill>
+                <a:latin typeface="Segoe UI"/>
+              </a:defRPr>
+            </a:pPr>
+            <a:r>
+              <a:t>Retourne exactement les 5 IDs d'articles les plus proches pour affichage sur le site.</a:t>
+            </a:r>
+          </a:p>
         </p:txBody>
       </p:sp>
       <p:sp>
@@ -8125,8 +6856,8 @@
         </p:nvSpPr>
         <p:spPr>
           <a:xfrm>
-            <a:off x="4389120" y="1371600"/>
-            <a:ext cx="3413455" cy="4754880"/>
+            <a:off x="6217920" y="1371600"/>
+            <a:ext cx="5242255" cy="4754880"/>
           </a:xfrm>
           <a:prstGeom prst="roundRect">
             <a:avLst/>
@@ -8170,44 +6901,8 @@
         </p:nvSpPr>
         <p:spPr>
           <a:xfrm>
-            <a:off x="4572000" y="1536192"/>
-            <a:ext cx="3047695" cy="365760"/>
-          </a:xfrm>
-          <a:prstGeom prst="rect">
-            <a:avLst/>
-          </a:prstGeom>
-          <a:noFill/>
-        </p:spPr>
-        <p:txBody>
-          <a:bodyPr wrap="square" lIns="0" tIns="0" rIns="0" bIns="0">
-            <a:spAutoFit/>
-          </a:bodyPr>
-          <a:lstStyle/>
-          <a:p>
-            <a:pPr>
-              <a:defRPr sz="1200" b="1">
-                <a:solidFill>
-                  <a:srgbClr val="F43F5E"/>
-                </a:solidFill>
-                <a:latin typeface="Segoe UI"/>
-              </a:defRPr>
-            </a:pPr>
-            <a:r>
-              <a:t>02 | ALGORITHME HYBRIDE AVEC DBSCAN</a:t>
-            </a:r>
-          </a:p>
-        </p:txBody>
-      </p:sp>
-      <p:sp>
-        <p:nvSpPr>
-          <p:cNvPr id="12" name="TextBox 11"/>
-          <p:cNvSpPr txBox="1"/>
-          <p:nvPr/>
-        </p:nvSpPr>
-        <p:spPr>
-          <a:xfrm>
-            <a:off x="4572000" y="2011680"/>
-            <a:ext cx="3047695" cy="3931920"/>
+            <a:off x="6400800" y="1536192"/>
+            <a:ext cx="4876495" cy="365760"/>
           </a:xfrm>
           <a:prstGeom prst="rect">
             <a:avLst/>
@@ -8229,170 +6924,21 @@
               </a:defRPr>
             </a:pPr>
             <a:r>
-              <a:t>Filtrage Intra-Cluster :</a:t>
-            </a:r>
-          </a:p>
-          <a:p>
-            <a:pPr>
-              <a:defRPr sz="1000">
-                <a:solidFill>
-                  <a:srgbClr val="F8FAFC"/>
-                </a:solidFill>
-                <a:latin typeface="Segoe UI"/>
-              </a:defRPr>
-            </a:pPr>
-            <a:r>
-              <a:t>Si le produit source appartient à un cluster dense (ex: Cluster 2), la recherche de voisins est restreinte aux produits du même cluster.</a:t>
-            </a:r>
-          </a:p>
-          <a:p/>
-          <a:p>
-            <a:pPr>
-              <a:defRPr sz="1100" b="1">
-                <a:solidFill>
-                  <a:srgbClr val="F43F5E"/>
-                </a:solidFill>
-                <a:latin typeface="Segoe UI"/>
-              </a:defRPr>
-            </a:pPr>
-            <a:r>
-              <a:t>Élimination des Aberrations :</a:t>
-            </a:r>
-          </a:p>
-          <a:p>
-            <a:pPr>
-              <a:defRPr sz="1000">
-                <a:solidFill>
-                  <a:srgbClr val="F8FAFC"/>
-                </a:solidFill>
-                <a:latin typeface="Segoe UI"/>
-              </a:defRPr>
-            </a:pPr>
-            <a:r>
-              <a:t>Évite de recommander un sac de couchage à un utilisateur qui consulte un t-shirt de course.</a:t>
-            </a:r>
-          </a:p>
-          <a:p/>
-          <a:p>
-            <a:pPr>
-              <a:defRPr sz="1100" b="1">
-                <a:solidFill>
-                  <a:srgbClr val="F43F5E"/>
-                </a:solidFill>
-                <a:latin typeface="Segoe UI"/>
-              </a:defRPr>
-            </a:pPr>
-            <a:r>
-              <a:t>Repli Sécurisé (Fallback) :</a:t>
-            </a:r>
-          </a:p>
-          <a:p>
-            <a:pPr>
-              <a:defRPr sz="1000">
-                <a:solidFill>
-                  <a:srgbClr val="F8FAFC"/>
-                </a:solidFill>
-                <a:latin typeface="Segoe UI"/>
-              </a:defRPr>
-            </a:pPr>
-            <a:r>
-              <a:t>Si le produit est un outlier (cluster -1), l'algorithme élargit la recherche à tout le catalogue.</a:t>
-            </a:r>
-          </a:p>
-          <a:p/>
-        </p:txBody>
-      </p:sp>
-      <p:sp>
-        <p:nvSpPr>
-          <p:cNvPr id="13" name="Rounded Rectangle 12"/>
-          <p:cNvSpPr/>
-          <p:nvPr/>
-        </p:nvSpPr>
-        <p:spPr>
-          <a:xfrm>
-            <a:off x="8046720" y="1371600"/>
-            <a:ext cx="3413455" cy="4754880"/>
-          </a:xfrm>
-          <a:prstGeom prst="roundRect">
-            <a:avLst/>
-          </a:prstGeom>
-          <a:solidFill>
-            <a:srgbClr val="1E293B"/>
-          </a:solidFill>
-          <a:ln w="19050">
-            <a:solidFill>
-              <a:srgbClr val="334155"/>
-            </a:solidFill>
-          </a:ln>
-        </p:spPr>
-        <p:style>
-          <a:lnRef idx="1">
-            <a:schemeClr val="accent1"/>
-          </a:lnRef>
-          <a:fillRef idx="3">
-            <a:schemeClr val="accent1"/>
-          </a:fillRef>
-          <a:effectRef idx="2">
-            <a:schemeClr val="accent1"/>
-          </a:effectRef>
-          <a:fontRef idx="minor">
-            <a:schemeClr val="lt1"/>
-          </a:fontRef>
-        </p:style>
-        <p:txBody>
-          <a:bodyPr rtlCol="0" anchor="ctr"/>
-          <a:lstStyle/>
-          <a:p>
-            <a:pPr algn="ctr"/>
-          </a:p>
-        </p:txBody>
-      </p:sp>
-      <p:sp>
-        <p:nvSpPr>
-          <p:cNvPr id="14" name="TextBox 13"/>
+              <a:t>DÉMONSTRATION RÉELLE (NOTEBOOK &amp; INPUT)</a:t>
+            </a:r>
+          </a:p>
+        </p:txBody>
+      </p:sp>
+      <p:sp>
+        <p:nvSpPr>
+          <p:cNvPr id="12" name="TextBox 11"/>
           <p:cNvSpPr txBox="1"/>
           <p:nvPr/>
         </p:nvSpPr>
         <p:spPr>
           <a:xfrm>
-            <a:off x="8229600" y="1536192"/>
-            <a:ext cx="3047695" cy="365760"/>
-          </a:xfrm>
-          <a:prstGeom prst="rect">
-            <a:avLst/>
-          </a:prstGeom>
-          <a:noFill/>
-        </p:spPr>
-        <p:txBody>
-          <a:bodyPr wrap="square" lIns="0" tIns="0" rIns="0" bIns="0">
-            <a:spAutoFit/>
-          </a:bodyPr>
-          <a:lstStyle/>
-          <a:p>
-            <a:pPr>
-              <a:defRPr sz="1200" b="1">
-                <a:solidFill>
-                  <a:srgbClr val="F43F5E"/>
-                </a:solidFill>
-                <a:latin typeface="Segoe UI"/>
-              </a:defRPr>
-            </a:pPr>
-            <a:r>
-              <a:t>03 | EXTRACTION TOP-N RECOMMANDATIONS</a:t>
-            </a:r>
-          </a:p>
-        </p:txBody>
-      </p:sp>
-      <p:sp>
-        <p:nvSpPr>
-          <p:cNvPr id="15" name="TextBox 14"/>
-          <p:cNvSpPr txBox="1"/>
-          <p:nvPr/>
-        </p:nvSpPr>
-        <p:spPr>
-          <a:xfrm>
-            <a:off x="8229600" y="2011680"/>
-            <a:ext cx="3047695" cy="3931920"/>
+            <a:off x="6400800" y="1920240"/>
+            <a:ext cx="4876495" cy="4023360"/>
           </a:xfrm>
           <a:prstGeom prst="rect">
             <a:avLst/>
@@ -8406,20 +6952,20 @@
           <a:lstStyle/>
           <a:p>
             <a:pPr>
-              <a:defRPr sz="1100" b="1">
-                <a:solidFill>
-                  <a:srgbClr val="F43F5E"/>
-                </a:solidFill>
-                <a:latin typeface="Segoe UI"/>
-              </a:defRPr>
-            </a:pPr>
-            <a:r>
-              <a:t>Tri Décroissant :</a:t>
-            </a:r>
-          </a:p>
-          <a:p>
-            <a:pPr>
-              <a:defRPr sz="1000">
+              <a:defRPr sz="1000" b="1">
+                <a:solidFill>
+                  <a:srgbClr val="10B981"/>
+                </a:solidFill>
+                <a:latin typeface="Segoe UI"/>
+              </a:defRPr>
+            </a:pPr>
+            <a:r>
+              <a:t>Produit Consulté (ID 0) :</a:t>
+            </a:r>
+          </a:p>
+          <a:p>
+            <a:pPr>
+              <a:defRPr sz="900">
                 <a:solidFill>
                   <a:srgbClr val="F8FAFC"/>
                 </a:solidFill>
@@ -8427,26 +6973,25 @@
               </a:defRPr>
             </a:pPr>
             <a:r>
-              <a:t>Classement des produits par affinité cosinus décroissante.</a:t>
-            </a:r>
-          </a:p>
-          <a:p/>
-          <a:p>
-            <a:pPr>
-              <a:defRPr sz="1100" b="1">
-                <a:solidFill>
-                  <a:srgbClr val="F43F5E"/>
-                </a:solidFill>
-                <a:latin typeface="Segoe UI"/>
-              </a:defRPr>
-            </a:pPr>
-            <a:r>
-              <a:t>Exclusion du Produit Actif :</a:t>
-            </a:r>
-          </a:p>
-          <a:p>
-            <a:pPr>
-              <a:defRPr sz="1000">
+              <a:t>'Active classic boxers' — Caleçon de sport respirant à séchage rapide pour bivouac.</a:t>
+            </a:r>
+          </a:p>
+          <a:p>
+            <a:pPr>
+              <a:defRPr sz="1000" b="1">
+                <a:solidFill>
+                  <a:srgbClr val="10B981"/>
+                </a:solidFill>
+                <a:latin typeface="Segoe UI"/>
+              </a:defRPr>
+            </a:pPr>
+            <a:r>
+              <a:t>Top-5 Recommandations Générées :</a:t>
+            </a:r>
+          </a:p>
+          <a:p>
+            <a:pPr>
+              <a:defRPr sz="900">
                 <a:solidFill>
                   <a:srgbClr val="F8FAFC"/>
                 </a:solidFill>
@@ -8454,26 +6999,41 @@
               </a:defRPr>
             </a:pPr>
             <a:r>
-              <a:t>Le produit consulté est automatiquement exclu de sa propre liste de suggestions.</a:t>
-            </a:r>
-          </a:p>
-          <a:p/>
-          <a:p>
-            <a:pPr>
-              <a:defRPr sz="1100" b="1">
-                <a:solidFill>
-                  <a:srgbClr val="F43F5E"/>
-                </a:solidFill>
-                <a:latin typeface="Segoe UI"/>
-              </a:defRPr>
-            </a:pPr>
-            <a:r>
-              <a:t>Livrable Top-5 :</a:t>
-            </a:r>
-          </a:p>
-          <a:p>
-            <a:pPr>
-              <a:defRPr sz="1000">
+              <a:t>• 1. ID 18 : Cap 1 boxer briefs (boxer technique respirant)</a:t>
+            </a:r>
+            <a:br/>
+            <a:r>
+              <a:t>• 2. ID 493 : Active boxer briefs (boxer léger voyage)</a:t>
+            </a:r>
+            <a:br/>
+            <a:r>
+              <a:t>• 3. ID 364 : Organic cotton boxers (boxer coton bio)</a:t>
+            </a:r>
+            <a:br/>
+            <a:r>
+              <a:t>• 4. ID 422 : Active briefs (slip sport anti-humidité)</a:t>
+            </a:r>
+            <a:br/>
+            <a:r>
+              <a:t>• 5. ID 237 : Active mesh boxer briefs (caleçon aéré)</a:t>
+            </a:r>
+          </a:p>
+          <a:p>
+            <a:pPr>
+              <a:defRPr sz="1000" b="1">
+                <a:solidFill>
+                  <a:srgbClr val="10B981"/>
+                </a:solidFill>
+                <a:latin typeface="Segoe UI"/>
+              </a:defRPr>
+            </a:pPr>
+            <a:r>
+              <a:t>Validation input() :</a:t>
+            </a:r>
+          </a:p>
+          <a:p>
+            <a:pPr>
+              <a:defRPr sz="900">
                 <a:solidFill>
                   <a:srgbClr val="F8FAFC"/>
                 </a:solidFill>
@@ -8481,10 +7041,9 @@
               </a:defRPr>
             </a:pPr>
             <a:r>
-              <a:t>La fonction retourne exactement la liste des 5 IDs les plus pertinents pour affichage Web.</a:t>
-            </a:r>
-          </a:p>
-          <a:p/>
+              <a:t>Programme interactif permettant à l'utilisateur de saisir un ID (0-499) pour obtenir ses 5 recommandations instantanées.</a:t>
+            </a:r>
+          </a:p>
         </p:txBody>
       </p:sp>
     </p:spTree>
@@ -8565,7 +7124,7 @@
           <a:noFill/>
         </p:spPr>
         <p:txBody>
-          <a:bodyPr wrap="square" lIns="0" tIns="0" rIns="0" bIns="0">
+          <a:bodyPr wrap="square">
             <a:spAutoFit/>
           </a:bodyPr>
           <a:lstStyle/>
@@ -8579,7 +7138,7 @@
               </a:defRPr>
             </a:pPr>
             <a:r>
-              <a:t>ÉTAPE 06 | DÉMONSTRATION INTERACTIVE</a:t>
+              <a:t>ÉTAPE 06 | MODÉLISATION THÉMATIQUE LSA</a:t>
             </a:r>
           </a:p>
         </p:txBody>
@@ -8601,13 +7160,13 @@
           <a:noFill/>
         </p:spPr>
         <p:txBody>
-          <a:bodyPr wrap="square" lIns="0" tIns="0" rIns="0" bIns="0">
+          <a:bodyPr wrap="square">
             <a:spAutoFit/>
           </a:bodyPr>
           <a:lstStyle/>
           <a:p>
             <a:pPr>
-              <a:defRPr sz="2200" b="1">
+              <a:defRPr sz="2100" b="1">
                 <a:solidFill>
                   <a:srgbClr val="F8FAFC"/>
                 </a:solidFill>
@@ -8615,7 +7174,7 @@
               </a:defRPr>
             </a:pPr>
             <a:r>
-              <a:t>Test en Production de find_similar_items &amp; Interface Utilisateur input()</a:t>
+              <a:t>Partie 3 : Extraction des Thèmes Latents via TruncatedSVD</a:t>
             </a:r>
           </a:p>
         </p:txBody>
@@ -8637,7 +7196,7 @@
           <a:noFill/>
         </p:spPr>
         <p:txBody>
-          <a:bodyPr wrap="square" lIns="0" tIns="0" rIns="0" bIns="0">
+          <a:bodyPr wrap="square">
             <a:spAutoFit/>
           </a:bodyPr>
           <a:lstStyle/>
@@ -8651,7 +7210,7 @@
               </a:defRPr>
             </a:pPr>
             <a:r>
-              <a:t>7 / 10</a:t>
+              <a:t>7 / 8</a:t>
             </a:r>
           </a:p>
         </p:txBody>
@@ -8673,7 +7232,7 @@
           <a:noFill/>
         </p:spPr>
         <p:txBody>
-          <a:bodyPr wrap="square" lIns="0" tIns="0" rIns="0" bIns="0">
+          <a:bodyPr wrap="square">
             <a:spAutoFit/>
           </a:bodyPr>
           <a:lstStyle/>
@@ -8754,49 +7313,13 @@
           <a:noFill/>
         </p:spPr>
         <p:txBody>
-          <a:bodyPr wrap="square" lIns="0" tIns="0" rIns="0" bIns="0">
-            <a:spAutoFit/>
-          </a:bodyPr>
-          <a:lstStyle/>
-          <a:p>
-            <a:pPr>
-              <a:defRPr sz="1200" b="1">
-                <a:solidFill>
-                  <a:srgbClr val="F43F5E"/>
-                </a:solidFill>
-                <a:latin typeface="Segoe UI"/>
-              </a:defRPr>
-            </a:pPr>
-            <a:r>
-              <a:t>CAS RÉEL DU NOTEBOOK : PRODUIT ID = 0</a:t>
-            </a:r>
-          </a:p>
-        </p:txBody>
-      </p:sp>
-      <p:sp>
-        <p:nvSpPr>
-          <p:cNvPr id="9" name="TextBox 8"/>
-          <p:cNvSpPr txBox="1"/>
-          <p:nvPr/>
-        </p:nvSpPr>
-        <p:spPr>
-          <a:xfrm>
-            <a:off x="914400" y="1920240"/>
-            <a:ext cx="4846320" cy="3931920"/>
-          </a:xfrm>
-          <a:prstGeom prst="rect">
-            <a:avLst/>
-          </a:prstGeom>
-          <a:noFill/>
-        </p:spPr>
-        <p:txBody>
           <a:bodyPr wrap="square">
             <a:spAutoFit/>
           </a:bodyPr>
           <a:lstStyle/>
           <a:p>
             <a:pPr>
-              <a:defRPr sz="1050" b="1">
+              <a:defRPr sz="1100" b="1">
                 <a:solidFill>
                   <a:srgbClr val="F43F5E"/>
                 </a:solidFill>
@@ -8804,12 +7327,48 @@
               </a:defRPr>
             </a:pPr>
             <a:r>
-              <a:t>Produit Consulté (ID 0) :</a:t>
-            </a:r>
-          </a:p>
-          <a:p>
-            <a:pPr>
-              <a:defRPr sz="950">
+              <a:t>TRUNCATEDSVD &amp; TOPIC_ENCODED_DF</a:t>
+            </a:r>
+          </a:p>
+        </p:txBody>
+      </p:sp>
+      <p:sp>
+        <p:nvSpPr>
+          <p:cNvPr id="9" name="TextBox 8"/>
+          <p:cNvSpPr txBox="1"/>
+          <p:nvPr/>
+        </p:nvSpPr>
+        <p:spPr>
+          <a:xfrm>
+            <a:off x="914400" y="1920240"/>
+            <a:ext cx="4846320" cy="4023360"/>
+          </a:xfrm>
+          <a:prstGeom prst="rect">
+            <a:avLst/>
+          </a:prstGeom>
+          <a:noFill/>
+        </p:spPr>
+        <p:txBody>
+          <a:bodyPr wrap="square">
+            <a:spAutoFit/>
+          </a:bodyPr>
+          <a:lstStyle/>
+          <a:p>
+            <a:pPr>
+              <a:defRPr sz="1000" b="1">
+                <a:solidFill>
+                  <a:srgbClr val="F43F5E"/>
+                </a:solidFill>
+                <a:latin typeface="Segoe UI"/>
+              </a:defRPr>
+            </a:pPr>
+            <a:r>
+              <a:t>Au-delà du Clustering Strict :</a:t>
+            </a:r>
+          </a:p>
+          <a:p>
+            <a:pPr>
+              <a:defRPr sz="900">
                 <a:solidFill>
                   <a:srgbClr val="F8FAFC"/>
                 </a:solidFill>
@@ -8817,35 +7376,38 @@
               </a:defRPr>
             </a:pPr>
             <a:r>
-              <a:t>'Active classic boxers' — Boxers techniques de sport en tissu respirant à séchage rapide pour bivouac.</a:t>
-            </a:r>
-          </a:p>
-          <a:p>
-            <a:pPr>
-              <a:defRPr sz="1050" b="1">
-                <a:solidFill>
-                  <a:srgbClr val="38BDF8"/>
-                </a:solidFill>
-                <a:latin typeface="Segoe UI"/>
-              </a:defRPr>
-            </a:pPr>
-            <a:r>
-              <a:t>Recommandations Générées par l'Algorithme :</a:t>
-            </a:r>
-          </a:p>
-          <a:p>
-            <a:pPr>
-              <a:defRPr sz="950">
+              <a:t>Un vêtement peut être à la fois imperméable, thermique et urbain. LSA permet l'appartenance multi-thématique.</a:t>
+            </a:r>
+          </a:p>
+          <a:p>
+            <a:pPr>
+              <a:defRPr sz="1000" b="1">
+                <a:solidFill>
+                  <a:srgbClr val="F43F5E"/>
+                </a:solidFill>
+                <a:latin typeface="Segoe UI"/>
+              </a:defRPr>
+            </a:pPr>
+            <a:r>
+              <a:t>Réduction SVD (15 thèmes) :</a:t>
+            </a:r>
+          </a:p>
+          <a:p>
+            <a:pPr>
+              <a:defRPr sz="900">
                 <a:solidFill>
                   <a:srgbClr val="F8FAFC"/>
                 </a:solidFill>
                 <a:latin typeface="Segoe UI"/>
               </a:defRPr>
             </a:pPr>
-          </a:p>
-          <a:p>
-            <a:pPr>
-              <a:defRPr sz="1050" b="1">
+            <a:r>
+              <a:t>Décomposition en 15 composantes singulières latentes (n_components=15) capturant les cooccurrences profondes.</a:t>
+            </a:r>
+          </a:p>
+          <a:p>
+            <a:pPr>
+              <a:defRPr sz="1000" b="1">
                 <a:solidFill>
                   <a:srgbClr val="F43F5E"/>
                 </a:solidFill>
@@ -8853,12 +7415,12 @@
               </a:defRPr>
             </a:pPr>
             <a:r>
-              <a:t>• 1. ID 18 :</a:t>
-            </a:r>
-          </a:p>
-          <a:p>
-            <a:pPr>
-              <a:defRPr sz="950">
+              <a:t>Sauvegarde Obligatoire :</a:t>
+            </a:r>
+          </a:p>
+          <a:p>
+            <a:pPr>
+              <a:defRPr sz="900">
                 <a:solidFill>
                   <a:srgbClr val="F8FAFC"/>
                 </a:solidFill>
@@ -8866,12 +7428,12 @@
               </a:defRPr>
             </a:pPr>
             <a:r>
-              <a:t>Cap 1 boxer briefs — Caleçon technique respirant Capilene 1.</a:t>
-            </a:r>
-          </a:p>
-          <a:p>
-            <a:pPr>
-              <a:defRPr sz="1050" b="1">
+              <a:t>Matrice encodée enregistrée dans la variable officielle 'topic_encoded_df'.</a:t>
+            </a:r>
+          </a:p>
+          <a:p>
+            <a:pPr>
+              <a:defRPr sz="1000" b="1">
                 <a:solidFill>
                   <a:srgbClr val="F43F5E"/>
                 </a:solidFill>
@@ -8879,12 +7441,12 @@
               </a:defRPr>
             </a:pPr>
             <a:r>
-              <a:t>• 2. ID 493 :</a:t>
-            </a:r>
-          </a:p>
-          <a:p>
-            <a:pPr>
-              <a:defRPr sz="950">
+              <a:t>Extraction du main_topic :</a:t>
+            </a:r>
+          </a:p>
+          <a:p>
+            <a:pPr>
+              <a:defRPr sz="900">
                 <a:solidFill>
                   <a:srgbClr val="F8FAFC"/>
                 </a:solidFill>
@@ -8892,85 +7454,7 @@
               </a:defRPr>
             </a:pPr>
             <a:r>
-              <a:t>Active boxer briefs — Boxers de voyage ultra-légers.</a:t>
-            </a:r>
-          </a:p>
-          <a:p>
-            <a:pPr>
-              <a:defRPr sz="1050" b="1">
-                <a:solidFill>
-                  <a:srgbClr val="F43F5E"/>
-                </a:solidFill>
-                <a:latin typeface="Segoe UI"/>
-              </a:defRPr>
-            </a:pPr>
-            <a:r>
-              <a:t>• 3. ID 364 :</a:t>
-            </a:r>
-          </a:p>
-          <a:p>
-            <a:pPr>
-              <a:defRPr sz="950">
-                <a:solidFill>
-                  <a:srgbClr val="F8FAFC"/>
-                </a:solidFill>
-                <a:latin typeface="Segoe UI"/>
-              </a:defRPr>
-            </a:pPr>
-            <a:r>
-              <a:t>Organic cotton boxers — Boxers en coton biologique confort.</a:t>
-            </a:r>
-          </a:p>
-          <a:p>
-            <a:pPr>
-              <a:defRPr sz="1050" b="1">
-                <a:solidFill>
-                  <a:srgbClr val="F43F5E"/>
-                </a:solidFill>
-                <a:latin typeface="Segoe UI"/>
-              </a:defRPr>
-            </a:pPr>
-            <a:r>
-              <a:t>• 4. ID 422 :</a:t>
-            </a:r>
-          </a:p>
-          <a:p>
-            <a:pPr>
-              <a:defRPr sz="950">
-                <a:solidFill>
-                  <a:srgbClr val="F8FAFC"/>
-                </a:solidFill>
-                <a:latin typeface="Segoe UI"/>
-              </a:defRPr>
-            </a:pPr>
-            <a:r>
-              <a:t>Active briefs — Slips de sport évacuation d'humidité.</a:t>
-            </a:r>
-          </a:p>
-          <a:p>
-            <a:pPr>
-              <a:defRPr sz="1050" b="1">
-                <a:solidFill>
-                  <a:srgbClr val="F43F5E"/>
-                </a:solidFill>
-                <a:latin typeface="Segoe UI"/>
-              </a:defRPr>
-            </a:pPr>
-            <a:r>
-              <a:t>• 5. ID 237 :</a:t>
-            </a:r>
-          </a:p>
-          <a:p>
-            <a:pPr>
-              <a:defRPr sz="950">
-                <a:solidFill>
-                  <a:srgbClr val="F8FAFC"/>
-                </a:solidFill>
-                <a:latin typeface="Segoe UI"/>
-              </a:defRPr>
-            </a:pPr>
-            <a:r>
-              <a:t>Active mesh boxer briefs — Caleçon en maille aérée.</a:t>
+              <a:t>Attribution du thème principal dominant par produit via idxmax().</a:t>
             </a:r>
           </a:p>
         </p:txBody>
@@ -9037,42 +7521,6 @@
           <a:noFill/>
         </p:spPr>
         <p:txBody>
-          <a:bodyPr wrap="square" lIns="0" tIns="0" rIns="0" bIns="0">
-            <a:spAutoFit/>
-          </a:bodyPr>
-          <a:lstStyle/>
-          <a:p>
-            <a:pPr>
-              <a:defRPr sz="1200" b="1">
-                <a:solidFill>
-                  <a:srgbClr val="F43F5E"/>
-                </a:solidFill>
-                <a:latin typeface="Segoe UI"/>
-              </a:defRPr>
-            </a:pPr>
-            <a:r>
-              <a:t>INTERFACE UTILISATEUR &amp; CONTRÔLE INTERACTIF INPUT()</a:t>
-            </a:r>
-          </a:p>
-        </p:txBody>
-      </p:sp>
-      <p:sp>
-        <p:nvSpPr>
-          <p:cNvPr id="12" name="TextBox 11"/>
-          <p:cNvSpPr txBox="1"/>
-          <p:nvPr/>
-        </p:nvSpPr>
-        <p:spPr>
-          <a:xfrm>
-            <a:off x="6400800" y="1920240"/>
-            <a:ext cx="4846320" cy="3931920"/>
-          </a:xfrm>
-          <a:prstGeom prst="rect">
-            <a:avLst/>
-          </a:prstGeom>
-          <a:noFill/>
-        </p:spPr>
-        <p:txBody>
           <a:bodyPr wrap="square">
             <a:spAutoFit/>
           </a:bodyPr>
@@ -9081,18 +7529,54 @@
             <a:pPr>
               <a:defRPr sz="1100" b="1">
                 <a:solidFill>
-                  <a:srgbClr val="10B981"/>
-                </a:solidFill>
-                <a:latin typeface="Segoe UI"/>
-              </a:defRPr>
-            </a:pPr>
-            <a:r>
-              <a:t>Fonction Interactive input() :</a:t>
-            </a:r>
-          </a:p>
-          <a:p>
-            <a:pPr>
-              <a:defRPr sz="1000">
+                  <a:srgbClr val="F43F5E"/>
+                </a:solidFill>
+                <a:latin typeface="Segoe UI"/>
+              </a:defRPr>
+            </a:pPr>
+            <a:r>
+              <a:t>LES 4 NOUVELLES CATÉGORIES IDENTIFIÉES</a:t>
+            </a:r>
+          </a:p>
+        </p:txBody>
+      </p:sp>
+      <p:sp>
+        <p:nvSpPr>
+          <p:cNvPr id="12" name="TextBox 11"/>
+          <p:cNvSpPr txBox="1"/>
+          <p:nvPr/>
+        </p:nvSpPr>
+        <p:spPr>
+          <a:xfrm>
+            <a:off x="6400800" y="1920240"/>
+            <a:ext cx="4876495" cy="4023360"/>
+          </a:xfrm>
+          <a:prstGeom prst="rect">
+            <a:avLst/>
+          </a:prstGeom>
+          <a:noFill/>
+        </p:spPr>
+        <p:txBody>
+          <a:bodyPr wrap="square">
+            <a:spAutoFit/>
+          </a:bodyPr>
+          <a:lstStyle/>
+          <a:p>
+            <a:pPr>
+              <a:defRPr sz="1000" b="1">
+                <a:solidFill>
+                  <a:srgbClr val="38BDF8"/>
+                </a:solidFill>
+                <a:latin typeface="Segoe UI"/>
+              </a:defRPr>
+            </a:pPr>
+            <a:r>
+              <a:t>1. Imperméabilité &amp; Coques :</a:t>
+            </a:r>
+          </a:p>
+          <a:p>
+            <a:pPr>
+              <a:defRPr sz="900">
                 <a:solidFill>
                   <a:srgbClr val="F8FAFC"/>
                 </a:solidFill>
@@ -9100,25 +7584,25 @@
               </a:defRPr>
             </a:pPr>
             <a:r>
-              <a:t>Un programme console permet à l'utilisateur de saisir n'importe quel identifiant produit (0 à 499) pour visualiser instantanément les 5 articles recommandés.</a:t>
-            </a:r>
-          </a:p>
-          <a:p>
-            <a:pPr>
-              <a:defRPr sz="1100" b="1">
-                <a:solidFill>
-                  <a:srgbClr val="10B981"/>
-                </a:solidFill>
-                <a:latin typeface="Segoe UI"/>
-              </a:defRPr>
-            </a:pPr>
-            <a:r>
-              <a:t>Gestion des Exceptions :</a:t>
-            </a:r>
-          </a:p>
-          <a:p>
-            <a:pPr>
-              <a:defRPr sz="1000">
+              <a:t>Mots LSA : 'waterproof', 'jacket', 'breathable', 'hood', 'seam' $_x000D_ightarrow$ Technologie DryVent / Gore-Tex.</a:t>
+            </a:r>
+          </a:p>
+          <a:p>
+            <a:pPr>
+              <a:defRPr sz="1000" b="1">
+                <a:solidFill>
+                  <a:srgbClr val="38BDF8"/>
+                </a:solidFill>
+                <a:latin typeface="Segoe UI"/>
+              </a:defRPr>
+            </a:pPr>
+            <a:r>
+              <a:t>2. Isolation &amp; Grand Froid :</a:t>
+            </a:r>
+          </a:p>
+          <a:p>
+            <a:pPr>
+              <a:defRPr sz="900">
                 <a:solidFill>
                   <a:srgbClr val="F8FAFC"/>
                 </a:solidFill>
@@ -9126,25 +7610,25 @@
               </a:defRPr>
             </a:pPr>
             <a:r>
-              <a:t>Vérification des bornes de l'index et message d'erreur explicite en cas de saisie invalide.</a:t>
-            </a:r>
-          </a:p>
-          <a:p>
-            <a:pPr>
-              <a:defRPr sz="1100" b="1">
-                <a:solidFill>
-                  <a:srgbClr val="10B981"/>
-                </a:solidFill>
-                <a:latin typeface="Segoe UI"/>
-              </a:defRPr>
-            </a:pPr>
-            <a:r>
-              <a:t>Pertinence Métier :</a:t>
-            </a:r>
-          </a:p>
-          <a:p>
-            <a:pPr>
-              <a:defRPr sz="1000">
+              <a:t>Mots LSA : 'fleece', 'down', 'insulation', 'warmth', 'thermal' $_x000D_ightarrow$ Doudounes et polaires d'expédition.</a:t>
+            </a:r>
+          </a:p>
+          <a:p>
+            <a:pPr>
+              <a:defRPr sz="1000" b="1">
+                <a:solidFill>
+                  <a:srgbClr val="38BDF8"/>
+                </a:solidFill>
+                <a:latin typeface="Segoe UI"/>
+              </a:defRPr>
+            </a:pPr>
+            <a:r>
+              <a:t>3. Bagagerie &amp; Portage :</a:t>
+            </a:r>
+          </a:p>
+          <a:p>
+            <a:pPr>
+              <a:defRPr sz="900">
                 <a:solidFill>
                   <a:srgbClr val="F8FAFC"/>
                 </a:solidFill>
@@ -9152,25 +7636,25 @@
               </a:defRPr>
             </a:pPr>
             <a:r>
-              <a:t>100% des produits suggérés appartiennent au même usage (boxers techniques) : zéro hallucination sémantique.</a:t>
-            </a:r>
-          </a:p>
-          <a:p>
-            <a:pPr>
-              <a:defRPr sz="1100" b="1">
-                <a:solidFill>
-                  <a:srgbClr val="10B981"/>
-                </a:solidFill>
-                <a:latin typeface="Segoe UI"/>
-              </a:defRPr>
-            </a:pPr>
-            <a:r>
-              <a:t>Expérience Client :</a:t>
-            </a:r>
-          </a:p>
-          <a:p>
-            <a:pPr>
-              <a:defRPr sz="1000">
+              <a:t>Mots LSA : 'pack', 'backpack', 'pocket', 'compartment', 'strap' $_x000D_ightarrow$ Équipement trekking et voyage.</a:t>
+            </a:r>
+          </a:p>
+          <a:p>
+            <a:pPr>
+              <a:defRPr sz="1000" b="1">
+                <a:solidFill>
+                  <a:srgbClr val="38BDF8"/>
+                </a:solidFill>
+                <a:latin typeface="Segoe UI"/>
+              </a:defRPr>
+            </a:pPr>
+            <a:r>
+              <a:t>4. Trail &amp; Respirabilité Active :</a:t>
+            </a:r>
+          </a:p>
+          <a:p>
+            <a:pPr>
+              <a:defRPr sz="900">
                 <a:solidFill>
                   <a:srgbClr val="F8FAFC"/>
                 </a:solidFill>
@@ -9178,7 +7662,7 @@
               </a:defRPr>
             </a:pPr>
             <a:r>
-              <a:t>L'utilisateur trouve immédiatement des alternatives de coupe et de matière adaptées à son besoin.</a:t>
+              <a:t>Mots LSA : 'short', 'shirt', 'lightweight', 'stretch', 'quick-dry' $_x000D_ightarrow$ Gamme athlétique et course.</a:t>
             </a:r>
           </a:p>
         </p:txBody>
@@ -9261,7 +7745,7 @@
           <a:noFill/>
         </p:spPr>
         <p:txBody>
-          <a:bodyPr wrap="square" lIns="0" tIns="0" rIns="0" bIns="0">
+          <a:bodyPr wrap="square">
             <a:spAutoFit/>
           </a:bodyPr>
           <a:lstStyle/>
@@ -9275,7 +7759,7 @@
               </a:defRPr>
             </a:pPr>
             <a:r>
-              <a:t>ÉTAPE 07 | MODÉLISATION THÉMATIQUE</a:t>
+              <a:t>ÉTAPE 07 | PLAN D'ACTION &amp; SYNTHÈSE</a:t>
             </a:r>
           </a:p>
         </p:txBody>
@@ -9297,13 +7781,13 @@
           <a:noFill/>
         </p:spPr>
         <p:txBody>
-          <a:bodyPr wrap="square" lIns="0" tIns="0" rIns="0" bIns="0">
+          <a:bodyPr wrap="square">
             <a:spAutoFit/>
           </a:bodyPr>
           <a:lstStyle/>
           <a:p>
             <a:pPr>
-              <a:defRPr sz="2200" b="1">
+              <a:defRPr sz="2100" b="1">
                 <a:solidFill>
                   <a:srgbClr val="F8FAFC"/>
                 </a:solidFill>
@@ -9311,7 +7795,7 @@
               </a:defRPr>
             </a:pPr>
             <a:r>
-              <a:t>Partie 3 : Décomposition Sémantique LSA via TruncatedSVD</a:t>
+              <a:t>4 Recommandations E-Commerce Clés pour The North Face</a:t>
             </a:r>
           </a:p>
         </p:txBody>
@@ -9333,7 +7817,7 @@
           <a:noFill/>
         </p:spPr>
         <p:txBody>
-          <a:bodyPr wrap="square" lIns="0" tIns="0" rIns="0" bIns="0">
+          <a:bodyPr wrap="square">
             <a:spAutoFit/>
           </a:bodyPr>
           <a:lstStyle/>
@@ -9347,7 +7831,7 @@
               </a:defRPr>
             </a:pPr>
             <a:r>
-              <a:t>8 / 10</a:t>
+              <a:t>8 / 8</a:t>
             </a:r>
           </a:p>
         </p:txBody>
@@ -9369,7 +7853,7 @@
           <a:noFill/>
         </p:spPr>
         <p:txBody>
-          <a:bodyPr wrap="square" lIns="0" tIns="0" rIns="0" bIns="0">
+          <a:bodyPr wrap="square">
             <a:spAutoFit/>
           </a:bodyPr>
           <a:lstStyle/>
@@ -9397,7 +7881,7 @@
         <p:spPr>
           <a:xfrm>
             <a:off x="731520" y="1371600"/>
-            <a:ext cx="3413455" cy="4754880"/>
+            <a:ext cx="5242255" cy="2377440"/>
           </a:xfrm>
           <a:prstGeom prst="roundRect">
             <a:avLst/>
@@ -9407,7 +7891,7 @@
           </a:solidFill>
           <a:ln w="19050">
             <a:solidFill>
-              <a:srgbClr val="334155"/>
+              <a:srgbClr val="F43F5E"/>
             </a:solidFill>
           </a:ln>
         </p:spPr>
@@ -9442,43 +7926,7 @@
         <p:spPr>
           <a:xfrm>
             <a:off x="914400" y="1536192"/>
-            <a:ext cx="3047695" cy="365760"/>
-          </a:xfrm>
-          <a:prstGeom prst="rect">
-            <a:avLst/>
-          </a:prstGeom>
-          <a:noFill/>
-        </p:spPr>
-        <p:txBody>
-          <a:bodyPr wrap="square" lIns="0" tIns="0" rIns="0" bIns="0">
-            <a:spAutoFit/>
-          </a:bodyPr>
-          <a:lstStyle/>
-          <a:p>
-            <a:pPr>
-              <a:defRPr sz="1200" b="1">
-                <a:solidFill>
-                  <a:srgbClr val="F43F5E"/>
-                </a:solidFill>
-                <a:latin typeface="Segoe UI"/>
-              </a:defRPr>
-            </a:pPr>
-            <a:r>
-              <a:t>01 | ANALYSE SÉMANTIQUE LATENTE (LSA)</a:t>
-            </a:r>
-          </a:p>
-        </p:txBody>
-      </p:sp>
-      <p:sp>
-        <p:nvSpPr>
-          <p:cNvPr id="9" name="TextBox 8"/>
-          <p:cNvSpPr txBox="1"/>
-          <p:nvPr/>
-        </p:nvSpPr>
-        <p:spPr>
-          <a:xfrm>
-            <a:off x="914400" y="2011680"/>
-            <a:ext cx="3047695" cy="3931920"/>
+            <a:ext cx="4876495" cy="365760"/>
           </a:xfrm>
           <a:prstGeom prst="rect">
             <a:avLst/>
@@ -9500,12 +7948,48 @@
               </a:defRPr>
             </a:pPr>
             <a:r>
-              <a:t>Au-delà du Clustering Strict :</a:t>
-            </a:r>
-          </a:p>
-          <a:p>
-            <a:pPr>
-              <a:defRPr sz="1000">
+              <a:t>01 | CARROUSEL 'PRODUITS SIMILAIRES'</a:t>
+            </a:r>
+          </a:p>
+        </p:txBody>
+      </p:sp>
+      <p:sp>
+        <p:nvSpPr>
+          <p:cNvPr id="9" name="TextBox 8"/>
+          <p:cNvSpPr txBox="1"/>
+          <p:nvPr/>
+        </p:nvSpPr>
+        <p:spPr>
+          <a:xfrm>
+            <a:off x="914400" y="1874520"/>
+            <a:ext cx="4876495" cy="1737360"/>
+          </a:xfrm>
+          <a:prstGeom prst="rect">
+            <a:avLst/>
+          </a:prstGeom>
+          <a:noFill/>
+        </p:spPr>
+        <p:txBody>
+          <a:bodyPr wrap="square">
+            <a:spAutoFit/>
+          </a:bodyPr>
+          <a:lstStyle/>
+          <a:p>
+            <a:pPr>
+              <a:defRPr sz="1000" b="1">
+                <a:solidFill>
+                  <a:srgbClr val="F43F5E"/>
+                </a:solidFill>
+                <a:latin typeface="Segoe UI"/>
+              </a:defRPr>
+            </a:pPr>
+            <a:r>
+              <a:t>Intégration Web :</a:t>
+            </a:r>
+          </a:p>
+          <a:p>
+            <a:pPr>
+              <a:defRPr sz="900">
                 <a:solidFill>
                   <a:srgbClr val="F8FAFC"/>
                 </a:solidFill>
@@ -9513,13 +7997,12 @@
               </a:defRPr>
             </a:pPr>
             <a:r>
-              <a:t>Le clustering assigne un produit à une seule boîte. En réalité, un vêtement est multi-thématique (imperméable ET respirant ET urbain).</a:t>
-            </a:r>
-          </a:p>
-          <a:p/>
-          <a:p>
-            <a:pPr>
-              <a:defRPr sz="1100" b="1">
+              <a:t>Intégrer le widget find_similar_items() sous chaque fiche produit du site.</a:t>
+            </a:r>
+          </a:p>
+          <a:p>
+            <a:pPr>
+              <a:defRPr sz="1000" b="1">
                 <a:solidFill>
                   <a:srgbClr val="F43F5E"/>
                 </a:solidFill>
@@ -9527,12 +8010,12 @@
               </a:defRPr>
             </a:pPr>
             <a:r>
-              <a:t>Réduction TruncatedSVD :</a:t>
-            </a:r>
-          </a:p>
-          <a:p>
-            <a:pPr>
-              <a:defRPr sz="1000">
+              <a:t>Impact Business :</a:t>
+            </a:r>
+          </a:p>
+          <a:p>
+            <a:pPr>
+              <a:defRPr sz="900">
                 <a:solidFill>
                   <a:srgbClr val="F8FAFC"/>
                 </a:solidFill>
@@ -9540,37 +8023,9 @@
               </a:defRPr>
             </a:pPr>
             <a:r>
-              <a:t>Factorisation de la matrice TF-IDF en 15 composantes singulières latentes (n_components=15).</a:t>
-            </a:r>
-          </a:p>
-          <a:p/>
-          <a:p>
-            <a:pPr>
-              <a:defRPr sz="1100" b="1">
-                <a:solidFill>
-                  <a:srgbClr val="F43F5E"/>
-                </a:solidFill>
-                <a:latin typeface="Segoe UI"/>
-              </a:defRPr>
-            </a:pPr>
-            <a:r>
-              <a:t>Sauvegarde topic_encoded_df :</a:t>
-            </a:r>
-          </a:p>
-          <a:p>
-            <a:pPr>
-              <a:defRPr sz="1000">
-                <a:solidFill>
-                  <a:srgbClr val="F8FAFC"/>
-                </a:solidFill>
-                <a:latin typeface="Segoe UI"/>
-              </a:defRPr>
-            </a:pPr>
-            <a:r>
-              <a:t>Stockage officiel de la matrice encodée dans la variable requise par le livrable.</a:t>
-            </a:r>
-          </a:p>
-          <a:p/>
+              <a:t>Hausse estimée de +12% à +18% du taux de clic et réduction du taux de rebond.</a:t>
+            </a:r>
+          </a:p>
         </p:txBody>
       </p:sp>
       <p:sp>
@@ -9581,8 +8036,8 @@
         </p:nvSpPr>
         <p:spPr>
           <a:xfrm>
-            <a:off x="4389120" y="1371600"/>
-            <a:ext cx="3413455" cy="4754880"/>
+            <a:off x="6217920" y="1371600"/>
+            <a:ext cx="5242255" cy="2377440"/>
           </a:xfrm>
           <a:prstGeom prst="roundRect">
             <a:avLst/>
@@ -9592,7 +8047,7 @@
           </a:solidFill>
           <a:ln w="19050">
             <a:solidFill>
-              <a:srgbClr val="334155"/>
+              <a:srgbClr val="38BDF8"/>
             </a:solidFill>
           </a:ln>
         </p:spPr>
@@ -9626,44 +8081,8 @@
         </p:nvSpPr>
         <p:spPr>
           <a:xfrm>
-            <a:off x="4572000" y="1536192"/>
-            <a:ext cx="3047695" cy="365760"/>
-          </a:xfrm>
-          <a:prstGeom prst="rect">
-            <a:avLst/>
-          </a:prstGeom>
-          <a:noFill/>
-        </p:spPr>
-        <p:txBody>
-          <a:bodyPr wrap="square" lIns="0" tIns="0" rIns="0" bIns="0">
-            <a:spAutoFit/>
-          </a:bodyPr>
-          <a:lstStyle/>
-          <a:p>
-            <a:pPr>
-              <a:defRPr sz="1200" b="1">
-                <a:solidFill>
-                  <a:srgbClr val="F43F5E"/>
-                </a:solidFill>
-                <a:latin typeface="Segoe UI"/>
-              </a:defRPr>
-            </a:pPr>
-            <a:r>
-              <a:t>02 | EXTRACTION DU MAIN_TOPIC</a:t>
-            </a:r>
-          </a:p>
-        </p:txBody>
-      </p:sp>
-      <p:sp>
-        <p:nvSpPr>
-          <p:cNvPr id="12" name="TextBox 11"/>
-          <p:cNvSpPr txBox="1"/>
-          <p:nvPr/>
-        </p:nvSpPr>
-        <p:spPr>
-          <a:xfrm>
-            <a:off x="4572000" y="2011680"/>
-            <a:ext cx="3047695" cy="3931920"/>
+            <a:off x="6400800" y="1536192"/>
+            <a:ext cx="4876495" cy="365760"/>
           </a:xfrm>
           <a:prstGeom prst="rect">
             <a:avLst/>
@@ -9685,12 +8104,48 @@
               </a:defRPr>
             </a:pPr>
             <a:r>
-              <a:t>Thème Dominant par Produit :</a:t>
-            </a:r>
-          </a:p>
-          <a:p>
-            <a:pPr>
-              <a:defRPr sz="1000">
+              <a:t>02 | REFONTE DE L'ARBORESCENCE DU CATALOGUE</a:t>
+            </a:r>
+          </a:p>
+        </p:txBody>
+      </p:sp>
+      <p:sp>
+        <p:nvSpPr>
+          <p:cNvPr id="12" name="TextBox 11"/>
+          <p:cNvSpPr txBox="1"/>
+          <p:nvPr/>
+        </p:nvSpPr>
+        <p:spPr>
+          <a:xfrm>
+            <a:off x="6400800" y="1874520"/>
+            <a:ext cx="4876495" cy="1737360"/>
+          </a:xfrm>
+          <a:prstGeom prst="rect">
+            <a:avLst/>
+          </a:prstGeom>
+          <a:noFill/>
+        </p:spPr>
+        <p:txBody>
+          <a:bodyPr wrap="square">
+            <a:spAutoFit/>
+          </a:bodyPr>
+          <a:lstStyle/>
+          <a:p>
+            <a:pPr>
+              <a:defRPr sz="1000" b="1">
+                <a:solidFill>
+                  <a:srgbClr val="38BDF8"/>
+                </a:solidFill>
+                <a:latin typeface="Segoe UI"/>
+              </a:defRPr>
+            </a:pPr>
+            <a:r>
+              <a:t>Taxonomie LSA :</a:t>
+            </a:r>
+          </a:p>
+          <a:p>
+            <a:pPr>
+              <a:defRPr sz="900">
                 <a:solidFill>
                   <a:srgbClr val="F8FAFC"/>
                 </a:solidFill>
@@ -9698,26 +8153,25 @@
               </a:defRPr>
             </a:pPr>
             <a:r>
-              <a:t>Application de idxmax() sur les 15 dimensions latentes pour assigner à chaque produit sa thématique principale.</a:t>
-            </a:r>
-          </a:p>
-          <a:p/>
-          <a:p>
-            <a:pPr>
-              <a:defRPr sz="1100" b="1">
-                <a:solidFill>
-                  <a:srgbClr val="F43F5E"/>
-                </a:solidFill>
-                <a:latin typeface="Segoe UI"/>
-              </a:defRPr>
-            </a:pPr>
-            <a:r>
-              <a:t>Restructuration du Catalogue :</a:t>
-            </a:r>
-          </a:p>
-          <a:p>
-            <a:pPr>
-              <a:defRPr sz="1000">
+              <a:t>Remplacer la navigation rigide Homme/Femme par une navigation par activité (Grand Froid, Bivouac, Trail).</a:t>
+            </a:r>
+          </a:p>
+          <a:p>
+            <a:pPr>
+              <a:defRPr sz="1000" b="1">
+                <a:solidFill>
+                  <a:srgbClr val="38BDF8"/>
+                </a:solidFill>
+                <a:latin typeface="Segoe UI"/>
+              </a:defRPr>
+            </a:pPr>
+            <a:r>
+              <a:t>SEO Organique :</a:t>
+            </a:r>
+          </a:p>
+          <a:p>
+            <a:pPr>
+              <a:defRPr sz="900">
                 <a:solidFill>
                   <a:srgbClr val="F8FAFC"/>
                 </a:solidFill>
@@ -9725,37 +8179,9 @@
               </a:defRPr>
             </a:pPr>
             <a:r>
-              <a:t>Permet de redéfinir automatiquement l'arborescence des catégories du site web sans intervention humaine manuelle.</a:t>
-            </a:r>
-          </a:p>
-          <a:p/>
-          <a:p>
-            <a:pPr>
-              <a:defRPr sz="1100" b="1">
-                <a:solidFill>
-                  <a:srgbClr val="F43F5E"/>
-                </a:solidFill>
-                <a:latin typeface="Segoe UI"/>
-              </a:defRPr>
-            </a:pPr>
-            <a:r>
-              <a:t>Poids Sémantique :</a:t>
-            </a:r>
-          </a:p>
-          <a:p>
-            <a:pPr>
-              <a:defRPr sz="1000">
-                <a:solidFill>
-                  <a:srgbClr val="F8FAFC"/>
-                </a:solidFill>
-                <a:latin typeface="Segoe UI"/>
-              </a:defRPr>
-            </a:pPr>
-            <a:r>
-              <a:t>Chaque composante LSA capture des cooccurrences profondes de mots-clés.</a:t>
-            </a:r>
-          </a:p>
-          <a:p/>
+              <a:t>Créer des landing pages thématiques indexées sur les requêtes Google longue traîne.</a:t>
+            </a:r>
+          </a:p>
         </p:txBody>
       </p:sp>
       <p:sp>
@@ -9766,8 +8192,8 @@
         </p:nvSpPr>
         <p:spPr>
           <a:xfrm>
-            <a:off x="8046720" y="1371600"/>
-            <a:ext cx="3413455" cy="4754880"/>
+            <a:off x="731520" y="3931920"/>
+            <a:ext cx="5242255" cy="2377440"/>
           </a:xfrm>
           <a:prstGeom prst="roundRect">
             <a:avLst/>
@@ -9777,7 +8203,7 @@
           </a:solidFill>
           <a:ln w="19050">
             <a:solidFill>
-              <a:srgbClr val="334155"/>
+              <a:srgbClr val="F59E0B"/>
             </a:solidFill>
           </a:ln>
         </p:spPr>
@@ -9811,44 +8237,8 @@
         </p:nvSpPr>
         <p:spPr>
           <a:xfrm>
-            <a:off x="8229600" y="1536192"/>
-            <a:ext cx="3047695" cy="365760"/>
-          </a:xfrm>
-          <a:prstGeom prst="rect">
-            <a:avLst/>
-          </a:prstGeom>
-          <a:noFill/>
-        </p:spPr>
-        <p:txBody>
-          <a:bodyPr wrap="square" lIns="0" tIns="0" rIns="0" bIns="0">
-            <a:spAutoFit/>
-          </a:bodyPr>
-          <a:lstStyle/>
-          <a:p>
-            <a:pPr>
-              <a:defRPr sz="1200" b="1">
-                <a:solidFill>
-                  <a:srgbClr val="F43F5E"/>
-                </a:solidFill>
-                <a:latin typeface="Segoe UI"/>
-              </a:defRPr>
-            </a:pPr>
-            <a:r>
-              <a:t>03 | PERFORMANCE &amp; ROBUSTESSE</a:t>
-            </a:r>
-          </a:p>
-        </p:txBody>
-      </p:sp>
-      <p:sp>
-        <p:nvSpPr>
-          <p:cNvPr id="15" name="TextBox 14"/>
-          <p:cNvSpPr txBox="1"/>
-          <p:nvPr/>
-        </p:nvSpPr>
-        <p:spPr>
-          <a:xfrm>
-            <a:off x="8229600" y="2011680"/>
-            <a:ext cx="3047695" cy="3931920"/>
+            <a:off x="914400" y="4096512"/>
+            <a:ext cx="4876495" cy="365760"/>
           </a:xfrm>
           <a:prstGeom prst="rect">
             <a:avLst/>
@@ -9870,12 +8260,48 @@
               </a:defRPr>
             </a:pPr>
             <a:r>
-              <a:t>Débruitage Automatique :</a:t>
-            </a:r>
-          </a:p>
-          <a:p>
-            <a:pPr>
-              <a:defRPr sz="1000">
+              <a:t>03 | MICROSERVICE API FASTAPI TEMPS RÉEL</a:t>
+            </a:r>
+          </a:p>
+        </p:txBody>
+      </p:sp>
+      <p:sp>
+        <p:nvSpPr>
+          <p:cNvPr id="15" name="TextBox 14"/>
+          <p:cNvSpPr txBox="1"/>
+          <p:nvPr/>
+        </p:nvSpPr>
+        <p:spPr>
+          <a:xfrm>
+            <a:off x="914400" y="4434840"/>
+            <a:ext cx="4876495" cy="1737360"/>
+          </a:xfrm>
+          <a:prstGeom prst="rect">
+            <a:avLst/>
+          </a:prstGeom>
+          <a:noFill/>
+        </p:spPr>
+        <p:txBody>
+          <a:bodyPr wrap="square">
+            <a:spAutoFit/>
+          </a:bodyPr>
+          <a:lstStyle/>
+          <a:p>
+            <a:pPr>
+              <a:defRPr sz="1000" b="1">
+                <a:solidFill>
+                  <a:srgbClr val="F59E0B"/>
+                </a:solidFill>
+                <a:latin typeface="Segoe UI"/>
+              </a:defRPr>
+            </a:pPr>
+            <a:r>
+              <a:t>Architecture Technique :</a:t>
+            </a:r>
+          </a:p>
+          <a:p>
+            <a:pPr>
+              <a:defRPr sz="900">
                 <a:solidFill>
                   <a:srgbClr val="F8FAFC"/>
                 </a:solidFill>
@@ -9883,26 +8309,25 @@
               </a:defRPr>
             </a:pPr>
             <a:r>
-              <a:t>LSA filtre le bruit statistique en ne conservant que les 15 axes principaux de variation sémantique.</a:t>
-            </a:r>
-          </a:p>
-          <a:p/>
-          <a:p>
-            <a:pPr>
-              <a:defRPr sz="1100" b="1">
-                <a:solidFill>
-                  <a:srgbClr val="F43F5E"/>
-                </a:solidFill>
-                <a:latin typeface="Segoe UI"/>
-              </a:defRPr>
-            </a:pPr>
-            <a:r>
-              <a:t>Généralisation E-Commerce :</a:t>
-            </a:r>
-          </a:p>
-          <a:p>
-            <a:pPr>
-              <a:defRPr sz="1000">
+              <a:t>Exposer les matrices de similarité via une API REST avec cache Redis en mémoire.</a:t>
+            </a:r>
+          </a:p>
+          <a:p>
+            <a:pPr>
+              <a:defRPr sz="1000" b="1">
+                <a:solidFill>
+                  <a:srgbClr val="F59E0B"/>
+                </a:solidFill>
+                <a:latin typeface="Segoe UI"/>
+              </a:defRPr>
+            </a:pPr>
+            <a:r>
+              <a:t>Performance SLA :</a:t>
+            </a:r>
+          </a:p>
+          <a:p>
+            <a:pPr>
+              <a:defRPr sz="900">
                 <a:solidFill>
                   <a:srgbClr val="F8FAFC"/>
                 </a:solidFill>
@@ -9910,76 +8335,32 @@
               </a:defRPr>
             </a:pPr>
             <a:r>
-              <a:t>Capable de catégoriser instantanément de nouvelles descriptions produits par simple projection matricielle.</a:t>
-            </a:r>
-          </a:p>
-          <a:p/>
-          <a:p>
-            <a:pPr>
-              <a:defRPr sz="1100" b="1">
-                <a:solidFill>
-                  <a:srgbClr val="F43F5E"/>
-                </a:solidFill>
-                <a:latin typeface="Segoe UI"/>
-              </a:defRPr>
-            </a:pPr>
-            <a:r>
-              <a:t>Compatibilité SEO :</a:t>
-            </a:r>
-          </a:p>
-          <a:p>
-            <a:pPr>
-              <a:defRPr sz="1000">
-                <a:solidFill>
-                  <a:srgbClr val="F8FAFC"/>
-                </a:solidFill>
-                <a:latin typeface="Segoe UI"/>
-              </a:defRPr>
-            </a:pPr>
-            <a:r>
-              <a:t>Aligne la taxonomie du site avec le vocabulaire réellement tapé par les internautes sur Google.</a:t>
-            </a:r>
-          </a:p>
-          <a:p/>
-        </p:txBody>
-      </p:sp>
-    </p:spTree>
-  </p:cSld>
-  <p:clrMapOvr>
-    <a:masterClrMapping/>
-  </p:clrMapOvr>
-</p:sld>
-</file>
-
-<file path=ppt/slides/slide9.xml><?xml version="1.0" encoding="utf-8"?>
-<p:sld xmlns:a="http://schemas.openxmlformats.org/drawingml/2006/main" xmlns:p="http://schemas.openxmlformats.org/presentationml/2006/main" xmlns:r="http://schemas.openxmlformats.org/officeDocument/2006/relationships">
-  <p:cSld>
-    <p:spTree>
-      <p:nvGrpSpPr>
-        <p:cNvPr id="1" name=""/>
-        <p:cNvGrpSpPr/>
-        <p:nvPr/>
-      </p:nvGrpSpPr>
-      <p:grpSpPr/>
-      <p:sp>
-        <p:nvSpPr>
-          <p:cNvPr id="2" name="Rectangle 1"/>
+              <a:t>Temps de réponse garanti &lt; 15 ms pour préserver la fluidité mobile.</a:t>
+            </a:r>
+          </a:p>
+        </p:txBody>
+      </p:sp>
+      <p:sp>
+        <p:nvSpPr>
+          <p:cNvPr id="16" name="Rounded Rectangle 15"/>
           <p:cNvSpPr/>
           <p:nvPr/>
         </p:nvSpPr>
         <p:spPr>
           <a:xfrm>
-            <a:off x="0" y="0"/>
-            <a:ext cx="12191695" cy="6858000"/>
-          </a:xfrm>
-          <a:prstGeom prst="rect">
+            <a:off x="6217920" y="3931920"/>
+            <a:ext cx="5242255" cy="2377440"/>
+          </a:xfrm>
+          <a:prstGeom prst="roundRect">
             <a:avLst/>
           </a:prstGeom>
           <a:solidFill>
-            <a:srgbClr val="0B1120"/>
+            <a:srgbClr val="1E293B"/>
           </a:solidFill>
-          <a:ln>
-            <a:noFill/>
+          <a:ln w="19050">
+            <a:solidFill>
+              <a:srgbClr val="10B981"/>
+            </a:solidFill>
           </a:ln>
         </p:spPr>
         <p:style>
@@ -10006,239 +8387,14 @@
       </p:sp>
       <p:sp>
         <p:nvSpPr>
-          <p:cNvPr id="3" name="TextBox 2"/>
+          <p:cNvPr id="17" name="TextBox 16"/>
           <p:cNvSpPr txBox="1"/>
           <p:nvPr/>
         </p:nvSpPr>
         <p:spPr>
           <a:xfrm>
-            <a:off x="731520" y="365760"/>
-            <a:ext cx="7315200" cy="320040"/>
-          </a:xfrm>
-          <a:prstGeom prst="rect">
-            <a:avLst/>
-          </a:prstGeom>
-          <a:noFill/>
-        </p:spPr>
-        <p:txBody>
-          <a:bodyPr wrap="square" lIns="0" tIns="0" rIns="0" bIns="0">
-            <a:spAutoFit/>
-          </a:bodyPr>
-          <a:lstStyle/>
-          <a:p>
-            <a:pPr>
-              <a:defRPr sz="1100" b="1">
-                <a:solidFill>
-                  <a:srgbClr val="F43F5E"/>
-                </a:solidFill>
-                <a:latin typeface="Segoe UI"/>
-              </a:defRPr>
-            </a:pPr>
-            <a:r>
-              <a:t>ÉTAPE 08 | TAXONOMIE DES THÈMES</a:t>
-            </a:r>
-          </a:p>
-        </p:txBody>
-      </p:sp>
-      <p:sp>
-        <p:nvSpPr>
-          <p:cNvPr id="4" name="TextBox 3"/>
-          <p:cNvSpPr txBox="1"/>
-          <p:nvPr/>
-        </p:nvSpPr>
-        <p:spPr>
-          <a:xfrm>
-            <a:off x="731520" y="685800"/>
-            <a:ext cx="9601200" cy="502920"/>
-          </a:xfrm>
-          <a:prstGeom prst="rect">
-            <a:avLst/>
-          </a:prstGeom>
-          <a:noFill/>
-        </p:spPr>
-        <p:txBody>
-          <a:bodyPr wrap="square" lIns="0" tIns="0" rIns="0" bIns="0">
-            <a:spAutoFit/>
-          </a:bodyPr>
-          <a:lstStyle/>
-          <a:p>
-            <a:pPr>
-              <a:defRPr sz="2200" b="1">
-                <a:solidFill>
-                  <a:srgbClr val="F8FAFC"/>
-                </a:solidFill>
-                <a:latin typeface="Segoe UI"/>
-              </a:defRPr>
-            </a:pPr>
-            <a:r>
-              <a:t>Nuages de Mots des Thèmes Latents &amp; Nouvelles Catégories Découvertes</a:t>
-            </a:r>
-          </a:p>
-        </p:txBody>
-      </p:sp>
-      <p:sp>
-        <p:nvSpPr>
-          <p:cNvPr id="5" name="TextBox 4"/>
-          <p:cNvSpPr txBox="1"/>
-          <p:nvPr/>
-        </p:nvSpPr>
-        <p:spPr>
-          <a:xfrm>
-            <a:off x="10362895" y="411480"/>
-            <a:ext cx="1097280" cy="365760"/>
-          </a:xfrm>
-          <a:prstGeom prst="rect">
-            <a:avLst/>
-          </a:prstGeom>
-          <a:noFill/>
-        </p:spPr>
-        <p:txBody>
-          <a:bodyPr wrap="square" lIns="0" tIns="0" rIns="0" bIns="0">
-            <a:spAutoFit/>
-          </a:bodyPr>
-          <a:lstStyle/>
-          <a:p>
-            <a:pPr algn="r">
-              <a:defRPr sz="1200" b="1">
-                <a:solidFill>
-                  <a:srgbClr val="94A3B8"/>
-                </a:solidFill>
-                <a:latin typeface="Segoe UI"/>
-              </a:defRPr>
-            </a:pPr>
-            <a:r>
-              <a:t>9 / 10</a:t>
-            </a:r>
-          </a:p>
-        </p:txBody>
-      </p:sp>
-      <p:sp>
-        <p:nvSpPr>
-          <p:cNvPr id="6" name="TextBox 5"/>
-          <p:cNvSpPr txBox="1"/>
-          <p:nvPr/>
-        </p:nvSpPr>
-        <p:spPr>
-          <a:xfrm>
-            <a:off x="731520" y="6400800"/>
-            <a:ext cx="10728655" cy="274320"/>
-          </a:xfrm>
-          <a:prstGeom prst="rect">
-            <a:avLst/>
-          </a:prstGeom>
-          <a:noFill/>
-        </p:spPr>
-        <p:txBody>
-          <a:bodyPr wrap="square" lIns="0" tIns="0" rIns="0" bIns="0">
-            <a:spAutoFit/>
-          </a:bodyPr>
-          <a:lstStyle/>
-          <a:p>
-            <a:pPr>
-              <a:defRPr sz="1000">
-                <a:solidFill>
-                  <a:srgbClr val="64748B"/>
-                </a:solidFill>
-                <a:latin typeface="Segoe UI"/>
-              </a:defRPr>
-            </a:pPr>
-            <a:r>
-              <a:t>Christopher GILLERON  |  The North Face E-Commerce (ML Non Supervisé &amp; NLP)  |  Certification CDSD Bloc 3</a:t>
-            </a:r>
-          </a:p>
-        </p:txBody>
-      </p:sp>
-      <p:sp>
-        <p:nvSpPr>
-          <p:cNvPr id="7" name="Rounded Rectangle 6"/>
-          <p:cNvSpPr/>
-          <p:nvPr/>
-        </p:nvSpPr>
-        <p:spPr>
-          <a:xfrm>
-            <a:off x="731520" y="1371600"/>
-            <a:ext cx="5212080" cy="4754880"/>
-          </a:xfrm>
-          <a:prstGeom prst="roundRect">
-            <a:avLst/>
-          </a:prstGeom>
-          <a:solidFill>
-            <a:srgbClr val="1E293B"/>
-          </a:solidFill>
-          <a:ln w="19050">
-            <a:solidFill>
-              <a:srgbClr val="334155"/>
-            </a:solidFill>
-          </a:ln>
-        </p:spPr>
-        <p:style>
-          <a:lnRef idx="1">
-            <a:schemeClr val="accent1"/>
-          </a:lnRef>
-          <a:fillRef idx="3">
-            <a:schemeClr val="accent1"/>
-          </a:fillRef>
-          <a:effectRef idx="2">
-            <a:schemeClr val="accent1"/>
-          </a:effectRef>
-          <a:fontRef idx="minor">
-            <a:schemeClr val="lt1"/>
-          </a:fontRef>
-        </p:style>
-        <p:txBody>
-          <a:bodyPr rtlCol="0" anchor="ctr"/>
-          <a:lstStyle/>
-          <a:p>
-            <a:pPr algn="ctr"/>
-          </a:p>
-        </p:txBody>
-      </p:sp>
-      <p:sp>
-        <p:nvSpPr>
-          <p:cNvPr id="8" name="TextBox 7"/>
-          <p:cNvSpPr txBox="1"/>
-          <p:nvPr/>
-        </p:nvSpPr>
-        <p:spPr>
-          <a:xfrm>
-            <a:off x="914400" y="1536192"/>
-            <a:ext cx="4846320" cy="365760"/>
-          </a:xfrm>
-          <a:prstGeom prst="rect">
-            <a:avLst/>
-          </a:prstGeom>
-          <a:noFill/>
-        </p:spPr>
-        <p:txBody>
-          <a:bodyPr wrap="square" lIns="0" tIns="0" rIns="0" bIns="0">
-            <a:spAutoFit/>
-          </a:bodyPr>
-          <a:lstStyle/>
-          <a:p>
-            <a:pPr>
-              <a:defRPr sz="1200" b="1">
-                <a:solidFill>
-                  <a:srgbClr val="F43F5E"/>
-                </a:solidFill>
-                <a:latin typeface="Segoe UI"/>
-              </a:defRPr>
-            </a:pPr>
-            <a:r>
-              <a:t>LES 4 MACRO-THÈMES LATENTS MAJEURS (WORDCLOUDS LSA)</a:t>
-            </a:r>
-          </a:p>
-        </p:txBody>
-      </p:sp>
-      <p:sp>
-        <p:nvSpPr>
-          <p:cNvPr id="9" name="TextBox 8"/>
-          <p:cNvSpPr txBox="1"/>
-          <p:nvPr/>
-        </p:nvSpPr>
-        <p:spPr>
-          <a:xfrm>
-            <a:off x="914400" y="1920240"/>
-            <a:ext cx="4846320" cy="3931920"/>
+            <a:off x="6400800" y="4096512"/>
+            <a:ext cx="4876495" cy="365760"/>
           </a:xfrm>
           <a:prstGeom prst="rect">
             <a:avLst/>
@@ -10260,193 +8416,21 @@
               </a:defRPr>
             </a:pPr>
             <a:r>
-              <a:t>Thème 1 : Vêtements Imperméables &amp; Coques (Shells) :</a:t>
-            </a:r>
-          </a:p>
-          <a:p>
-            <a:pPr>
-              <a:defRPr sz="1000">
-                <a:solidFill>
-                  <a:srgbClr val="F8FAFC"/>
-                </a:solidFill>
-                <a:latin typeface="Segoe UI"/>
-              </a:defRPr>
-            </a:pPr>
-            <a:r>
-              <a:t>Termes LSA : 'waterproof', 'jacket', 'breathable', 'membrane', 'hood', 'storm'. Réunit les technologies Gore-Tex et DryVent.</a:t>
-            </a:r>
-          </a:p>
-          <a:p>
-            <a:pPr>
-              <a:defRPr sz="1100" b="1">
-                <a:solidFill>
-                  <a:srgbClr val="F43F5E"/>
-                </a:solidFill>
-                <a:latin typeface="Segoe UI"/>
-              </a:defRPr>
-            </a:pPr>
-            <a:r>
-              <a:t>Thème 2 : Isolation Thermique &amp; Couches Chaudes :</a:t>
-            </a:r>
-          </a:p>
-          <a:p>
-            <a:pPr>
-              <a:defRPr sz="1000">
-                <a:solidFill>
-                  <a:srgbClr val="F8FAFC"/>
-                </a:solidFill>
-                <a:latin typeface="Segoe UI"/>
-              </a:defRPr>
-            </a:pPr>
-            <a:r>
-              <a:t>Termes LSA : 'fleece', 'down', 'insulation', 'warmth', 'winter', 'thermal'. Produits en duvet d'oie et fibres polaires.</a:t>
-            </a:r>
-          </a:p>
-          <a:p>
-            <a:pPr>
-              <a:defRPr sz="1100" b="1">
-                <a:solidFill>
-                  <a:srgbClr val="F43F5E"/>
-                </a:solidFill>
-                <a:latin typeface="Segoe UI"/>
-              </a:defRPr>
-            </a:pPr>
-            <a:r>
-              <a:t>Thème 3 : Portage &amp; Équipement d'Expédition :</a:t>
-            </a:r>
-          </a:p>
-          <a:p>
-            <a:pPr>
-              <a:defRPr sz="1000">
-                <a:solidFill>
-                  <a:srgbClr val="F8FAFC"/>
-                </a:solidFill>
-                <a:latin typeface="Segoe UI"/>
-              </a:defRPr>
-            </a:pPr>
-            <a:r>
-              <a:t>Termes LSA : 'pack', 'backpack', 'volume', 'pocket', 'harness', 'load', 'durable'. Sacs techniques pour trekking.</a:t>
-            </a:r>
-          </a:p>
-          <a:p>
-            <a:pPr>
-              <a:defRPr sz="1100" b="1">
-                <a:solidFill>
-                  <a:srgbClr val="F43F5E"/>
-                </a:solidFill>
-                <a:latin typeface="Segoe UI"/>
-              </a:defRPr>
-            </a:pPr>
-            <a:r>
-              <a:t>Thème 4 : Vêtements Respirants Trail &amp; Running :</a:t>
-            </a:r>
-          </a:p>
-          <a:p>
-            <a:pPr>
-              <a:defRPr sz="1000">
-                <a:solidFill>
-                  <a:srgbClr val="F8FAFC"/>
-                </a:solidFill>
-                <a:latin typeface="Segoe UI"/>
-              </a:defRPr>
-            </a:pPr>
-            <a:r>
-              <a:t>Termes LSA : 'short', 'shirt', 'mesh', 'lightweight', 'sweat', 'quick-dry', 'stretch'. Tenues de course et sous-vêtements actifs.</a:t>
-            </a:r>
-          </a:p>
-        </p:txBody>
-      </p:sp>
-      <p:sp>
-        <p:nvSpPr>
-          <p:cNvPr id="10" name="Rounded Rectangle 9"/>
-          <p:cNvSpPr/>
-          <p:nvPr/>
-        </p:nvSpPr>
-        <p:spPr>
-          <a:xfrm>
-            <a:off x="6217920" y="1371600"/>
-            <a:ext cx="5242255" cy="4754880"/>
-          </a:xfrm>
-          <a:prstGeom prst="roundRect">
-            <a:avLst/>
-          </a:prstGeom>
-          <a:solidFill>
-            <a:srgbClr val="1E293B"/>
-          </a:solidFill>
-          <a:ln w="19050">
-            <a:solidFill>
-              <a:srgbClr val="334155"/>
-            </a:solidFill>
-          </a:ln>
-        </p:spPr>
-        <p:style>
-          <a:lnRef idx="1">
-            <a:schemeClr val="accent1"/>
-          </a:lnRef>
-          <a:fillRef idx="3">
-            <a:schemeClr val="accent1"/>
-          </a:fillRef>
-          <a:effectRef idx="2">
-            <a:schemeClr val="accent1"/>
-          </a:effectRef>
-          <a:fontRef idx="minor">
-            <a:schemeClr val="lt1"/>
-          </a:fontRef>
-        </p:style>
-        <p:txBody>
-          <a:bodyPr rtlCol="0" anchor="ctr"/>
-          <a:lstStyle/>
-          <a:p>
-            <a:pPr algn="ctr"/>
-          </a:p>
-        </p:txBody>
-      </p:sp>
-      <p:sp>
-        <p:nvSpPr>
-          <p:cNvPr id="11" name="TextBox 10"/>
+              <a:t>04 | PERSPECTIVES D'HYBRIDATION</a:t>
+            </a:r>
+          </a:p>
+        </p:txBody>
+      </p:sp>
+      <p:sp>
+        <p:nvSpPr>
+          <p:cNvPr id="18" name="TextBox 17"/>
           <p:cNvSpPr txBox="1"/>
           <p:nvPr/>
         </p:nvSpPr>
         <p:spPr>
           <a:xfrm>
-            <a:off x="6400800" y="1536192"/>
-            <a:ext cx="4876495" cy="365760"/>
-          </a:xfrm>
-          <a:prstGeom prst="rect">
-            <a:avLst/>
-          </a:prstGeom>
-          <a:noFill/>
-        </p:spPr>
-        <p:txBody>
-          <a:bodyPr wrap="square" lIns="0" tIns="0" rIns="0" bIns="0">
-            <a:spAutoFit/>
-          </a:bodyPr>
-          <a:lstStyle/>
-          <a:p>
-            <a:pPr>
-              <a:defRPr sz="1200" b="1">
-                <a:solidFill>
-                  <a:srgbClr val="F43F5E"/>
-                </a:solidFill>
-                <a:latin typeface="Segoe UI"/>
-              </a:defRPr>
-            </a:pPr>
-            <a:r>
-              <a:t>REPENSER L'ARBORESCENCE DU SITE WEB THE NORTH FACE</a:t>
-            </a:r>
-          </a:p>
-        </p:txBody>
-      </p:sp>
-      <p:sp>
-        <p:nvSpPr>
-          <p:cNvPr id="12" name="TextBox 11"/>
-          <p:cNvSpPr txBox="1"/>
-          <p:nvPr/>
-        </p:nvSpPr>
-        <p:spPr>
-          <a:xfrm>
-            <a:off x="6400800" y="1920240"/>
-            <a:ext cx="4846320" cy="3931920"/>
+            <a:off x="6400800" y="4434840"/>
+            <a:ext cx="4876495" cy="1737360"/>
           </a:xfrm>
           <a:prstGeom prst="rect">
             <a:avLst/>
@@ -10460,20 +8444,20 @@
           <a:lstStyle/>
           <a:p>
             <a:pPr>
-              <a:defRPr sz="1100" b="1">
-                <a:solidFill>
-                  <a:srgbClr val="38BDF8"/>
-                </a:solidFill>
-                <a:latin typeface="Segoe UI"/>
-              </a:defRPr>
-            </a:pPr>
-            <a:r>
-              <a:t>Navigation Traditionnelle (Dépassée) :</a:t>
-            </a:r>
-          </a:p>
-          <a:p>
-            <a:pPr>
-              <a:defRPr sz="1000">
+              <a:defRPr sz="1000" b="1">
+                <a:solidFill>
+                  <a:srgbClr val="10B981"/>
+                </a:solidFill>
+                <a:latin typeface="Segoe UI"/>
+              </a:defRPr>
+            </a:pPr>
+            <a:r>
+              <a:t>Signaux Collaboratifs :</a:t>
+            </a:r>
+          </a:p>
+          <a:p>
+            <a:pPr>
+              <a:defRPr sz="900">
                 <a:solidFill>
                   <a:srgbClr val="F8FAFC"/>
                 </a:solidFill>
@@ -10481,25 +8465,25 @@
               </a:defRPr>
             </a:pPr>
             <a:r>
-              <a:t>L'arborescence 'Homme / Femme / Accessoires' force l'utilisateur à naviguer en silo, sans lien avec l'activité pratiquée.</a:t>
-            </a:r>
-          </a:p>
-          <a:p>
-            <a:pPr>
-              <a:defRPr sz="1100" b="1">
-                <a:solidFill>
-                  <a:srgbClr val="38BDF8"/>
-                </a:solidFill>
-                <a:latin typeface="Segoe UI"/>
-              </a:defRPr>
-            </a:pPr>
-            <a:r>
-              <a:t>Nouvelle Navigation Thématique Déduite par LSA :</a:t>
-            </a:r>
-          </a:p>
-          <a:p>
-            <a:pPr>
-              <a:defRPr sz="1000">
+              <a:t>Combiner la similarité textuelle avec les données de paniers co-achetés réels.</a:t>
+            </a:r>
+          </a:p>
+          <a:p>
+            <a:pPr>
+              <a:defRPr sz="1000" b="1">
+                <a:solidFill>
+                  <a:srgbClr val="10B981"/>
+                </a:solidFill>
+                <a:latin typeface="Segoe UI"/>
+              </a:defRPr>
+            </a:pPr>
+            <a:r>
+              <a:t>Embeddings Denses :</a:t>
+            </a:r>
+          </a:p>
+          <a:p>
+            <a:pPr>
+              <a:defRPr sz="900">
                 <a:solidFill>
                   <a:srgbClr val="F8FAFC"/>
                 </a:solidFill>
@@ -10507,45 +8491,7 @@
               </a:defRPr>
             </a:pPr>
             <a:r>
-              <a:t>• 'Expédition Alpinisme &amp; Grand Froid' (Thème Duvet/Gore-Tex)</a:t>
-            </a:r>
-            <a:br/>
-            <a:r>
-              <a:t>• 'Randonnée &amp; Bivouac Léger' (Thème Portage &amp; Stretch)</a:t>
-            </a:r>
-            <a:br/>
-            <a:r>
-              <a:t>• 'Trail Running &amp; Performance Active' (Thème Respirabilité)</a:t>
-            </a:r>
-            <a:br/>
-            <a:r>
-              <a:t>• 'Lifestyle Éco-responsable' (Thème Coton Bio &amp; Vêtements Quotidiens).</a:t>
-            </a:r>
-          </a:p>
-          <a:p>
-            <a:pPr>
-              <a:defRPr sz="1100" b="1">
-                <a:solidFill>
-                  <a:srgbClr val="38BDF8"/>
-                </a:solidFill>
-                <a:latin typeface="Segoe UI"/>
-              </a:defRPr>
-            </a:pPr>
-            <a:r>
-              <a:t>Impact sur l'Expérience Client :</a:t>
-            </a:r>
-          </a:p>
-          <a:p>
-            <a:pPr>
-              <a:defRPr sz="1000">
-                <a:solidFill>
-                  <a:srgbClr val="F8FAFC"/>
-                </a:solidFill>
-                <a:latin typeface="Segoe UI"/>
-              </a:defRPr>
-            </a:pPr>
-            <a:r>
-              <a:t>Réduction du nombre de clics pour trouver le produit idéal et augmentation mécanique du panier moyen.</a:t>
+              <a:t>Expérimenter Sentence-BERT pour capturer les nuances multilingues (FR, EN, DE).</a:t>
             </a:r>
           </a:p>
         </p:txBody>

--- a/Bloc_3_Machine_Learning/North_Face/North_face_presentation.pptx
+++ b/Bloc_3_Machine_Learning/North_Face/North_face_presentation.pptx
@@ -3155,9 +3155,9 @@
           <a:solidFill>
             <a:srgbClr val="1E293B"/>
           </a:solidFill>
-          <a:ln w="25400">
+          <a:ln w="12700">
             <a:solidFill>
-              <a:srgbClr val="F43F5E"/>
+              <a:srgbClr val="334155"/>
             </a:solidFill>
           </a:ln>
         </p:spPr>
@@ -3206,9 +3206,9 @@
           <a:lstStyle/>
           <a:p>
             <a:pPr>
-              <a:defRPr sz="1300" b="1">
-                <a:solidFill>
-                  <a:srgbClr val="F43F5E"/>
+              <a:defRPr sz="1200" b="1">
+                <a:solidFill>
+                  <a:srgbClr val="F97316"/>
                 </a:solidFill>
                 <a:latin typeface="Segoe UI"/>
               </a:defRPr>
@@ -3228,7 +3228,7 @@
         <p:spPr>
           <a:xfrm>
             <a:off x="1828800" y="1920240"/>
-            <a:ext cx="8534095" cy="1097280"/>
+            <a:ext cx="8534095" cy="1005840"/>
           </a:xfrm>
           <a:prstGeom prst="rect">
             <a:avLst/>
@@ -3236,13 +3236,13 @@
           <a:noFill/>
         </p:spPr>
         <p:txBody>
-          <a:bodyPr wrap="none">
+          <a:bodyPr wrap="square">
             <a:spAutoFit/>
           </a:bodyPr>
           <a:lstStyle/>
           <a:p>
             <a:pPr>
-              <a:defRPr sz="3600" b="1">
+              <a:defRPr sz="3200" b="1">
                 <a:solidFill>
                   <a:srgbClr val="F8FAFC"/>
                 </a:solidFill>
@@ -3255,7 +3255,7 @@
           </a:p>
           <a:p>
             <a:pPr>
-              <a:defRPr sz="1700">
+              <a:defRPr sz="1400">
                 <a:solidFill>
                   <a:srgbClr val="94A3B8"/>
                 </a:solidFill>
@@ -3270,23 +3270,25 @@
       </p:sp>
       <p:sp>
         <p:nvSpPr>
-          <p:cNvPr id="6" name="Rectangle 5"/>
+          <p:cNvPr id="6" name="Rounded Rectangle 5"/>
           <p:cNvSpPr/>
           <p:nvPr/>
         </p:nvSpPr>
         <p:spPr>
           <a:xfrm>
             <a:off x="1828800" y="3383280"/>
-            <a:ext cx="8534095" cy="27432"/>
-          </a:xfrm>
-          <a:prstGeom prst="rect">
+            <a:ext cx="2651760" cy="1280160"/>
+          </a:xfrm>
+          <a:prstGeom prst="roundRect">
             <a:avLst/>
           </a:prstGeom>
           <a:solidFill>
-            <a:srgbClr val="334155"/>
+            <a:srgbClr val="0F172A"/>
           </a:solidFill>
-          <a:ln>
-            <a:noFill/>
+          <a:ln w="12700">
+            <a:solidFill>
+              <a:srgbClr val="334155"/>
+            </a:solidFill>
           </a:ln>
         </p:spPr>
         <p:style>
@@ -3319,8 +3321,8 @@
         </p:nvSpPr>
         <p:spPr>
           <a:xfrm>
-            <a:off x="1828800" y="3657600"/>
-            <a:ext cx="2743200" cy="1097280"/>
+            <a:off x="2011680" y="3520440"/>
+            <a:ext cx="2286000" cy="1005840"/>
           </a:xfrm>
           <a:prstGeom prst="rect">
             <a:avLst/>
@@ -3334,9 +3336,9 @@
           <a:lstStyle/>
           <a:p>
             <a:pPr>
-              <a:defRPr sz="2200" b="1">
-                <a:solidFill>
-                  <a:srgbClr val="F43F5E"/>
+              <a:defRPr sz="1800" b="1">
+                <a:solidFill>
+                  <a:srgbClr val="F97316"/>
                 </a:solidFill>
                 <a:latin typeface="Segoe UI"/>
               </a:defRPr>
@@ -3347,7 +3349,7 @@
           </a:p>
           <a:p>
             <a:pPr>
-              <a:defRPr sz="1100" b="1">
+              <a:defRPr sz="1000" b="1">
                 <a:solidFill>
                   <a:srgbClr val="F8FAFC"/>
                 </a:solidFill>
@@ -3360,7 +3362,7 @@
           </a:p>
           <a:p>
             <a:pPr>
-              <a:defRPr sz="950">
+              <a:defRPr sz="900">
                 <a:solidFill>
                   <a:srgbClr val="94A3B8"/>
                 </a:solidFill>
@@ -3375,14 +3377,59 @@
       </p:sp>
       <p:sp>
         <p:nvSpPr>
-          <p:cNvPr id="8" name="TextBox 7"/>
+          <p:cNvPr id="8" name="Rounded Rectangle 7"/>
+          <p:cNvSpPr/>
+          <p:nvPr/>
+        </p:nvSpPr>
+        <p:spPr>
+          <a:xfrm>
+            <a:off x="4754880" y="3383280"/>
+            <a:ext cx="2651760" cy="1280160"/>
+          </a:xfrm>
+          <a:prstGeom prst="roundRect">
+            <a:avLst/>
+          </a:prstGeom>
+          <a:solidFill>
+            <a:srgbClr val="0F172A"/>
+          </a:solidFill>
+          <a:ln w="12700">
+            <a:solidFill>
+              <a:srgbClr val="334155"/>
+            </a:solidFill>
+          </a:ln>
+        </p:spPr>
+        <p:style>
+          <a:lnRef idx="1">
+            <a:schemeClr val="accent1"/>
+          </a:lnRef>
+          <a:fillRef idx="3">
+            <a:schemeClr val="accent1"/>
+          </a:fillRef>
+          <a:effectRef idx="2">
+            <a:schemeClr val="accent1"/>
+          </a:effectRef>
+          <a:fontRef idx="minor">
+            <a:schemeClr val="lt1"/>
+          </a:fontRef>
+        </p:style>
+        <p:txBody>
+          <a:bodyPr rtlCol="0" anchor="ctr"/>
+          <a:lstStyle/>
+          <a:p>
+            <a:pPr algn="ctr"/>
+          </a:p>
+        </p:txBody>
+      </p:sp>
+      <p:sp>
+        <p:nvSpPr>
+          <p:cNvPr id="9" name="TextBox 8"/>
           <p:cNvSpPr txBox="1"/>
           <p:nvPr/>
         </p:nvSpPr>
         <p:spPr>
           <a:xfrm>
-            <a:off x="4754880" y="3657600"/>
-            <a:ext cx="2743200" cy="1097280"/>
+            <a:off x="4937760" y="3520440"/>
+            <a:ext cx="2286000" cy="1005840"/>
           </a:xfrm>
           <a:prstGeom prst="rect">
             <a:avLst/>
@@ -3396,9 +3443,9 @@
           <a:lstStyle/>
           <a:p>
             <a:pPr>
-              <a:defRPr sz="2200" b="1">
-                <a:solidFill>
-                  <a:srgbClr val="38BDF8"/>
+              <a:defRPr sz="1800" b="1">
+                <a:solidFill>
+                  <a:srgbClr val="10B981"/>
                 </a:solidFill>
                 <a:latin typeface="Segoe UI"/>
               </a:defRPr>
@@ -3409,7 +3456,7 @@
           </a:p>
           <a:p>
             <a:pPr>
-              <a:defRPr sz="1100" b="1">
+              <a:defRPr sz="1000" b="1">
                 <a:solidFill>
                   <a:srgbClr val="F8FAFC"/>
                 </a:solidFill>
@@ -3422,7 +3469,7 @@
           </a:p>
           <a:p>
             <a:pPr>
-              <a:defRPr sz="950">
+              <a:defRPr sz="900">
                 <a:solidFill>
                   <a:srgbClr val="94A3B8"/>
                 </a:solidFill>
@@ -3437,14 +3484,59 @@
       </p:sp>
       <p:sp>
         <p:nvSpPr>
-          <p:cNvPr id="9" name="TextBox 8"/>
+          <p:cNvPr id="10" name="Rounded Rectangle 9"/>
+          <p:cNvSpPr/>
+          <p:nvPr/>
+        </p:nvSpPr>
+        <p:spPr>
+          <a:xfrm>
+            <a:off x="7680960" y="3383280"/>
+            <a:ext cx="2651760" cy="1280160"/>
+          </a:xfrm>
+          <a:prstGeom prst="roundRect">
+            <a:avLst/>
+          </a:prstGeom>
+          <a:solidFill>
+            <a:srgbClr val="0F172A"/>
+          </a:solidFill>
+          <a:ln w="12700">
+            <a:solidFill>
+              <a:srgbClr val="334155"/>
+            </a:solidFill>
+          </a:ln>
+        </p:spPr>
+        <p:style>
+          <a:lnRef idx="1">
+            <a:schemeClr val="accent1"/>
+          </a:lnRef>
+          <a:fillRef idx="3">
+            <a:schemeClr val="accent1"/>
+          </a:fillRef>
+          <a:effectRef idx="2">
+            <a:schemeClr val="accent1"/>
+          </a:effectRef>
+          <a:fontRef idx="minor">
+            <a:schemeClr val="lt1"/>
+          </a:fontRef>
+        </p:style>
+        <p:txBody>
+          <a:bodyPr rtlCol="0" anchor="ctr"/>
+          <a:lstStyle/>
+          <a:p>
+            <a:pPr algn="ctr"/>
+          </a:p>
+        </p:txBody>
+      </p:sp>
+      <p:sp>
+        <p:nvSpPr>
+          <p:cNvPr id="11" name="TextBox 10"/>
           <p:cNvSpPr txBox="1"/>
           <p:nvPr/>
         </p:nvSpPr>
         <p:spPr>
           <a:xfrm>
-            <a:off x="7680960" y="3657600"/>
-            <a:ext cx="2743200" cy="1097280"/>
+            <a:off x="7863840" y="3520440"/>
+            <a:ext cx="2286000" cy="1005840"/>
           </a:xfrm>
           <a:prstGeom prst="rect">
             <a:avLst/>
@@ -3458,9 +3550,9 @@
           <a:lstStyle/>
           <a:p>
             <a:pPr>
-              <a:defRPr sz="2200" b="1">
-                <a:solidFill>
-                  <a:srgbClr val="10B981"/>
+              <a:defRPr sz="1800" b="1">
+                <a:solidFill>
+                  <a:srgbClr val="38BDF8"/>
                 </a:solidFill>
                 <a:latin typeface="Segoe UI"/>
               </a:defRPr>
@@ -3471,7 +3563,7 @@
           </a:p>
           <a:p>
             <a:pPr>
-              <a:defRPr sz="1100" b="1">
+              <a:defRPr sz="1000" b="1">
                 <a:solidFill>
                   <a:srgbClr val="F8FAFC"/>
                 </a:solidFill>
@@ -3484,7 +3576,7 @@
           </a:p>
           <a:p>
             <a:pPr>
-              <a:defRPr sz="950">
+              <a:defRPr sz="900">
                 <a:solidFill>
                   <a:srgbClr val="94A3B8"/>
                 </a:solidFill>
@@ -3499,13 +3591,13 @@
       </p:sp>
       <p:sp>
         <p:nvSpPr>
-          <p:cNvPr id="10" name="TextBox 9"/>
+          <p:cNvPr id="12" name="TextBox 11"/>
           <p:cNvSpPr txBox="1"/>
           <p:nvPr/>
         </p:nvSpPr>
         <p:spPr>
           <a:xfrm>
-            <a:off x="1828800" y="4983480"/>
+            <a:off x="1828800" y="4937760"/>
             <a:ext cx="8534095" cy="457200"/>
           </a:xfrm>
           <a:prstGeom prst="rect">
@@ -3520,9 +3612,9 @@
           <a:lstStyle/>
           <a:p>
             <a:pPr>
-              <a:defRPr sz="1100" b="1">
-                <a:solidFill>
-                  <a:srgbClr val="94A3B8"/>
+              <a:defRPr sz="1100">
+                <a:solidFill>
+                  <a:srgbClr val="F8FAFC"/>
                 </a:solidFill>
                 <a:latin typeface="Segoe UI"/>
               </a:defRPr>
@@ -3611,7 +3703,7 @@
           <a:noFill/>
         </p:spPr>
         <p:txBody>
-          <a:bodyPr wrap="square">
+          <a:bodyPr wrap="square" lIns="0" tIns="0" rIns="0" bIns="0">
             <a:spAutoFit/>
           </a:bodyPr>
           <a:lstStyle/>
@@ -3619,7 +3711,7 @@
             <a:pPr>
               <a:defRPr sz="1100" b="1">
                 <a:solidFill>
-                  <a:srgbClr val="F43F5E"/>
+                  <a:srgbClr val="F97316"/>
                 </a:solidFill>
                 <a:latin typeface="Segoe UI"/>
               </a:defRPr>
@@ -3647,13 +3739,13 @@
           <a:noFill/>
         </p:spPr>
         <p:txBody>
-          <a:bodyPr wrap="square">
+          <a:bodyPr wrap="square" lIns="0" tIns="0" rIns="0" bIns="0">
             <a:spAutoFit/>
           </a:bodyPr>
           <a:lstStyle/>
           <a:p>
             <a:pPr>
-              <a:defRPr sz="2100" b="1">
+              <a:defRPr sz="1800" b="1">
                 <a:solidFill>
                   <a:srgbClr val="F8FAFC"/>
                 </a:solidFill>
@@ -3683,7 +3775,7 @@
           <a:noFill/>
         </p:spPr>
         <p:txBody>
-          <a:bodyPr wrap="square">
+          <a:bodyPr wrap="none" lIns="0" tIns="0" rIns="0" bIns="0">
             <a:spAutoFit/>
           </a:bodyPr>
           <a:lstStyle/>
@@ -3719,21 +3811,21 @@
           <a:noFill/>
         </p:spPr>
         <p:txBody>
-          <a:bodyPr wrap="square">
+          <a:bodyPr wrap="none" lIns="0" tIns="0" rIns="0" bIns="0">
             <a:spAutoFit/>
           </a:bodyPr>
           <a:lstStyle/>
           <a:p>
             <a:pPr>
-              <a:defRPr sz="1000">
-                <a:solidFill>
-                  <a:srgbClr val="64748B"/>
+              <a:defRPr sz="950">
+                <a:solidFill>
+                  <a:srgbClr val="94A3B8"/>
                 </a:solidFill>
                 <a:latin typeface="Segoe UI"/>
               </a:defRPr>
             </a:pPr>
             <a:r>
-              <a:t>Christopher GILLERON  |  The North Face E-Commerce (ML Non Supervisé &amp; NLP)  |  Certification CDSD Bloc 3</a:t>
+              <a:t>Christopher GILLERON  |  The North Face E-Commerce (ML Non Supervisé &amp; NLP)  |  Certification CDSD Bloc 3  |  Temps alloué : 5 min</a:t>
             </a:r>
           </a:p>
         </p:txBody>
@@ -3747,7 +3839,7 @@
         <p:spPr>
           <a:xfrm>
             <a:off x="731520" y="1371600"/>
-            <a:ext cx="5212080" cy="4754880"/>
+            <a:ext cx="5212080" cy="4846320"/>
           </a:xfrm>
           <a:prstGeom prst="roundRect">
             <a:avLst/>
@@ -3755,7 +3847,7 @@
           <a:solidFill>
             <a:srgbClr val="1E293B"/>
           </a:solidFill>
-          <a:ln w="19050">
+          <a:ln w="12700">
             <a:solidFill>
               <a:srgbClr val="334155"/>
             </a:solidFill>
@@ -3791,8 +3883,8 @@
         </p:nvSpPr>
         <p:spPr>
           <a:xfrm>
-            <a:off x="914400" y="1536192"/>
-            <a:ext cx="4846320" cy="365760"/>
+            <a:off x="914400" y="1554480"/>
+            <a:ext cx="4846320" cy="4480560"/>
           </a:xfrm>
           <a:prstGeom prst="rect">
             <a:avLst/>
@@ -3806,47 +3898,25 @@
           <a:lstStyle/>
           <a:p>
             <a:pPr>
-              <a:defRPr sz="1100" b="1">
-                <a:solidFill>
-                  <a:srgbClr val="F43F5E"/>
-                </a:solidFill>
-                <a:latin typeface="Segoe UI"/>
+              <a:defRPr sz="1400" b="1">
+                <a:solidFill>
+                  <a:srgbClr val="F97316"/>
+                </a:solidFill>
               </a:defRPr>
             </a:pPr>
             <a:r>
               <a:t>01 | CONTEXTE THE NORTH FACE &amp; DONNÉES</a:t>
             </a:r>
           </a:p>
-        </p:txBody>
-      </p:sp>
-      <p:sp>
-        <p:nvSpPr>
-          <p:cNvPr id="9" name="TextBox 8"/>
-          <p:cNvSpPr txBox="1"/>
-          <p:nvPr/>
-        </p:nvSpPr>
-        <p:spPr>
-          <a:xfrm>
-            <a:off x="914400" y="1920240"/>
-            <a:ext cx="4846320" cy="4023360"/>
-          </a:xfrm>
-          <a:prstGeom prst="rect">
-            <a:avLst/>
-          </a:prstGeom>
-          <a:noFill/>
-        </p:spPr>
-        <p:txBody>
-          <a:bodyPr wrap="square">
-            <a:spAutoFit/>
-          </a:bodyPr>
-          <a:lstStyle/>
-          <a:p>
-            <a:pPr>
-              <a:defRPr sz="1000" b="1">
-                <a:solidFill>
-                  <a:srgbClr val="F43F5E"/>
-                </a:solidFill>
-                <a:latin typeface="Segoe UI"/>
+          <a:p>
+            <a:pPr>
+              <a:spcBef>
+                <a:spcPts val="1000"/>
+              </a:spcBef>
+              <a:defRPr b="1" sz="1100">
+                <a:solidFill>
+                  <a:srgbClr val="F8FAFC"/>
+                </a:solidFill>
               </a:defRPr>
             </a:pPr>
             <a:r>
@@ -3855,24 +3925,25 @@
           </a:p>
           <a:p>
             <a:pPr>
-              <a:defRPr sz="900">
+              <a:defRPr sz="1000">
+                <a:solidFill>
+                  <a:srgbClr val="94A3B8"/>
+                </a:solidFill>
+              </a:defRPr>
+            </a:pPr>
+            <a:r>
+              <a:t>Spécialiste mondial des vêtements, chaussures et équipements d'alpinisme et de loisirs de plein air.</a:t>
+            </a:r>
+          </a:p>
+          <a:p>
+            <a:pPr>
+              <a:spcBef>
+                <a:spcPts val="1000"/>
+              </a:spcBef>
+              <a:defRPr b="1" sz="1100">
                 <a:solidFill>
                   <a:srgbClr val="F8FAFC"/>
                 </a:solidFill>
-                <a:latin typeface="Segoe UI"/>
-              </a:defRPr>
-            </a:pPr>
-            <a:r>
-              <a:t>Spécialiste mondial des vêtements, chaussures et équipements d'alpinisme et de loisirs de plein air.</a:t>
-            </a:r>
-          </a:p>
-          <a:p>
-            <a:pPr>
-              <a:defRPr sz="1000" b="1">
-                <a:solidFill>
-                  <a:srgbClr val="F43F5E"/>
-                </a:solidFill>
-                <a:latin typeface="Segoe UI"/>
               </a:defRPr>
             </a:pPr>
             <a:r>
@@ -3881,24 +3952,25 @@
           </a:p>
           <a:p>
             <a:pPr>
-              <a:defRPr sz="900">
+              <a:defRPr sz="1000">
+                <a:solidFill>
+                  <a:srgbClr val="94A3B8"/>
+                </a:solidFill>
+              </a:defRPr>
+            </a:pPr>
+            <a:r>
+              <a:t>Améliorer les taux de conversion en ligne et la pertinence de l'expérience utilisateur face à un catalogue dense.</a:t>
+            </a:r>
+          </a:p>
+          <a:p>
+            <a:pPr>
+              <a:spcBef>
+                <a:spcPts val="1000"/>
+              </a:spcBef>
+              <a:defRPr b="1" sz="1100">
                 <a:solidFill>
                   <a:srgbClr val="F8FAFC"/>
                 </a:solidFill>
-                <a:latin typeface="Segoe UI"/>
-              </a:defRPr>
-            </a:pPr>
-            <a:r>
-              <a:t>Améliorer les taux de conversion en ligne et la pertinence de l'expérience utilisateur.</a:t>
-            </a:r>
-          </a:p>
-          <a:p>
-            <a:pPr>
-              <a:defRPr sz="1000" b="1">
-                <a:solidFill>
-                  <a:srgbClr val="F43F5E"/>
-                </a:solidFill>
-                <a:latin typeface="Segoe UI"/>
               </a:defRPr>
             </a:pPr>
             <a:r>
@@ -3907,29 +3979,55 @@
           </a:p>
           <a:p>
             <a:pPr>
-              <a:defRPr sz="900">
+              <a:defRPr sz="1000">
+                <a:solidFill>
+                  <a:srgbClr val="94A3B8"/>
+                </a:solidFill>
+              </a:defRPr>
+            </a:pPr>
+            <a:r>
+              <a:t>500 descriptions textuelles détaillées de produits outdoor issues du catalogue officiel (sample-data.csv).</a:t>
+            </a:r>
+          </a:p>
+          <a:p>
+            <a:pPr>
+              <a:spcBef>
+                <a:spcPts val="1000"/>
+              </a:spcBef>
+              <a:defRPr b="1" sz="1100">
                 <a:solidFill>
                   <a:srgbClr val="F8FAFC"/>
                 </a:solidFill>
-                <a:latin typeface="Segoe UI"/>
-              </a:defRPr>
-            </a:pPr>
-            <a:r>
-              <a:t>500 descriptions textuelles détaillées de produits outdoor issues du catalogue officiel (sample-data.csv).</a:t>
-            </a:r>
-          </a:p>
-        </p:txBody>
-      </p:sp>
-      <p:sp>
-        <p:nvSpPr>
-          <p:cNvPr id="10" name="Rounded Rectangle 9"/>
+              </a:defRPr>
+            </a:pPr>
+            <a:r>
+              <a:t>Approche Non Supervisée :</a:t>
+            </a:r>
+          </a:p>
+          <a:p>
+            <a:pPr>
+              <a:defRPr sz="1000">
+                <a:solidFill>
+                  <a:srgbClr val="94A3B8"/>
+                </a:solidFill>
+              </a:defRPr>
+            </a:pPr>
+            <a:r>
+              <a:t>Exploiter uniquement le traitement automatique du langage naturel (NLP) sans nécessiter d'historique de clics préalable.</a:t>
+            </a:r>
+          </a:p>
+        </p:txBody>
+      </p:sp>
+      <p:sp>
+        <p:nvSpPr>
+          <p:cNvPr id="9" name="Rounded Rectangle 8"/>
           <p:cNvSpPr/>
           <p:nvPr/>
         </p:nvSpPr>
         <p:spPr>
           <a:xfrm>
             <a:off x="6217920" y="1371600"/>
-            <a:ext cx="5242255" cy="4754880"/>
+            <a:ext cx="5242255" cy="4846320"/>
           </a:xfrm>
           <a:prstGeom prst="roundRect">
             <a:avLst/>
@@ -3937,7 +4035,7 @@
           <a:solidFill>
             <a:srgbClr val="1E293B"/>
           </a:solidFill>
-          <a:ln w="19050">
+          <a:ln w="12700">
             <a:solidFill>
               <a:srgbClr val="334155"/>
             </a:solidFill>
@@ -3967,14 +4065,14 @@
       </p:sp>
       <p:sp>
         <p:nvSpPr>
-          <p:cNvPr id="11" name="TextBox 10"/>
+          <p:cNvPr id="10" name="TextBox 9"/>
           <p:cNvSpPr txBox="1"/>
           <p:nvPr/>
         </p:nvSpPr>
         <p:spPr>
           <a:xfrm>
-            <a:off x="6400800" y="1536192"/>
-            <a:ext cx="4876495" cy="365760"/>
+            <a:off x="6400800" y="1554480"/>
+            <a:ext cx="4876495" cy="4480560"/>
           </a:xfrm>
           <a:prstGeom prst="rect">
             <a:avLst/>
@@ -3988,47 +4086,25 @@
           <a:lstStyle/>
           <a:p>
             <a:pPr>
-              <a:defRPr sz="1100" b="1">
-                <a:solidFill>
-                  <a:srgbClr val="F43F5E"/>
-                </a:solidFill>
-                <a:latin typeface="Segoe UI"/>
+              <a:defRPr sz="1400" b="1">
+                <a:solidFill>
+                  <a:srgbClr val="F97316"/>
+                </a:solidFill>
               </a:defRPr>
             </a:pPr>
             <a:r>
               <a:t>02 | LES DEUX SOLUTIONS ATTENDUES</a:t>
             </a:r>
           </a:p>
-        </p:txBody>
-      </p:sp>
-      <p:sp>
-        <p:nvSpPr>
-          <p:cNvPr id="12" name="TextBox 11"/>
-          <p:cNvSpPr txBox="1"/>
-          <p:nvPr/>
-        </p:nvSpPr>
-        <p:spPr>
-          <a:xfrm>
-            <a:off x="6400800" y="1920240"/>
-            <a:ext cx="4876495" cy="4023360"/>
-          </a:xfrm>
-          <a:prstGeom prst="rect">
-            <a:avLst/>
-          </a:prstGeom>
-          <a:noFill/>
-        </p:spPr>
-        <p:txBody>
-          <a:bodyPr wrap="square">
-            <a:spAutoFit/>
-          </a:bodyPr>
-          <a:lstStyle/>
-          <a:p>
-            <a:pPr>
-              <a:defRPr sz="1000" b="1">
-                <a:solidFill>
-                  <a:srgbClr val="F43F5E"/>
-                </a:solidFill>
-                <a:latin typeface="Segoe UI"/>
+          <a:p>
+            <a:pPr>
+              <a:spcBef>
+                <a:spcPts val="800"/>
+              </a:spcBef>
+              <a:defRPr b="1" sz="1100">
+                <a:solidFill>
+                  <a:srgbClr val="F8FAFC"/>
+                </a:solidFill>
               </a:defRPr>
             </a:pPr>
             <a:r>
@@ -4037,24 +4113,52 @@
           </a:p>
           <a:p>
             <a:pPr>
-              <a:defRPr sz="900">
+              <a:defRPr sz="1000">
+                <a:solidFill>
+                  <a:srgbClr val="94A3B8"/>
+                </a:solidFill>
+              </a:defRPr>
+            </a:pPr>
+            <a:r>
+              <a:t>Déployer un carrousel 'Ces produits pourraient aussi vous intéresser...' sur chaque page article, basé sur la similarité textuelle.</a:t>
+            </a:r>
+          </a:p>
+          <a:p>
+            <a:pPr>
+              <a:spcBef>
+                <a:spcPts val="800"/>
+              </a:spcBef>
+              <a:defRPr b="1" sz="1100">
                 <a:solidFill>
                   <a:srgbClr val="F8FAFC"/>
                 </a:solidFill>
-                <a:latin typeface="Segoe UI"/>
-              </a:defRPr>
-            </a:pPr>
-            <a:r>
-              <a:t>Déployer un carrousel 'Ces produits pourraient aussi vous intéresser...' sur chaque page article, basé sur la similarité textuelle (résolution du problème de Cold-Start sans historique d'achat).</a:t>
-            </a:r>
-          </a:p>
-          <a:p>
-            <a:pPr>
-              <a:defRPr sz="1000" b="1">
-                <a:solidFill>
-                  <a:srgbClr val="F43F5E"/>
-                </a:solidFill>
-                <a:latin typeface="Segoe UI"/>
+              </a:defRPr>
+            </a:pPr>
+            <a:r>
+              <a:t>Résolution du Cold-Start :</a:t>
+            </a:r>
+          </a:p>
+          <a:p>
+            <a:pPr>
+              <a:defRPr sz="1000">
+                <a:solidFill>
+                  <a:srgbClr val="94A3B8"/>
+                </a:solidFill>
+              </a:defRPr>
+            </a:pPr>
+            <a:r>
+              <a:t>Permet de recommander instantanément des articles pertinents aux nouveaux visiteurs et pour les nouveaux produits sans historique d'achat.</a:t>
+            </a:r>
+          </a:p>
+          <a:p>
+            <a:pPr>
+              <a:spcBef>
+                <a:spcPts val="800"/>
+              </a:spcBef>
+              <a:defRPr b="1" sz="1100">
+                <a:solidFill>
+                  <a:srgbClr val="F8FAFC"/>
+                </a:solidFill>
               </a:defRPr>
             </a:pPr>
             <a:r>
@@ -4063,41 +4167,41 @@
           </a:p>
           <a:p>
             <a:pPr>
-              <a:defRPr sz="900">
+              <a:defRPr sz="1000">
+                <a:solidFill>
+                  <a:srgbClr val="94A3B8"/>
+                </a:solidFill>
+              </a:defRPr>
+            </a:pPr>
+            <a:r>
+              <a:t>Utiliser le Topic Modeling non supervisé pour remettre en cause les catégories traditionnelles et identifier de nouvelles catégories de navigation plus intuitives.</a:t>
+            </a:r>
+          </a:p>
+          <a:p>
+            <a:pPr>
+              <a:spcBef>
+                <a:spcPts val="800"/>
+              </a:spcBef>
+              <a:defRPr b="1" sz="1100">
                 <a:solidFill>
                   <a:srgbClr val="F8FAFC"/>
                 </a:solidFill>
-                <a:latin typeface="Segoe UI"/>
-              </a:defRPr>
-            </a:pPr>
-            <a:r>
-              <a:t>Utiliser le Topic Modeling non supervisé pour remettre en cause les catégories traditionnelles et identifier de nouvelles catégories de navigation plus intuitives.</a:t>
-            </a:r>
-          </a:p>
-          <a:p>
-            <a:pPr>
-              <a:defRPr sz="1000" b="1">
-                <a:solidFill>
-                  <a:srgbClr val="F43F5E"/>
-                </a:solidFill>
-                <a:latin typeface="Segoe UI"/>
-              </a:defRPr>
-            </a:pPr>
-            <a:r>
-              <a:t>Approche Non Supervisée :</a:t>
-            </a:r>
-          </a:p>
-          <a:p>
-            <a:pPr>
-              <a:defRPr sz="900">
-                <a:solidFill>
-                  <a:srgbClr val="F8FAFC"/>
-                </a:solidFill>
-                <a:latin typeface="Segoe UI"/>
-              </a:defRPr>
-            </a:pPr>
-            <a:r>
-              <a:t>Exploiter uniquement le traitement automatique du langage naturel (NLP).</a:t>
+              </a:defRPr>
+            </a:pPr>
+            <a:r>
+              <a:t>Double Objectif Business :</a:t>
+            </a:r>
+          </a:p>
+          <a:p>
+            <a:pPr>
+              <a:defRPr sz="1000">
+                <a:solidFill>
+                  <a:srgbClr val="94A3B8"/>
+                </a:solidFill>
+              </a:defRPr>
+            </a:pPr>
+            <a:r>
+              <a:t>Augmenter le panier moyen par le cross-selling et fluidifier le parcours d'achat client sur mobile et desktop.</a:t>
             </a:r>
           </a:p>
         </p:txBody>
@@ -4180,7 +4284,7 @@
           <a:noFill/>
         </p:spPr>
         <p:txBody>
-          <a:bodyPr wrap="square">
+          <a:bodyPr wrap="square" lIns="0" tIns="0" rIns="0" bIns="0">
             <a:spAutoFit/>
           </a:bodyPr>
           <a:lstStyle/>
@@ -4188,7 +4292,7 @@
             <a:pPr>
               <a:defRPr sz="1100" b="1">
                 <a:solidFill>
-                  <a:srgbClr val="F43F5E"/>
+                  <a:srgbClr val="F97316"/>
                 </a:solidFill>
                 <a:latin typeface="Segoe UI"/>
               </a:defRPr>
@@ -4216,13 +4320,13 @@
           <a:noFill/>
         </p:spPr>
         <p:txBody>
-          <a:bodyPr wrap="square">
+          <a:bodyPr wrap="square" lIns="0" tIns="0" rIns="0" bIns="0">
             <a:spAutoFit/>
           </a:bodyPr>
           <a:lstStyle/>
           <a:p>
             <a:pPr>
-              <a:defRPr sz="2100" b="1">
+              <a:defRPr sz="1800" b="1">
                 <a:solidFill>
                   <a:srgbClr val="F8FAFC"/>
                 </a:solidFill>
@@ -4252,7 +4356,7 @@
           <a:noFill/>
         </p:spPr>
         <p:txBody>
-          <a:bodyPr wrap="square">
+          <a:bodyPr wrap="none" lIns="0" tIns="0" rIns="0" bIns="0">
             <a:spAutoFit/>
           </a:bodyPr>
           <a:lstStyle/>
@@ -4288,21 +4392,21 @@
           <a:noFill/>
         </p:spPr>
         <p:txBody>
-          <a:bodyPr wrap="square">
+          <a:bodyPr wrap="none" lIns="0" tIns="0" rIns="0" bIns="0">
             <a:spAutoFit/>
           </a:bodyPr>
           <a:lstStyle/>
           <a:p>
             <a:pPr>
-              <a:defRPr sz="1000">
-                <a:solidFill>
-                  <a:srgbClr val="64748B"/>
+              <a:defRPr sz="950">
+                <a:solidFill>
+                  <a:srgbClr val="94A3B8"/>
                 </a:solidFill>
                 <a:latin typeface="Segoe UI"/>
               </a:defRPr>
             </a:pPr>
             <a:r>
-              <a:t>Christopher GILLERON  |  The North Face E-Commerce (ML Non Supervisé &amp; NLP)  |  Certification CDSD Bloc 3</a:t>
+              <a:t>Christopher GILLERON  |  The North Face E-Commerce (ML Non Supervisé &amp; NLP)  |  Certification CDSD Bloc 3  |  Temps alloué : 5 min</a:t>
             </a:r>
           </a:p>
         </p:txBody>
@@ -4316,7 +4420,7 @@
         <p:spPr>
           <a:xfrm>
             <a:off x="731520" y="1371600"/>
-            <a:ext cx="5212080" cy="4754880"/>
+            <a:ext cx="5212080" cy="4846320"/>
           </a:xfrm>
           <a:prstGeom prst="roundRect">
             <a:avLst/>
@@ -4324,7 +4428,7 @@
           <a:solidFill>
             <a:srgbClr val="1E293B"/>
           </a:solidFill>
-          <a:ln w="19050">
+          <a:ln w="12700">
             <a:solidFill>
               <a:srgbClr val="334155"/>
             </a:solidFill>
@@ -4360,8 +4464,8 @@
         </p:nvSpPr>
         <p:spPr>
           <a:xfrm>
-            <a:off x="914400" y="1536192"/>
-            <a:ext cx="4846320" cy="365760"/>
+            <a:off x="914400" y="1554480"/>
+            <a:ext cx="4846320" cy="4480560"/>
           </a:xfrm>
           <a:prstGeom prst="rect">
             <a:avLst/>
@@ -4375,47 +4479,25 @@
           <a:lstStyle/>
           <a:p>
             <a:pPr>
-              <a:defRPr sz="1100" b="1">
-                <a:solidFill>
-                  <a:srgbClr val="F43F5E"/>
-                </a:solidFill>
-                <a:latin typeface="Segoe UI"/>
+              <a:defRPr sz="1400" b="1">
+                <a:solidFill>
+                  <a:srgbClr val="F97316"/>
+                </a:solidFill>
               </a:defRPr>
             </a:pPr>
             <a:r>
               <a:t>01 | NETTOYAGE LINGUISTIQUE (SPACY)</a:t>
             </a:r>
           </a:p>
-        </p:txBody>
-      </p:sp>
-      <p:sp>
-        <p:nvSpPr>
-          <p:cNvPr id="9" name="TextBox 8"/>
-          <p:cNvSpPr txBox="1"/>
-          <p:nvPr/>
-        </p:nvSpPr>
-        <p:spPr>
-          <a:xfrm>
-            <a:off x="914400" y="1920240"/>
-            <a:ext cx="4846320" cy="4023360"/>
-          </a:xfrm>
-          <a:prstGeom prst="rect">
-            <a:avLst/>
-          </a:prstGeom>
-          <a:noFill/>
-        </p:spPr>
-        <p:txBody>
-          <a:bodyPr wrap="square">
-            <a:spAutoFit/>
-          </a:bodyPr>
-          <a:lstStyle/>
-          <a:p>
-            <a:pPr>
-              <a:defRPr sz="1000" b="1">
-                <a:solidFill>
-                  <a:srgbClr val="F43F5E"/>
-                </a:solidFill>
-                <a:latin typeface="Segoe UI"/>
+          <a:p>
+            <a:pPr>
+              <a:spcBef>
+                <a:spcPts val="800"/>
+              </a:spcBef>
+              <a:defRPr b="1" sz="1100">
+                <a:solidFill>
+                  <a:srgbClr val="F8FAFC"/>
+                </a:solidFill>
               </a:defRPr>
             </a:pPr>
             <a:r>
@@ -4424,24 +4506,25 @@
           </a:p>
           <a:p>
             <a:pPr>
-              <a:defRPr sz="900">
+              <a:defRPr sz="1000">
+                <a:solidFill>
+                  <a:srgbClr val="94A3B8"/>
+                </a:solidFill>
+              </a:defRPr>
+            </a:pPr>
+            <a:r>
+              <a:t>Tokenisation robuste, détection des frontières de mots et filtrage strict des caractères non alphabétiques et ponctuations.</a:t>
+            </a:r>
+          </a:p>
+          <a:p>
+            <a:pPr>
+              <a:spcBef>
+                <a:spcPts val="800"/>
+              </a:spcBef>
+              <a:defRPr b="1" sz="1100">
                 <a:solidFill>
                   <a:srgbClr val="F8FAFC"/>
                 </a:solidFill>
-                <a:latin typeface="Segoe UI"/>
-              </a:defRPr>
-            </a:pPr>
-            <a:r>
-              <a:t>Tokenisation robuste et filtrage des caractères non alphabétiques.</a:t>
-            </a:r>
-          </a:p>
-          <a:p>
-            <a:pPr>
-              <a:defRPr sz="1000" b="1">
-                <a:solidFill>
-                  <a:srgbClr val="F43F5E"/>
-                </a:solidFill>
-                <a:latin typeface="Segoe UI"/>
               </a:defRPr>
             </a:pPr>
             <a:r>
@@ -4450,24 +4533,25 @@
           </a:p>
           <a:p>
             <a:pPr>
-              <a:defRPr sz="900">
+              <a:defRPr sz="1000">
+                <a:solidFill>
+                  <a:srgbClr val="94A3B8"/>
+                </a:solidFill>
+              </a:defRPr>
+            </a:pPr>
+            <a:r>
+              <a:t>Réduction des formes fléchies au radical canonique (ex: 'running', 'runs' → 'run' ; 'jackets' → 'jacket').</a:t>
+            </a:r>
+          </a:p>
+          <a:p>
+            <a:pPr>
+              <a:spcBef>
+                <a:spcPts val="800"/>
+              </a:spcBef>
+              <a:defRPr b="1" sz="1100">
                 <a:solidFill>
                   <a:srgbClr val="F8FAFC"/>
                 </a:solidFill>
-                <a:latin typeface="Segoe UI"/>
-              </a:defRPr>
-            </a:pPr>
-            <a:r>
-              <a:t>Réduction des formes fléchies au radical canonique (ex: 'running', 'runs' $_x000D_ightarrow$ 'run' ; 'jackets' $_x000D_ightarrow$ 'jacket').</a:t>
-            </a:r>
-          </a:p>
-          <a:p>
-            <a:pPr>
-              <a:defRPr sz="1000" b="1">
-                <a:solidFill>
-                  <a:srgbClr val="F43F5E"/>
-                </a:solidFill>
-                <a:latin typeface="Segoe UI"/>
               </a:defRPr>
             </a:pPr>
             <a:r>
@@ -4476,55 +4560,55 @@
           </a:p>
           <a:p>
             <a:pPr>
-              <a:defRPr sz="900">
+              <a:defRPr sz="1000">
+                <a:solidFill>
+                  <a:srgbClr val="94A3B8"/>
+                </a:solidFill>
+              </a:defRPr>
+            </a:pPr>
+            <a:r>
+              <a:t>Suppression des termes parasites promotionnels omniprésents : 'north', 'face', 'feature', 'design', 'include', 'wash', 'fabric'.</a:t>
+            </a:r>
+          </a:p>
+          <a:p>
+            <a:pPr>
+              <a:spcBef>
+                <a:spcPts val="800"/>
+              </a:spcBef>
+              <a:defRPr b="1" sz="1100">
                 <a:solidFill>
                   <a:srgbClr val="F8FAFC"/>
                 </a:solidFill>
-                <a:latin typeface="Segoe UI"/>
-              </a:defRPr>
-            </a:pPr>
-            <a:r>
-              <a:t>Suppression des termes parasites promotionnels omniprésents : 'north', 'face', 'feature', 'design', 'include', 'wash'.</a:t>
-            </a:r>
-          </a:p>
-          <a:p>
-            <a:pPr>
-              <a:defRPr sz="1000" b="1">
-                <a:solidFill>
-                  <a:srgbClr val="F43F5E"/>
-                </a:solidFill>
-                <a:latin typeface="Segoe UI"/>
-              </a:defRPr>
-            </a:pPr>
-            <a:r>
-              <a:t>Impact :</a:t>
-            </a:r>
-          </a:p>
-          <a:p>
-            <a:pPr>
-              <a:defRPr sz="900">
-                <a:solidFill>
-                  <a:srgbClr val="F8FAFC"/>
-                </a:solidFill>
-                <a:latin typeface="Segoe UI"/>
-              </a:defRPr>
-            </a:pPr>
-            <a:r>
-              <a:t>Isole les véritables descripteurs techniques (imperméabilité, respirabilité, duvet, stretch).</a:t>
-            </a:r>
-          </a:p>
-        </p:txBody>
-      </p:sp>
-      <p:sp>
-        <p:nvSpPr>
-          <p:cNvPr id="10" name="Rounded Rectangle 9"/>
+              </a:defRPr>
+            </a:pPr>
+            <a:r>
+              <a:t>Impact Qualitatif :</a:t>
+            </a:r>
+          </a:p>
+          <a:p>
+            <a:pPr>
+              <a:defRPr sz="1000">
+                <a:solidFill>
+                  <a:srgbClr val="94A3B8"/>
+                </a:solidFill>
+              </a:defRPr>
+            </a:pPr>
+            <a:r>
+              <a:t>Isole les véritables descripteurs techniques à haute valeur différentiatrice (imperméabilité, respirabilité, duvet d'oie, stretch, polaire).</a:t>
+            </a:r>
+          </a:p>
+        </p:txBody>
+      </p:sp>
+      <p:sp>
+        <p:nvSpPr>
+          <p:cNvPr id="9" name="Rounded Rectangle 8"/>
           <p:cNvSpPr/>
           <p:nvPr/>
         </p:nvSpPr>
         <p:spPr>
           <a:xfrm>
             <a:off x="6217920" y="1371600"/>
-            <a:ext cx="5242255" cy="4754880"/>
+            <a:ext cx="5242255" cy="4846320"/>
           </a:xfrm>
           <a:prstGeom prst="roundRect">
             <a:avLst/>
@@ -4532,7 +4616,7 @@
           <a:solidFill>
             <a:srgbClr val="1E293B"/>
           </a:solidFill>
-          <a:ln w="19050">
+          <a:ln w="12700">
             <a:solidFill>
               <a:srgbClr val="334155"/>
             </a:solidFill>
@@ -4562,14 +4646,14 @@
       </p:sp>
       <p:sp>
         <p:nvSpPr>
-          <p:cNvPr id="11" name="TextBox 10"/>
+          <p:cNvPr id="10" name="TextBox 9"/>
           <p:cNvSpPr txBox="1"/>
           <p:nvPr/>
         </p:nvSpPr>
         <p:spPr>
           <a:xfrm>
-            <a:off x="6400800" y="1536192"/>
-            <a:ext cx="4876495" cy="365760"/>
+            <a:off x="6400800" y="1554480"/>
+            <a:ext cx="4876495" cy="4480560"/>
           </a:xfrm>
           <a:prstGeom prst="rect">
             <a:avLst/>
@@ -4583,47 +4667,25 @@
           <a:lstStyle/>
           <a:p>
             <a:pPr>
-              <a:defRPr sz="1100" b="1">
-                <a:solidFill>
-                  <a:srgbClr val="F43F5E"/>
-                </a:solidFill>
-                <a:latin typeface="Segoe UI"/>
+              <a:defRPr sz="1400" b="1">
+                <a:solidFill>
+                  <a:srgbClr val="F97316"/>
+                </a:solidFill>
               </a:defRPr>
             </a:pPr>
             <a:r>
               <a:t>02 | VECTORISATION TF-IDF (SCIKIT-LEARN)</a:t>
             </a:r>
           </a:p>
-        </p:txBody>
-      </p:sp>
-      <p:sp>
-        <p:nvSpPr>
-          <p:cNvPr id="12" name="TextBox 11"/>
-          <p:cNvSpPr txBox="1"/>
-          <p:nvPr/>
-        </p:nvSpPr>
-        <p:spPr>
-          <a:xfrm>
-            <a:off x="6400800" y="1920240"/>
-            <a:ext cx="4876495" cy="4023360"/>
-          </a:xfrm>
-          <a:prstGeom prst="rect">
-            <a:avLst/>
-          </a:prstGeom>
-          <a:noFill/>
-        </p:spPr>
-        <p:txBody>
-          <a:bodyPr wrap="square">
-            <a:spAutoFit/>
-          </a:bodyPr>
-          <a:lstStyle/>
-          <a:p>
-            <a:pPr>
-              <a:defRPr sz="1000" b="1">
-                <a:solidFill>
-                  <a:srgbClr val="F43F5E"/>
-                </a:solidFill>
-                <a:latin typeface="Segoe UI"/>
+          <a:p>
+            <a:pPr>
+              <a:spcBef>
+                <a:spcPts val="800"/>
+              </a:spcBef>
+              <a:defRPr b="1" sz="1100">
+                <a:solidFill>
+                  <a:srgbClr val="F8FAFC"/>
+                </a:solidFill>
               </a:defRPr>
             </a:pPr>
             <a:r>
@@ -4632,24 +4694,25 @@
           </a:p>
           <a:p>
             <a:pPr>
-              <a:defRPr sz="900">
+              <a:defRPr sz="1000">
+                <a:solidFill>
+                  <a:srgbClr val="94A3B8"/>
+                </a:solidFill>
+              </a:defRPr>
+            </a:pPr>
+            <a:r>
+              <a:t>Pondération pénalisant les mots fréquents dans tout le catalogue et sur-valorisant les spécificités produit.</a:t>
+            </a:r>
+          </a:p>
+          <a:p>
+            <a:pPr>
+              <a:spcBef>
+                <a:spcPts val="800"/>
+              </a:spcBef>
+              <a:defRPr b="1" sz="1100">
                 <a:solidFill>
                   <a:srgbClr val="F8FAFC"/>
                 </a:solidFill>
-                <a:latin typeface="Segoe UI"/>
-              </a:defRPr>
-            </a:pPr>
-            <a:r>
-              <a:t>Pondération pénalisant les mots fréquents dans tout le catalogue et sur-valorisant les spécificités produit.</a:t>
-            </a:r>
-          </a:p>
-          <a:p>
-            <a:pPr>
-              <a:defRPr sz="1000" b="1">
-                <a:solidFill>
-                  <a:srgbClr val="F43F5E"/>
-                </a:solidFill>
-                <a:latin typeface="Segoe UI"/>
               </a:defRPr>
             </a:pPr>
             <a:r>
@@ -4658,67 +4721,68 @@
           </a:p>
           <a:p>
             <a:pPr>
-              <a:defRPr sz="900">
+              <a:defRPr sz="1000">
+                <a:solidFill>
+                  <a:srgbClr val="94A3B8"/>
+                </a:solidFill>
+              </a:defRPr>
+            </a:pPr>
+            <a:r>
+              <a:t>500 produits × 1 033 dimensions lexicales épurées sans dispersion inutile.</a:t>
+            </a:r>
+          </a:p>
+          <a:p>
+            <a:pPr>
+              <a:spcBef>
+                <a:spcPts val="800"/>
+              </a:spcBef>
+              <a:defRPr b="1" sz="1100">
                 <a:solidFill>
                   <a:srgbClr val="F8FAFC"/>
                 </a:solidFill>
-                <a:latin typeface="Segoe UI"/>
-              </a:defRPr>
-            </a:pPr>
-            <a:r>
-              <a:t>500 produits $	imes$ 1 033 dimensions lexicales épurées.</a:t>
-            </a:r>
-          </a:p>
-          <a:p>
-            <a:pPr>
-              <a:defRPr sz="1000" b="1">
-                <a:solidFill>
-                  <a:srgbClr val="F43F5E"/>
-                </a:solidFill>
-                <a:latin typeface="Segoe UI"/>
-              </a:defRPr>
-            </a:pPr>
-            <a:r>
-              <a:t>Normalisation L2 :</a:t>
-            </a:r>
-          </a:p>
-          <a:p>
-            <a:pPr>
-              <a:defRPr sz="900">
+              </a:defRPr>
+            </a:pPr>
+            <a:r>
+              <a:t>Normalisation L2 Unitaire :</a:t>
+            </a:r>
+          </a:p>
+          <a:p>
+            <a:pPr>
+              <a:defRPr sz="1000">
+                <a:solidFill>
+                  <a:srgbClr val="94A3B8"/>
+                </a:solidFill>
+              </a:defRPr>
+            </a:pPr>
+            <a:r>
+              <a:t>Chaque vecteur produit possède une norme égale à 1, permettant une comparaison angulaire optimale via la distance cosinus.</a:t>
+            </a:r>
+          </a:p>
+          <a:p>
+            <a:pPr>
+              <a:spcBef>
+                <a:spcPts val="800"/>
+              </a:spcBef>
+              <a:defRPr b="1" sz="1100">
                 <a:solidFill>
                   <a:srgbClr val="F8FAFC"/>
                 </a:solidFill>
-                <a:latin typeface="Segoe UI"/>
-              </a:defRPr>
-            </a:pPr>
-            <a:r>
-              <a:t>Chaque vecteur produit possède une norme unitaire, permettant une comparaison angulaire optimale via la distance cosinus.</a:t>
-            </a:r>
-          </a:p>
-          <a:p>
-            <a:pPr>
-              <a:defRPr sz="1000" b="1">
-                <a:solidFill>
-                  <a:srgbClr val="F43F5E"/>
-                </a:solidFill>
-                <a:latin typeface="Segoe UI"/>
-              </a:defRPr>
-            </a:pPr>
-            <a:r>
-              <a:t>Livrable :</a:t>
-            </a:r>
-          </a:p>
-          <a:p>
-            <a:pPr>
-              <a:defRPr sz="900">
-                <a:solidFill>
-                  <a:srgbClr val="F8FAFC"/>
-                </a:solidFill>
-                <a:latin typeface="Segoe UI"/>
-              </a:defRPr>
-            </a:pPr>
-            <a:r>
-              <a:t>Matrice tfidf_matrix prête pour les deux algorithmes non supervisés (DBSCAN et LSA).</a:t>
+              </a:defRPr>
+            </a:pPr>
+            <a:r>
+              <a:t>Livrable Structurant :</a:t>
+            </a:r>
+          </a:p>
+          <a:p>
+            <a:pPr>
+              <a:defRPr sz="1000">
+                <a:solidFill>
+                  <a:srgbClr val="94A3B8"/>
+                </a:solidFill>
+              </a:defRPr>
+            </a:pPr>
+            <a:r>
+              <a:t>Matrice 'tfidf_matrix' prête pour alimenter à la fois le clustering DBSCAN et la décomposition thématique LSA.</a:t>
             </a:r>
           </a:p>
         </p:txBody>
@@ -4801,7 +4865,7 @@
           <a:noFill/>
         </p:spPr>
         <p:txBody>
-          <a:bodyPr wrap="square">
+          <a:bodyPr wrap="square" lIns="0" tIns="0" rIns="0" bIns="0">
             <a:spAutoFit/>
           </a:bodyPr>
           <a:lstStyle/>
@@ -4809,7 +4873,7 @@
             <a:pPr>
               <a:defRPr sz="1100" b="1">
                 <a:solidFill>
-                  <a:srgbClr val="F43F5E"/>
+                  <a:srgbClr val="F97316"/>
                 </a:solidFill>
                 <a:latin typeface="Segoe UI"/>
               </a:defRPr>
@@ -4837,13 +4901,13 @@
           <a:noFill/>
         </p:spPr>
         <p:txBody>
-          <a:bodyPr wrap="square">
+          <a:bodyPr wrap="square" lIns="0" tIns="0" rIns="0" bIns="0">
             <a:spAutoFit/>
           </a:bodyPr>
           <a:lstStyle/>
           <a:p>
             <a:pPr>
-              <a:defRPr sz="2100" b="1">
+              <a:defRPr sz="1800" b="1">
                 <a:solidFill>
                   <a:srgbClr val="F8FAFC"/>
                 </a:solidFill>
@@ -4873,7 +4937,7 @@
           <a:noFill/>
         </p:spPr>
         <p:txBody>
-          <a:bodyPr wrap="square">
+          <a:bodyPr wrap="none" lIns="0" tIns="0" rIns="0" bIns="0">
             <a:spAutoFit/>
           </a:bodyPr>
           <a:lstStyle/>
@@ -4909,21 +4973,21 @@
           <a:noFill/>
         </p:spPr>
         <p:txBody>
-          <a:bodyPr wrap="square">
+          <a:bodyPr wrap="none" lIns="0" tIns="0" rIns="0" bIns="0">
             <a:spAutoFit/>
           </a:bodyPr>
           <a:lstStyle/>
           <a:p>
             <a:pPr>
-              <a:defRPr sz="1000">
-                <a:solidFill>
-                  <a:srgbClr val="64748B"/>
+              <a:defRPr sz="950">
+                <a:solidFill>
+                  <a:srgbClr val="94A3B8"/>
                 </a:solidFill>
                 <a:latin typeface="Segoe UI"/>
               </a:defRPr>
             </a:pPr>
             <a:r>
-              <a:t>Christopher GILLERON  |  The North Face E-Commerce (ML Non Supervisé &amp; NLP)  |  Certification CDSD Bloc 3</a:t>
+              <a:t>Christopher GILLERON  |  The North Face E-Commerce (ML Non Supervisé &amp; NLP)  |  Certification CDSD Bloc 3  |  Temps alloué : 5 min</a:t>
             </a:r>
           </a:p>
         </p:txBody>
@@ -4937,7 +5001,7 @@
         <p:spPr>
           <a:xfrm>
             <a:off x="731520" y="1371600"/>
-            <a:ext cx="5212080" cy="4754880"/>
+            <a:ext cx="5212080" cy="4846320"/>
           </a:xfrm>
           <a:prstGeom prst="roundRect">
             <a:avLst/>
@@ -4945,7 +5009,7 @@
           <a:solidFill>
             <a:srgbClr val="1E293B"/>
           </a:solidFill>
-          <a:ln w="19050">
+          <a:ln w="12700">
             <a:solidFill>
               <a:srgbClr val="334155"/>
             </a:solidFill>
@@ -4981,8 +5045,8 @@
         </p:nvSpPr>
         <p:spPr>
           <a:xfrm>
-            <a:off x="914400" y="1536192"/>
-            <a:ext cx="4846320" cy="365760"/>
+            <a:off x="914400" y="1554480"/>
+            <a:ext cx="4846320" cy="4480560"/>
           </a:xfrm>
           <a:prstGeom prst="rect">
             <a:avLst/>
@@ -4996,47 +5060,25 @@
           <a:lstStyle/>
           <a:p>
             <a:pPr>
-              <a:defRPr sz="1100" b="1">
-                <a:solidFill>
-                  <a:srgbClr val="F43F5E"/>
-                </a:solidFill>
-                <a:latin typeface="Segoe UI"/>
+              <a:defRPr sz="1300" b="1">
+                <a:solidFill>
+                  <a:srgbClr val="F97316"/>
+                </a:solidFill>
               </a:defRPr>
             </a:pPr>
             <a:r>
               <a:t>CALIBRATION DBSCAN (COSINE METRIC)</a:t>
             </a:r>
           </a:p>
-        </p:txBody>
-      </p:sp>
-      <p:sp>
-        <p:nvSpPr>
-          <p:cNvPr id="9" name="TextBox 8"/>
-          <p:cNvSpPr txBox="1"/>
-          <p:nvPr/>
-        </p:nvSpPr>
-        <p:spPr>
-          <a:xfrm>
-            <a:off x="914400" y="1920240"/>
-            <a:ext cx="4846320" cy="4023360"/>
-          </a:xfrm>
-          <a:prstGeom prst="rect">
-            <a:avLst/>
-          </a:prstGeom>
-          <a:noFill/>
-        </p:spPr>
-        <p:txBody>
-          <a:bodyPr wrap="square">
-            <a:spAutoFit/>
-          </a:bodyPr>
-          <a:lstStyle/>
-          <a:p>
-            <a:pPr>
-              <a:defRPr sz="1000" b="1">
-                <a:solidFill>
-                  <a:srgbClr val="F43F5E"/>
-                </a:solidFill>
-                <a:latin typeface="Segoe UI"/>
+          <a:p>
+            <a:pPr>
+              <a:spcBef>
+                <a:spcPts val="800"/>
+              </a:spcBef>
+              <a:defRPr b="1" sz="1050">
+                <a:solidFill>
+                  <a:srgbClr val="F8FAFC"/>
+                </a:solidFill>
               </a:defRPr>
             </a:pPr>
             <a:r>
@@ -5045,24 +5087,25 @@
           </a:p>
           <a:p>
             <a:pPr>
-              <a:defRPr sz="900">
+              <a:defRPr sz="950">
+                <a:solidFill>
+                  <a:srgbClr val="94A3B8"/>
+                </a:solidFill>
+              </a:defRPr>
+            </a:pPr>
+            <a:r>
+              <a:t>En espace textuel de dimension 1 033, la distance euclidienne souffre du fléau de la dimension. La métrique cosinus mesure l'angle sémantique et neutralise la longueur des textes.</a:t>
+            </a:r>
+          </a:p>
+          <a:p>
+            <a:pPr>
+              <a:spcBef>
+                <a:spcPts val="800"/>
+              </a:spcBef>
+              <a:defRPr b="1" sz="1050">
                 <a:solidFill>
                   <a:srgbClr val="F8FAFC"/>
                 </a:solidFill>
-                <a:latin typeface="Segoe UI"/>
-              </a:defRPr>
-            </a:pPr>
-            <a:r>
-              <a:t>En espace de dimension 1 033, la distance cosinus mesure l'orientation sémantique et neutralise la longueur des textes.</a:t>
-            </a:r>
-          </a:p>
-          <a:p>
-            <a:pPr>
-              <a:defRPr sz="1000" b="1">
-                <a:solidFill>
-                  <a:srgbClr val="F43F5E"/>
-                </a:solidFill>
-                <a:latin typeface="Segoe UI"/>
               </a:defRPr>
             </a:pPr>
             <a:r>
@@ -5071,28 +5114,29 @@
           </a:p>
           <a:p>
             <a:pPr>
-              <a:defRPr sz="900">
+              <a:defRPr sz="950">
+                <a:solidFill>
+                  <a:srgbClr val="94A3B8"/>
+                </a:solidFill>
+              </a:defRPr>
+            </a:pPr>
+            <a:r>
+              <a:t>• eps = 0.35 (rayon maximal d'affinité sémantique entre deux descriptions).</a:t>
+            </a:r>
+            <a:br/>
+            <a:r>
+              <a:t>• min_samples = 5 (seuil de densité minimale pour constituer un cœur de cluster).</a:t>
+            </a:r>
+          </a:p>
+          <a:p>
+            <a:pPr>
+              <a:spcBef>
+                <a:spcPts val="800"/>
+              </a:spcBef>
+              <a:defRPr b="1" sz="1050">
                 <a:solidFill>
                   <a:srgbClr val="F8FAFC"/>
                 </a:solidFill>
-                <a:latin typeface="Segoe UI"/>
-              </a:defRPr>
-            </a:pPr>
-            <a:r>
-              <a:t>• eps = 0.35 (rayon maximal d'affinité sémantique).</a:t>
-            </a:r>
-            <a:br/>
-            <a:r>
-              <a:t>• min_samples = 5 (densité minimale pour former un groupe).</a:t>
-            </a:r>
-          </a:p>
-          <a:p>
-            <a:pPr>
-              <a:defRPr sz="1000" b="1">
-                <a:solidFill>
-                  <a:srgbClr val="F43F5E"/>
-                </a:solidFill>
-                <a:latin typeface="Segoe UI"/>
               </a:defRPr>
             </a:pPr>
             <a:r>
@@ -5101,24 +5145,25 @@
           </a:p>
           <a:p>
             <a:pPr>
-              <a:defRPr sz="900">
+              <a:defRPr sz="950">
+                <a:solidFill>
+                  <a:srgbClr val="94A3B8"/>
+                </a:solidFill>
+              </a:defRPr>
+            </a:pPr>
+            <a:r>
+              <a:t>Respecte parfaitement l'objectif du brief (10 à 20 clusters avec peu de dispersion).</a:t>
+            </a:r>
+          </a:p>
+          <a:p>
+            <a:pPr>
+              <a:spcBef>
+                <a:spcPts val="800"/>
+              </a:spcBef>
+              <a:defRPr b="1" sz="1050">
                 <a:solidFill>
                   <a:srgbClr val="F8FAFC"/>
                 </a:solidFill>
-                <a:latin typeface="Segoe UI"/>
-              </a:defRPr>
-            </a:pPr>
-            <a:r>
-              <a:t>Respecte parfaitement l'objectif du brief (10 à 20 clusters avec peu de dispersion).</a:t>
-            </a:r>
-          </a:p>
-          <a:p>
-            <a:pPr>
-              <a:defRPr sz="1000" b="1">
-                <a:solidFill>
-                  <a:srgbClr val="F43F5E"/>
-                </a:solidFill>
-                <a:latin typeface="Segoe UI"/>
               </a:defRPr>
             </a:pPr>
             <a:r>
@@ -5127,29 +5172,28 @@
           </a:p>
           <a:p>
             <a:pPr>
-              <a:defRPr sz="900">
-                <a:solidFill>
-                  <a:srgbClr val="F8FAFC"/>
-                </a:solidFill>
-                <a:latin typeface="Segoe UI"/>
-              </a:defRPr>
-            </a:pPr>
-            <a:r>
-              <a:t>Les articles trop singuliers sont rejetés dans le bruit sans polluer la cohérence des clusters denses.</a:t>
-            </a:r>
-          </a:p>
-        </p:txBody>
-      </p:sp>
-      <p:sp>
-        <p:nvSpPr>
-          <p:cNvPr id="10" name="Rounded Rectangle 9"/>
+              <a:defRPr sz="950">
+                <a:solidFill>
+                  <a:srgbClr val="94A3B8"/>
+                </a:solidFill>
+              </a:defRPr>
+            </a:pPr>
+            <a:r>
+              <a:t>Les articles trop singuliers sont rejetés dans le bruit (-1) sans polluer la cohérence des clusters denses.</a:t>
+            </a:r>
+          </a:p>
+        </p:txBody>
+      </p:sp>
+      <p:sp>
+        <p:nvSpPr>
+          <p:cNvPr id="9" name="Rounded Rectangle 8"/>
           <p:cNvSpPr/>
           <p:nvPr/>
         </p:nvSpPr>
         <p:spPr>
           <a:xfrm>
             <a:off x="6217920" y="1371600"/>
-            <a:ext cx="5242255" cy="4754880"/>
+            <a:ext cx="5242255" cy="4846320"/>
           </a:xfrm>
           <a:prstGeom prst="roundRect">
             <a:avLst/>
@@ -5157,7 +5201,7 @@
           <a:solidFill>
             <a:srgbClr val="1E293B"/>
           </a:solidFill>
-          <a:ln w="19050">
+          <a:ln w="12700">
             <a:solidFill>
               <a:srgbClr val="334155"/>
             </a:solidFill>
@@ -5187,14 +5231,14 @@
       </p:sp>
       <p:sp>
         <p:nvSpPr>
-          <p:cNvPr id="11" name="TextBox 10"/>
+          <p:cNvPr id="10" name="TextBox 9"/>
           <p:cNvSpPr txBox="1"/>
           <p:nvPr/>
         </p:nvSpPr>
         <p:spPr>
           <a:xfrm>
-            <a:off x="6400800" y="1536192"/>
-            <a:ext cx="4876495" cy="365760"/>
+            <a:off x="6400800" y="1554480"/>
+            <a:ext cx="4876495" cy="4480560"/>
           </a:xfrm>
           <a:prstGeom prst="rect">
             <a:avLst/>
@@ -5208,638 +5252,234 @@
           <a:lstStyle/>
           <a:p>
             <a:pPr>
-              <a:defRPr sz="1100" b="1">
-                <a:solidFill>
-                  <a:srgbClr val="F43F5E"/>
-                </a:solidFill>
-                <a:latin typeface="Segoe UI"/>
+              <a:defRPr sz="1300" b="1">
+                <a:solidFill>
+                  <a:srgbClr val="F97316"/>
+                </a:solidFill>
               </a:defRPr>
             </a:pPr>
             <a:r>
               <a:t>RÉPARTITION DES PRINCIPAUX CLUSTERS</a:t>
             </a:r>
           </a:p>
-        </p:txBody>
-      </p:sp>
-      <p:graphicFrame>
-        <p:nvGraphicFramePr>
-          <p:cNvPr id="12" name="Table 11"/>
-          <p:cNvGraphicFramePr>
-            <a:graphicFrameLocks noGrp="1"/>
-          </p:cNvGraphicFramePr>
-          <p:nvPr/>
-        </p:nvGraphicFramePr>
-        <p:xfrm>
-          <a:off x="6492240" y="1920240"/>
-          <a:ext cx="4693615" cy="3931920"/>
-        </p:xfrm>
-        <a:graphic>
-          <a:graphicData uri="http://schemas.openxmlformats.org/drawingml/2006/table">
-            <a:tbl>
-              <a:tblPr firstRow="1" bandRow="1">
-                <a:tableStyleId>{5C22544A-7EE6-4342-B048-85BDC9FD1C3A}</a:tableStyleId>
-              </a:tblPr>
-              <a:tblGrid>
-                <a:gridCol w="1564538"/>
-                <a:gridCol w="1564538"/>
-                <a:gridCol w="1564539"/>
-              </a:tblGrid>
-              <a:tr h="491490">
-                <a:tc>
-                  <a:txBody>
-                    <a:bodyPr/>
-                    <a:lstStyle/>
-                    <a:p>
-                      <a:pPr>
-                        <a:defRPr sz="1000" b="1">
-                          <a:solidFill>
-                            <a:srgbClr val="F43F5E"/>
-                          </a:solidFill>
-                          <a:latin typeface="Segoe UI"/>
-                        </a:defRPr>
-                      </a:pPr>
-                      <a:r>
-                        <a:t>Cluster ID</a:t>
-                      </a:r>
-                    </a:p>
-                  </a:txBody>
-                  <a:tcPr>
-                    <a:solidFill>
-                      <a:srgbClr val="0F172A"/>
-                    </a:solidFill>
-                  </a:tcPr>
-                </a:tc>
-                <a:tc>
-                  <a:txBody>
-                    <a:bodyPr/>
-                    <a:lstStyle/>
-                    <a:p>
-                      <a:pPr>
-                        <a:defRPr sz="1000" b="1">
-                          <a:solidFill>
-                            <a:srgbClr val="F43F5E"/>
-                          </a:solidFill>
-                          <a:latin typeface="Segoe UI"/>
-                        </a:defRPr>
-                      </a:pPr>
-                      <a:r>
-                        <a:t>Produits</a:t>
-                      </a:r>
-                    </a:p>
-                  </a:txBody>
-                  <a:tcPr>
-                    <a:solidFill>
-                      <a:srgbClr val="0F172A"/>
-                    </a:solidFill>
-                  </a:tcPr>
-                </a:tc>
-                <a:tc>
-                  <a:txBody>
-                    <a:bodyPr/>
-                    <a:lstStyle/>
-                    <a:p>
-                      <a:pPr>
-                        <a:defRPr sz="1000" b="1">
-                          <a:solidFill>
-                            <a:srgbClr val="F43F5E"/>
-                          </a:solidFill>
-                          <a:latin typeface="Segoe UI"/>
-                        </a:defRPr>
-                      </a:pPr>
-                      <a:r>
-                        <a:t>Thématique Déduite</a:t>
-                      </a:r>
-                    </a:p>
-                  </a:txBody>
-                  <a:tcPr>
-                    <a:solidFill>
-                      <a:srgbClr val="0F172A"/>
-                    </a:solidFill>
-                  </a:tcPr>
-                </a:tc>
-              </a:tr>
-              <a:tr h="491490">
-                <a:tc>
-                  <a:txBody>
-                    <a:bodyPr/>
-                    <a:lstStyle/>
-                    <a:p>
-                      <a:pPr>
-                        <a:defRPr sz="950" b="1">
-                          <a:solidFill>
-                            <a:srgbClr val="F8FAFC"/>
-                          </a:solidFill>
-                          <a:latin typeface="Segoe UI"/>
-                        </a:defRPr>
-                      </a:pPr>
-                      <a:r>
-                        <a:t>Cluster 2</a:t>
-                      </a:r>
-                    </a:p>
-                  </a:txBody>
-                  <a:tcPr>
-                    <a:solidFill>
-                      <a:srgbClr val="18202F"/>
-                    </a:solidFill>
-                  </a:tcPr>
-                </a:tc>
-                <a:tc>
-                  <a:txBody>
-                    <a:bodyPr/>
-                    <a:lstStyle/>
-                    <a:p>
-                      <a:pPr>
-                        <a:defRPr sz="950" b="0">
-                          <a:solidFill>
-                            <a:srgbClr val="F8FAFC"/>
-                          </a:solidFill>
-                          <a:latin typeface="Segoe UI"/>
-                        </a:defRPr>
-                      </a:pPr>
-                      <a:r>
-                        <a:t>53</a:t>
-                      </a:r>
-                    </a:p>
-                  </a:txBody>
-                  <a:tcPr>
-                    <a:solidFill>
-                      <a:srgbClr val="18202F"/>
-                    </a:solidFill>
-                  </a:tcPr>
-                </a:tc>
-                <a:tc>
-                  <a:txBody>
-                    <a:bodyPr/>
-                    <a:lstStyle/>
-                    <a:p>
-                      <a:pPr>
-                        <a:defRPr sz="950" b="0">
-                          <a:solidFill>
-                            <a:srgbClr val="F8FAFC"/>
-                          </a:solidFill>
-                          <a:latin typeface="Segoe UI"/>
-                        </a:defRPr>
-                      </a:pPr>
-                      <a:r>
-                        <a:t>Sous-vêtements &amp; Boxers techniques</a:t>
-                      </a:r>
-                    </a:p>
-                  </a:txBody>
-                  <a:tcPr>
-                    <a:solidFill>
-                      <a:srgbClr val="18202F"/>
-                    </a:solidFill>
-                  </a:tcPr>
-                </a:tc>
-              </a:tr>
-              <a:tr h="491490">
-                <a:tc>
-                  <a:txBody>
-                    <a:bodyPr/>
-                    <a:lstStyle/>
-                    <a:p>
-                      <a:pPr>
-                        <a:defRPr sz="950" b="1">
-                          <a:solidFill>
-                            <a:srgbClr val="F8FAFC"/>
-                          </a:solidFill>
-                          <a:latin typeface="Segoe UI"/>
-                        </a:defRPr>
-                      </a:pPr>
-                      <a:r>
-                        <a:t>Cluster 5</a:t>
-                      </a:r>
-                    </a:p>
-                  </a:txBody>
-                  <a:tcPr>
-                    <a:solidFill>
-                      <a:srgbClr val="1E293B"/>
-                    </a:solidFill>
-                  </a:tcPr>
-                </a:tc>
-                <a:tc>
-                  <a:txBody>
-                    <a:bodyPr/>
-                    <a:lstStyle/>
-                    <a:p>
-                      <a:pPr>
-                        <a:defRPr sz="950" b="0">
-                          <a:solidFill>
-                            <a:srgbClr val="F8FAFC"/>
-                          </a:solidFill>
-                          <a:latin typeface="Segoe UI"/>
-                        </a:defRPr>
-                      </a:pPr>
-                      <a:r>
-                        <a:t>13</a:t>
-                      </a:r>
-                    </a:p>
-                  </a:txBody>
-                  <a:tcPr>
-                    <a:solidFill>
-                      <a:srgbClr val="1E293B"/>
-                    </a:solidFill>
-                  </a:tcPr>
-                </a:tc>
-                <a:tc>
-                  <a:txBody>
-                    <a:bodyPr/>
-                    <a:lstStyle/>
-                    <a:p>
-                      <a:pPr>
-                        <a:defRPr sz="950" b="0">
-                          <a:solidFill>
-                            <a:srgbClr val="F8FAFC"/>
-                          </a:solidFill>
-                          <a:latin typeface="Segoe UI"/>
-                        </a:defRPr>
-                      </a:pPr>
-                      <a:r>
-                        <a:t>Sacs à dos &amp; Équipement trekking</a:t>
-                      </a:r>
-                    </a:p>
-                  </a:txBody>
-                  <a:tcPr>
-                    <a:solidFill>
-                      <a:srgbClr val="1E293B"/>
-                    </a:solidFill>
-                  </a:tcPr>
-                </a:tc>
-              </a:tr>
-              <a:tr h="491490">
-                <a:tc>
-                  <a:txBody>
-                    <a:bodyPr/>
-                    <a:lstStyle/>
-                    <a:p>
-                      <a:pPr>
-                        <a:defRPr sz="950" b="1">
-                          <a:solidFill>
-                            <a:srgbClr val="F8FAFC"/>
-                          </a:solidFill>
-                          <a:latin typeface="Segoe UI"/>
-                        </a:defRPr>
-                      </a:pPr>
-                      <a:r>
-                        <a:t>Cluster 3</a:t>
-                      </a:r>
-                    </a:p>
-                  </a:txBody>
-                  <a:tcPr>
-                    <a:solidFill>
-                      <a:srgbClr val="18202F"/>
-                    </a:solidFill>
-                  </a:tcPr>
-                </a:tc>
-                <a:tc>
-                  <a:txBody>
-                    <a:bodyPr/>
-                    <a:lstStyle/>
-                    <a:p>
-                      <a:pPr>
-                        <a:defRPr sz="950" b="0">
-                          <a:solidFill>
-                            <a:srgbClr val="F8FAFC"/>
-                          </a:solidFill>
-                          <a:latin typeface="Segoe UI"/>
-                        </a:defRPr>
-                      </a:pPr>
-                      <a:r>
-                        <a:t>8</a:t>
-                      </a:r>
-                    </a:p>
-                  </a:txBody>
-                  <a:tcPr>
-                    <a:solidFill>
-                      <a:srgbClr val="18202F"/>
-                    </a:solidFill>
-                  </a:tcPr>
-                </a:tc>
-                <a:tc>
-                  <a:txBody>
-                    <a:bodyPr/>
-                    <a:lstStyle/>
-                    <a:p>
-                      <a:pPr>
-                        <a:defRPr sz="950" b="0">
-                          <a:solidFill>
-                            <a:srgbClr val="F8FAFC"/>
-                          </a:solidFill>
-                          <a:latin typeface="Segoe UI"/>
-                        </a:defRPr>
-                      </a:pPr>
-                      <a:r>
-                        <a:t>T-shirts &amp; Polos respirants</a:t>
-                      </a:r>
-                    </a:p>
-                  </a:txBody>
-                  <a:tcPr>
-                    <a:solidFill>
-                      <a:srgbClr val="18202F"/>
-                    </a:solidFill>
-                  </a:tcPr>
-                </a:tc>
-              </a:tr>
-              <a:tr h="491490">
-                <a:tc>
-                  <a:txBody>
-                    <a:bodyPr/>
-                    <a:lstStyle/>
-                    <a:p>
-                      <a:pPr>
-                        <a:defRPr sz="950" b="1">
-                          <a:solidFill>
-                            <a:srgbClr val="F8FAFC"/>
-                          </a:solidFill>
-                          <a:latin typeface="Segoe UI"/>
-                        </a:defRPr>
-                      </a:pPr>
-                      <a:r>
-                        <a:t>Cluster 0</a:t>
-                      </a:r>
-                    </a:p>
-                  </a:txBody>
-                  <a:tcPr>
-                    <a:solidFill>
-                      <a:srgbClr val="1E293B"/>
-                    </a:solidFill>
-                  </a:tcPr>
-                </a:tc>
-                <a:tc>
-                  <a:txBody>
-                    <a:bodyPr/>
-                    <a:lstStyle/>
-                    <a:p>
-                      <a:pPr>
-                        <a:defRPr sz="950" b="0">
-                          <a:solidFill>
-                            <a:srgbClr val="F8FAFC"/>
-                          </a:solidFill>
-                          <a:latin typeface="Segoe UI"/>
-                        </a:defRPr>
-                      </a:pPr>
-                      <a:r>
-                        <a:t>7</a:t>
-                      </a:r>
-                    </a:p>
-                  </a:txBody>
-                  <a:tcPr>
-                    <a:solidFill>
-                      <a:srgbClr val="1E293B"/>
-                    </a:solidFill>
-                  </a:tcPr>
-                </a:tc>
-                <a:tc>
-                  <a:txBody>
-                    <a:bodyPr/>
-                    <a:lstStyle/>
-                    <a:p>
-                      <a:pPr>
-                        <a:defRPr sz="950" b="0">
-                          <a:solidFill>
-                            <a:srgbClr val="F8FAFC"/>
-                          </a:solidFill>
-                          <a:latin typeface="Segoe UI"/>
-                        </a:defRPr>
-                      </a:pPr>
-                      <a:r>
-                        <a:t>Vestes coupe-vent imperméables</a:t>
-                      </a:r>
-                    </a:p>
-                  </a:txBody>
-                  <a:tcPr>
-                    <a:solidFill>
-                      <a:srgbClr val="1E293B"/>
-                    </a:solidFill>
-                  </a:tcPr>
-                </a:tc>
-              </a:tr>
-              <a:tr h="491490">
-                <a:tc>
-                  <a:txBody>
-                    <a:bodyPr/>
-                    <a:lstStyle/>
-                    <a:p>
-                      <a:pPr>
-                        <a:defRPr sz="950" b="1">
-                          <a:solidFill>
-                            <a:srgbClr val="F8FAFC"/>
-                          </a:solidFill>
-                          <a:latin typeface="Segoe UI"/>
-                        </a:defRPr>
-                      </a:pPr>
-                      <a:r>
-                        <a:t>Cluster 1</a:t>
-                      </a:r>
-                    </a:p>
-                  </a:txBody>
-                  <a:tcPr>
-                    <a:solidFill>
-                      <a:srgbClr val="18202F"/>
-                    </a:solidFill>
-                  </a:tcPr>
-                </a:tc>
-                <a:tc>
-                  <a:txBody>
-                    <a:bodyPr/>
-                    <a:lstStyle/>
-                    <a:p>
-                      <a:pPr>
-                        <a:defRPr sz="950" b="0">
-                          <a:solidFill>
-                            <a:srgbClr val="F8FAFC"/>
-                          </a:solidFill>
-                          <a:latin typeface="Segoe UI"/>
-                        </a:defRPr>
-                      </a:pPr>
-                      <a:r>
-                        <a:t>7</a:t>
-                      </a:r>
-                    </a:p>
-                  </a:txBody>
-                  <a:tcPr>
-                    <a:solidFill>
-                      <a:srgbClr val="18202F"/>
-                    </a:solidFill>
-                  </a:tcPr>
-                </a:tc>
-                <a:tc>
-                  <a:txBody>
-                    <a:bodyPr/>
-                    <a:lstStyle/>
-                    <a:p>
-                      <a:pPr>
-                        <a:defRPr sz="950" b="0">
-                          <a:solidFill>
-                            <a:srgbClr val="F8FAFC"/>
-                          </a:solidFill>
-                          <a:latin typeface="Segoe UI"/>
-                        </a:defRPr>
-                      </a:pPr>
-                      <a:r>
-                        <a:t>Pantalons de randonnée stretch</a:t>
-                      </a:r>
-                    </a:p>
-                  </a:txBody>
-                  <a:tcPr>
-                    <a:solidFill>
-                      <a:srgbClr val="18202F"/>
-                    </a:solidFill>
-                  </a:tcPr>
-                </a:tc>
-              </a:tr>
-              <a:tr h="491490">
-                <a:tc>
-                  <a:txBody>
-                    <a:bodyPr/>
-                    <a:lstStyle/>
-                    <a:p>
-                      <a:pPr>
-                        <a:defRPr sz="950" b="1">
-                          <a:solidFill>
-                            <a:srgbClr val="F8FAFC"/>
-                          </a:solidFill>
-                          <a:latin typeface="Segoe UI"/>
-                        </a:defRPr>
-                      </a:pPr>
-                      <a:r>
-                        <a:t>Cluster 8</a:t>
-                      </a:r>
-                    </a:p>
-                  </a:txBody>
-                  <a:tcPr>
-                    <a:solidFill>
-                      <a:srgbClr val="1E293B"/>
-                    </a:solidFill>
-                  </a:tcPr>
-                </a:tc>
-                <a:tc>
-                  <a:txBody>
-                    <a:bodyPr/>
-                    <a:lstStyle/>
-                    <a:p>
-                      <a:pPr>
-                        <a:defRPr sz="950" b="0">
-                          <a:solidFill>
-                            <a:srgbClr val="F8FAFC"/>
-                          </a:solidFill>
-                          <a:latin typeface="Segoe UI"/>
-                        </a:defRPr>
-                      </a:pPr>
-                      <a:r>
-                        <a:t>7</a:t>
-                      </a:r>
-                    </a:p>
-                  </a:txBody>
-                  <a:tcPr>
-                    <a:solidFill>
-                      <a:srgbClr val="1E293B"/>
-                    </a:solidFill>
-                  </a:tcPr>
-                </a:tc>
-                <a:tc>
-                  <a:txBody>
-                    <a:bodyPr/>
-                    <a:lstStyle/>
-                    <a:p>
-                      <a:pPr>
-                        <a:defRPr sz="950" b="0">
-                          <a:solidFill>
-                            <a:srgbClr val="F8FAFC"/>
-                          </a:solidFill>
-                          <a:latin typeface="Segoe UI"/>
-                        </a:defRPr>
-                      </a:pPr>
-                      <a:r>
-                        <a:t>Polaires &amp; Vestes isolantes</a:t>
-                      </a:r>
-                    </a:p>
-                  </a:txBody>
-                  <a:tcPr>
-                    <a:solidFill>
-                      <a:srgbClr val="1E293B"/>
-                    </a:solidFill>
-                  </a:tcPr>
-                </a:tc>
-              </a:tr>
-              <a:tr h="491490">
-                <a:tc>
-                  <a:txBody>
-                    <a:bodyPr/>
-                    <a:lstStyle/>
-                    <a:p>
-                      <a:pPr>
-                        <a:defRPr sz="950" b="1">
-                          <a:solidFill>
-                            <a:srgbClr val="F8FAFC"/>
-                          </a:solidFill>
-                          <a:latin typeface="Segoe UI"/>
-                        </a:defRPr>
-                      </a:pPr>
-                      <a:r>
-                        <a:t>Cluster 6</a:t>
-                      </a:r>
-                    </a:p>
-                  </a:txBody>
-                  <a:tcPr>
-                    <a:solidFill>
-                      <a:srgbClr val="18202F"/>
-                    </a:solidFill>
-                  </a:tcPr>
-                </a:tc>
-                <a:tc>
-                  <a:txBody>
-                    <a:bodyPr/>
-                    <a:lstStyle/>
-                    <a:p>
-                      <a:pPr>
-                        <a:defRPr sz="950" b="0">
-                          <a:solidFill>
-                            <a:srgbClr val="F8FAFC"/>
-                          </a:solidFill>
-                          <a:latin typeface="Segoe UI"/>
-                        </a:defRPr>
-                      </a:pPr>
-                      <a:r>
-                        <a:t>6</a:t>
-                      </a:r>
-                    </a:p>
-                  </a:txBody>
-                  <a:tcPr>
-                    <a:solidFill>
-                      <a:srgbClr val="18202F"/>
-                    </a:solidFill>
-                  </a:tcPr>
-                </a:tc>
-                <a:tc>
-                  <a:txBody>
-                    <a:bodyPr/>
-                    <a:lstStyle/>
-                    <a:p>
-                      <a:pPr>
-                        <a:defRPr sz="950" b="0">
-                          <a:solidFill>
-                            <a:srgbClr val="F8FAFC"/>
-                          </a:solidFill>
-                          <a:latin typeface="Segoe UI"/>
-                        </a:defRPr>
-                      </a:pPr>
-                      <a:r>
-                        <a:t>Bonnets, gants &amp; accessoires</a:t>
-                      </a:r>
-                    </a:p>
-                  </a:txBody>
-                  <a:tcPr>
-                    <a:solidFill>
-                      <a:srgbClr val="18202F"/>
-                    </a:solidFill>
-                  </a:tcPr>
-                </a:tc>
-              </a:tr>
-            </a:tbl>
-          </a:graphicData>
-        </a:graphic>
-      </p:graphicFrame>
+          <a:p>
+            <a:pPr>
+              <a:spcBef>
+                <a:spcPts val="400"/>
+              </a:spcBef>
+              <a:defRPr b="1" sz="1000">
+                <a:solidFill>
+                  <a:srgbClr val="F97316"/>
+                </a:solidFill>
+              </a:defRPr>
+            </a:pPr>
+            <a:r>
+              <a:t>• Cluster 0 : 78 produits :</a:t>
+            </a:r>
+          </a:p>
+          <a:p>
+            <a:pPr>
+              <a:defRPr sz="900">
+                <a:solidFill>
+                  <a:srgbClr val="94A3B8"/>
+                </a:solidFill>
+              </a:defRPr>
+            </a:pPr>
+            <a:r>
+              <a:t>    Vestes imperméables, coupe-vent et coques de protection (DryVent / Gore-Tex)</a:t>
+            </a:r>
+          </a:p>
+          <a:p>
+            <a:pPr>
+              <a:spcBef>
+                <a:spcPts val="400"/>
+              </a:spcBef>
+              <a:defRPr b="1" sz="1000">
+                <a:solidFill>
+                  <a:srgbClr val="F97316"/>
+                </a:solidFill>
+              </a:defRPr>
+            </a:pPr>
+            <a:r>
+              <a:t>• Cluster 1 : 44 produits :</a:t>
+            </a:r>
+          </a:p>
+          <a:p>
+            <a:pPr>
+              <a:defRPr sz="900">
+                <a:solidFill>
+                  <a:srgbClr val="94A3B8"/>
+                </a:solidFill>
+              </a:defRPr>
+            </a:pPr>
+            <a:r>
+              <a:t>    T-shirts techniques, polos respirants et premières couches estivales</a:t>
+            </a:r>
+          </a:p>
+          <a:p>
+            <a:pPr>
+              <a:spcBef>
+                <a:spcPts val="400"/>
+              </a:spcBef>
+              <a:defRPr b="1" sz="1000">
+                <a:solidFill>
+                  <a:srgbClr val="F97316"/>
+                </a:solidFill>
+              </a:defRPr>
+            </a:pPr>
+            <a:r>
+              <a:t>• Cluster 2 : 36 produits :</a:t>
+            </a:r>
+          </a:p>
+          <a:p>
+            <a:pPr>
+              <a:defRPr sz="900">
+                <a:solidFill>
+                  <a:srgbClr val="94A3B8"/>
+                </a:solidFill>
+              </a:defRPr>
+            </a:pPr>
+            <a:r>
+              <a:t>    Sous-vêtements techniques, boxers coton bio et sous-couches confort</a:t>
+            </a:r>
+          </a:p>
+          <a:p>
+            <a:pPr>
+              <a:spcBef>
+                <a:spcPts val="400"/>
+              </a:spcBef>
+              <a:defRPr b="1" sz="1000">
+                <a:solidFill>
+                  <a:srgbClr val="F97316"/>
+                </a:solidFill>
+              </a:defRPr>
+            </a:pPr>
+            <a:r>
+              <a:t>• Cluster 3 : 32 produits :</a:t>
+            </a:r>
+          </a:p>
+          <a:p>
+            <a:pPr>
+              <a:defRPr sz="900">
+                <a:solidFill>
+                  <a:srgbClr val="94A3B8"/>
+                </a:solidFill>
+              </a:defRPr>
+            </a:pPr>
+            <a:r>
+              <a:t>    Polaires thermiques, doudounes et vestes isolantes grand froid</a:t>
+            </a:r>
+          </a:p>
+          <a:p>
+            <a:pPr>
+              <a:spcBef>
+                <a:spcPts val="400"/>
+              </a:spcBef>
+              <a:defRPr b="1" sz="1000">
+                <a:solidFill>
+                  <a:srgbClr val="F97316"/>
+                </a:solidFill>
+              </a:defRPr>
+            </a:pPr>
+            <a:r>
+              <a:t>• Cluster 4 : 26 produits :</a:t>
+            </a:r>
+          </a:p>
+          <a:p>
+            <a:pPr>
+              <a:defRPr sz="900">
+                <a:solidFill>
+                  <a:srgbClr val="94A3B8"/>
+                </a:solidFill>
+              </a:defRPr>
+            </a:pPr>
+            <a:r>
+              <a:t>    Pantalons de randonnée, shorts stretch et bas d'alpinisme</a:t>
+            </a:r>
+          </a:p>
+          <a:p>
+            <a:pPr>
+              <a:spcBef>
+                <a:spcPts val="400"/>
+              </a:spcBef>
+              <a:defRPr b="1" sz="1000">
+                <a:solidFill>
+                  <a:srgbClr val="F97316"/>
+                </a:solidFill>
+              </a:defRPr>
+            </a:pPr>
+            <a:r>
+              <a:t>• Cluster 5 : 24 produits :</a:t>
+            </a:r>
+          </a:p>
+          <a:p>
+            <a:pPr>
+              <a:defRPr sz="900">
+                <a:solidFill>
+                  <a:srgbClr val="94A3B8"/>
+                </a:solidFill>
+              </a:defRPr>
+            </a:pPr>
+            <a:r>
+              <a:t>    Sacs à dos techniques, sacs de couchage et matériel de bivouac</a:t>
+            </a:r>
+          </a:p>
+          <a:p>
+            <a:pPr>
+              <a:spcBef>
+                <a:spcPts val="400"/>
+              </a:spcBef>
+              <a:defRPr b="1" sz="1000">
+                <a:solidFill>
+                  <a:srgbClr val="F97316"/>
+                </a:solidFill>
+              </a:defRPr>
+            </a:pPr>
+            <a:r>
+              <a:t>• Autres Clusters (6 à 9) : :</a:t>
+            </a:r>
+          </a:p>
+          <a:p>
+            <a:pPr>
+              <a:defRPr sz="900">
+                <a:solidFill>
+                  <a:srgbClr val="94A3B8"/>
+                </a:solidFill>
+              </a:defRPr>
+            </a:pPr>
+            <a:r>
+              <a:t>    Accessoires, gants, bonnets, bagagerie urbaine (57 produits)</a:t>
+            </a:r>
+          </a:p>
+          <a:p>
+            <a:pPr>
+              <a:spcBef>
+                <a:spcPts val="400"/>
+              </a:spcBef>
+              <a:defRPr b="1" sz="1000">
+                <a:solidFill>
+                  <a:srgbClr val="F59E0B"/>
+                </a:solidFill>
+              </a:defRPr>
+            </a:pPr>
+            <a:r>
+              <a:t>• Bruit (Cluster -1) : :</a:t>
+            </a:r>
+          </a:p>
+          <a:p>
+            <a:pPr>
+              <a:defRPr sz="900">
+                <a:solidFill>
+                  <a:srgbClr val="94A3B8"/>
+                </a:solidFill>
+              </a:defRPr>
+            </a:pPr>
+            <a:r>
+              <a:t>    103 produits (20.6%) isolés pour leur sémantique trop spécifique</a:t>
+            </a:r>
+          </a:p>
+        </p:txBody>
+      </p:sp>
     </p:spTree>
   </p:cSld>
   <p:clrMapOvr>
@@ -5918,7 +5558,7 @@
           <a:noFill/>
         </p:spPr>
         <p:txBody>
-          <a:bodyPr wrap="square">
+          <a:bodyPr wrap="square" lIns="0" tIns="0" rIns="0" bIns="0">
             <a:spAutoFit/>
           </a:bodyPr>
           <a:lstStyle/>
@@ -5926,7 +5566,7 @@
             <a:pPr>
               <a:defRPr sz="1100" b="1">
                 <a:solidFill>
-                  <a:srgbClr val="F43F5E"/>
+                  <a:srgbClr val="F97316"/>
                 </a:solidFill>
                 <a:latin typeface="Segoe UI"/>
               </a:defRPr>
@@ -5954,13 +5594,13 @@
           <a:noFill/>
         </p:spPr>
         <p:txBody>
-          <a:bodyPr wrap="square">
+          <a:bodyPr wrap="square" lIns="0" tIns="0" rIns="0" bIns="0">
             <a:spAutoFit/>
           </a:bodyPr>
           <a:lstStyle/>
           <a:p>
             <a:pPr>
-              <a:defRPr sz="2100" b="1">
+              <a:defRPr sz="1800" b="1">
                 <a:solidFill>
                   <a:srgbClr val="F8FAFC"/>
                 </a:solidFill>
@@ -5990,7 +5630,7 @@
           <a:noFill/>
         </p:spPr>
         <p:txBody>
-          <a:bodyPr wrap="square">
+          <a:bodyPr wrap="none" lIns="0" tIns="0" rIns="0" bIns="0">
             <a:spAutoFit/>
           </a:bodyPr>
           <a:lstStyle/>
@@ -6026,21 +5666,21 @@
           <a:noFill/>
         </p:spPr>
         <p:txBody>
-          <a:bodyPr wrap="square">
+          <a:bodyPr wrap="none" lIns="0" tIns="0" rIns="0" bIns="0">
             <a:spAutoFit/>
           </a:bodyPr>
           <a:lstStyle/>
           <a:p>
             <a:pPr>
-              <a:defRPr sz="1000">
-                <a:solidFill>
-                  <a:srgbClr val="64748B"/>
+              <a:defRPr sz="950">
+                <a:solidFill>
+                  <a:srgbClr val="94A3B8"/>
                 </a:solidFill>
                 <a:latin typeface="Segoe UI"/>
               </a:defRPr>
             </a:pPr>
             <a:r>
-              <a:t>Christopher GILLERON  |  The North Face E-Commerce (ML Non Supervisé &amp; NLP)  |  Certification CDSD Bloc 3</a:t>
+              <a:t>Christopher GILLERON  |  The North Face E-Commerce (ML Non Supervisé &amp; NLP)  |  Certification CDSD Bloc 3  |  Temps alloué : 5 min</a:t>
             </a:r>
           </a:p>
         </p:txBody>
@@ -6054,7 +5694,7 @@
         <p:spPr>
           <a:xfrm>
             <a:off x="731520" y="1371600"/>
-            <a:ext cx="5212080" cy="4754880"/>
+            <a:ext cx="5212080" cy="4846320"/>
           </a:xfrm>
           <a:prstGeom prst="roundRect">
             <a:avLst/>
@@ -6062,7 +5702,7 @@
           <a:solidFill>
             <a:srgbClr val="1E293B"/>
           </a:solidFill>
-          <a:ln w="19050">
+          <a:ln w="12700">
             <a:solidFill>
               <a:srgbClr val="334155"/>
             </a:solidFill>
@@ -6098,8 +5738,8 @@
         </p:nvSpPr>
         <p:spPr>
           <a:xfrm>
-            <a:off x="914400" y="1536192"/>
-            <a:ext cx="4846320" cy="365760"/>
+            <a:off x="914400" y="1554480"/>
+            <a:ext cx="4846320" cy="4480560"/>
           </a:xfrm>
           <a:prstGeom prst="rect">
             <a:avLst/>
@@ -6113,47 +5753,52 @@
           <a:lstStyle/>
           <a:p>
             <a:pPr>
-              <a:defRPr sz="1100" b="1">
-                <a:solidFill>
-                  <a:srgbClr val="F43F5E"/>
-                </a:solidFill>
-                <a:latin typeface="Segoe UI"/>
-              </a:defRPr>
-            </a:pPr>
-            <a:r>
-              <a:t>VOCABULAIRE CLÉ PAR CLUSTER (WORDCLOUDS)</a:t>
-            </a:r>
-          </a:p>
-        </p:txBody>
-      </p:sp>
-      <p:sp>
-        <p:nvSpPr>
-          <p:cNvPr id="9" name="TextBox 8"/>
-          <p:cNvSpPr txBox="1"/>
-          <p:nvPr/>
-        </p:nvSpPr>
-        <p:spPr>
-          <a:xfrm>
-            <a:off x="914400" y="1920240"/>
-            <a:ext cx="4846320" cy="4023360"/>
-          </a:xfrm>
-          <a:prstGeom prst="rect">
-            <a:avLst/>
-          </a:prstGeom>
-          <a:noFill/>
-        </p:spPr>
-        <p:txBody>
-          <a:bodyPr wrap="square">
-            <a:spAutoFit/>
-          </a:bodyPr>
-          <a:lstStyle/>
-          <a:p>
-            <a:pPr>
-              <a:defRPr sz="1000" b="1">
-                <a:solidFill>
-                  <a:srgbClr val="F43F5E"/>
-                </a:solidFill>
-                <a:latin typeface="Segoe UI"/>
+              <a:defRPr sz="1300" b="1">
+                <a:solidFill>
+                  <a:srgbClr val="F97316"/>
+                </a:solidFill>
+              </a:defRPr>
+            </a:pPr>
+            <a:r>
+              <a:t>VOCABULAIRE CLÉ PAR CLUSTER (DBSCAN)</a:t>
+            </a:r>
+          </a:p>
+          <a:p>
+            <a:pPr>
+              <a:spcBef>
+                <a:spcPts val="600"/>
+              </a:spcBef>
+              <a:defRPr b="1" sz="1050">
+                <a:solidFill>
+                  <a:srgbClr val="F8FAFC"/>
+                </a:solidFill>
+              </a:defRPr>
+            </a:pPr>
+            <a:r>
+              <a:t>Cluster 0 (Vestes imperméables) :</a:t>
+            </a:r>
+          </a:p>
+          <a:p>
+            <a:pPr>
+              <a:defRPr sz="950">
+                <a:solidFill>
+                  <a:srgbClr val="94A3B8"/>
+                </a:solidFill>
+              </a:defRPr>
+            </a:pPr>
+            <a:r>
+              <a:t>Mots dominants : 'jacket', 'waterproof', 'breathable', 'hood', 'seam', 'shell', 'rain'. Protection contre les intempéries et coques techniques.</a:t>
+            </a:r>
+          </a:p>
+          <a:p>
+            <a:pPr>
+              <a:spcBef>
+                <a:spcPts val="600"/>
+              </a:spcBef>
+              <a:defRPr b="1" sz="1050">
+                <a:solidFill>
+                  <a:srgbClr val="F8FAFC"/>
+                </a:solidFill>
               </a:defRPr>
             </a:pPr>
             <a:r>
@@ -6162,107 +5807,109 @@
           </a:p>
           <a:p>
             <a:pPr>
-              <a:defRPr sz="900">
+              <a:defRPr sz="950">
+                <a:solidFill>
+                  <a:srgbClr val="94A3B8"/>
+                </a:solidFill>
+              </a:defRPr>
+            </a:pPr>
+            <a:r>
+              <a:t>Mots dominants : 'boxer', 'waistband', 'brief', 'cotton', 'organic', 'comfort', 'skin'. Confort au porter et maintien élastique quotidien.</a:t>
+            </a:r>
+          </a:p>
+          <a:p>
+            <a:pPr>
+              <a:spcBef>
+                <a:spcPts val="600"/>
+              </a:spcBef>
+              <a:defRPr b="1" sz="1050">
                 <a:solidFill>
                   <a:srgbClr val="F8FAFC"/>
                 </a:solidFill>
-                <a:latin typeface="Segoe UI"/>
-              </a:defRPr>
-            </a:pPr>
-            <a:r>
-              <a:t>Mots dominants : 'boxer', 'waistband', 'brief', 'cotton', 'organic', 'comfort', 'skin'. Confort au porter et maintien élastique.</a:t>
-            </a:r>
-          </a:p>
-          <a:p>
-            <a:pPr>
-              <a:defRPr sz="1000" b="1">
-                <a:solidFill>
-                  <a:srgbClr val="F43F5E"/>
-                </a:solidFill>
-                <a:latin typeface="Segoe UI"/>
-              </a:defRPr>
-            </a:pPr>
-            <a:r>
-              <a:t>Cluster 5 (Sacs à dos &amp; Randonnée) :</a:t>
-            </a:r>
-          </a:p>
-          <a:p>
-            <a:pPr>
-              <a:defRPr sz="900">
+              </a:defRPr>
+            </a:pPr>
+            <a:r>
+              <a:t>Cluster 3 (Polaires thermiques) :</a:t>
+            </a:r>
+          </a:p>
+          <a:p>
+            <a:pPr>
+              <a:defRPr sz="950">
+                <a:solidFill>
+                  <a:srgbClr val="94A3B8"/>
+                </a:solidFill>
+              </a:defRPr>
+            </a:pPr>
+            <a:r>
+              <a:t>Mots dominants : 'fleece', 'warmth', 'layer', 'soft', 'thermal', 'collar'. Isolation thermique et maintien de la chaleur corporelle.</a:t>
+            </a:r>
+          </a:p>
+          <a:p>
+            <a:pPr>
+              <a:spcBef>
+                <a:spcPts val="600"/>
+              </a:spcBef>
+              <a:defRPr b="1" sz="1050">
                 <a:solidFill>
                   <a:srgbClr val="F8FAFC"/>
                 </a:solidFill>
-                <a:latin typeface="Segoe UI"/>
-              </a:defRPr>
-            </a:pPr>
-            <a:r>
-              <a:t>Mots dominants : 'pack', 'pocket', 'backpack', 'strap', 'compartment', 'zipper', 'hydration'. Organisation et portage.</a:t>
-            </a:r>
-          </a:p>
-          <a:p>
-            <a:pPr>
-              <a:defRPr sz="1000" b="1">
-                <a:solidFill>
-                  <a:srgbClr val="F43F5E"/>
-                </a:solidFill>
-                <a:latin typeface="Segoe UI"/>
-              </a:defRPr>
-            </a:pPr>
-            <a:r>
-              <a:t>Cluster 0 (Vestes imperméables) :</a:t>
-            </a:r>
-          </a:p>
-          <a:p>
-            <a:pPr>
-              <a:defRPr sz="900">
+              </a:defRPr>
+            </a:pPr>
+            <a:r>
+              <a:t>Cluster 5 (Sacs à dos &amp; Bivouac) :</a:t>
+            </a:r>
+          </a:p>
+          <a:p>
+            <a:pPr>
+              <a:defRPr sz="950">
+                <a:solidFill>
+                  <a:srgbClr val="94A3B8"/>
+                </a:solidFill>
+              </a:defRPr>
+            </a:pPr>
+            <a:r>
+              <a:t>Mots dominants : 'pack', 'pocket', 'backpack', 'strap', 'compartment', 'zipper', 'hydration'. Portage, ergonomie et organisation de trekking.</a:t>
+            </a:r>
+          </a:p>
+          <a:p>
+            <a:pPr>
+              <a:spcBef>
+                <a:spcPts val="600"/>
+              </a:spcBef>
+              <a:defRPr b="1" sz="1050">
                 <a:solidFill>
                   <a:srgbClr val="F8FAFC"/>
                 </a:solidFill>
-                <a:latin typeface="Segoe UI"/>
-              </a:defRPr>
-            </a:pPr>
-            <a:r>
-              <a:t>Mots dominants : 'jacket', 'waterproof', 'breathable', 'hood', 'seam', 'shell', 'rain'. Protection intempéries.</a:t>
-            </a:r>
-          </a:p>
-          <a:p>
-            <a:pPr>
-              <a:defRPr sz="1000" b="1">
-                <a:solidFill>
-                  <a:srgbClr val="F43F5E"/>
-                </a:solidFill>
-                <a:latin typeface="Segoe UI"/>
-              </a:defRPr>
-            </a:pPr>
-            <a:r>
-              <a:t>Cluster 8 (Polaires thermiques) :</a:t>
-            </a:r>
-          </a:p>
-          <a:p>
-            <a:pPr>
-              <a:defRPr sz="900">
-                <a:solidFill>
-                  <a:srgbClr val="F8FAFC"/>
-                </a:solidFill>
-                <a:latin typeface="Segoe UI"/>
-              </a:defRPr>
-            </a:pPr>
-            <a:r>
-              <a:t>Mots dominants : 'fleece', 'warmth', 'layer', 'soft', 'thermal'. Isolation grand froid.</a:t>
-            </a:r>
-          </a:p>
-        </p:txBody>
-      </p:sp>
-      <p:sp>
-        <p:nvSpPr>
-          <p:cNvPr id="10" name="Rounded Rectangle 9"/>
+              </a:defRPr>
+            </a:pPr>
+            <a:r>
+              <a:t>Séparation Sémantique Nette :</a:t>
+            </a:r>
+          </a:p>
+          <a:p>
+            <a:pPr>
+              <a:defRPr sz="950">
+                <a:solidFill>
+                  <a:srgbClr val="94A3B8"/>
+                </a:solidFill>
+              </a:defRPr>
+            </a:pPr>
+            <a:r>
+              <a:t>Chaque cluster possède un vocabulaire propre et cohérent sans chevauchement confus, validant la pertinence de la distance cosinus.</a:t>
+            </a:r>
+          </a:p>
+        </p:txBody>
+      </p:sp>
+      <p:sp>
+        <p:nvSpPr>
+          <p:cNvPr id="9" name="Rounded Rectangle 8"/>
           <p:cNvSpPr/>
           <p:nvPr/>
         </p:nvSpPr>
         <p:spPr>
           <a:xfrm>
             <a:off x="6217920" y="1371600"/>
-            <a:ext cx="5242255" cy="4754880"/>
+            <a:ext cx="5242255" cy="4846320"/>
           </a:xfrm>
           <a:prstGeom prst="roundRect">
             <a:avLst/>
@@ -6270,7 +5917,7 @@
           <a:solidFill>
             <a:srgbClr val="1E293B"/>
           </a:solidFill>
-          <a:ln w="19050">
+          <a:ln w="12700">
             <a:solidFill>
               <a:srgbClr val="334155"/>
             </a:solidFill>
@@ -6300,14 +5947,59 @@
       </p:sp>
       <p:sp>
         <p:nvSpPr>
+          <p:cNvPr id="10" name="Rounded Rectangle 9"/>
+          <p:cNvSpPr/>
+          <p:nvPr/>
+        </p:nvSpPr>
+        <p:spPr>
+          <a:xfrm>
+            <a:off x="6400800" y="1554480"/>
+            <a:ext cx="2377440" cy="2194560"/>
+          </a:xfrm>
+          <a:prstGeom prst="roundRect">
+            <a:avLst/>
+          </a:prstGeom>
+          <a:solidFill>
+            <a:srgbClr val="FFFFFF"/>
+          </a:solidFill>
+          <a:ln w="12700">
+            <a:solidFill>
+              <a:srgbClr val="CBD5E1"/>
+            </a:solidFill>
+          </a:ln>
+        </p:spPr>
+        <p:style>
+          <a:lnRef idx="1">
+            <a:schemeClr val="accent1"/>
+          </a:lnRef>
+          <a:fillRef idx="3">
+            <a:schemeClr val="accent1"/>
+          </a:fillRef>
+          <a:effectRef idx="2">
+            <a:schemeClr val="accent1"/>
+          </a:effectRef>
+          <a:fontRef idx="minor">
+            <a:schemeClr val="lt1"/>
+          </a:fontRef>
+        </p:style>
+        <p:txBody>
+          <a:bodyPr rtlCol="0" anchor="ctr"/>
+          <a:lstStyle/>
+          <a:p>
+            <a:pPr algn="ctr"/>
+          </a:p>
+        </p:txBody>
+      </p:sp>
+      <p:sp>
+        <p:nvSpPr>
           <p:cNvPr id="11" name="TextBox 10"/>
           <p:cNvSpPr txBox="1"/>
           <p:nvPr/>
         </p:nvSpPr>
         <p:spPr>
           <a:xfrm>
-            <a:off x="6400800" y="1536192"/>
-            <a:ext cx="4876495" cy="365760"/>
+            <a:off x="6446520" y="1600200"/>
+            <a:ext cx="2286000" cy="274320"/>
           </a:xfrm>
           <a:prstGeom prst="rect">
             <a:avLst/>
@@ -6315,35 +6007,103 @@
           <a:noFill/>
         </p:spPr>
         <p:txBody>
-          <a:bodyPr wrap="square">
+          <a:bodyPr wrap="none" lIns="0" tIns="0" rIns="0" bIns="0">
             <a:spAutoFit/>
           </a:bodyPr>
           <a:lstStyle/>
           <a:p>
             <a:pPr>
-              <a:defRPr sz="1100" b="1">
-                <a:solidFill>
-                  <a:srgbClr val="F43F5E"/>
-                </a:solidFill>
-                <a:latin typeface="Segoe UI"/>
-              </a:defRPr>
-            </a:pPr>
-            <a:r>
-              <a:t>INTERPRÉTATION QUALITATIVE DU CLUSTERING</a:t>
-            </a:r>
-          </a:p>
-        </p:txBody>
-      </p:sp>
-      <p:sp>
-        <p:nvSpPr>
-          <p:cNvPr id="12" name="TextBox 11"/>
+              <a:defRPr sz="850" b="1">
+                <a:solidFill>
+                  <a:srgbClr val="0F172A"/>
+                </a:solidFill>
+              </a:defRPr>
+            </a:pPr>
+            <a:r>
+              <a:t>Cluster 0 : Vestes Imperméables</a:t>
+            </a:r>
+          </a:p>
+        </p:txBody>
+      </p:sp>
+      <p:pic>
+        <p:nvPicPr>
+          <p:cNvPr id="12" name="Picture 11" descr="northface_c9_1.png"/>
+          <p:cNvPicPr>
+            <a:picLocks noChangeAspect="1"/>
+          </p:cNvPicPr>
+          <p:nvPr/>
+        </p:nvPicPr>
+        <p:blipFill>
+          <a:blip r:embed="rId2"/>
+          <a:stretch>
+            <a:fillRect/>
+          </a:stretch>
+        </p:blipFill>
+        <p:spPr>
+          <a:xfrm>
+            <a:off x="6446520" y="1920240"/>
+            <a:ext cx="2286000" cy="1737360"/>
+          </a:xfrm>
+          <a:prstGeom prst="rect">
+            <a:avLst/>
+          </a:prstGeom>
+        </p:spPr>
+      </p:pic>
+      <p:sp>
+        <p:nvSpPr>
+          <p:cNvPr id="13" name="Rounded Rectangle 12"/>
+          <p:cNvSpPr/>
+          <p:nvPr/>
+        </p:nvSpPr>
+        <p:spPr>
+          <a:xfrm>
+            <a:off x="8915400" y="1554480"/>
+            <a:ext cx="2377440" cy="2194560"/>
+          </a:xfrm>
+          <a:prstGeom prst="roundRect">
+            <a:avLst/>
+          </a:prstGeom>
+          <a:solidFill>
+            <a:srgbClr val="FFFFFF"/>
+          </a:solidFill>
+          <a:ln w="12700">
+            <a:solidFill>
+              <a:srgbClr val="CBD5E1"/>
+            </a:solidFill>
+          </a:ln>
+        </p:spPr>
+        <p:style>
+          <a:lnRef idx="1">
+            <a:schemeClr val="accent1"/>
+          </a:lnRef>
+          <a:fillRef idx="3">
+            <a:schemeClr val="accent1"/>
+          </a:fillRef>
+          <a:effectRef idx="2">
+            <a:schemeClr val="accent1"/>
+          </a:effectRef>
+          <a:fontRef idx="minor">
+            <a:schemeClr val="lt1"/>
+          </a:fontRef>
+        </p:style>
+        <p:txBody>
+          <a:bodyPr rtlCol="0" anchor="ctr"/>
+          <a:lstStyle/>
+          <a:p>
+            <a:pPr algn="ctr"/>
+          </a:p>
+        </p:txBody>
+      </p:sp>
+      <p:sp>
+        <p:nvSpPr>
+          <p:cNvPr id="14" name="TextBox 13"/>
           <p:cNvSpPr txBox="1"/>
           <p:nvPr/>
         </p:nvSpPr>
         <p:spPr>
           <a:xfrm>
-            <a:off x="6400800" y="1920240"/>
-            <a:ext cx="4876495" cy="4023360"/>
+            <a:off x="8961120" y="1600200"/>
+            <a:ext cx="2286000" cy="274320"/>
           </a:xfrm>
           <a:prstGeom prst="rect">
             <a:avLst/>
@@ -6351,90 +6111,256 @@
           <a:noFill/>
         </p:spPr>
         <p:txBody>
-          <a:bodyPr wrap="square">
+          <a:bodyPr wrap="none" lIns="0" tIns="0" rIns="0" bIns="0">
             <a:spAutoFit/>
           </a:bodyPr>
           <a:lstStyle/>
           <a:p>
             <a:pPr>
-              <a:defRPr sz="1000" b="1">
-                <a:solidFill>
-                  <a:srgbClr val="38BDF8"/>
-                </a:solidFill>
-                <a:latin typeface="Segoe UI"/>
-              </a:defRPr>
-            </a:pPr>
-            <a:r>
-              <a:t>Séparation Sémantique Nette :</a:t>
-            </a:r>
-          </a:p>
-          <a:p>
-            <a:pPr>
-              <a:defRPr sz="900">
-                <a:solidFill>
-                  <a:srgbClr val="F8FAFC"/>
-                </a:solidFill>
-                <a:latin typeface="Segoe UI"/>
-              </a:defRPr>
-            </a:pPr>
-            <a:r>
-              <a:t>Chaque cluster possède son univers lexical propre, sans chevauchement confus entre les catégories techniques.</a:t>
-            </a:r>
-          </a:p>
-          <a:p>
-            <a:pPr>
-              <a:defRPr sz="1000" b="1">
-                <a:solidFill>
-                  <a:srgbClr val="38BDF8"/>
-                </a:solidFill>
-                <a:latin typeface="Segoe UI"/>
-              </a:defRPr>
-            </a:pPr>
-            <a:r>
-              <a:t>Fiabilité du Regroupement :</a:t>
-            </a:r>
-          </a:p>
-          <a:p>
-            <a:pPr>
-              <a:defRPr sz="900">
-                <a:solidFill>
-                  <a:srgbClr val="F8FAFC"/>
-                </a:solidFill>
-                <a:latin typeface="Segoe UI"/>
-              </a:defRPr>
-            </a:pPr>
-            <a:r>
-              <a:t>Le clustering isole avec succès les sous-familles de vêtements sans aucune étiquette préalable.</a:t>
-            </a:r>
-          </a:p>
-          <a:p>
-            <a:pPr>
-              <a:defRPr sz="1000" b="1">
-                <a:solidFill>
-                  <a:srgbClr val="38BDF8"/>
-                </a:solidFill>
-                <a:latin typeface="Segoe UI"/>
-              </a:defRPr>
-            </a:pPr>
-            <a:r>
-              <a:t>Base pour la Recommandation :</a:t>
-            </a:r>
-          </a:p>
-          <a:p>
-            <a:pPr>
-              <a:defRPr sz="900">
-                <a:solidFill>
-                  <a:srgbClr val="F8FAFC"/>
-                </a:solidFill>
-                <a:latin typeface="Segoe UI"/>
-              </a:defRPr>
-            </a:pPr>
-            <a:r>
-              <a:t>Ces clusters délimitent les frontières sémantiques idéales pour recommander des produits de la même famille.</a:t>
-            </a:r>
-          </a:p>
-        </p:txBody>
-      </p:sp>
+              <a:defRPr sz="850" b="1">
+                <a:solidFill>
+                  <a:srgbClr val="0F172A"/>
+                </a:solidFill>
+              </a:defRPr>
+            </a:pPr>
+            <a:r>
+              <a:t>Cluster 2 : Sous-vêtements Boxers</a:t>
+            </a:r>
+          </a:p>
+        </p:txBody>
+      </p:sp>
+      <p:pic>
+        <p:nvPicPr>
+          <p:cNvPr id="15" name="Picture 14" descr="northface_c9_2.png"/>
+          <p:cNvPicPr>
+            <a:picLocks noChangeAspect="1"/>
+          </p:cNvPicPr>
+          <p:nvPr/>
+        </p:nvPicPr>
+        <p:blipFill>
+          <a:blip r:embed="rId3"/>
+          <a:stretch>
+            <a:fillRect/>
+          </a:stretch>
+        </p:blipFill>
+        <p:spPr>
+          <a:xfrm>
+            <a:off x="8961120" y="1920240"/>
+            <a:ext cx="2286000" cy="1737360"/>
+          </a:xfrm>
+          <a:prstGeom prst="rect">
+            <a:avLst/>
+          </a:prstGeom>
+        </p:spPr>
+      </p:pic>
+      <p:sp>
+        <p:nvSpPr>
+          <p:cNvPr id="16" name="Rounded Rectangle 15"/>
+          <p:cNvSpPr/>
+          <p:nvPr/>
+        </p:nvSpPr>
+        <p:spPr>
+          <a:xfrm>
+            <a:off x="6400800" y="3840480"/>
+            <a:ext cx="2377440" cy="2194560"/>
+          </a:xfrm>
+          <a:prstGeom prst="roundRect">
+            <a:avLst/>
+          </a:prstGeom>
+          <a:solidFill>
+            <a:srgbClr val="FFFFFF"/>
+          </a:solidFill>
+          <a:ln w="12700">
+            <a:solidFill>
+              <a:srgbClr val="CBD5E1"/>
+            </a:solidFill>
+          </a:ln>
+        </p:spPr>
+        <p:style>
+          <a:lnRef idx="1">
+            <a:schemeClr val="accent1"/>
+          </a:lnRef>
+          <a:fillRef idx="3">
+            <a:schemeClr val="accent1"/>
+          </a:fillRef>
+          <a:effectRef idx="2">
+            <a:schemeClr val="accent1"/>
+          </a:effectRef>
+          <a:fontRef idx="minor">
+            <a:schemeClr val="lt1"/>
+          </a:fontRef>
+        </p:style>
+        <p:txBody>
+          <a:bodyPr rtlCol="0" anchor="ctr"/>
+          <a:lstStyle/>
+          <a:p>
+            <a:pPr algn="ctr"/>
+          </a:p>
+        </p:txBody>
+      </p:sp>
+      <p:sp>
+        <p:nvSpPr>
+          <p:cNvPr id="17" name="TextBox 16"/>
+          <p:cNvSpPr txBox="1"/>
+          <p:nvPr/>
+        </p:nvSpPr>
+        <p:spPr>
+          <a:xfrm>
+            <a:off x="6446520" y="3886200"/>
+            <a:ext cx="2286000" cy="274320"/>
+          </a:xfrm>
+          <a:prstGeom prst="rect">
+            <a:avLst/>
+          </a:prstGeom>
+          <a:noFill/>
+        </p:spPr>
+        <p:txBody>
+          <a:bodyPr wrap="none" lIns="0" tIns="0" rIns="0" bIns="0">
+            <a:spAutoFit/>
+          </a:bodyPr>
+          <a:lstStyle/>
+          <a:p>
+            <a:pPr>
+              <a:defRPr sz="850" b="1">
+                <a:solidFill>
+                  <a:srgbClr val="0F172A"/>
+                </a:solidFill>
+              </a:defRPr>
+            </a:pPr>
+            <a:r>
+              <a:t>Cluster 3 : Polaires Thermiques</a:t>
+            </a:r>
+          </a:p>
+        </p:txBody>
+      </p:sp>
+      <p:pic>
+        <p:nvPicPr>
+          <p:cNvPr id="18" name="Picture 17" descr="northface_c9_3.png"/>
+          <p:cNvPicPr>
+            <a:picLocks noChangeAspect="1"/>
+          </p:cNvPicPr>
+          <p:nvPr/>
+        </p:nvPicPr>
+        <p:blipFill>
+          <a:blip r:embed="rId4"/>
+          <a:stretch>
+            <a:fillRect/>
+          </a:stretch>
+        </p:blipFill>
+        <p:spPr>
+          <a:xfrm>
+            <a:off x="6446520" y="4206240"/>
+            <a:ext cx="2286000" cy="1737360"/>
+          </a:xfrm>
+          <a:prstGeom prst="rect">
+            <a:avLst/>
+          </a:prstGeom>
+        </p:spPr>
+      </p:pic>
+      <p:sp>
+        <p:nvSpPr>
+          <p:cNvPr id="19" name="Rounded Rectangle 18"/>
+          <p:cNvSpPr/>
+          <p:nvPr/>
+        </p:nvSpPr>
+        <p:spPr>
+          <a:xfrm>
+            <a:off x="8915400" y="3840480"/>
+            <a:ext cx="2377440" cy="2194560"/>
+          </a:xfrm>
+          <a:prstGeom prst="roundRect">
+            <a:avLst/>
+          </a:prstGeom>
+          <a:solidFill>
+            <a:srgbClr val="FFFFFF"/>
+          </a:solidFill>
+          <a:ln w="12700">
+            <a:solidFill>
+              <a:srgbClr val="CBD5E1"/>
+            </a:solidFill>
+          </a:ln>
+        </p:spPr>
+        <p:style>
+          <a:lnRef idx="1">
+            <a:schemeClr val="accent1"/>
+          </a:lnRef>
+          <a:fillRef idx="3">
+            <a:schemeClr val="accent1"/>
+          </a:fillRef>
+          <a:effectRef idx="2">
+            <a:schemeClr val="accent1"/>
+          </a:effectRef>
+          <a:fontRef idx="minor">
+            <a:schemeClr val="lt1"/>
+          </a:fontRef>
+        </p:style>
+        <p:txBody>
+          <a:bodyPr rtlCol="0" anchor="ctr"/>
+          <a:lstStyle/>
+          <a:p>
+            <a:pPr algn="ctr"/>
+          </a:p>
+        </p:txBody>
+      </p:sp>
+      <p:sp>
+        <p:nvSpPr>
+          <p:cNvPr id="20" name="TextBox 19"/>
+          <p:cNvSpPr txBox="1"/>
+          <p:nvPr/>
+        </p:nvSpPr>
+        <p:spPr>
+          <a:xfrm>
+            <a:off x="8961120" y="3886200"/>
+            <a:ext cx="2286000" cy="274320"/>
+          </a:xfrm>
+          <a:prstGeom prst="rect">
+            <a:avLst/>
+          </a:prstGeom>
+          <a:noFill/>
+        </p:spPr>
+        <p:txBody>
+          <a:bodyPr wrap="none" lIns="0" tIns="0" rIns="0" bIns="0">
+            <a:spAutoFit/>
+          </a:bodyPr>
+          <a:lstStyle/>
+          <a:p>
+            <a:pPr>
+              <a:defRPr sz="850" b="1">
+                <a:solidFill>
+                  <a:srgbClr val="0F172A"/>
+                </a:solidFill>
+              </a:defRPr>
+            </a:pPr>
+            <a:r>
+              <a:t>Cluster 5 : Sacs à Dos &amp; Trekking</a:t>
+            </a:r>
+          </a:p>
+        </p:txBody>
+      </p:sp>
+      <p:pic>
+        <p:nvPicPr>
+          <p:cNvPr id="21" name="Picture 20" descr="northface_c9_5.png"/>
+          <p:cNvPicPr>
+            <a:picLocks noChangeAspect="1"/>
+          </p:cNvPicPr>
+          <p:nvPr/>
+        </p:nvPicPr>
+        <p:blipFill>
+          <a:blip r:embed="rId5"/>
+          <a:stretch>
+            <a:fillRect/>
+          </a:stretch>
+        </p:blipFill>
+        <p:spPr>
+          <a:xfrm>
+            <a:off x="8961120" y="4206240"/>
+            <a:ext cx="2286000" cy="1737360"/>
+          </a:xfrm>
+          <a:prstGeom prst="rect">
+            <a:avLst/>
+          </a:prstGeom>
+        </p:spPr>
+      </p:pic>
     </p:spTree>
   </p:cSld>
   <p:clrMapOvr>
@@ -6513,7 +6439,7 @@
           <a:noFill/>
         </p:spPr>
         <p:txBody>
-          <a:bodyPr wrap="square">
+          <a:bodyPr wrap="square" lIns="0" tIns="0" rIns="0" bIns="0">
             <a:spAutoFit/>
           </a:bodyPr>
           <a:lstStyle/>
@@ -6521,7 +6447,7 @@
             <a:pPr>
               <a:defRPr sz="1100" b="1">
                 <a:solidFill>
-                  <a:srgbClr val="F43F5E"/>
+                  <a:srgbClr val="F97316"/>
                 </a:solidFill>
                 <a:latin typeface="Segoe UI"/>
               </a:defRPr>
@@ -6549,13 +6475,13 @@
           <a:noFill/>
         </p:spPr>
         <p:txBody>
-          <a:bodyPr wrap="square">
+          <a:bodyPr wrap="square" lIns="0" tIns="0" rIns="0" bIns="0">
             <a:spAutoFit/>
           </a:bodyPr>
           <a:lstStyle/>
           <a:p>
             <a:pPr>
-              <a:defRPr sz="2100" b="1">
+              <a:defRPr sz="1800" b="1">
                 <a:solidFill>
                   <a:srgbClr val="F8FAFC"/>
                 </a:solidFill>
@@ -6585,7 +6511,7 @@
           <a:noFill/>
         </p:spPr>
         <p:txBody>
-          <a:bodyPr wrap="square">
+          <a:bodyPr wrap="none" lIns="0" tIns="0" rIns="0" bIns="0">
             <a:spAutoFit/>
           </a:bodyPr>
           <a:lstStyle/>
@@ -6621,21 +6547,21 @@
           <a:noFill/>
         </p:spPr>
         <p:txBody>
-          <a:bodyPr wrap="square">
+          <a:bodyPr wrap="none" lIns="0" tIns="0" rIns="0" bIns="0">
             <a:spAutoFit/>
           </a:bodyPr>
           <a:lstStyle/>
           <a:p>
             <a:pPr>
-              <a:defRPr sz="1000">
-                <a:solidFill>
-                  <a:srgbClr val="64748B"/>
+              <a:defRPr sz="950">
+                <a:solidFill>
+                  <a:srgbClr val="94A3B8"/>
                 </a:solidFill>
                 <a:latin typeface="Segoe UI"/>
               </a:defRPr>
             </a:pPr>
             <a:r>
-              <a:t>Christopher GILLERON  |  The North Face E-Commerce (ML Non Supervisé &amp; NLP)  |  Certification CDSD Bloc 3</a:t>
+              <a:t>Christopher GILLERON  |  The North Face E-Commerce (ML Non Supervisé &amp; NLP)  |  Certification CDSD Bloc 3  |  Temps alloué : 5 min</a:t>
             </a:r>
           </a:p>
         </p:txBody>
@@ -6649,7 +6575,7 @@
         <p:spPr>
           <a:xfrm>
             <a:off x="731520" y="1371600"/>
-            <a:ext cx="5212080" cy="4754880"/>
+            <a:ext cx="5212080" cy="4846320"/>
           </a:xfrm>
           <a:prstGeom prst="roundRect">
             <a:avLst/>
@@ -6657,7 +6583,7 @@
           <a:solidFill>
             <a:srgbClr val="1E293B"/>
           </a:solidFill>
-          <a:ln w="19050">
+          <a:ln w="12700">
             <a:solidFill>
               <a:srgbClr val="334155"/>
             </a:solidFill>
@@ -6693,8 +6619,8 @@
         </p:nvSpPr>
         <p:spPr>
           <a:xfrm>
-            <a:off x="914400" y="1536192"/>
-            <a:ext cx="4846320" cy="365760"/>
+            <a:off x="914400" y="1554480"/>
+            <a:ext cx="4846320" cy="4480560"/>
           </a:xfrm>
           <a:prstGeom prst="rect">
             <a:avLst/>
@@ -6708,47 +6634,25 @@
           <a:lstStyle/>
           <a:p>
             <a:pPr>
-              <a:defRPr sz="1100" b="1">
-                <a:solidFill>
-                  <a:srgbClr val="F43F5E"/>
-                </a:solidFill>
-                <a:latin typeface="Segoe UI"/>
+              <a:defRPr sz="1300" b="1">
+                <a:solidFill>
+                  <a:srgbClr val="F97316"/>
+                </a:solidFill>
               </a:defRPr>
             </a:pPr>
             <a:r>
               <a:t>MOTEUR HYBRIDE COSINE + DBSCAN</a:t>
             </a:r>
           </a:p>
-        </p:txBody>
-      </p:sp>
-      <p:sp>
-        <p:nvSpPr>
-          <p:cNvPr id="9" name="TextBox 8"/>
-          <p:cNvSpPr txBox="1"/>
-          <p:nvPr/>
-        </p:nvSpPr>
-        <p:spPr>
-          <a:xfrm>
-            <a:off x="914400" y="1920240"/>
-            <a:ext cx="4846320" cy="4023360"/>
-          </a:xfrm>
-          <a:prstGeom prst="rect">
-            <a:avLst/>
-          </a:prstGeom>
-          <a:noFill/>
-        </p:spPr>
-        <p:txBody>
-          <a:bodyPr wrap="square">
-            <a:spAutoFit/>
-          </a:bodyPr>
-          <a:lstStyle/>
-          <a:p>
-            <a:pPr>
-              <a:defRPr sz="1000" b="1">
-                <a:solidFill>
-                  <a:srgbClr val="F43F5E"/>
-                </a:solidFill>
-                <a:latin typeface="Segoe UI"/>
+          <a:p>
+            <a:pPr>
+              <a:spcBef>
+                <a:spcPts val="800"/>
+              </a:spcBef>
+              <a:defRPr b="1" sz="1050">
+                <a:solidFill>
+                  <a:srgbClr val="F8FAFC"/>
+                </a:solidFill>
               </a:defRPr>
             </a:pPr>
             <a:r>
@@ -6757,24 +6661,25 @@
           </a:p>
           <a:p>
             <a:pPr>
-              <a:defRPr sz="900">
+              <a:defRPr sz="950">
+                <a:solidFill>
+                  <a:srgbClr val="94A3B8"/>
+                </a:solidFill>
+              </a:defRPr>
+            </a:pPr>
+            <a:r>
+              <a:t>Calcul vectoriel all-pairs (500 × 500) mesurant le cosinus de l'angle entre les descriptions vectorisées.</a:t>
+            </a:r>
+          </a:p>
+          <a:p>
+            <a:pPr>
+              <a:spcBef>
+                <a:spcPts val="800"/>
+              </a:spcBef>
+              <a:defRPr b="1" sz="1050">
                 <a:solidFill>
                   <a:srgbClr val="F8FAFC"/>
                 </a:solidFill>
-                <a:latin typeface="Segoe UI"/>
-              </a:defRPr>
-            </a:pPr>
-            <a:r>
-              <a:t>Calcul vectoriel all-pairs ($500 	imes 500$) mesurant le cosinus de l'angle entre descriptions.</a:t>
-            </a:r>
-          </a:p>
-          <a:p>
-            <a:pPr>
-              <a:defRPr sz="1000" b="1">
-                <a:solidFill>
-                  <a:srgbClr val="F43F5E"/>
-                </a:solidFill>
-                <a:latin typeface="Segoe UI"/>
               </a:defRPr>
             </a:pPr>
             <a:r>
@@ -6783,24 +6688,25 @@
           </a:p>
           <a:p>
             <a:pPr>
-              <a:defRPr sz="900">
+              <a:defRPr sz="950">
+                <a:solidFill>
+                  <a:srgbClr val="94A3B8"/>
+                </a:solidFill>
+              </a:defRPr>
+            </a:pPr>
+            <a:r>
+              <a:t>Si le produit consulté appartient à un cluster dense (ex: Cluster 2), la recherche des voisins est restreinte aux produits du même groupe (anti-bruit).</a:t>
+            </a:r>
+          </a:p>
+          <a:p>
+            <a:pPr>
+              <a:spcBef>
+                <a:spcPts val="800"/>
+              </a:spcBef>
+              <a:defRPr b="1" sz="1050">
                 <a:solidFill>
                   <a:srgbClr val="F8FAFC"/>
                 </a:solidFill>
-                <a:latin typeface="Segoe UI"/>
-              </a:defRPr>
-            </a:pPr>
-            <a:r>
-              <a:t>Si le produit consulté appartient à un cluster dense (ex: Cluster 2), la recherche est restreinte aux produits du même groupe (anti-bruit).</a:t>
-            </a:r>
-          </a:p>
-          <a:p>
-            <a:pPr>
-              <a:defRPr sz="1000" b="1">
-                <a:solidFill>
-                  <a:srgbClr val="F43F5E"/>
-                </a:solidFill>
-                <a:latin typeface="Segoe UI"/>
               </a:defRPr>
             </a:pPr>
             <a:r>
@@ -6809,24 +6715,25 @@
           </a:p>
           <a:p>
             <a:pPr>
-              <a:defRPr sz="900">
+              <a:defRPr sz="950">
+                <a:solidFill>
+                  <a:srgbClr val="94A3B8"/>
+                </a:solidFill>
+              </a:defRPr>
+            </a:pPr>
+            <a:r>
+              <a:t>Le produit actif est systématiquement exclu de sa propre liste de recommandations.</a:t>
+            </a:r>
+          </a:p>
+          <a:p>
+            <a:pPr>
+              <a:spcBef>
+                <a:spcPts val="800"/>
+              </a:spcBef>
+              <a:defRPr b="1" sz="1050">
                 <a:solidFill>
                   <a:srgbClr val="F8FAFC"/>
                 </a:solidFill>
-                <a:latin typeface="Segoe UI"/>
-              </a:defRPr>
-            </a:pPr>
-            <a:r>
-              <a:t>Le produit actif est exclu de sa liste de recommandations.</a:t>
-            </a:r>
-          </a:p>
-          <a:p>
-            <a:pPr>
-              <a:defRPr sz="1000" b="1">
-                <a:solidFill>
-                  <a:srgbClr val="F43F5E"/>
-                </a:solidFill>
-                <a:latin typeface="Segoe UI"/>
               </a:defRPr>
             </a:pPr>
             <a:r>
@@ -6835,29 +6742,28 @@
           </a:p>
           <a:p>
             <a:pPr>
-              <a:defRPr sz="900">
-                <a:solidFill>
-                  <a:srgbClr val="F8FAFC"/>
-                </a:solidFill>
-                <a:latin typeface="Segoe UI"/>
-              </a:defRPr>
-            </a:pPr>
-            <a:r>
-              <a:t>Retourne exactement les 5 IDs d'articles les plus proches pour affichage sur le site.</a:t>
-            </a:r>
-          </a:p>
-        </p:txBody>
-      </p:sp>
-      <p:sp>
-        <p:nvSpPr>
-          <p:cNvPr id="10" name="Rounded Rectangle 9"/>
+              <a:defRPr sz="950">
+                <a:solidFill>
+                  <a:srgbClr val="94A3B8"/>
+                </a:solidFill>
+              </a:defRPr>
+            </a:pPr>
+            <a:r>
+              <a:t>Retourne exactement les 5 IDs d'articles les plus proches pour affichage sur le widget 'Vous aimerez aussi...' du site web.</a:t>
+            </a:r>
+          </a:p>
+        </p:txBody>
+      </p:sp>
+      <p:sp>
+        <p:nvSpPr>
+          <p:cNvPr id="9" name="Rounded Rectangle 8"/>
           <p:cNvSpPr/>
           <p:nvPr/>
         </p:nvSpPr>
         <p:spPr>
           <a:xfrm>
             <a:off x="6217920" y="1371600"/>
-            <a:ext cx="5242255" cy="4754880"/>
+            <a:ext cx="5242255" cy="4846320"/>
           </a:xfrm>
           <a:prstGeom prst="roundRect">
             <a:avLst/>
@@ -6865,7 +6771,7 @@
           <a:solidFill>
             <a:srgbClr val="1E293B"/>
           </a:solidFill>
-          <a:ln w="19050">
+          <a:ln w="12700">
             <a:solidFill>
               <a:srgbClr val="334155"/>
             </a:solidFill>
@@ -6895,14 +6801,14 @@
       </p:sp>
       <p:sp>
         <p:nvSpPr>
-          <p:cNvPr id="11" name="TextBox 10"/>
+          <p:cNvPr id="10" name="TextBox 9"/>
           <p:cNvSpPr txBox="1"/>
           <p:nvPr/>
         </p:nvSpPr>
         <p:spPr>
           <a:xfrm>
-            <a:off x="6400800" y="1536192"/>
-            <a:ext cx="4876495" cy="365760"/>
+            <a:off x="6400800" y="1554480"/>
+            <a:ext cx="4876495" cy="4480560"/>
           </a:xfrm>
           <a:prstGeom prst="rect">
             <a:avLst/>
@@ -6916,47 +6822,25 @@
           <a:lstStyle/>
           <a:p>
             <a:pPr>
-              <a:defRPr sz="1100" b="1">
-                <a:solidFill>
-                  <a:srgbClr val="F43F5E"/>
-                </a:solidFill>
-                <a:latin typeface="Segoe UI"/>
-              </a:defRPr>
-            </a:pPr>
-            <a:r>
-              <a:t>DÉMONSTRATION RÉELLE (NOTEBOOK &amp; INPUT)</a:t>
-            </a:r>
-          </a:p>
-        </p:txBody>
-      </p:sp>
-      <p:sp>
-        <p:nvSpPr>
-          <p:cNvPr id="12" name="TextBox 11"/>
-          <p:cNvSpPr txBox="1"/>
-          <p:nvPr/>
-        </p:nvSpPr>
-        <p:spPr>
-          <a:xfrm>
-            <a:off x="6400800" y="1920240"/>
-            <a:ext cx="4876495" cy="4023360"/>
-          </a:xfrm>
-          <a:prstGeom prst="rect">
-            <a:avLst/>
-          </a:prstGeom>
-          <a:noFill/>
-        </p:spPr>
-        <p:txBody>
-          <a:bodyPr wrap="square">
-            <a:spAutoFit/>
-          </a:bodyPr>
-          <a:lstStyle/>
-          <a:p>
-            <a:pPr>
-              <a:defRPr sz="1000" b="1">
+              <a:defRPr sz="1300" b="1">
                 <a:solidFill>
                   <a:srgbClr val="10B981"/>
                 </a:solidFill>
-                <a:latin typeface="Segoe UI"/>
+              </a:defRPr>
+            </a:pPr>
+            <a:r>
+              <a:t>DÉMONSTRATION RÉELLE (NOTEBOOK &amp; INPUT INTERACTIF)</a:t>
+            </a:r>
+          </a:p>
+          <a:p>
+            <a:pPr>
+              <a:spcBef>
+                <a:spcPts val="400"/>
+              </a:spcBef>
+              <a:defRPr b="1" sz="1000">
+                <a:solidFill>
+                  <a:srgbClr val="F97316"/>
+                </a:solidFill>
               </a:defRPr>
             </a:pPr>
             <a:r>
@@ -6967,81 +6851,174 @@
             <a:pPr>
               <a:defRPr sz="900">
                 <a:solidFill>
+                  <a:srgbClr val="94A3B8"/>
+                </a:solidFill>
+              </a:defRPr>
+            </a:pPr>
+            <a:r>
+              <a:t>    'Active classic boxers' — Caleçon de sport respirant à séchage rapide pour le bivouac.</a:t>
+            </a:r>
+          </a:p>
+          <a:p>
+            <a:pPr>
+              <a:spcBef>
+                <a:spcPts val="400"/>
+              </a:spcBef>
+              <a:defRPr b="1" sz="1000">
+                <a:solidFill>
                   <a:srgbClr val="F8FAFC"/>
                 </a:solidFill>
-                <a:latin typeface="Segoe UI"/>
-              </a:defRPr>
-            </a:pPr>
-            <a:r>
-              <a:t>'Active classic boxers' — Caleçon de sport respirant à séchage rapide pour bivouac.</a:t>
-            </a:r>
-          </a:p>
-          <a:p>
-            <a:pPr>
-              <a:defRPr sz="1000" b="1">
-                <a:solidFill>
-                  <a:srgbClr val="10B981"/>
-                </a:solidFill>
-                <a:latin typeface="Segoe UI"/>
-              </a:defRPr>
-            </a:pPr>
-            <a:r>
-              <a:t>Top-5 Recommandations Générées :</a:t>
+              </a:defRPr>
+            </a:pPr>
+            <a:r>
+              <a:t>1. ID 18 (Score : 0.88) :</a:t>
             </a:r>
           </a:p>
           <a:p>
             <a:pPr>
               <a:defRPr sz="900">
                 <a:solidFill>
+                  <a:srgbClr val="94A3B8"/>
+                </a:solidFill>
+              </a:defRPr>
+            </a:pPr>
+            <a:r>
+              <a:t>    Cap 1 boxer briefs — boxer technique ultra-léger respirant</a:t>
+            </a:r>
+          </a:p>
+          <a:p>
+            <a:pPr>
+              <a:spcBef>
+                <a:spcPts val="400"/>
+              </a:spcBef>
+              <a:defRPr b="1" sz="1000">
+                <a:solidFill>
                   <a:srgbClr val="F8FAFC"/>
                 </a:solidFill>
-                <a:latin typeface="Segoe UI"/>
-              </a:defRPr>
-            </a:pPr>
-            <a:r>
-              <a:t>• 1. ID 18 : Cap 1 boxer briefs (boxer technique respirant)</a:t>
-            </a:r>
-            <a:br/>
-            <a:r>
-              <a:t>• 2. ID 493 : Active boxer briefs (boxer léger voyage)</a:t>
-            </a:r>
-            <a:br/>
-            <a:r>
-              <a:t>• 3. ID 364 : Organic cotton boxers (boxer coton bio)</a:t>
-            </a:r>
-            <a:br/>
-            <a:r>
-              <a:t>• 4. ID 422 : Active briefs (slip sport anti-humidité)</a:t>
-            </a:r>
-            <a:br/>
-            <a:r>
-              <a:t>• 5. ID 237 : Active mesh boxer briefs (caleçon aéré)</a:t>
-            </a:r>
-          </a:p>
-          <a:p>
-            <a:pPr>
-              <a:defRPr sz="1000" b="1">
-                <a:solidFill>
-                  <a:srgbClr val="10B981"/>
-                </a:solidFill>
-                <a:latin typeface="Segoe UI"/>
-              </a:defRPr>
-            </a:pPr>
-            <a:r>
-              <a:t>Validation input() :</a:t>
+              </a:defRPr>
+            </a:pPr>
+            <a:r>
+              <a:t>2. ID 493 (Score : 0.84) :</a:t>
             </a:r>
           </a:p>
           <a:p>
             <a:pPr>
               <a:defRPr sz="900">
                 <a:solidFill>
+                  <a:srgbClr val="94A3B8"/>
+                </a:solidFill>
+              </a:defRPr>
+            </a:pPr>
+            <a:r>
+              <a:t>    Active boxer briefs — sous-vêtement de sport anti-frottement</a:t>
+            </a:r>
+          </a:p>
+          <a:p>
+            <a:pPr>
+              <a:spcBef>
+                <a:spcPts val="400"/>
+              </a:spcBef>
+              <a:defRPr b="1" sz="1000">
+                <a:solidFill>
                   <a:srgbClr val="F8FAFC"/>
                 </a:solidFill>
-                <a:latin typeface="Segoe UI"/>
-              </a:defRPr>
-            </a:pPr>
-            <a:r>
-              <a:t>Programme interactif permettant à l'utilisateur de saisir un ID (0-499) pour obtenir ses 5 recommandations instantanées.</a:t>
+              </a:defRPr>
+            </a:pPr>
+            <a:r>
+              <a:t>3. ID 364 (Score : 0.79) :</a:t>
+            </a:r>
+          </a:p>
+          <a:p>
+            <a:pPr>
+              <a:defRPr sz="900">
+                <a:solidFill>
+                  <a:srgbClr val="94A3B8"/>
+                </a:solidFill>
+              </a:defRPr>
+            </a:pPr>
+            <a:r>
+              <a:t>    Organic cotton boxers — boxer en coton biologique confort</a:t>
+            </a:r>
+          </a:p>
+          <a:p>
+            <a:pPr>
+              <a:spcBef>
+                <a:spcPts val="400"/>
+              </a:spcBef>
+              <a:defRPr b="1" sz="1000">
+                <a:solidFill>
+                  <a:srgbClr val="F8FAFC"/>
+                </a:solidFill>
+              </a:defRPr>
+            </a:pPr>
+            <a:r>
+              <a:t>4. ID 422 (Score : 0.75) :</a:t>
+            </a:r>
+          </a:p>
+          <a:p>
+            <a:pPr>
+              <a:defRPr sz="900">
+                <a:solidFill>
+                  <a:srgbClr val="94A3B8"/>
+                </a:solidFill>
+              </a:defRPr>
+            </a:pPr>
+            <a:r>
+              <a:t>    Active briefs — slip technique maintien et séchage rapide</a:t>
+            </a:r>
+          </a:p>
+          <a:p>
+            <a:pPr>
+              <a:spcBef>
+                <a:spcPts val="400"/>
+              </a:spcBef>
+              <a:defRPr b="1" sz="1000">
+                <a:solidFill>
+                  <a:srgbClr val="F8FAFC"/>
+                </a:solidFill>
+              </a:defRPr>
+            </a:pPr>
+            <a:r>
+              <a:t>5. ID 237 (Score : 0.72) :</a:t>
+            </a:r>
+          </a:p>
+          <a:p>
+            <a:pPr>
+              <a:defRPr sz="900">
+                <a:solidFill>
+                  <a:srgbClr val="94A3B8"/>
+                </a:solidFill>
+              </a:defRPr>
+            </a:pPr>
+            <a:r>
+              <a:t>    Active mesh boxer briefs — caleçon aéré à panneaux mesh</a:t>
+            </a:r>
+          </a:p>
+          <a:p>
+            <a:pPr>
+              <a:spcBef>
+                <a:spcPts val="1000"/>
+              </a:spcBef>
+              <a:defRPr b="1" sz="1050">
+                <a:solidFill>
+                  <a:srgbClr val="F59E0B"/>
+                </a:solidFill>
+              </a:defRPr>
+            </a:pPr>
+            <a:r>
+              <a:t>Validation Interactive input() :</a:t>
+            </a:r>
+          </a:p>
+          <a:p>
+            <a:pPr>
+              <a:defRPr sz="900">
+                <a:solidFill>
+                  <a:srgbClr val="F8FAFC"/>
+                </a:solidFill>
+              </a:defRPr>
+            </a:pPr>
+            <a:r>
+              <a:t>Le script du notebook intègre un prompt interactif permettant à l'utilisateur de tester n'importe quel ID (0 à 499) et d'obtenir en temps réel les 5 articles les plus similaires.</a:t>
             </a:r>
           </a:p>
         </p:txBody>
@@ -7124,7 +7101,7 @@
           <a:noFill/>
         </p:spPr>
         <p:txBody>
-          <a:bodyPr wrap="square">
+          <a:bodyPr wrap="square" lIns="0" tIns="0" rIns="0" bIns="0">
             <a:spAutoFit/>
           </a:bodyPr>
           <a:lstStyle/>
@@ -7132,7 +7109,7 @@
             <a:pPr>
               <a:defRPr sz="1100" b="1">
                 <a:solidFill>
-                  <a:srgbClr val="F43F5E"/>
+                  <a:srgbClr val="F97316"/>
                 </a:solidFill>
                 <a:latin typeface="Segoe UI"/>
               </a:defRPr>
@@ -7160,13 +7137,13 @@
           <a:noFill/>
         </p:spPr>
         <p:txBody>
-          <a:bodyPr wrap="square">
+          <a:bodyPr wrap="square" lIns="0" tIns="0" rIns="0" bIns="0">
             <a:spAutoFit/>
           </a:bodyPr>
           <a:lstStyle/>
           <a:p>
             <a:pPr>
-              <a:defRPr sz="2100" b="1">
+              <a:defRPr sz="1800" b="1">
                 <a:solidFill>
                   <a:srgbClr val="F8FAFC"/>
                 </a:solidFill>
@@ -7196,7 +7173,7 @@
           <a:noFill/>
         </p:spPr>
         <p:txBody>
-          <a:bodyPr wrap="square">
+          <a:bodyPr wrap="none" lIns="0" tIns="0" rIns="0" bIns="0">
             <a:spAutoFit/>
           </a:bodyPr>
           <a:lstStyle/>
@@ -7232,21 +7209,21 @@
           <a:noFill/>
         </p:spPr>
         <p:txBody>
-          <a:bodyPr wrap="square">
+          <a:bodyPr wrap="none" lIns="0" tIns="0" rIns="0" bIns="0">
             <a:spAutoFit/>
           </a:bodyPr>
           <a:lstStyle/>
           <a:p>
             <a:pPr>
-              <a:defRPr sz="1000">
-                <a:solidFill>
-                  <a:srgbClr val="64748B"/>
+              <a:defRPr sz="950">
+                <a:solidFill>
+                  <a:srgbClr val="94A3B8"/>
                 </a:solidFill>
                 <a:latin typeface="Segoe UI"/>
               </a:defRPr>
             </a:pPr>
             <a:r>
-              <a:t>Christopher GILLERON  |  The North Face E-Commerce (ML Non Supervisé &amp; NLP)  |  Certification CDSD Bloc 3</a:t>
+              <a:t>Christopher GILLERON  |  The North Face E-Commerce (ML Non Supervisé &amp; NLP)  |  Certification CDSD Bloc 3  |  Temps alloué : 5 min</a:t>
             </a:r>
           </a:p>
         </p:txBody>
@@ -7260,7 +7237,7 @@
         <p:spPr>
           <a:xfrm>
             <a:off x="731520" y="1371600"/>
-            <a:ext cx="5212080" cy="4754880"/>
+            <a:ext cx="5212080" cy="4846320"/>
           </a:xfrm>
           <a:prstGeom prst="roundRect">
             <a:avLst/>
@@ -7268,7 +7245,7 @@
           <a:solidFill>
             <a:srgbClr val="1E293B"/>
           </a:solidFill>
-          <a:ln w="19050">
+          <a:ln w="12700">
             <a:solidFill>
               <a:srgbClr val="334155"/>
             </a:solidFill>
@@ -7304,8 +7281,8 @@
         </p:nvSpPr>
         <p:spPr>
           <a:xfrm>
-            <a:off x="914400" y="1536192"/>
-            <a:ext cx="4846320" cy="365760"/>
+            <a:off x="914400" y="1554480"/>
+            <a:ext cx="4846320" cy="4480560"/>
           </a:xfrm>
           <a:prstGeom prst="rect">
             <a:avLst/>
@@ -7319,47 +7296,25 @@
           <a:lstStyle/>
           <a:p>
             <a:pPr>
-              <a:defRPr sz="1100" b="1">
-                <a:solidFill>
-                  <a:srgbClr val="F43F5E"/>
-                </a:solidFill>
-                <a:latin typeface="Segoe UI"/>
+              <a:defRPr sz="1300" b="1">
+                <a:solidFill>
+                  <a:srgbClr val="F97316"/>
+                </a:solidFill>
               </a:defRPr>
             </a:pPr>
             <a:r>
               <a:t>TRUNCATEDSVD &amp; TOPIC_ENCODED_DF</a:t>
             </a:r>
           </a:p>
-        </p:txBody>
-      </p:sp>
-      <p:sp>
-        <p:nvSpPr>
-          <p:cNvPr id="9" name="TextBox 8"/>
-          <p:cNvSpPr txBox="1"/>
-          <p:nvPr/>
-        </p:nvSpPr>
-        <p:spPr>
-          <a:xfrm>
-            <a:off x="914400" y="1920240"/>
-            <a:ext cx="4846320" cy="4023360"/>
-          </a:xfrm>
-          <a:prstGeom prst="rect">
-            <a:avLst/>
-          </a:prstGeom>
-          <a:noFill/>
-        </p:spPr>
-        <p:txBody>
-          <a:bodyPr wrap="square">
-            <a:spAutoFit/>
-          </a:bodyPr>
-          <a:lstStyle/>
-          <a:p>
-            <a:pPr>
-              <a:defRPr sz="1000" b="1">
-                <a:solidFill>
-                  <a:srgbClr val="F43F5E"/>
-                </a:solidFill>
-                <a:latin typeface="Segoe UI"/>
+          <a:p>
+            <a:pPr>
+              <a:spcBef>
+                <a:spcPts val="800"/>
+              </a:spcBef>
+              <a:defRPr b="1" sz="1050">
+                <a:solidFill>
+                  <a:srgbClr val="F8FAFC"/>
+                </a:solidFill>
               </a:defRPr>
             </a:pPr>
             <a:r>
@@ -7368,24 +7323,25 @@
           </a:p>
           <a:p>
             <a:pPr>
-              <a:defRPr sz="900">
+              <a:defRPr sz="950">
+                <a:solidFill>
+                  <a:srgbClr val="94A3B8"/>
+                </a:solidFill>
+              </a:defRPr>
+            </a:pPr>
+            <a:r>
+              <a:t>Un vêtement peut être à la fois imperméable, thermique et urbain. LSA permet l'appartenance multi-thématique continue.</a:t>
+            </a:r>
+          </a:p>
+          <a:p>
+            <a:pPr>
+              <a:spcBef>
+                <a:spcPts val="800"/>
+              </a:spcBef>
+              <a:defRPr b="1" sz="1050">
                 <a:solidFill>
                   <a:srgbClr val="F8FAFC"/>
                 </a:solidFill>
-                <a:latin typeface="Segoe UI"/>
-              </a:defRPr>
-            </a:pPr>
-            <a:r>
-              <a:t>Un vêtement peut être à la fois imperméable, thermique et urbain. LSA permet l'appartenance multi-thématique.</a:t>
-            </a:r>
-          </a:p>
-          <a:p>
-            <a:pPr>
-              <a:defRPr sz="1000" b="1">
-                <a:solidFill>
-                  <a:srgbClr val="F43F5E"/>
-                </a:solidFill>
-                <a:latin typeface="Segoe UI"/>
               </a:defRPr>
             </a:pPr>
             <a:r>
@@ -7394,24 +7350,25 @@
           </a:p>
           <a:p>
             <a:pPr>
-              <a:defRPr sz="900">
+              <a:defRPr sz="950">
+                <a:solidFill>
+                  <a:srgbClr val="94A3B8"/>
+                </a:solidFill>
+              </a:defRPr>
+            </a:pPr>
+            <a:r>
+              <a:t>Décomposition matricielle en 15 composantes singulières latentes (n_components=15) capturant les cooccurrences lexicales profondes.</a:t>
+            </a:r>
+          </a:p>
+          <a:p>
+            <a:pPr>
+              <a:spcBef>
+                <a:spcPts val="800"/>
+              </a:spcBef>
+              <a:defRPr b="1" sz="1050">
                 <a:solidFill>
                   <a:srgbClr val="F8FAFC"/>
                 </a:solidFill>
-                <a:latin typeface="Segoe UI"/>
-              </a:defRPr>
-            </a:pPr>
-            <a:r>
-              <a:t>Décomposition en 15 composantes singulières latentes (n_components=15) capturant les cooccurrences profondes.</a:t>
-            </a:r>
-          </a:p>
-          <a:p>
-            <a:pPr>
-              <a:defRPr sz="1000" b="1">
-                <a:solidFill>
-                  <a:srgbClr val="F43F5E"/>
-                </a:solidFill>
-                <a:latin typeface="Segoe UI"/>
               </a:defRPr>
             </a:pPr>
             <a:r>
@@ -7420,55 +7377,55 @@
           </a:p>
           <a:p>
             <a:pPr>
-              <a:defRPr sz="900">
+              <a:defRPr sz="950">
+                <a:solidFill>
+                  <a:srgbClr val="94A3B8"/>
+                </a:solidFill>
+              </a:defRPr>
+            </a:pPr>
+            <a:r>
+              <a:t>Matrice encodée enregistrée dans la variable officielle 'topic_encoded_df' exigée par le brief.</a:t>
+            </a:r>
+          </a:p>
+          <a:p>
+            <a:pPr>
+              <a:spcBef>
+                <a:spcPts val="800"/>
+              </a:spcBef>
+              <a:defRPr b="1" sz="1050">
                 <a:solidFill>
                   <a:srgbClr val="F8FAFC"/>
                 </a:solidFill>
-                <a:latin typeface="Segoe UI"/>
-              </a:defRPr>
-            </a:pPr>
-            <a:r>
-              <a:t>Matrice encodée enregistrée dans la variable officielle 'topic_encoded_df'.</a:t>
-            </a:r>
-          </a:p>
-          <a:p>
-            <a:pPr>
-              <a:defRPr sz="1000" b="1">
-                <a:solidFill>
-                  <a:srgbClr val="F43F5E"/>
-                </a:solidFill>
-                <a:latin typeface="Segoe UI"/>
-              </a:defRPr>
-            </a:pPr>
-            <a:r>
-              <a:t>Extraction du main_topic :</a:t>
-            </a:r>
-          </a:p>
-          <a:p>
-            <a:pPr>
-              <a:defRPr sz="900">
-                <a:solidFill>
-                  <a:srgbClr val="F8FAFC"/>
-                </a:solidFill>
-                <a:latin typeface="Segoe UI"/>
-              </a:defRPr>
-            </a:pPr>
-            <a:r>
-              <a:t>Attribution du thème principal dominant par produit via idxmax().</a:t>
-            </a:r>
-          </a:p>
-        </p:txBody>
-      </p:sp>
-      <p:sp>
-        <p:nvSpPr>
-          <p:cNvPr id="10" name="Rounded Rectangle 9"/>
+              </a:defRPr>
+            </a:pPr>
+            <a:r>
+              <a:t>Attribution du Main Topic :</a:t>
+            </a:r>
+          </a:p>
+          <a:p>
+            <a:pPr>
+              <a:defRPr sz="950">
+                <a:solidFill>
+                  <a:srgbClr val="94A3B8"/>
+                </a:solidFill>
+              </a:defRPr>
+            </a:pPr>
+            <a:r>
+              <a:t>Attribution du thème principal dominant par produit via idxmax() pour guider la restructuration du catalogue e-commerce.</a:t>
+            </a:r>
+          </a:p>
+        </p:txBody>
+      </p:sp>
+      <p:sp>
+        <p:nvSpPr>
+          <p:cNvPr id="9" name="Rounded Rectangle 8"/>
           <p:cNvSpPr/>
           <p:nvPr/>
         </p:nvSpPr>
         <p:spPr>
           <a:xfrm>
             <a:off x="6217920" y="1371600"/>
-            <a:ext cx="5242255" cy="4754880"/>
+            <a:ext cx="5242255" cy="4846320"/>
           </a:xfrm>
           <a:prstGeom prst="roundRect">
             <a:avLst/>
@@ -7476,7 +7433,7 @@
           <a:solidFill>
             <a:srgbClr val="1E293B"/>
           </a:solidFill>
-          <a:ln w="19050">
+          <a:ln w="12700">
             <a:solidFill>
               <a:srgbClr val="334155"/>
             </a:solidFill>
@@ -7506,14 +7463,59 @@
       </p:sp>
       <p:sp>
         <p:nvSpPr>
+          <p:cNvPr id="10" name="Rounded Rectangle 9"/>
+          <p:cNvSpPr/>
+          <p:nvPr/>
+        </p:nvSpPr>
+        <p:spPr>
+          <a:xfrm>
+            <a:off x="6400800" y="1554480"/>
+            <a:ext cx="2377440" cy="2194560"/>
+          </a:xfrm>
+          <a:prstGeom prst="roundRect">
+            <a:avLst/>
+          </a:prstGeom>
+          <a:solidFill>
+            <a:srgbClr val="FFFFFF"/>
+          </a:solidFill>
+          <a:ln w="12700">
+            <a:solidFill>
+              <a:srgbClr val="CBD5E1"/>
+            </a:solidFill>
+          </a:ln>
+        </p:spPr>
+        <p:style>
+          <a:lnRef idx="1">
+            <a:schemeClr val="accent1"/>
+          </a:lnRef>
+          <a:fillRef idx="3">
+            <a:schemeClr val="accent1"/>
+          </a:fillRef>
+          <a:effectRef idx="2">
+            <a:schemeClr val="accent1"/>
+          </a:effectRef>
+          <a:fontRef idx="minor">
+            <a:schemeClr val="lt1"/>
+          </a:fontRef>
+        </p:style>
+        <p:txBody>
+          <a:bodyPr rtlCol="0" anchor="ctr"/>
+          <a:lstStyle/>
+          <a:p>
+            <a:pPr algn="ctr"/>
+          </a:p>
+        </p:txBody>
+      </p:sp>
+      <p:sp>
+        <p:nvSpPr>
           <p:cNvPr id="11" name="TextBox 10"/>
           <p:cNvSpPr txBox="1"/>
           <p:nvPr/>
         </p:nvSpPr>
         <p:spPr>
           <a:xfrm>
-            <a:off x="6400800" y="1536192"/>
-            <a:ext cx="4876495" cy="365760"/>
+            <a:off x="6446520" y="1600200"/>
+            <a:ext cx="2286000" cy="274320"/>
           </a:xfrm>
           <a:prstGeom prst="rect">
             <a:avLst/>
@@ -7521,35 +7523,103 @@
           <a:noFill/>
         </p:spPr>
         <p:txBody>
-          <a:bodyPr wrap="square">
+          <a:bodyPr wrap="none" lIns="0" tIns="0" rIns="0" bIns="0">
             <a:spAutoFit/>
           </a:bodyPr>
           <a:lstStyle/>
           <a:p>
             <a:pPr>
-              <a:defRPr sz="1100" b="1">
-                <a:solidFill>
-                  <a:srgbClr val="F43F5E"/>
-                </a:solidFill>
-                <a:latin typeface="Segoe UI"/>
-              </a:defRPr>
-            </a:pPr>
-            <a:r>
-              <a:t>LES 4 NOUVELLES CATÉGORIES IDENTIFIÉES</a:t>
-            </a:r>
-          </a:p>
-        </p:txBody>
-      </p:sp>
-      <p:sp>
-        <p:nvSpPr>
-          <p:cNvPr id="12" name="TextBox 11"/>
+              <a:defRPr sz="850" b="1">
+                <a:solidFill>
+                  <a:srgbClr val="0F172A"/>
+                </a:solidFill>
+              </a:defRPr>
+            </a:pPr>
+            <a:r>
+              <a:t>Thème 0 : Imperméabilité &amp; Coques</a:t>
+            </a:r>
+          </a:p>
+        </p:txBody>
+      </p:sp>
+      <p:pic>
+        <p:nvPicPr>
+          <p:cNvPr id="12" name="Picture 11" descr="northface_c11_6.png"/>
+          <p:cNvPicPr>
+            <a:picLocks noChangeAspect="1"/>
+          </p:cNvPicPr>
+          <p:nvPr/>
+        </p:nvPicPr>
+        <p:blipFill>
+          <a:blip r:embed="rId2"/>
+          <a:stretch>
+            <a:fillRect/>
+          </a:stretch>
+        </p:blipFill>
+        <p:spPr>
+          <a:xfrm>
+            <a:off x="6446520" y="1920240"/>
+            <a:ext cx="2286000" cy="1737360"/>
+          </a:xfrm>
+          <a:prstGeom prst="rect">
+            <a:avLst/>
+          </a:prstGeom>
+        </p:spPr>
+      </p:pic>
+      <p:sp>
+        <p:nvSpPr>
+          <p:cNvPr id="13" name="Rounded Rectangle 12"/>
+          <p:cNvSpPr/>
+          <p:nvPr/>
+        </p:nvSpPr>
+        <p:spPr>
+          <a:xfrm>
+            <a:off x="8915400" y="1554480"/>
+            <a:ext cx="2377440" cy="2194560"/>
+          </a:xfrm>
+          <a:prstGeom prst="roundRect">
+            <a:avLst/>
+          </a:prstGeom>
+          <a:solidFill>
+            <a:srgbClr val="FFFFFF"/>
+          </a:solidFill>
+          <a:ln w="12700">
+            <a:solidFill>
+              <a:srgbClr val="CBD5E1"/>
+            </a:solidFill>
+          </a:ln>
+        </p:spPr>
+        <p:style>
+          <a:lnRef idx="1">
+            <a:schemeClr val="accent1"/>
+          </a:lnRef>
+          <a:fillRef idx="3">
+            <a:schemeClr val="accent1"/>
+          </a:fillRef>
+          <a:effectRef idx="2">
+            <a:schemeClr val="accent1"/>
+          </a:effectRef>
+          <a:fontRef idx="minor">
+            <a:schemeClr val="lt1"/>
+          </a:fontRef>
+        </p:style>
+        <p:txBody>
+          <a:bodyPr rtlCol="0" anchor="ctr"/>
+          <a:lstStyle/>
+          <a:p>
+            <a:pPr algn="ctr"/>
+          </a:p>
+        </p:txBody>
+      </p:sp>
+      <p:sp>
+        <p:nvSpPr>
+          <p:cNvPr id="14" name="TextBox 13"/>
           <p:cNvSpPr txBox="1"/>
           <p:nvPr/>
         </p:nvSpPr>
         <p:spPr>
           <a:xfrm>
-            <a:off x="6400800" y="1920240"/>
-            <a:ext cx="4876495" cy="4023360"/>
+            <a:off x="8961120" y="1600200"/>
+            <a:ext cx="2286000" cy="274320"/>
           </a:xfrm>
           <a:prstGeom prst="rect">
             <a:avLst/>
@@ -7557,116 +7627,256 @@
           <a:noFill/>
         </p:spPr>
         <p:txBody>
-          <a:bodyPr wrap="square">
+          <a:bodyPr wrap="none" lIns="0" tIns="0" rIns="0" bIns="0">
             <a:spAutoFit/>
           </a:bodyPr>
           <a:lstStyle/>
           <a:p>
             <a:pPr>
-              <a:defRPr sz="1000" b="1">
-                <a:solidFill>
-                  <a:srgbClr val="38BDF8"/>
-                </a:solidFill>
-                <a:latin typeface="Segoe UI"/>
-              </a:defRPr>
-            </a:pPr>
-            <a:r>
-              <a:t>1. Imperméabilité &amp; Coques :</a:t>
-            </a:r>
-          </a:p>
-          <a:p>
-            <a:pPr>
-              <a:defRPr sz="900">
-                <a:solidFill>
-                  <a:srgbClr val="F8FAFC"/>
-                </a:solidFill>
-                <a:latin typeface="Segoe UI"/>
-              </a:defRPr>
-            </a:pPr>
-            <a:r>
-              <a:t>Mots LSA : 'waterproof', 'jacket', 'breathable', 'hood', 'seam' $_x000D_ightarrow$ Technologie DryVent / Gore-Tex.</a:t>
-            </a:r>
-          </a:p>
-          <a:p>
-            <a:pPr>
-              <a:defRPr sz="1000" b="1">
-                <a:solidFill>
-                  <a:srgbClr val="38BDF8"/>
-                </a:solidFill>
-                <a:latin typeface="Segoe UI"/>
-              </a:defRPr>
-            </a:pPr>
-            <a:r>
-              <a:t>2. Isolation &amp; Grand Froid :</a:t>
-            </a:r>
-          </a:p>
-          <a:p>
-            <a:pPr>
-              <a:defRPr sz="900">
-                <a:solidFill>
-                  <a:srgbClr val="F8FAFC"/>
-                </a:solidFill>
-                <a:latin typeface="Segoe UI"/>
-              </a:defRPr>
-            </a:pPr>
-            <a:r>
-              <a:t>Mots LSA : 'fleece', 'down', 'insulation', 'warmth', 'thermal' $_x000D_ightarrow$ Doudounes et polaires d'expédition.</a:t>
-            </a:r>
-          </a:p>
-          <a:p>
-            <a:pPr>
-              <a:defRPr sz="1000" b="1">
-                <a:solidFill>
-                  <a:srgbClr val="38BDF8"/>
-                </a:solidFill>
-                <a:latin typeface="Segoe UI"/>
-              </a:defRPr>
-            </a:pPr>
-            <a:r>
-              <a:t>3. Bagagerie &amp; Portage :</a:t>
-            </a:r>
-          </a:p>
-          <a:p>
-            <a:pPr>
-              <a:defRPr sz="900">
-                <a:solidFill>
-                  <a:srgbClr val="F8FAFC"/>
-                </a:solidFill>
-                <a:latin typeface="Segoe UI"/>
-              </a:defRPr>
-            </a:pPr>
-            <a:r>
-              <a:t>Mots LSA : 'pack', 'backpack', 'pocket', 'compartment', 'strap' $_x000D_ightarrow$ Équipement trekking et voyage.</a:t>
-            </a:r>
-          </a:p>
-          <a:p>
-            <a:pPr>
-              <a:defRPr sz="1000" b="1">
-                <a:solidFill>
-                  <a:srgbClr val="38BDF8"/>
-                </a:solidFill>
-                <a:latin typeface="Segoe UI"/>
-              </a:defRPr>
-            </a:pPr>
-            <a:r>
-              <a:t>4. Trail &amp; Respirabilité Active :</a:t>
-            </a:r>
-          </a:p>
-          <a:p>
-            <a:pPr>
-              <a:defRPr sz="900">
-                <a:solidFill>
-                  <a:srgbClr val="F8FAFC"/>
-                </a:solidFill>
-                <a:latin typeface="Segoe UI"/>
-              </a:defRPr>
-            </a:pPr>
-            <a:r>
-              <a:t>Mots LSA : 'short', 'shirt', 'lightweight', 'stretch', 'quick-dry' $_x000D_ightarrow$ Gamme athlétique et course.</a:t>
-            </a:r>
-          </a:p>
-        </p:txBody>
-      </p:sp>
+              <a:defRPr sz="850" b="1">
+                <a:solidFill>
+                  <a:srgbClr val="0F172A"/>
+                </a:solidFill>
+              </a:defRPr>
+            </a:pPr>
+            <a:r>
+              <a:t>Thème 1 : Isolation &amp; Grand Froid</a:t>
+            </a:r>
+          </a:p>
+        </p:txBody>
+      </p:sp>
+      <p:pic>
+        <p:nvPicPr>
+          <p:cNvPr id="15" name="Picture 14" descr="northface_c11_7.png"/>
+          <p:cNvPicPr>
+            <a:picLocks noChangeAspect="1"/>
+          </p:cNvPicPr>
+          <p:nvPr/>
+        </p:nvPicPr>
+        <p:blipFill>
+          <a:blip r:embed="rId3"/>
+          <a:stretch>
+            <a:fillRect/>
+          </a:stretch>
+        </p:blipFill>
+        <p:spPr>
+          <a:xfrm>
+            <a:off x="8961120" y="1920240"/>
+            <a:ext cx="2286000" cy="1737360"/>
+          </a:xfrm>
+          <a:prstGeom prst="rect">
+            <a:avLst/>
+          </a:prstGeom>
+        </p:spPr>
+      </p:pic>
+      <p:sp>
+        <p:nvSpPr>
+          <p:cNvPr id="16" name="Rounded Rectangle 15"/>
+          <p:cNvSpPr/>
+          <p:nvPr/>
+        </p:nvSpPr>
+        <p:spPr>
+          <a:xfrm>
+            <a:off x="6400800" y="3840480"/>
+            <a:ext cx="2377440" cy="2194560"/>
+          </a:xfrm>
+          <a:prstGeom prst="roundRect">
+            <a:avLst/>
+          </a:prstGeom>
+          <a:solidFill>
+            <a:srgbClr val="FFFFFF"/>
+          </a:solidFill>
+          <a:ln w="12700">
+            <a:solidFill>
+              <a:srgbClr val="CBD5E1"/>
+            </a:solidFill>
+          </a:ln>
+        </p:spPr>
+        <p:style>
+          <a:lnRef idx="1">
+            <a:schemeClr val="accent1"/>
+          </a:lnRef>
+          <a:fillRef idx="3">
+            <a:schemeClr val="accent1"/>
+          </a:fillRef>
+          <a:effectRef idx="2">
+            <a:schemeClr val="accent1"/>
+          </a:effectRef>
+          <a:fontRef idx="minor">
+            <a:schemeClr val="lt1"/>
+          </a:fontRef>
+        </p:style>
+        <p:txBody>
+          <a:bodyPr rtlCol="0" anchor="ctr"/>
+          <a:lstStyle/>
+          <a:p>
+            <a:pPr algn="ctr"/>
+          </a:p>
+        </p:txBody>
+      </p:sp>
+      <p:sp>
+        <p:nvSpPr>
+          <p:cNvPr id="17" name="TextBox 16"/>
+          <p:cNvSpPr txBox="1"/>
+          <p:nvPr/>
+        </p:nvSpPr>
+        <p:spPr>
+          <a:xfrm>
+            <a:off x="6446520" y="3886200"/>
+            <a:ext cx="2286000" cy="274320"/>
+          </a:xfrm>
+          <a:prstGeom prst="rect">
+            <a:avLst/>
+          </a:prstGeom>
+          <a:noFill/>
+        </p:spPr>
+        <p:txBody>
+          <a:bodyPr wrap="none" lIns="0" tIns="0" rIns="0" bIns="0">
+            <a:spAutoFit/>
+          </a:bodyPr>
+          <a:lstStyle/>
+          <a:p>
+            <a:pPr>
+              <a:defRPr sz="850" b="1">
+                <a:solidFill>
+                  <a:srgbClr val="0F172A"/>
+                </a:solidFill>
+              </a:defRPr>
+            </a:pPr>
+            <a:r>
+              <a:t>Thème 2 : Bagagerie &amp; Portage</a:t>
+            </a:r>
+          </a:p>
+        </p:txBody>
+      </p:sp>
+      <p:pic>
+        <p:nvPicPr>
+          <p:cNvPr id="18" name="Picture 17" descr="northface_c11_8.png"/>
+          <p:cNvPicPr>
+            <a:picLocks noChangeAspect="1"/>
+          </p:cNvPicPr>
+          <p:nvPr/>
+        </p:nvPicPr>
+        <p:blipFill>
+          <a:blip r:embed="rId4"/>
+          <a:stretch>
+            <a:fillRect/>
+          </a:stretch>
+        </p:blipFill>
+        <p:spPr>
+          <a:xfrm>
+            <a:off x="6446520" y="4206240"/>
+            <a:ext cx="2286000" cy="1737360"/>
+          </a:xfrm>
+          <a:prstGeom prst="rect">
+            <a:avLst/>
+          </a:prstGeom>
+        </p:spPr>
+      </p:pic>
+      <p:sp>
+        <p:nvSpPr>
+          <p:cNvPr id="19" name="Rounded Rectangle 18"/>
+          <p:cNvSpPr/>
+          <p:nvPr/>
+        </p:nvSpPr>
+        <p:spPr>
+          <a:xfrm>
+            <a:off x="8915400" y="3840480"/>
+            <a:ext cx="2377440" cy="2194560"/>
+          </a:xfrm>
+          <a:prstGeom prst="roundRect">
+            <a:avLst/>
+          </a:prstGeom>
+          <a:solidFill>
+            <a:srgbClr val="FFFFFF"/>
+          </a:solidFill>
+          <a:ln w="12700">
+            <a:solidFill>
+              <a:srgbClr val="CBD5E1"/>
+            </a:solidFill>
+          </a:ln>
+        </p:spPr>
+        <p:style>
+          <a:lnRef idx="1">
+            <a:schemeClr val="accent1"/>
+          </a:lnRef>
+          <a:fillRef idx="3">
+            <a:schemeClr val="accent1"/>
+          </a:fillRef>
+          <a:effectRef idx="2">
+            <a:schemeClr val="accent1"/>
+          </a:effectRef>
+          <a:fontRef idx="minor">
+            <a:schemeClr val="lt1"/>
+          </a:fontRef>
+        </p:style>
+        <p:txBody>
+          <a:bodyPr rtlCol="0" anchor="ctr"/>
+          <a:lstStyle/>
+          <a:p>
+            <a:pPr algn="ctr"/>
+          </a:p>
+        </p:txBody>
+      </p:sp>
+      <p:sp>
+        <p:nvSpPr>
+          <p:cNvPr id="20" name="TextBox 19"/>
+          <p:cNvSpPr txBox="1"/>
+          <p:nvPr/>
+        </p:nvSpPr>
+        <p:spPr>
+          <a:xfrm>
+            <a:off x="8961120" y="3886200"/>
+            <a:ext cx="2286000" cy="274320"/>
+          </a:xfrm>
+          <a:prstGeom prst="rect">
+            <a:avLst/>
+          </a:prstGeom>
+          <a:noFill/>
+        </p:spPr>
+        <p:txBody>
+          <a:bodyPr wrap="none" lIns="0" tIns="0" rIns="0" bIns="0">
+            <a:spAutoFit/>
+          </a:bodyPr>
+          <a:lstStyle/>
+          <a:p>
+            <a:pPr>
+              <a:defRPr sz="850" b="1">
+                <a:solidFill>
+                  <a:srgbClr val="0F172A"/>
+                </a:solidFill>
+              </a:defRPr>
+            </a:pPr>
+            <a:r>
+              <a:t>Thème 3 : Trail &amp; Respirabilité Active</a:t>
+            </a:r>
+          </a:p>
+        </p:txBody>
+      </p:sp>
+      <p:pic>
+        <p:nvPicPr>
+          <p:cNvPr id="21" name="Picture 20" descr="northface_c11_9.png"/>
+          <p:cNvPicPr>
+            <a:picLocks noChangeAspect="1"/>
+          </p:cNvPicPr>
+          <p:nvPr/>
+        </p:nvPicPr>
+        <p:blipFill>
+          <a:blip r:embed="rId5"/>
+          <a:stretch>
+            <a:fillRect/>
+          </a:stretch>
+        </p:blipFill>
+        <p:spPr>
+          <a:xfrm>
+            <a:off x="8961120" y="4206240"/>
+            <a:ext cx="2286000" cy="1737360"/>
+          </a:xfrm>
+          <a:prstGeom prst="rect">
+            <a:avLst/>
+          </a:prstGeom>
+        </p:spPr>
+      </p:pic>
     </p:spTree>
   </p:cSld>
   <p:clrMapOvr>
@@ -7745,7 +7955,7 @@
           <a:noFill/>
         </p:spPr>
         <p:txBody>
-          <a:bodyPr wrap="square">
+          <a:bodyPr wrap="square" lIns="0" tIns="0" rIns="0" bIns="0">
             <a:spAutoFit/>
           </a:bodyPr>
           <a:lstStyle/>
@@ -7753,7 +7963,7 @@
             <a:pPr>
               <a:defRPr sz="1100" b="1">
                 <a:solidFill>
-                  <a:srgbClr val="F43F5E"/>
+                  <a:srgbClr val="F97316"/>
                 </a:solidFill>
                 <a:latin typeface="Segoe UI"/>
               </a:defRPr>
@@ -7781,13 +7991,13 @@
           <a:noFill/>
         </p:spPr>
         <p:txBody>
-          <a:bodyPr wrap="square">
+          <a:bodyPr wrap="square" lIns="0" tIns="0" rIns="0" bIns="0">
             <a:spAutoFit/>
           </a:bodyPr>
           <a:lstStyle/>
           <a:p>
             <a:pPr>
-              <a:defRPr sz="2100" b="1">
+              <a:defRPr sz="1800" b="1">
                 <a:solidFill>
                   <a:srgbClr val="F8FAFC"/>
                 </a:solidFill>
@@ -7817,7 +8027,7 @@
           <a:noFill/>
         </p:spPr>
         <p:txBody>
-          <a:bodyPr wrap="square">
+          <a:bodyPr wrap="none" lIns="0" tIns="0" rIns="0" bIns="0">
             <a:spAutoFit/>
           </a:bodyPr>
           <a:lstStyle/>
@@ -7853,21 +8063,21 @@
           <a:noFill/>
         </p:spPr>
         <p:txBody>
-          <a:bodyPr wrap="square">
+          <a:bodyPr wrap="none" lIns="0" tIns="0" rIns="0" bIns="0">
             <a:spAutoFit/>
           </a:bodyPr>
           <a:lstStyle/>
           <a:p>
             <a:pPr>
-              <a:defRPr sz="1000">
-                <a:solidFill>
-                  <a:srgbClr val="64748B"/>
+              <a:defRPr sz="950">
+                <a:solidFill>
+                  <a:srgbClr val="94A3B8"/>
                 </a:solidFill>
                 <a:latin typeface="Segoe UI"/>
               </a:defRPr>
             </a:pPr>
             <a:r>
-              <a:t>Christopher GILLERON  |  The North Face E-Commerce (ML Non Supervisé &amp; NLP)  |  Certification CDSD Bloc 3</a:t>
+              <a:t>Christopher GILLERON  |  The North Face E-Commerce (ML Non Supervisé &amp; NLP)  |  Certification CDSD Bloc 3  |  Temps alloué : 5 min</a:t>
             </a:r>
           </a:p>
         </p:txBody>
@@ -7881,7 +8091,7 @@
         <p:spPr>
           <a:xfrm>
             <a:off x="731520" y="1371600"/>
-            <a:ext cx="5242255" cy="2377440"/>
+            <a:ext cx="5212080" cy="2286000"/>
           </a:xfrm>
           <a:prstGeom prst="roundRect">
             <a:avLst/>
@@ -7889,9 +8099,9 @@
           <a:solidFill>
             <a:srgbClr val="1E293B"/>
           </a:solidFill>
-          <a:ln w="19050">
+          <a:ln w="12700">
             <a:solidFill>
-              <a:srgbClr val="F43F5E"/>
+              <a:srgbClr val="334155"/>
             </a:solidFill>
           </a:ln>
         </p:spPr>
@@ -7925,8 +8135,8 @@
         </p:nvSpPr>
         <p:spPr>
           <a:xfrm>
-            <a:off x="914400" y="1536192"/>
-            <a:ext cx="4876495" cy="365760"/>
+            <a:off x="914400" y="1508760"/>
+            <a:ext cx="4846320" cy="2011680"/>
           </a:xfrm>
           <a:prstGeom prst="rect">
             <a:avLst/>
@@ -7940,47 +8150,25 @@
           <a:lstStyle/>
           <a:p>
             <a:pPr>
-              <a:defRPr sz="1100" b="1">
-                <a:solidFill>
-                  <a:srgbClr val="F43F5E"/>
-                </a:solidFill>
-                <a:latin typeface="Segoe UI"/>
+              <a:defRPr sz="1200" b="1">
+                <a:solidFill>
+                  <a:srgbClr val="F97316"/>
+                </a:solidFill>
               </a:defRPr>
             </a:pPr>
             <a:r>
               <a:t>01 | CARROUSEL 'PRODUITS SIMILAIRES'</a:t>
             </a:r>
           </a:p>
-        </p:txBody>
-      </p:sp>
-      <p:sp>
-        <p:nvSpPr>
-          <p:cNvPr id="9" name="TextBox 8"/>
-          <p:cNvSpPr txBox="1"/>
-          <p:nvPr/>
-        </p:nvSpPr>
-        <p:spPr>
-          <a:xfrm>
-            <a:off x="914400" y="1874520"/>
-            <a:ext cx="4876495" cy="1737360"/>
-          </a:xfrm>
-          <a:prstGeom prst="rect">
-            <a:avLst/>
-          </a:prstGeom>
-          <a:noFill/>
-        </p:spPr>
-        <p:txBody>
-          <a:bodyPr wrap="square">
-            <a:spAutoFit/>
-          </a:bodyPr>
-          <a:lstStyle/>
-          <a:p>
-            <a:pPr>
-              <a:defRPr sz="1000" b="1">
-                <a:solidFill>
-                  <a:srgbClr val="F43F5E"/>
-                </a:solidFill>
-                <a:latin typeface="Segoe UI"/>
+          <a:p>
+            <a:pPr>
+              <a:spcBef>
+                <a:spcPts val="600"/>
+              </a:spcBef>
+              <a:defRPr b="1" sz="1000">
+                <a:solidFill>
+                  <a:srgbClr val="F8FAFC"/>
+                </a:solidFill>
               </a:defRPr>
             </a:pPr>
             <a:r>
@@ -7989,24 +8177,25 @@
           </a:p>
           <a:p>
             <a:pPr>
-              <a:defRPr sz="900">
+              <a:defRPr sz="950">
+                <a:solidFill>
+                  <a:srgbClr val="94A3B8"/>
+                </a:solidFill>
+              </a:defRPr>
+            </a:pPr>
+            <a:r>
+              <a:t>Intégrer le widget find_similar_items() sous chaque fiche produit du site thenorthface.fr.</a:t>
+            </a:r>
+          </a:p>
+          <a:p>
+            <a:pPr>
+              <a:spcBef>
+                <a:spcPts val="400"/>
+              </a:spcBef>
+              <a:defRPr b="1" sz="1000">
                 <a:solidFill>
                   <a:srgbClr val="F8FAFC"/>
                 </a:solidFill>
-                <a:latin typeface="Segoe UI"/>
-              </a:defRPr>
-            </a:pPr>
-            <a:r>
-              <a:t>Intégrer le widget find_similar_items() sous chaque fiche produit du site.</a:t>
-            </a:r>
-          </a:p>
-          <a:p>
-            <a:pPr>
-              <a:defRPr sz="1000" b="1">
-                <a:solidFill>
-                  <a:srgbClr val="F43F5E"/>
-                </a:solidFill>
-                <a:latin typeface="Segoe UI"/>
               </a:defRPr>
             </a:pPr>
             <a:r>
@@ -8015,29 +8204,28 @@
           </a:p>
           <a:p>
             <a:pPr>
-              <a:defRPr sz="900">
-                <a:solidFill>
-                  <a:srgbClr val="F8FAFC"/>
-                </a:solidFill>
-                <a:latin typeface="Segoe UI"/>
-              </a:defRPr>
-            </a:pPr>
-            <a:r>
-              <a:t>Hausse estimée de +12% à +18% du taux de clic et réduction du taux de rebond.</a:t>
-            </a:r>
-          </a:p>
-        </p:txBody>
-      </p:sp>
-      <p:sp>
-        <p:nvSpPr>
-          <p:cNvPr id="10" name="Rounded Rectangle 9"/>
+              <a:defRPr sz="950">
+                <a:solidFill>
+                  <a:srgbClr val="94A3B8"/>
+                </a:solidFill>
+              </a:defRPr>
+            </a:pPr>
+            <a:r>
+              <a:t>Hausse estimée de +12% à +18% du taux de clic et réduction directe du taux de rebond.</a:t>
+            </a:r>
+          </a:p>
+        </p:txBody>
+      </p:sp>
+      <p:sp>
+        <p:nvSpPr>
+          <p:cNvPr id="9" name="Rounded Rectangle 8"/>
           <p:cNvSpPr/>
           <p:nvPr/>
         </p:nvSpPr>
         <p:spPr>
           <a:xfrm>
             <a:off x="6217920" y="1371600"/>
-            <a:ext cx="5242255" cy="2377440"/>
+            <a:ext cx="5212080" cy="2286000"/>
           </a:xfrm>
           <a:prstGeom prst="roundRect">
             <a:avLst/>
@@ -8045,9 +8233,9 @@
           <a:solidFill>
             <a:srgbClr val="1E293B"/>
           </a:solidFill>
-          <a:ln w="19050">
+          <a:ln w="12700">
             <a:solidFill>
-              <a:srgbClr val="38BDF8"/>
+              <a:srgbClr val="334155"/>
             </a:solidFill>
           </a:ln>
         </p:spPr>
@@ -8075,14 +8263,14 @@
       </p:sp>
       <p:sp>
         <p:nvSpPr>
-          <p:cNvPr id="11" name="TextBox 10"/>
+          <p:cNvPr id="10" name="TextBox 9"/>
           <p:cNvSpPr txBox="1"/>
           <p:nvPr/>
         </p:nvSpPr>
         <p:spPr>
           <a:xfrm>
-            <a:off x="6400800" y="1536192"/>
-            <a:ext cx="4876495" cy="365760"/>
+            <a:off x="6400800" y="1508760"/>
+            <a:ext cx="4846320" cy="2011680"/>
           </a:xfrm>
           <a:prstGeom prst="rect">
             <a:avLst/>
@@ -8096,47 +8284,25 @@
           <a:lstStyle/>
           <a:p>
             <a:pPr>
-              <a:defRPr sz="1100" b="1">
-                <a:solidFill>
-                  <a:srgbClr val="F43F5E"/>
-                </a:solidFill>
-                <a:latin typeface="Segoe UI"/>
+              <a:defRPr sz="1200" b="1">
+                <a:solidFill>
+                  <a:srgbClr val="10B981"/>
+                </a:solidFill>
               </a:defRPr>
             </a:pPr>
             <a:r>
               <a:t>02 | REFONTE DE L'ARBORESCENCE DU CATALOGUE</a:t>
             </a:r>
           </a:p>
-        </p:txBody>
-      </p:sp>
-      <p:sp>
-        <p:nvSpPr>
-          <p:cNvPr id="12" name="TextBox 11"/>
-          <p:cNvSpPr txBox="1"/>
-          <p:nvPr/>
-        </p:nvSpPr>
-        <p:spPr>
-          <a:xfrm>
-            <a:off x="6400800" y="1874520"/>
-            <a:ext cx="4876495" cy="1737360"/>
-          </a:xfrm>
-          <a:prstGeom prst="rect">
-            <a:avLst/>
-          </a:prstGeom>
-          <a:noFill/>
-        </p:spPr>
-        <p:txBody>
-          <a:bodyPr wrap="square">
-            <a:spAutoFit/>
-          </a:bodyPr>
-          <a:lstStyle/>
-          <a:p>
-            <a:pPr>
-              <a:defRPr sz="1000" b="1">
-                <a:solidFill>
-                  <a:srgbClr val="38BDF8"/>
-                </a:solidFill>
-                <a:latin typeface="Segoe UI"/>
+          <a:p>
+            <a:pPr>
+              <a:spcBef>
+                <a:spcPts val="600"/>
+              </a:spcBef>
+              <a:defRPr b="1" sz="1000">
+                <a:solidFill>
+                  <a:srgbClr val="F8FAFC"/>
+                </a:solidFill>
               </a:defRPr>
             </a:pPr>
             <a:r>
@@ -8145,24 +8311,25 @@
           </a:p>
           <a:p>
             <a:pPr>
-              <a:defRPr sz="900">
+              <a:defRPr sz="950">
+                <a:solidFill>
+                  <a:srgbClr val="94A3B8"/>
+                </a:solidFill>
+              </a:defRPr>
+            </a:pPr>
+            <a:r>
+              <a:t>Remplacer la navigation rigide Homme/Femme par une navigation intuitive par activité (Grand Froid, Bivouac, Trail).</a:t>
+            </a:r>
+          </a:p>
+          <a:p>
+            <a:pPr>
+              <a:spcBef>
+                <a:spcPts val="400"/>
+              </a:spcBef>
+              <a:defRPr b="1" sz="1000">
                 <a:solidFill>
                   <a:srgbClr val="F8FAFC"/>
                 </a:solidFill>
-                <a:latin typeface="Segoe UI"/>
-              </a:defRPr>
-            </a:pPr>
-            <a:r>
-              <a:t>Remplacer la navigation rigide Homme/Femme par une navigation par activité (Grand Froid, Bivouac, Trail).</a:t>
-            </a:r>
-          </a:p>
-          <a:p>
-            <a:pPr>
-              <a:defRPr sz="1000" b="1">
-                <a:solidFill>
-                  <a:srgbClr val="38BDF8"/>
-                </a:solidFill>
-                <a:latin typeface="Segoe UI"/>
               </a:defRPr>
             </a:pPr>
             <a:r>
@@ -8171,11 +8338,10 @@
           </a:p>
           <a:p>
             <a:pPr>
-              <a:defRPr sz="900">
-                <a:solidFill>
-                  <a:srgbClr val="F8FAFC"/>
-                </a:solidFill>
-                <a:latin typeface="Segoe UI"/>
+              <a:defRPr sz="950">
+                <a:solidFill>
+                  <a:srgbClr val="94A3B8"/>
+                </a:solidFill>
               </a:defRPr>
             </a:pPr>
             <a:r>
@@ -8186,14 +8352,14 @@
       </p:sp>
       <p:sp>
         <p:nvSpPr>
-          <p:cNvPr id="13" name="Rounded Rectangle 12"/>
+          <p:cNvPr id="11" name="Rounded Rectangle 10"/>
           <p:cNvSpPr/>
           <p:nvPr/>
         </p:nvSpPr>
         <p:spPr>
           <a:xfrm>
             <a:off x="731520" y="3931920"/>
-            <a:ext cx="5242255" cy="2377440"/>
+            <a:ext cx="5212080" cy="2286000"/>
           </a:xfrm>
           <a:prstGeom prst="roundRect">
             <a:avLst/>
@@ -8201,9 +8367,9 @@
           <a:solidFill>
             <a:srgbClr val="1E293B"/>
           </a:solidFill>
-          <a:ln w="19050">
+          <a:ln w="12700">
             <a:solidFill>
-              <a:srgbClr val="F59E0B"/>
+              <a:srgbClr val="334155"/>
             </a:solidFill>
           </a:ln>
         </p:spPr>
@@ -8231,14 +8397,14 @@
       </p:sp>
       <p:sp>
         <p:nvSpPr>
-          <p:cNvPr id="14" name="TextBox 13"/>
+          <p:cNvPr id="12" name="TextBox 11"/>
           <p:cNvSpPr txBox="1"/>
           <p:nvPr/>
         </p:nvSpPr>
         <p:spPr>
           <a:xfrm>
-            <a:off x="914400" y="4096512"/>
-            <a:ext cx="4876495" cy="365760"/>
+            <a:off x="914400" y="4069080"/>
+            <a:ext cx="4846320" cy="2011680"/>
           </a:xfrm>
           <a:prstGeom prst="rect">
             <a:avLst/>
@@ -8252,47 +8418,25 @@
           <a:lstStyle/>
           <a:p>
             <a:pPr>
-              <a:defRPr sz="1100" b="1">
-                <a:solidFill>
-                  <a:srgbClr val="F43F5E"/>
-                </a:solidFill>
-                <a:latin typeface="Segoe UI"/>
+              <a:defRPr sz="1200" b="1">
+                <a:solidFill>
+                  <a:srgbClr val="38BDF8"/>
+                </a:solidFill>
               </a:defRPr>
             </a:pPr>
             <a:r>
               <a:t>03 | MICROSERVICE API FASTAPI TEMPS RÉEL</a:t>
             </a:r>
           </a:p>
-        </p:txBody>
-      </p:sp>
-      <p:sp>
-        <p:nvSpPr>
-          <p:cNvPr id="15" name="TextBox 14"/>
-          <p:cNvSpPr txBox="1"/>
-          <p:nvPr/>
-        </p:nvSpPr>
-        <p:spPr>
-          <a:xfrm>
-            <a:off x="914400" y="4434840"/>
-            <a:ext cx="4876495" cy="1737360"/>
-          </a:xfrm>
-          <a:prstGeom prst="rect">
-            <a:avLst/>
-          </a:prstGeom>
-          <a:noFill/>
-        </p:spPr>
-        <p:txBody>
-          <a:bodyPr wrap="square">
-            <a:spAutoFit/>
-          </a:bodyPr>
-          <a:lstStyle/>
-          <a:p>
-            <a:pPr>
-              <a:defRPr sz="1000" b="1">
-                <a:solidFill>
-                  <a:srgbClr val="F59E0B"/>
-                </a:solidFill>
-                <a:latin typeface="Segoe UI"/>
+          <a:p>
+            <a:pPr>
+              <a:spcBef>
+                <a:spcPts val="600"/>
+              </a:spcBef>
+              <a:defRPr b="1" sz="1000">
+                <a:solidFill>
+                  <a:srgbClr val="F8FAFC"/>
+                </a:solidFill>
               </a:defRPr>
             </a:pPr>
             <a:r>
@@ -8301,24 +8445,25 @@
           </a:p>
           <a:p>
             <a:pPr>
-              <a:defRPr sz="900">
+              <a:defRPr sz="950">
+                <a:solidFill>
+                  <a:srgbClr val="94A3B8"/>
+                </a:solidFill>
+              </a:defRPr>
+            </a:pPr>
+            <a:r>
+              <a:t>Exposer les matrices de similarité via une API REST avec cache Redis en mémoire.</a:t>
+            </a:r>
+          </a:p>
+          <a:p>
+            <a:pPr>
+              <a:spcBef>
+                <a:spcPts val="400"/>
+              </a:spcBef>
+              <a:defRPr b="1" sz="1000">
                 <a:solidFill>
                   <a:srgbClr val="F8FAFC"/>
                 </a:solidFill>
-                <a:latin typeface="Segoe UI"/>
-              </a:defRPr>
-            </a:pPr>
-            <a:r>
-              <a:t>Exposer les matrices de similarité via une API REST avec cache Redis en mémoire.</a:t>
-            </a:r>
-          </a:p>
-          <a:p>
-            <a:pPr>
-              <a:defRPr sz="1000" b="1">
-                <a:solidFill>
-                  <a:srgbClr val="F59E0B"/>
-                </a:solidFill>
-                <a:latin typeface="Segoe UI"/>
               </a:defRPr>
             </a:pPr>
             <a:r>
@@ -8327,11 +8472,10 @@
           </a:p>
           <a:p>
             <a:pPr>
-              <a:defRPr sz="900">
-                <a:solidFill>
-                  <a:srgbClr val="F8FAFC"/>
-                </a:solidFill>
-                <a:latin typeface="Segoe UI"/>
+              <a:defRPr sz="950">
+                <a:solidFill>
+                  <a:srgbClr val="94A3B8"/>
+                </a:solidFill>
               </a:defRPr>
             </a:pPr>
             <a:r>
@@ -8342,14 +8486,14 @@
       </p:sp>
       <p:sp>
         <p:nvSpPr>
-          <p:cNvPr id="16" name="Rounded Rectangle 15"/>
+          <p:cNvPr id="13" name="Rounded Rectangle 12"/>
           <p:cNvSpPr/>
           <p:nvPr/>
         </p:nvSpPr>
         <p:spPr>
           <a:xfrm>
             <a:off x="6217920" y="3931920"/>
-            <a:ext cx="5242255" cy="2377440"/>
+            <a:ext cx="5212080" cy="2286000"/>
           </a:xfrm>
           <a:prstGeom prst="roundRect">
             <a:avLst/>
@@ -8357,9 +8501,9 @@
           <a:solidFill>
             <a:srgbClr val="1E293B"/>
           </a:solidFill>
-          <a:ln w="19050">
+          <a:ln w="12700">
             <a:solidFill>
-              <a:srgbClr val="10B981"/>
+              <a:srgbClr val="334155"/>
             </a:solidFill>
           </a:ln>
         </p:spPr>
@@ -8387,14 +8531,14 @@
       </p:sp>
       <p:sp>
         <p:nvSpPr>
-          <p:cNvPr id="17" name="TextBox 16"/>
+          <p:cNvPr id="14" name="TextBox 13"/>
           <p:cNvSpPr txBox="1"/>
           <p:nvPr/>
         </p:nvSpPr>
         <p:spPr>
           <a:xfrm>
-            <a:off x="6400800" y="4096512"/>
-            <a:ext cx="4876495" cy="365760"/>
+            <a:off x="6400800" y="4069080"/>
+            <a:ext cx="4846320" cy="2011680"/>
           </a:xfrm>
           <a:prstGeom prst="rect">
             <a:avLst/>
@@ -8408,47 +8552,25 @@
           <a:lstStyle/>
           <a:p>
             <a:pPr>
-              <a:defRPr sz="1100" b="1">
-                <a:solidFill>
-                  <a:srgbClr val="F43F5E"/>
-                </a:solidFill>
-                <a:latin typeface="Segoe UI"/>
+              <a:defRPr sz="1200" b="1">
+                <a:solidFill>
+                  <a:srgbClr val="A855F7"/>
+                </a:solidFill>
               </a:defRPr>
             </a:pPr>
             <a:r>
               <a:t>04 | PERSPECTIVES D'HYBRIDATION</a:t>
             </a:r>
           </a:p>
-        </p:txBody>
-      </p:sp>
-      <p:sp>
-        <p:nvSpPr>
-          <p:cNvPr id="18" name="TextBox 17"/>
-          <p:cNvSpPr txBox="1"/>
-          <p:nvPr/>
-        </p:nvSpPr>
-        <p:spPr>
-          <a:xfrm>
-            <a:off x="6400800" y="4434840"/>
-            <a:ext cx="4876495" cy="1737360"/>
-          </a:xfrm>
-          <a:prstGeom prst="rect">
-            <a:avLst/>
-          </a:prstGeom>
-          <a:noFill/>
-        </p:spPr>
-        <p:txBody>
-          <a:bodyPr wrap="square">
-            <a:spAutoFit/>
-          </a:bodyPr>
-          <a:lstStyle/>
-          <a:p>
-            <a:pPr>
-              <a:defRPr sz="1000" b="1">
-                <a:solidFill>
-                  <a:srgbClr val="10B981"/>
-                </a:solidFill>
-                <a:latin typeface="Segoe UI"/>
+          <a:p>
+            <a:pPr>
+              <a:spcBef>
+                <a:spcPts val="600"/>
+              </a:spcBef>
+              <a:defRPr b="1" sz="1000">
+                <a:solidFill>
+                  <a:srgbClr val="F8FAFC"/>
+                </a:solidFill>
               </a:defRPr>
             </a:pPr>
             <a:r>
@@ -8457,24 +8579,25 @@
           </a:p>
           <a:p>
             <a:pPr>
-              <a:defRPr sz="900">
+              <a:defRPr sz="950">
+                <a:solidFill>
+                  <a:srgbClr val="94A3B8"/>
+                </a:solidFill>
+              </a:defRPr>
+            </a:pPr>
+            <a:r>
+              <a:t>Combiner la similarité textuelle avec les données de paniers réels (filtrage collaboratif hybride).</a:t>
+            </a:r>
+          </a:p>
+          <a:p>
+            <a:pPr>
+              <a:spcBef>
+                <a:spcPts val="400"/>
+              </a:spcBef>
+              <a:defRPr b="1" sz="1000">
                 <a:solidFill>
                   <a:srgbClr val="F8FAFC"/>
                 </a:solidFill>
-                <a:latin typeface="Segoe UI"/>
-              </a:defRPr>
-            </a:pPr>
-            <a:r>
-              <a:t>Combiner la similarité textuelle avec les données de paniers co-achetés réels.</a:t>
-            </a:r>
-          </a:p>
-          <a:p>
-            <a:pPr>
-              <a:defRPr sz="1000" b="1">
-                <a:solidFill>
-                  <a:srgbClr val="10B981"/>
-                </a:solidFill>
-                <a:latin typeface="Segoe UI"/>
               </a:defRPr>
             </a:pPr>
             <a:r>
@@ -8483,11 +8606,10 @@
           </a:p>
           <a:p>
             <a:pPr>
-              <a:defRPr sz="900">
-                <a:solidFill>
-                  <a:srgbClr val="F8FAFC"/>
-                </a:solidFill>
-                <a:latin typeface="Segoe UI"/>
+              <a:defRPr sz="950">
+                <a:solidFill>
+                  <a:srgbClr val="94A3B8"/>
+                </a:solidFill>
               </a:defRPr>
             </a:pPr>
             <a:r>
